--- a/output/wordlabs-mid-prefix-3day.pptx
+++ b/output/wordlabs-mid-prefix-3day.pptx
@@ -6102,7 +6102,7 @@
                 <a:ea typeface="Calibri" pitchFamily="34" charset="-122"/>
                 <a:cs typeface="Calibri" pitchFamily="34" charset="-120"/>
               </a:rPr>
-              <a:t> ran to the centre of the field.</a:t>
+              <a:t> passed the ball across the field.</a:t>
             </a:r>
             <a:endParaRPr lang="en-US" sz="1800" dirty="0"/>
           </a:p>
@@ -12309,7 +12309,7 @@
                 <a:ea typeface="Calibri" pitchFamily="34" charset="-122"/>
                 <a:cs typeface="Calibri" pitchFamily="34" charset="-120"/>
               </a:rPr>
-              <a:t>open area of play</a:t>
+              <a:t>open area</a:t>
             </a:r>
             <a:endParaRPr lang="en-US" sz="850" dirty="0"/>
           </a:p>
@@ -12421,7 +12421,7 @@
                 <a:ea typeface="Calibri" pitchFamily="34" charset="-122"/>
                 <a:cs typeface="Calibri" pitchFamily="34" charset="-120"/>
               </a:rPr>
-              <a:t>a person who does something</a:t>
+              <a:t>a person who does</a:t>
             </a:r>
             <a:endParaRPr lang="en-US" sz="850" dirty="0"/>
           </a:p>
@@ -13406,7 +13406,7 @@
                 <a:ea typeface="Calibri" pitchFamily="34" charset="-122"/>
                 <a:cs typeface="Calibri" pitchFamily="34" charset="-120"/>
               </a:rPr>
-              <a:t>open area of play</a:t>
+              <a:t>open area</a:t>
             </a:r>
             <a:endParaRPr lang="en-US" sz="850" dirty="0"/>
           </a:p>
@@ -13518,7 +13518,7 @@
                 <a:ea typeface="Calibri" pitchFamily="34" charset="-122"/>
                 <a:cs typeface="Calibri" pitchFamily="34" charset="-120"/>
               </a:rPr>
-              <a:t>a person who does something</a:t>
+              <a:t>a person who does</a:t>
             </a:r>
             <a:endParaRPr lang="en-US" sz="850" dirty="0"/>
           </a:p>
@@ -15005,7 +15005,7 @@
                 <a:ea typeface="Calibri" pitchFamily="34" charset="-122"/>
                 <a:cs typeface="Calibri" pitchFamily="34" charset="-120"/>
               </a:rPr>
-              <a:t>open area of play</a:t>
+              <a:t>open area</a:t>
             </a:r>
             <a:endParaRPr lang="en-US" sz="850" dirty="0"/>
           </a:p>
@@ -15117,7 +15117,7 @@
                 <a:ea typeface="Calibri" pitchFamily="34" charset="-122"/>
                 <a:cs typeface="Calibri" pitchFamily="34" charset="-120"/>
               </a:rPr>
-              <a:t>a person who does something</a:t>
+              <a:t>a person who does</a:t>
             </a:r>
             <a:endParaRPr lang="en-US" sz="850" dirty="0"/>
           </a:p>
@@ -17433,7 +17433,7 @@
                 <a:ea typeface="Calibri" pitchFamily="34" charset="-122"/>
                 <a:cs typeface="Calibri" pitchFamily="34" charset="-120"/>
               </a:rPr>
-              <a:t>At </a:t>
+              <a:t>On </a:t>
             </a:r>
             <a:pPr algn="l" indent="0" marL="0">
               <a:buNone/>
@@ -17450,7 +17450,7 @@
                 <a:ea typeface="Calibri" pitchFamily="34" charset="-122"/>
                 <a:cs typeface="Calibri" pitchFamily="34" charset="-120"/>
               </a:rPr>
-              <a:t>midnight</a:t>
+              <a:t>midsummer</a:t>
             </a:r>
             <a:pPr algn="l" indent="0" marL="0">
               <a:buNone/>
@@ -17464,7 +17464,7 @@
                 <a:ea typeface="Calibri" pitchFamily="34" charset="-122"/>
                 <a:cs typeface="Calibri" pitchFamily="34" charset="-120"/>
               </a:rPr>
-              <a:t> in </a:t>
+              <a:t> evenings, we stayed up past </a:t>
             </a:r>
             <a:pPr algn="l" indent="0" marL="0">
               <a:buNone/>
@@ -17481,7 +17481,7 @@
                 <a:ea typeface="Calibri" pitchFamily="34" charset="-122"/>
                 <a:cs typeface="Calibri" pitchFamily="34" charset="-120"/>
               </a:rPr>
-              <a:t>midwinter</a:t>
+              <a:t>midnight</a:t>
             </a:r>
             <a:pPr algn="l" indent="0" marL="0">
               <a:buNone/>
@@ -17495,7 +17495,7 @@
                 <a:ea typeface="Calibri" pitchFamily="34" charset="-122"/>
                 <a:cs typeface="Calibri" pitchFamily="34" charset="-120"/>
               </a:rPr>
-              <a:t>, the </a:t>
+              <a:t> and walked the </a:t>
             </a:r>
             <a:pPr algn="l" indent="0" marL="0">
               <a:buNone/>
@@ -17512,7 +17512,7 @@
                 <a:ea typeface="Calibri" pitchFamily="34" charset="-122"/>
                 <a:cs typeface="Calibri" pitchFamily="34" charset="-120"/>
               </a:rPr>
-              <a:t>midfield</a:t>
+              <a:t>midway</a:t>
             </a:r>
             <a:pPr algn="l" indent="0" marL="0">
               <a:buNone/>
@@ -17526,7 +17526,7 @@
                 <a:ea typeface="Calibri" pitchFamily="34" charset="-122"/>
                 <a:cs typeface="Calibri" pitchFamily="34" charset="-120"/>
               </a:rPr>
-              <a:t> was covered in frost and snow.</a:t>
+              <a:t> path home.</a:t>
             </a:r>
             <a:endParaRPr lang="en-US" sz="1800" dirty="0"/>
           </a:p>
@@ -17681,7 +17681,7 @@
                 <a:ea typeface="Trebuchet MS" pitchFamily="34" charset="-122"/>
                 <a:cs typeface="Trebuchet MS" pitchFamily="34" charset="-120"/>
               </a:rPr>
-              <a:t>midnight</a:t>
+              <a:t>midsummer</a:t>
             </a:r>
             <a:endParaRPr lang="en-US" sz="1400" dirty="0"/>
           </a:p>
@@ -17809,7 +17809,7 @@
                 <a:ea typeface="Trebuchet MS" pitchFamily="34" charset="-122"/>
                 <a:cs typeface="Trebuchet MS" pitchFamily="34" charset="-120"/>
               </a:rPr>
-              <a:t>midwinter</a:t>
+              <a:t>midnight</a:t>
             </a:r>
             <a:endParaRPr lang="en-US" sz="1400" dirty="0"/>
           </a:p>
@@ -17937,7 +17937,7 @@
                 <a:ea typeface="Trebuchet MS" pitchFamily="34" charset="-122"/>
                 <a:cs typeface="Trebuchet MS" pitchFamily="34" charset="-120"/>
               </a:rPr>
-              <a:t>midfield</a:t>
+              <a:t>midway</a:t>
             </a:r>
             <a:endParaRPr lang="en-US" sz="1400" dirty="0"/>
           </a:p>
@@ -18407,7 +18407,7 @@
                 <a:ea typeface="Trebuchet MS" pitchFamily="34" charset="-122"/>
                 <a:cs typeface="Trebuchet MS" pitchFamily="34" charset="-120"/>
               </a:rPr>
-              <a:t>midnight</a:t>
+              <a:t>midsummer</a:t>
             </a:r>
             <a:endParaRPr lang="en-US" sz="2800" dirty="0"/>
           </a:p>
@@ -19234,7 +19234,7 @@
                 <a:ea typeface="Trebuchet MS" pitchFamily="34" charset="-122"/>
                 <a:cs typeface="Trebuchet MS" pitchFamily="34" charset="-120"/>
               </a:rPr>
-              <a:t>midnight</a:t>
+              <a:t>midsummer</a:t>
             </a:r>
             <a:endParaRPr lang="en-US" sz="2800" dirty="0"/>
           </a:p>
@@ -19485,7 +19485,7 @@
                 <a:ea typeface="Trebuchet MS" pitchFamily="34" charset="-122"/>
                 <a:cs typeface="Trebuchet MS" pitchFamily="34" charset="-120"/>
               </a:rPr>
-              <a:t>night</a:t>
+              <a:t>summer</a:t>
             </a:r>
             <a:endParaRPr lang="en-US" sz="1300" dirty="0"/>
           </a:p>
@@ -19524,7 +19524,7 @@
                 <a:ea typeface="Calibri" pitchFamily="34" charset="-122"/>
                 <a:cs typeface="Calibri" pitchFamily="34" charset="-120"/>
               </a:rPr>
-              <a:t>the night</a:t>
+              <a:t>the warmest season</a:t>
             </a:r>
             <a:endParaRPr lang="en-US" sz="850" dirty="0"/>
           </a:p>
@@ -20219,7 +20219,7 @@
                 <a:ea typeface="Trebuchet MS" pitchFamily="34" charset="-122"/>
                 <a:cs typeface="Trebuchet MS" pitchFamily="34" charset="-120"/>
               </a:rPr>
-              <a:t>midnight</a:t>
+              <a:t>midsummer</a:t>
             </a:r>
             <a:endParaRPr lang="en-US" sz="2800" dirty="0"/>
           </a:p>
@@ -20470,7 +20470,7 @@
                 <a:ea typeface="Trebuchet MS" pitchFamily="34" charset="-122"/>
                 <a:cs typeface="Trebuchet MS" pitchFamily="34" charset="-120"/>
               </a:rPr>
-              <a:t>night</a:t>
+              <a:t>summer</a:t>
             </a:r>
             <a:endParaRPr lang="en-US" sz="1300" dirty="0"/>
           </a:p>
@@ -20509,7 +20509,7 @@
                 <a:ea typeface="Calibri" pitchFamily="34" charset="-122"/>
                 <a:cs typeface="Calibri" pitchFamily="34" charset="-120"/>
               </a:rPr>
-              <a:t>the night</a:t>
+              <a:t>the warmest season</a:t>
             </a:r>
             <a:endParaRPr lang="en-US" sz="850" dirty="0"/>
           </a:p>
@@ -20616,7 +20616,7 @@
         </p:nvSpPr>
         <p:spPr>
           <a:xfrm>
-            <a:off x="2999232" y="3364992"/>
+            <a:off x="2313432" y="3364992"/>
             <a:ext cx="1645920" cy="475488"/>
           </a:xfrm>
           <a:prstGeom prst="rect">
@@ -20643,7 +20643,7 @@
         </p:nvSpPr>
         <p:spPr>
           <a:xfrm>
-            <a:off x="2999232" y="3364992"/>
+            <a:off x="2313432" y="3364992"/>
             <a:ext cx="1645920" cy="475488"/>
           </a:xfrm>
           <a:prstGeom prst="rect">
@@ -20682,8 +20682,8 @@
         </p:nvSpPr>
         <p:spPr>
           <a:xfrm>
-            <a:off x="4645152" y="3364992"/>
-            <a:ext cx="1097280" cy="475488"/>
+            <a:off x="3959352" y="3364992"/>
+            <a:ext cx="411480" cy="475488"/>
           </a:xfrm>
           <a:prstGeom prst="rect">
             <a:avLst/>
@@ -20721,7 +20721,7 @@
         </p:nvSpPr>
         <p:spPr>
           <a:xfrm>
-            <a:off x="5742432" y="3364992"/>
+            <a:off x="4370832" y="3364992"/>
             <a:ext cx="1645920" cy="475488"/>
           </a:xfrm>
           <a:prstGeom prst="rect">
@@ -20748,7 +20748,7 @@
         </p:nvSpPr>
         <p:spPr>
           <a:xfrm>
-            <a:off x="5742432" y="3364992"/>
+            <a:off x="4370832" y="3364992"/>
             <a:ext cx="1645920" cy="475488"/>
           </a:xfrm>
           <a:prstGeom prst="rect">
@@ -20773,7 +20773,7 @@
                 <a:ea typeface="Trebuchet MS" pitchFamily="34" charset="-122"/>
                 <a:cs typeface="Trebuchet MS" pitchFamily="34" charset="-120"/>
               </a:rPr>
-              <a:t>night</a:t>
+              <a:t>sum</a:t>
             </a:r>
             <a:endParaRPr lang="en-US" sz="1400" dirty="0"/>
           </a:p>
@@ -20781,7 +20781,112 @@
       </p:sp>
       <p:sp>
         <p:nvSpPr>
-          <p:cNvPr id="30" name="Shape 28"/>
+          <p:cNvPr id="30" name="Text 28"/>
+          <p:cNvSpPr/>
+          <p:nvPr/>
+        </p:nvSpPr>
+        <p:spPr>
+          <a:xfrm>
+            <a:off x="6016752" y="3364992"/>
+            <a:ext cx="411480" cy="475488"/>
+          </a:xfrm>
+          <a:prstGeom prst="rect">
+            <a:avLst/>
+          </a:prstGeom>
+          <a:noFill/>
+          <a:ln/>
+        </p:spPr>
+        <p:txBody>
+          <a:bodyPr wrap="square" lIns="0" tIns="0" rIns="0" bIns="0" rtlCol="0" anchor="ctr"/>
+          <a:lstStyle/>
+          <a:p>
+            <a:pPr algn="ctr" indent="0" marL="0">
+              <a:buNone/>
+            </a:pPr>
+            <a:r>
+              <a:rPr lang="en-US" sz="1600" b="1" dirty="0">
+                <a:solidFill>
+                  <a:srgbClr val="0D9488"/>
+                </a:solidFill>
+                <a:latin typeface="Trebuchet MS" pitchFamily="34" charset="0"/>
+                <a:ea typeface="Trebuchet MS" pitchFamily="34" charset="-122"/>
+                <a:cs typeface="Trebuchet MS" pitchFamily="34" charset="-120"/>
+              </a:rPr>
+              <a:t>·</a:t>
+            </a:r>
+            <a:endParaRPr lang="en-US" sz="1600" dirty="0"/>
+          </a:p>
+        </p:txBody>
+      </p:sp>
+      <p:sp>
+        <p:nvSpPr>
+          <p:cNvPr id="31" name="Shape 29"/>
+          <p:cNvSpPr/>
+          <p:nvPr/>
+        </p:nvSpPr>
+        <p:spPr>
+          <a:xfrm>
+            <a:off x="6428232" y="3364992"/>
+            <a:ext cx="1645920" cy="475488"/>
+          </a:xfrm>
+          <a:prstGeom prst="rect">
+            <a:avLst>
+              <a:gd name="adj" fmla="val 9615"/>
+            </a:avLst>
+          </a:prstGeom>
+          <a:solidFill>
+            <a:srgbClr val="FFFFFF"/>
+          </a:solidFill>
+          <a:ln w="12700">
+            <a:solidFill>
+              <a:srgbClr val="0D9488"/>
+            </a:solidFill>
+            <a:prstDash val="solid"/>
+          </a:ln>
+        </p:spPr>
+      </p:sp>
+      <p:sp>
+        <p:nvSpPr>
+          <p:cNvPr id="32" name="Text 30"/>
+          <p:cNvSpPr/>
+          <p:nvPr/>
+        </p:nvSpPr>
+        <p:spPr>
+          <a:xfrm>
+            <a:off x="6428232" y="3364992"/>
+            <a:ext cx="1645920" cy="475488"/>
+          </a:xfrm>
+          <a:prstGeom prst="rect">
+            <a:avLst/>
+          </a:prstGeom>
+          <a:noFill/>
+          <a:ln/>
+        </p:spPr>
+        <p:txBody>
+          <a:bodyPr wrap="square" lIns="0" tIns="0" rIns="0" bIns="0" rtlCol="0" anchor="ctr"/>
+          <a:lstStyle/>
+          <a:p>
+            <a:pPr algn="ctr" indent="0" marL="0">
+              <a:buNone/>
+            </a:pPr>
+            <a:r>
+              <a:rPr lang="en-US" sz="1400" b="1" dirty="0">
+                <a:solidFill>
+                  <a:srgbClr val="0D9488"/>
+                </a:solidFill>
+                <a:latin typeface="Trebuchet MS" pitchFamily="34" charset="0"/>
+                <a:ea typeface="Trebuchet MS" pitchFamily="34" charset="-122"/>
+                <a:cs typeface="Trebuchet MS" pitchFamily="34" charset="-120"/>
+              </a:rPr>
+              <a:t>mer</a:t>
+            </a:r>
+            <a:endParaRPr lang="en-US" sz="1400" dirty="0"/>
+          </a:p>
+        </p:txBody>
+      </p:sp>
+      <p:sp>
+        <p:nvSpPr>
+          <p:cNvPr id="33" name="Shape 31"/>
           <p:cNvSpPr/>
           <p:nvPr/>
         </p:nvSpPr>
@@ -20808,7 +20913,7 @@
       </p:sp>
       <p:sp>
         <p:nvSpPr>
-          <p:cNvPr id="31" name="Text 29"/>
+          <p:cNvPr id="34" name="Text 32"/>
           <p:cNvSpPr/>
           <p:nvPr/>
         </p:nvSpPr>
@@ -20847,7 +20952,7 @@
       </p:sp>
       <p:sp>
         <p:nvSpPr>
-          <p:cNvPr id="32" name="Shape 30"/>
+          <p:cNvPr id="35" name="Shape 33"/>
           <p:cNvSpPr/>
           <p:nvPr/>
         </p:nvSpPr>
@@ -20874,7 +20979,7 @@
       </p:sp>
       <p:sp>
         <p:nvSpPr>
-          <p:cNvPr id="33" name="Text 31"/>
+          <p:cNvPr id="36" name="Text 34"/>
           <p:cNvSpPr/>
           <p:nvPr/>
         </p:nvSpPr>
@@ -21336,7 +21441,7 @@
                 <a:ea typeface="Trebuchet MS" pitchFamily="34" charset="-122"/>
                 <a:cs typeface="Trebuchet MS" pitchFamily="34" charset="-120"/>
               </a:rPr>
-              <a:t>midnight</a:t>
+              <a:t>midsummer</a:t>
             </a:r>
             <a:endParaRPr lang="en-US" sz="2800" dirty="0"/>
           </a:p>
@@ -21587,7 +21692,7 @@
                 <a:ea typeface="Trebuchet MS" pitchFamily="34" charset="-122"/>
                 <a:cs typeface="Trebuchet MS" pitchFamily="34" charset="-120"/>
               </a:rPr>
-              <a:t>night</a:t>
+              <a:t>summer</a:t>
             </a:r>
             <a:endParaRPr lang="en-US" sz="1300" dirty="0"/>
           </a:p>
@@ -21626,7 +21731,7 @@
                 <a:ea typeface="Calibri" pitchFamily="34" charset="-122"/>
                 <a:cs typeface="Calibri" pitchFamily="34" charset="-120"/>
               </a:rPr>
-              <a:t>the night</a:t>
+              <a:t>the warmest season</a:t>
             </a:r>
             <a:endParaRPr lang="en-US" sz="850" dirty="0"/>
           </a:p>
@@ -21733,7 +21838,7 @@
         </p:nvSpPr>
         <p:spPr>
           <a:xfrm>
-            <a:off x="2999232" y="3364992"/>
+            <a:off x="2313432" y="3364992"/>
             <a:ext cx="1645920" cy="475488"/>
           </a:xfrm>
           <a:prstGeom prst="rect">
@@ -21760,7 +21865,7 @@
         </p:nvSpPr>
         <p:spPr>
           <a:xfrm>
-            <a:off x="2999232" y="3364992"/>
+            <a:off x="2313432" y="3364992"/>
             <a:ext cx="1645920" cy="475488"/>
           </a:xfrm>
           <a:prstGeom prst="rect">
@@ -21799,8 +21904,8 @@
         </p:nvSpPr>
         <p:spPr>
           <a:xfrm>
-            <a:off x="4645152" y="3364992"/>
-            <a:ext cx="1097280" cy="475488"/>
+            <a:off x="3959352" y="3364992"/>
+            <a:ext cx="411480" cy="475488"/>
           </a:xfrm>
           <a:prstGeom prst="rect">
             <a:avLst/>
@@ -21838,7 +21943,7 @@
         </p:nvSpPr>
         <p:spPr>
           <a:xfrm>
-            <a:off x="5742432" y="3364992"/>
+            <a:off x="4370832" y="3364992"/>
             <a:ext cx="1645920" cy="475488"/>
           </a:xfrm>
           <a:prstGeom prst="rect">
@@ -21865,7 +21970,7 @@
         </p:nvSpPr>
         <p:spPr>
           <a:xfrm>
-            <a:off x="5742432" y="3364992"/>
+            <a:off x="4370832" y="3364992"/>
             <a:ext cx="1645920" cy="475488"/>
           </a:xfrm>
           <a:prstGeom prst="rect">
@@ -21890,7 +21995,7 @@
                 <a:ea typeface="Trebuchet MS" pitchFamily="34" charset="-122"/>
                 <a:cs typeface="Trebuchet MS" pitchFamily="34" charset="-120"/>
               </a:rPr>
-              <a:t>night</a:t>
+              <a:t>sum</a:t>
             </a:r>
             <a:endParaRPr lang="en-US" sz="1400" dirty="0"/>
           </a:p>
@@ -21898,7 +22003,112 @@
       </p:sp>
       <p:sp>
         <p:nvSpPr>
-          <p:cNvPr id="30" name="Shape 28"/>
+          <p:cNvPr id="30" name="Text 28"/>
+          <p:cNvSpPr/>
+          <p:nvPr/>
+        </p:nvSpPr>
+        <p:spPr>
+          <a:xfrm>
+            <a:off x="6016752" y="3364992"/>
+            <a:ext cx="411480" cy="475488"/>
+          </a:xfrm>
+          <a:prstGeom prst="rect">
+            <a:avLst/>
+          </a:prstGeom>
+          <a:noFill/>
+          <a:ln/>
+        </p:spPr>
+        <p:txBody>
+          <a:bodyPr wrap="square" lIns="0" tIns="0" rIns="0" bIns="0" rtlCol="0" anchor="ctr"/>
+          <a:lstStyle/>
+          <a:p>
+            <a:pPr algn="ctr" indent="0" marL="0">
+              <a:buNone/>
+            </a:pPr>
+            <a:r>
+              <a:rPr lang="en-US" sz="1600" b="1" dirty="0">
+                <a:solidFill>
+                  <a:srgbClr val="0D9488"/>
+                </a:solidFill>
+                <a:latin typeface="Trebuchet MS" pitchFamily="34" charset="0"/>
+                <a:ea typeface="Trebuchet MS" pitchFamily="34" charset="-122"/>
+                <a:cs typeface="Trebuchet MS" pitchFamily="34" charset="-120"/>
+              </a:rPr>
+              <a:t>·</a:t>
+            </a:r>
+            <a:endParaRPr lang="en-US" sz="1600" dirty="0"/>
+          </a:p>
+        </p:txBody>
+      </p:sp>
+      <p:sp>
+        <p:nvSpPr>
+          <p:cNvPr id="31" name="Shape 29"/>
+          <p:cNvSpPr/>
+          <p:nvPr/>
+        </p:nvSpPr>
+        <p:spPr>
+          <a:xfrm>
+            <a:off x="6428232" y="3364992"/>
+            <a:ext cx="1645920" cy="475488"/>
+          </a:xfrm>
+          <a:prstGeom prst="rect">
+            <a:avLst>
+              <a:gd name="adj" fmla="val 9615"/>
+            </a:avLst>
+          </a:prstGeom>
+          <a:solidFill>
+            <a:srgbClr val="FFFFFF"/>
+          </a:solidFill>
+          <a:ln w="12700">
+            <a:solidFill>
+              <a:srgbClr val="0D9488"/>
+            </a:solidFill>
+            <a:prstDash val="solid"/>
+          </a:ln>
+        </p:spPr>
+      </p:sp>
+      <p:sp>
+        <p:nvSpPr>
+          <p:cNvPr id="32" name="Text 30"/>
+          <p:cNvSpPr/>
+          <p:nvPr/>
+        </p:nvSpPr>
+        <p:spPr>
+          <a:xfrm>
+            <a:off x="6428232" y="3364992"/>
+            <a:ext cx="1645920" cy="475488"/>
+          </a:xfrm>
+          <a:prstGeom prst="rect">
+            <a:avLst/>
+          </a:prstGeom>
+          <a:noFill/>
+          <a:ln/>
+        </p:spPr>
+        <p:txBody>
+          <a:bodyPr wrap="square" lIns="0" tIns="0" rIns="0" bIns="0" rtlCol="0" anchor="ctr"/>
+          <a:lstStyle/>
+          <a:p>
+            <a:pPr algn="ctr" indent="0" marL="0">
+              <a:buNone/>
+            </a:pPr>
+            <a:r>
+              <a:rPr lang="en-US" sz="1400" b="1" dirty="0">
+                <a:solidFill>
+                  <a:srgbClr val="0D9488"/>
+                </a:solidFill>
+                <a:latin typeface="Trebuchet MS" pitchFamily="34" charset="0"/>
+                <a:ea typeface="Trebuchet MS" pitchFamily="34" charset="-122"/>
+                <a:cs typeface="Trebuchet MS" pitchFamily="34" charset="-120"/>
+              </a:rPr>
+              <a:t>mer</a:t>
+            </a:r>
+            <a:endParaRPr lang="en-US" sz="1400" dirty="0"/>
+          </a:p>
+        </p:txBody>
+      </p:sp>
+      <p:sp>
+        <p:nvSpPr>
+          <p:cNvPr id="33" name="Shape 31"/>
           <p:cNvSpPr/>
           <p:nvPr/>
         </p:nvSpPr>
@@ -21925,7 +22135,7 @@
       </p:sp>
       <p:sp>
         <p:nvSpPr>
-          <p:cNvPr id="31" name="Text 29"/>
+          <p:cNvPr id="34" name="Text 32"/>
           <p:cNvSpPr/>
           <p:nvPr/>
         </p:nvSpPr>
@@ -21964,18 +22174,18 @@
       </p:sp>
       <p:sp>
         <p:nvSpPr>
-          <p:cNvPr id="32" name="Shape 30"/>
+          <p:cNvPr id="35" name="Shape 33"/>
           <p:cNvSpPr/>
           <p:nvPr/>
         </p:nvSpPr>
         <p:spPr>
           <a:xfrm>
             <a:off x="1874520" y="4096512"/>
-            <a:ext cx="6903720" cy="804672"/>
+            <a:ext cx="6903720" cy="658368"/>
           </a:xfrm>
           <a:prstGeom prst="rect">
             <a:avLst>
-              <a:gd name="adj" fmla="val 6818"/>
+              <a:gd name="adj" fmla="val 8333"/>
             </a:avLst>
           </a:prstGeom>
           <a:solidFill>
@@ -21991,18 +22201,18 @@
       </p:sp>
       <p:sp>
         <p:nvSpPr>
-          <p:cNvPr id="33" name="Shape 31"/>
-          <p:cNvSpPr/>
-          <p:nvPr/>
-        </p:nvSpPr>
-        <p:spPr>
-          <a:xfrm>
-            <a:off x="2254649" y="4169664"/>
-            <a:ext cx="685800" cy="384048"/>
+          <p:cNvPr id="36" name="Shape 34"/>
+          <p:cNvSpPr/>
+          <p:nvPr/>
+        </p:nvSpPr>
+        <p:spPr>
+          <a:xfrm>
+            <a:off x="2124837" y="4169664"/>
+            <a:ext cx="685800" cy="475488"/>
           </a:xfrm>
           <a:prstGeom prst="rect">
             <a:avLst>
-              <a:gd name="adj" fmla="val 9524"/>
+              <a:gd name="adj" fmla="val 7692"/>
             </a:avLst>
           </a:prstGeom>
           <a:solidFill>
@@ -22018,14 +22228,14 @@
       </p:sp>
       <p:sp>
         <p:nvSpPr>
-          <p:cNvPr id="34" name="Text 32"/>
-          <p:cNvSpPr/>
-          <p:nvPr/>
-        </p:nvSpPr>
-        <p:spPr>
-          <a:xfrm>
-            <a:off x="2254649" y="4169664"/>
-            <a:ext cx="685800" cy="384048"/>
+          <p:cNvPr id="37" name="Text 35"/>
+          <p:cNvSpPr/>
+          <p:nvPr/>
+        </p:nvSpPr>
+        <p:spPr>
+          <a:xfrm>
+            <a:off x="2124837" y="4169664"/>
+            <a:ext cx="685800" cy="475488"/>
           </a:xfrm>
           <a:prstGeom prst="rect">
             <a:avLst/>
@@ -22057,18 +22267,18 @@
       </p:sp>
       <p:sp>
         <p:nvSpPr>
-          <p:cNvPr id="35" name="Shape 33"/>
-          <p:cNvSpPr/>
-          <p:nvPr/>
-        </p:nvSpPr>
-        <p:spPr>
-          <a:xfrm>
-            <a:off x="3293146" y="4169664"/>
-            <a:ext cx="685800" cy="384048"/>
+          <p:cNvPr id="38" name="Shape 36"/>
+          <p:cNvSpPr/>
+          <p:nvPr/>
+        </p:nvSpPr>
+        <p:spPr>
+          <a:xfrm>
+            <a:off x="3033522" y="4169664"/>
+            <a:ext cx="685800" cy="475488"/>
           </a:xfrm>
           <a:prstGeom prst="rect">
             <a:avLst>
-              <a:gd name="adj" fmla="val 9524"/>
+              <a:gd name="adj" fmla="val 7692"/>
             </a:avLst>
           </a:prstGeom>
           <a:solidFill>
@@ -22084,14 +22294,14 @@
       </p:sp>
       <p:sp>
         <p:nvSpPr>
-          <p:cNvPr id="36" name="Text 34"/>
-          <p:cNvSpPr/>
-          <p:nvPr/>
-        </p:nvSpPr>
-        <p:spPr>
-          <a:xfrm>
-            <a:off x="3293146" y="4169664"/>
-            <a:ext cx="685800" cy="384048"/>
+          <p:cNvPr id="39" name="Text 37"/>
+          <p:cNvSpPr/>
+          <p:nvPr/>
+        </p:nvSpPr>
+        <p:spPr>
+          <a:xfrm>
+            <a:off x="3033522" y="4169664"/>
+            <a:ext cx="685800" cy="475488"/>
           </a:xfrm>
           <a:prstGeom prst="rect">
             <a:avLst/>
@@ -22123,18 +22333,18 @@
       </p:sp>
       <p:sp>
         <p:nvSpPr>
-          <p:cNvPr id="37" name="Shape 35"/>
-          <p:cNvSpPr/>
-          <p:nvPr/>
-        </p:nvSpPr>
-        <p:spPr>
-          <a:xfrm>
-            <a:off x="4331643" y="4169664"/>
-            <a:ext cx="685800" cy="384048"/>
+          <p:cNvPr id="40" name="Shape 38"/>
+          <p:cNvSpPr/>
+          <p:nvPr/>
+        </p:nvSpPr>
+        <p:spPr>
+          <a:xfrm>
+            <a:off x="3942207" y="4169664"/>
+            <a:ext cx="685800" cy="475488"/>
           </a:xfrm>
           <a:prstGeom prst="rect">
             <a:avLst>
-              <a:gd name="adj" fmla="val 9524"/>
+              <a:gd name="adj" fmla="val 7692"/>
             </a:avLst>
           </a:prstGeom>
           <a:solidFill>
@@ -22150,14 +22360,14 @@
       </p:sp>
       <p:sp>
         <p:nvSpPr>
-          <p:cNvPr id="38" name="Text 36"/>
-          <p:cNvSpPr/>
-          <p:nvPr/>
-        </p:nvSpPr>
-        <p:spPr>
-          <a:xfrm>
-            <a:off x="4331643" y="4169664"/>
-            <a:ext cx="685800" cy="384048"/>
+          <p:cNvPr id="41" name="Text 39"/>
+          <p:cNvSpPr/>
+          <p:nvPr/>
+        </p:nvSpPr>
+        <p:spPr>
+          <a:xfrm>
+            <a:off x="3942207" y="4169664"/>
+            <a:ext cx="685800" cy="475488"/>
           </a:xfrm>
           <a:prstGeom prst="rect">
             <a:avLst/>
@@ -22189,18 +22399,18 @@
       </p:sp>
       <p:sp>
         <p:nvSpPr>
-          <p:cNvPr id="39" name="Shape 37"/>
-          <p:cNvSpPr/>
-          <p:nvPr/>
-        </p:nvSpPr>
-        <p:spPr>
-          <a:xfrm>
-            <a:off x="5370141" y="4169664"/>
-            <a:ext cx="685800" cy="384048"/>
+          <p:cNvPr id="42" name="Shape 40"/>
+          <p:cNvSpPr/>
+          <p:nvPr/>
+        </p:nvSpPr>
+        <p:spPr>
+          <a:xfrm>
+            <a:off x="4850892" y="4169664"/>
+            <a:ext cx="685800" cy="475488"/>
           </a:xfrm>
           <a:prstGeom prst="rect">
             <a:avLst>
-              <a:gd name="adj" fmla="val 9524"/>
+              <a:gd name="adj" fmla="val 7692"/>
             </a:avLst>
           </a:prstGeom>
           <a:solidFill>
@@ -22216,14 +22426,14 @@
       </p:sp>
       <p:sp>
         <p:nvSpPr>
-          <p:cNvPr id="40" name="Text 38"/>
-          <p:cNvSpPr/>
-          <p:nvPr/>
-        </p:nvSpPr>
-        <p:spPr>
-          <a:xfrm>
-            <a:off x="5370141" y="4169664"/>
-            <a:ext cx="685800" cy="384048"/>
+          <p:cNvPr id="43" name="Text 41"/>
+          <p:cNvSpPr/>
+          <p:nvPr/>
+        </p:nvSpPr>
+        <p:spPr>
+          <a:xfrm>
+            <a:off x="4850892" y="4169664"/>
+            <a:ext cx="685800" cy="475488"/>
           </a:xfrm>
           <a:prstGeom prst="rect">
             <a:avLst/>
@@ -22247,7 +22457,7 @@
                 <a:ea typeface="Trebuchet MS" pitchFamily="34" charset="-122"/>
                 <a:cs typeface="Trebuchet MS" pitchFamily="34" charset="-120"/>
               </a:rPr>
-              <a:t>n</a:t>
+              <a:t>s</a:t>
             </a:r>
             <a:endParaRPr lang="en-US" sz="900" dirty="0"/>
           </a:p>
@@ -22255,18 +22465,18 @@
       </p:sp>
       <p:sp>
         <p:nvSpPr>
-          <p:cNvPr id="41" name="Shape 39"/>
-          <p:cNvSpPr/>
-          <p:nvPr/>
-        </p:nvSpPr>
-        <p:spPr>
-          <a:xfrm>
-            <a:off x="6408638" y="4169664"/>
-            <a:ext cx="685800" cy="384048"/>
+          <p:cNvPr id="44" name="Shape 42"/>
+          <p:cNvSpPr/>
+          <p:nvPr/>
+        </p:nvSpPr>
+        <p:spPr>
+          <a:xfrm>
+            <a:off x="5759577" y="4169664"/>
+            <a:ext cx="685800" cy="475488"/>
           </a:xfrm>
           <a:prstGeom prst="rect">
             <a:avLst>
-              <a:gd name="adj" fmla="val 9524"/>
+              <a:gd name="adj" fmla="val 7692"/>
             </a:avLst>
           </a:prstGeom>
           <a:solidFill>
@@ -22282,14 +22492,14 @@
       </p:sp>
       <p:sp>
         <p:nvSpPr>
-          <p:cNvPr id="42" name="Text 40"/>
-          <p:cNvSpPr/>
-          <p:nvPr/>
-        </p:nvSpPr>
-        <p:spPr>
-          <a:xfrm>
-            <a:off x="6408638" y="4169664"/>
-            <a:ext cx="685800" cy="384048"/>
+          <p:cNvPr id="45" name="Text 43"/>
+          <p:cNvSpPr/>
+          <p:nvPr/>
+        </p:nvSpPr>
+        <p:spPr>
+          <a:xfrm>
+            <a:off x="5759577" y="4169664"/>
+            <a:ext cx="685800" cy="475488"/>
           </a:xfrm>
           <a:prstGeom prst="rect">
             <a:avLst/>
@@ -22313,7 +22523,7 @@
                 <a:ea typeface="Trebuchet MS" pitchFamily="34" charset="-122"/>
                 <a:cs typeface="Trebuchet MS" pitchFamily="34" charset="-120"/>
               </a:rPr>
-              <a:t>igh</a:t>
+              <a:t>u</a:t>
             </a:r>
             <a:endParaRPr lang="en-US" sz="900" dirty="0"/>
           </a:p>
@@ -22321,57 +22531,18 @@
       </p:sp>
       <p:sp>
         <p:nvSpPr>
-          <p:cNvPr id="43" name="Text 41"/>
-          <p:cNvSpPr/>
-          <p:nvPr/>
-        </p:nvSpPr>
-        <p:spPr>
-          <a:xfrm>
-            <a:off x="6408638" y="4572000"/>
-            <a:ext cx="685800" cy="219456"/>
-          </a:xfrm>
-          <a:prstGeom prst="rect">
-            <a:avLst/>
-          </a:prstGeom>
-          <a:noFill/>
-          <a:ln/>
-        </p:spPr>
-        <p:txBody>
-          <a:bodyPr wrap="square" lIns="0" tIns="0" rIns="0" bIns="0" rtlCol="0" anchor="t"/>
-          <a:lstStyle/>
-          <a:p>
-            <a:pPr algn="ctr" indent="0" marL="0">
-              <a:buNone/>
-            </a:pPr>
-            <a:r>
-              <a:rPr lang="en-US" sz="750" i="1" dirty="0">
-                <a:solidFill>
-                  <a:srgbClr val="94A3B8"/>
-                </a:solidFill>
-                <a:latin typeface="Calibri" pitchFamily="34" charset="0"/>
-                <a:ea typeface="Calibri" pitchFamily="34" charset="-122"/>
-                <a:cs typeface="Calibri" pitchFamily="34" charset="-120"/>
-              </a:rPr>
-              <a:t>/ie/</a:t>
-            </a:r>
-            <a:endParaRPr lang="en-US" sz="750" dirty="0"/>
-          </a:p>
-        </p:txBody>
-      </p:sp>
-      <p:sp>
-        <p:nvSpPr>
-          <p:cNvPr id="44" name="Shape 42"/>
-          <p:cNvSpPr/>
-          <p:nvPr/>
-        </p:nvSpPr>
-        <p:spPr>
-          <a:xfrm>
-            <a:off x="7447135" y="4169664"/>
-            <a:ext cx="685800" cy="384048"/>
+          <p:cNvPr id="46" name="Shape 44"/>
+          <p:cNvSpPr/>
+          <p:nvPr/>
+        </p:nvSpPr>
+        <p:spPr>
+          <a:xfrm>
+            <a:off x="6668262" y="4169664"/>
+            <a:ext cx="685800" cy="475488"/>
           </a:xfrm>
           <a:prstGeom prst="rect">
             <a:avLst>
-              <a:gd name="adj" fmla="val 9524"/>
+              <a:gd name="adj" fmla="val 7692"/>
             </a:avLst>
           </a:prstGeom>
           <a:solidFill>
@@ -22387,14 +22558,14 @@
       </p:sp>
       <p:sp>
         <p:nvSpPr>
-          <p:cNvPr id="45" name="Text 43"/>
-          <p:cNvSpPr/>
-          <p:nvPr/>
-        </p:nvSpPr>
-        <p:spPr>
-          <a:xfrm>
-            <a:off x="7447135" y="4169664"/>
-            <a:ext cx="685800" cy="384048"/>
+          <p:cNvPr id="47" name="Text 45"/>
+          <p:cNvSpPr/>
+          <p:nvPr/>
+        </p:nvSpPr>
+        <p:spPr>
+          <a:xfrm>
+            <a:off x="6668262" y="4169664"/>
+            <a:ext cx="685800" cy="475488"/>
           </a:xfrm>
           <a:prstGeom prst="rect">
             <a:avLst/>
@@ -22418,7 +22589,73 @@
                 <a:ea typeface="Trebuchet MS" pitchFamily="34" charset="-122"/>
                 <a:cs typeface="Trebuchet MS" pitchFamily="34" charset="-120"/>
               </a:rPr>
-              <a:t>t</a:t>
+              <a:t>mm</a:t>
+            </a:r>
+            <a:endParaRPr lang="en-US" sz="900" dirty="0"/>
+          </a:p>
+        </p:txBody>
+      </p:sp>
+      <p:sp>
+        <p:nvSpPr>
+          <p:cNvPr id="48" name="Shape 46"/>
+          <p:cNvSpPr/>
+          <p:nvPr/>
+        </p:nvSpPr>
+        <p:spPr>
+          <a:xfrm>
+            <a:off x="7576947" y="4169664"/>
+            <a:ext cx="685800" cy="475488"/>
+          </a:xfrm>
+          <a:prstGeom prst="rect">
+            <a:avLst>
+              <a:gd name="adj" fmla="val 7692"/>
+            </a:avLst>
+          </a:prstGeom>
+          <a:solidFill>
+            <a:srgbClr val="FFFFFF"/>
+          </a:solidFill>
+          <a:ln w="12700">
+            <a:solidFill>
+              <a:srgbClr val="DB2777"/>
+            </a:solidFill>
+            <a:prstDash val="solid"/>
+          </a:ln>
+        </p:spPr>
+      </p:sp>
+      <p:sp>
+        <p:nvSpPr>
+          <p:cNvPr id="49" name="Text 47"/>
+          <p:cNvSpPr/>
+          <p:nvPr/>
+        </p:nvSpPr>
+        <p:spPr>
+          <a:xfrm>
+            <a:off x="7576947" y="4169664"/>
+            <a:ext cx="685800" cy="475488"/>
+          </a:xfrm>
+          <a:prstGeom prst="rect">
+            <a:avLst/>
+          </a:prstGeom>
+          <a:noFill/>
+          <a:ln/>
+        </p:spPr>
+        <p:txBody>
+          <a:bodyPr wrap="square" lIns="0" tIns="0" rIns="0" bIns="0" rtlCol="0" anchor="ctr"/>
+          <a:lstStyle/>
+          <a:p>
+            <a:pPr algn="ctr" indent="0" marL="0">
+              <a:buNone/>
+            </a:pPr>
+            <a:r>
+              <a:rPr lang="en-US" sz="900" b="1" dirty="0">
+                <a:solidFill>
+                  <a:srgbClr val="9D174D"/>
+                </a:solidFill>
+                <a:latin typeface="Trebuchet MS" pitchFamily="34" charset="0"/>
+                <a:ea typeface="Trebuchet MS" pitchFamily="34" charset="-122"/>
+                <a:cs typeface="Trebuchet MS" pitchFamily="34" charset="-120"/>
+              </a:rPr>
+              <a:t>er</a:t>
             </a:r>
             <a:endParaRPr lang="en-US" sz="900" dirty="0"/>
           </a:p>
@@ -22849,7 +23086,7 @@
                 <a:ea typeface="Trebuchet MS" pitchFamily="34" charset="-122"/>
                 <a:cs typeface="Trebuchet MS" pitchFamily="34" charset="-120"/>
               </a:rPr>
-              <a:t>midwinter</a:t>
+              <a:t>midnight</a:t>
             </a:r>
             <a:endParaRPr lang="en-US" sz="2800" dirty="0"/>
           </a:p>
@@ -23676,7 +23913,7 @@
                 <a:ea typeface="Trebuchet MS" pitchFamily="34" charset="-122"/>
                 <a:cs typeface="Trebuchet MS" pitchFamily="34" charset="-120"/>
               </a:rPr>
-              <a:t>midwinter</a:t>
+              <a:t>midnight</a:t>
             </a:r>
             <a:endParaRPr lang="en-US" sz="2800" dirty="0"/>
           </a:p>
@@ -23927,7 +24164,7 @@
                 <a:ea typeface="Trebuchet MS" pitchFamily="34" charset="-122"/>
                 <a:cs typeface="Trebuchet MS" pitchFamily="34" charset="-120"/>
               </a:rPr>
-              <a:t>winter</a:t>
+              <a:t>night</a:t>
             </a:r>
             <a:endParaRPr lang="en-US" sz="1300" dirty="0"/>
           </a:p>
@@ -23966,7 +24203,7 @@
                 <a:ea typeface="Calibri" pitchFamily="34" charset="-122"/>
                 <a:cs typeface="Calibri" pitchFamily="34" charset="-120"/>
               </a:rPr>
-              <a:t>the coldest season</a:t>
+              <a:t>the dark time of day</a:t>
             </a:r>
             <a:endParaRPr lang="en-US" sz="850" dirty="0"/>
           </a:p>
@@ -25380,7 +25617,7 @@
                 <a:ea typeface="Trebuchet MS" pitchFamily="34" charset="-122"/>
                 <a:cs typeface="Trebuchet MS" pitchFamily="34" charset="-120"/>
               </a:rPr>
-              <a:t>midwinter</a:t>
+              <a:t>midnight</a:t>
             </a:r>
             <a:endParaRPr lang="en-US" sz="2800" dirty="0"/>
           </a:p>
@@ -25631,7 +25868,7 @@
                 <a:ea typeface="Trebuchet MS" pitchFamily="34" charset="-122"/>
                 <a:cs typeface="Trebuchet MS" pitchFamily="34" charset="-120"/>
               </a:rPr>
-              <a:t>winter</a:t>
+              <a:t>night</a:t>
             </a:r>
             <a:endParaRPr lang="en-US" sz="1300" dirty="0"/>
           </a:p>
@@ -25670,7 +25907,7 @@
                 <a:ea typeface="Calibri" pitchFamily="34" charset="-122"/>
                 <a:cs typeface="Calibri" pitchFamily="34" charset="-120"/>
               </a:rPr>
-              <a:t>the coldest season</a:t>
+              <a:t>the dark time of day</a:t>
             </a:r>
             <a:endParaRPr lang="en-US" sz="850" dirty="0"/>
           </a:p>
@@ -25777,7 +26014,7 @@
         </p:nvSpPr>
         <p:spPr>
           <a:xfrm>
-            <a:off x="2313432" y="3364992"/>
+            <a:off x="2999232" y="3364992"/>
             <a:ext cx="1645920" cy="475488"/>
           </a:xfrm>
           <a:prstGeom prst="rect">
@@ -25804,7 +26041,7 @@
         </p:nvSpPr>
         <p:spPr>
           <a:xfrm>
-            <a:off x="2313432" y="3364992"/>
+            <a:off x="2999232" y="3364992"/>
             <a:ext cx="1645920" cy="475488"/>
           </a:xfrm>
           <a:prstGeom prst="rect">
@@ -25843,8 +26080,8 @@
         </p:nvSpPr>
         <p:spPr>
           <a:xfrm>
-            <a:off x="3959352" y="3364992"/>
-            <a:ext cx="411480" cy="475488"/>
+            <a:off x="4645152" y="3364992"/>
+            <a:ext cx="1097280" cy="475488"/>
           </a:xfrm>
           <a:prstGeom prst="rect">
             <a:avLst/>
@@ -25882,7 +26119,7 @@
         </p:nvSpPr>
         <p:spPr>
           <a:xfrm>
-            <a:off x="4370832" y="3364992"/>
+            <a:off x="5742432" y="3364992"/>
             <a:ext cx="1645920" cy="475488"/>
           </a:xfrm>
           <a:prstGeom prst="rect">
@@ -25909,7 +26146,7 @@
         </p:nvSpPr>
         <p:spPr>
           <a:xfrm>
-            <a:off x="4370832" y="3364992"/>
+            <a:off x="5742432" y="3364992"/>
             <a:ext cx="1645920" cy="475488"/>
           </a:xfrm>
           <a:prstGeom prst="rect">
@@ -25934,7 +26171,7 @@
                 <a:ea typeface="Trebuchet MS" pitchFamily="34" charset="-122"/>
                 <a:cs typeface="Trebuchet MS" pitchFamily="34" charset="-120"/>
               </a:rPr>
-              <a:t>win</a:t>
+              <a:t>night</a:t>
             </a:r>
             <a:endParaRPr lang="en-US" sz="1400" dirty="0"/>
           </a:p>
@@ -25942,14 +26179,41 @@
       </p:sp>
       <p:sp>
         <p:nvSpPr>
-          <p:cNvPr id="30" name="Text 28"/>
-          <p:cNvSpPr/>
-          <p:nvPr/>
-        </p:nvSpPr>
-        <p:spPr>
-          <a:xfrm>
-            <a:off x="6016752" y="3364992"/>
-            <a:ext cx="411480" cy="475488"/>
+          <p:cNvPr id="30" name="Shape 28"/>
+          <p:cNvSpPr/>
+          <p:nvPr/>
+        </p:nvSpPr>
+        <p:spPr>
+          <a:xfrm>
+            <a:off x="365760" y="4096512"/>
+            <a:ext cx="1371600" cy="804672"/>
+          </a:xfrm>
+          <a:prstGeom prst="rect">
+            <a:avLst>
+              <a:gd name="adj" fmla="val 6818"/>
+            </a:avLst>
+          </a:prstGeom>
+          <a:solidFill>
+            <a:srgbClr val="E2E8F0"/>
+          </a:solidFill>
+          <a:ln w="12700">
+            <a:solidFill>
+              <a:srgbClr val="E2E8F0"/>
+            </a:solidFill>
+            <a:prstDash val="solid"/>
+          </a:ln>
+        </p:spPr>
+      </p:sp>
+      <p:sp>
+        <p:nvSpPr>
+          <p:cNvPr id="31" name="Text 29"/>
+          <p:cNvSpPr/>
+          <p:nvPr/>
+        </p:nvSpPr>
+        <p:spPr>
+          <a:xfrm>
+            <a:off x="365760" y="4096512"/>
+            <a:ext cx="1371600" cy="804672"/>
           </a:xfrm>
           <a:prstGeom prst="rect">
             <a:avLst/>
@@ -25965,96 +26229,30 @@
               <a:buNone/>
             </a:pPr>
             <a:r>
-              <a:rPr lang="en-US" sz="1600" b="1" dirty="0">
-                <a:solidFill>
-                  <a:srgbClr val="0D9488"/>
+              <a:rPr lang="en-US" sz="1100" b="1" dirty="0">
+                <a:solidFill>
+                  <a:srgbClr val="475569"/>
                 </a:solidFill>
                 <a:latin typeface="Trebuchet MS" pitchFamily="34" charset="0"/>
                 <a:ea typeface="Trebuchet MS" pitchFamily="34" charset="-122"/>
                 <a:cs typeface="Trebuchet MS" pitchFamily="34" charset="-120"/>
               </a:rPr>
-              <a:t>·</a:t>
-            </a:r>
-            <a:endParaRPr lang="en-US" sz="1600" dirty="0"/>
-          </a:p>
-        </p:txBody>
-      </p:sp>
-      <p:sp>
-        <p:nvSpPr>
-          <p:cNvPr id="31" name="Shape 29"/>
-          <p:cNvSpPr/>
-          <p:nvPr/>
-        </p:nvSpPr>
-        <p:spPr>
-          <a:xfrm>
-            <a:off x="6428232" y="3364992"/>
-            <a:ext cx="1645920" cy="475488"/>
-          </a:xfrm>
-          <a:prstGeom prst="rect">
-            <a:avLst>
-              <a:gd name="adj" fmla="val 9615"/>
-            </a:avLst>
-          </a:prstGeom>
-          <a:solidFill>
-            <a:srgbClr val="FFFFFF"/>
-          </a:solidFill>
-          <a:ln w="12700">
-            <a:solidFill>
-              <a:srgbClr val="0D9488"/>
-            </a:solidFill>
-            <a:prstDash val="solid"/>
-          </a:ln>
-        </p:spPr>
-      </p:sp>
-      <p:sp>
-        <p:nvSpPr>
-          <p:cNvPr id="32" name="Text 30"/>
-          <p:cNvSpPr/>
-          <p:nvPr/>
-        </p:nvSpPr>
-        <p:spPr>
-          <a:xfrm>
-            <a:off x="6428232" y="3364992"/>
-            <a:ext cx="1645920" cy="475488"/>
-          </a:xfrm>
-          <a:prstGeom prst="rect">
-            <a:avLst/>
-          </a:prstGeom>
-          <a:noFill/>
-          <a:ln/>
-        </p:spPr>
-        <p:txBody>
-          <a:bodyPr wrap="square" lIns="0" tIns="0" rIns="0" bIns="0" rtlCol="0" anchor="ctr"/>
-          <a:lstStyle/>
-          <a:p>
-            <a:pPr algn="ctr" indent="0" marL="0">
-              <a:buNone/>
-            </a:pPr>
-            <a:r>
-              <a:rPr lang="en-US" sz="1400" b="1" dirty="0">
-                <a:solidFill>
-                  <a:srgbClr val="0D9488"/>
-                </a:solidFill>
-                <a:latin typeface="Trebuchet MS" pitchFamily="34" charset="0"/>
-                <a:ea typeface="Trebuchet MS" pitchFamily="34" charset="-122"/>
-                <a:cs typeface="Trebuchet MS" pitchFamily="34" charset="-120"/>
-              </a:rPr>
-              <a:t>ter</a:t>
-            </a:r>
-            <a:endParaRPr lang="en-US" sz="1400" dirty="0"/>
-          </a:p>
-        </p:txBody>
-      </p:sp>
-      <p:sp>
-        <p:nvSpPr>
-          <p:cNvPr id="33" name="Shape 31"/>
-          <p:cNvSpPr/>
-          <p:nvPr/>
-        </p:nvSpPr>
-        <p:spPr>
-          <a:xfrm>
-            <a:off x="365760" y="4096512"/>
-            <a:ext cx="1371600" cy="804672"/>
+              <a:t>Phonemes</a:t>
+            </a:r>
+            <a:endParaRPr lang="en-US" sz="1100" dirty="0"/>
+          </a:p>
+        </p:txBody>
+      </p:sp>
+      <p:sp>
+        <p:nvSpPr>
+          <p:cNvPr id="32" name="Shape 30"/>
+          <p:cNvSpPr/>
+          <p:nvPr/>
+        </p:nvSpPr>
+        <p:spPr>
+          <a:xfrm>
+            <a:off x="1874520" y="4096512"/>
+            <a:ext cx="6903720" cy="804672"/>
           </a:xfrm>
           <a:prstGeom prst="rect">
             <a:avLst>
@@ -26062,85 +26260,19 @@
             </a:avLst>
           </a:prstGeom>
           <a:solidFill>
-            <a:srgbClr val="E2E8F0"/>
+            <a:srgbClr val="F8FAFC"/>
           </a:solidFill>
           <a:ln w="12700">
             <a:solidFill>
               <a:srgbClr val="E2E8F0"/>
             </a:solidFill>
-            <a:prstDash val="solid"/>
-          </a:ln>
-        </p:spPr>
-      </p:sp>
-      <p:sp>
-        <p:nvSpPr>
-          <p:cNvPr id="34" name="Text 32"/>
-          <p:cNvSpPr/>
-          <p:nvPr/>
-        </p:nvSpPr>
-        <p:spPr>
-          <a:xfrm>
-            <a:off x="365760" y="4096512"/>
-            <a:ext cx="1371600" cy="804672"/>
-          </a:xfrm>
-          <a:prstGeom prst="rect">
-            <a:avLst/>
-          </a:prstGeom>
-          <a:noFill/>
-          <a:ln/>
-        </p:spPr>
-        <p:txBody>
-          <a:bodyPr wrap="square" lIns="0" tIns="0" rIns="0" bIns="0" rtlCol="0" anchor="ctr"/>
-          <a:lstStyle/>
-          <a:p>
-            <a:pPr algn="ctr" indent="0" marL="0">
-              <a:buNone/>
-            </a:pPr>
-            <a:r>
-              <a:rPr lang="en-US" sz="1100" b="1" dirty="0">
-                <a:solidFill>
-                  <a:srgbClr val="475569"/>
-                </a:solidFill>
-                <a:latin typeface="Trebuchet MS" pitchFamily="34" charset="0"/>
-                <a:ea typeface="Trebuchet MS" pitchFamily="34" charset="-122"/>
-                <a:cs typeface="Trebuchet MS" pitchFamily="34" charset="-120"/>
-              </a:rPr>
-              <a:t>Phonemes</a:t>
-            </a:r>
-            <a:endParaRPr lang="en-US" sz="1100" dirty="0"/>
-          </a:p>
-        </p:txBody>
-      </p:sp>
-      <p:sp>
-        <p:nvSpPr>
-          <p:cNvPr id="35" name="Shape 33"/>
-          <p:cNvSpPr/>
-          <p:nvPr/>
-        </p:nvSpPr>
-        <p:spPr>
-          <a:xfrm>
-            <a:off x="1874520" y="4096512"/>
-            <a:ext cx="6903720" cy="804672"/>
-          </a:xfrm>
-          <a:prstGeom prst="rect">
-            <a:avLst>
-              <a:gd name="adj" fmla="val 6818"/>
-            </a:avLst>
-          </a:prstGeom>
-          <a:solidFill>
-            <a:srgbClr val="F8FAFC"/>
-          </a:solidFill>
-          <a:ln w="12700">
-            <a:solidFill>
-              <a:srgbClr val="E2E8F0"/>
-            </a:solidFill>
             <a:prstDash val="dash"/>
           </a:ln>
         </p:spPr>
       </p:sp>
       <p:sp>
         <p:nvSpPr>
-          <p:cNvPr id="36" name="Text 34"/>
+          <p:cNvPr id="33" name="Text 31"/>
           <p:cNvSpPr/>
           <p:nvPr/>
         </p:nvSpPr>
@@ -26602,7 +26734,7 @@
                 <a:ea typeface="Trebuchet MS" pitchFamily="34" charset="-122"/>
                 <a:cs typeface="Trebuchet MS" pitchFamily="34" charset="-120"/>
               </a:rPr>
-              <a:t>midwinter</a:t>
+              <a:t>midnight</a:t>
             </a:r>
             <a:endParaRPr lang="en-US" sz="2800" dirty="0"/>
           </a:p>
@@ -26853,7 +26985,7 @@
                 <a:ea typeface="Trebuchet MS" pitchFamily="34" charset="-122"/>
                 <a:cs typeface="Trebuchet MS" pitchFamily="34" charset="-120"/>
               </a:rPr>
-              <a:t>winter</a:t>
+              <a:t>night</a:t>
             </a:r>
             <a:endParaRPr lang="en-US" sz="1300" dirty="0"/>
           </a:p>
@@ -26892,7 +27024,7 @@
                 <a:ea typeface="Calibri" pitchFamily="34" charset="-122"/>
                 <a:cs typeface="Calibri" pitchFamily="34" charset="-120"/>
               </a:rPr>
-              <a:t>the coldest season</a:t>
+              <a:t>the dark time of day</a:t>
             </a:r>
             <a:endParaRPr lang="en-US" sz="850" dirty="0"/>
           </a:p>
@@ -26999,7 +27131,7 @@
         </p:nvSpPr>
         <p:spPr>
           <a:xfrm>
-            <a:off x="2313432" y="3364992"/>
+            <a:off x="2999232" y="3364992"/>
             <a:ext cx="1645920" cy="475488"/>
           </a:xfrm>
           <a:prstGeom prst="rect">
@@ -27026,7 +27158,7 @@
         </p:nvSpPr>
         <p:spPr>
           <a:xfrm>
-            <a:off x="2313432" y="3364992"/>
+            <a:off x="2999232" y="3364992"/>
             <a:ext cx="1645920" cy="475488"/>
           </a:xfrm>
           <a:prstGeom prst="rect">
@@ -27065,8 +27197,8 @@
         </p:nvSpPr>
         <p:spPr>
           <a:xfrm>
-            <a:off x="3959352" y="3364992"/>
-            <a:ext cx="411480" cy="475488"/>
+            <a:off x="4645152" y="3364992"/>
+            <a:ext cx="1097280" cy="475488"/>
           </a:xfrm>
           <a:prstGeom prst="rect">
             <a:avLst/>
@@ -27104,7 +27236,7 @@
         </p:nvSpPr>
         <p:spPr>
           <a:xfrm>
-            <a:off x="4370832" y="3364992"/>
+            <a:off x="5742432" y="3364992"/>
             <a:ext cx="1645920" cy="475488"/>
           </a:xfrm>
           <a:prstGeom prst="rect">
@@ -27131,7 +27263,7 @@
         </p:nvSpPr>
         <p:spPr>
           <a:xfrm>
-            <a:off x="4370832" y="3364992"/>
+            <a:off x="5742432" y="3364992"/>
             <a:ext cx="1645920" cy="475488"/>
           </a:xfrm>
           <a:prstGeom prst="rect">
@@ -27156,7 +27288,7 @@
                 <a:ea typeface="Trebuchet MS" pitchFamily="34" charset="-122"/>
                 <a:cs typeface="Trebuchet MS" pitchFamily="34" charset="-120"/>
               </a:rPr>
-              <a:t>win</a:t>
+              <a:t>night</a:t>
             </a:r>
             <a:endParaRPr lang="en-US" sz="1400" dirty="0"/>
           </a:p>
@@ -27164,14 +27296,41 @@
       </p:sp>
       <p:sp>
         <p:nvSpPr>
-          <p:cNvPr id="30" name="Text 28"/>
-          <p:cNvSpPr/>
-          <p:nvPr/>
-        </p:nvSpPr>
-        <p:spPr>
-          <a:xfrm>
-            <a:off x="6016752" y="3364992"/>
-            <a:ext cx="411480" cy="475488"/>
+          <p:cNvPr id="30" name="Shape 28"/>
+          <p:cNvSpPr/>
+          <p:nvPr/>
+        </p:nvSpPr>
+        <p:spPr>
+          <a:xfrm>
+            <a:off x="365760" y="4096512"/>
+            <a:ext cx="1371600" cy="804672"/>
+          </a:xfrm>
+          <a:prstGeom prst="rect">
+            <a:avLst>
+              <a:gd name="adj" fmla="val 6818"/>
+            </a:avLst>
+          </a:prstGeom>
+          <a:solidFill>
+            <a:srgbClr val="E2E8F0"/>
+          </a:solidFill>
+          <a:ln w="12700">
+            <a:solidFill>
+              <a:srgbClr val="E2E8F0"/>
+            </a:solidFill>
+            <a:prstDash val="solid"/>
+          </a:ln>
+        </p:spPr>
+      </p:sp>
+      <p:sp>
+        <p:nvSpPr>
+          <p:cNvPr id="31" name="Text 29"/>
+          <p:cNvSpPr/>
+          <p:nvPr/>
+        </p:nvSpPr>
+        <p:spPr>
+          <a:xfrm>
+            <a:off x="365760" y="4096512"/>
+            <a:ext cx="1371600" cy="804672"/>
           </a:xfrm>
           <a:prstGeom prst="rect">
             <a:avLst/>
@@ -27187,57 +27346,84 @@
               <a:buNone/>
             </a:pPr>
             <a:r>
-              <a:rPr lang="en-US" sz="1600" b="1" dirty="0">
-                <a:solidFill>
-                  <a:srgbClr val="0D9488"/>
+              <a:rPr lang="en-US" sz="1100" b="1" dirty="0">
+                <a:solidFill>
+                  <a:srgbClr val="475569"/>
                 </a:solidFill>
                 <a:latin typeface="Trebuchet MS" pitchFamily="34" charset="0"/>
                 <a:ea typeface="Trebuchet MS" pitchFamily="34" charset="-122"/>
                 <a:cs typeface="Trebuchet MS" pitchFamily="34" charset="-120"/>
               </a:rPr>
-              <a:t>·</a:t>
-            </a:r>
-            <a:endParaRPr lang="en-US" sz="1600" dirty="0"/>
-          </a:p>
-        </p:txBody>
-      </p:sp>
-      <p:sp>
-        <p:nvSpPr>
-          <p:cNvPr id="31" name="Shape 29"/>
-          <p:cNvSpPr/>
-          <p:nvPr/>
-        </p:nvSpPr>
-        <p:spPr>
-          <a:xfrm>
-            <a:off x="6428232" y="3364992"/>
-            <a:ext cx="1645920" cy="475488"/>
+              <a:t>Phonemes</a:t>
+            </a:r>
+            <a:endParaRPr lang="en-US" sz="1100" dirty="0"/>
+          </a:p>
+        </p:txBody>
+      </p:sp>
+      <p:sp>
+        <p:nvSpPr>
+          <p:cNvPr id="32" name="Shape 30"/>
+          <p:cNvSpPr/>
+          <p:nvPr/>
+        </p:nvSpPr>
+        <p:spPr>
+          <a:xfrm>
+            <a:off x="1874520" y="4096512"/>
+            <a:ext cx="6903720" cy="804672"/>
           </a:xfrm>
           <a:prstGeom prst="rect">
             <a:avLst>
-              <a:gd name="adj" fmla="val 9615"/>
+              <a:gd name="adj" fmla="val 6818"/>
             </a:avLst>
           </a:prstGeom>
           <a:solidFill>
+            <a:srgbClr val="FCE7F3"/>
+          </a:solidFill>
+          <a:ln w="12700">
+            <a:solidFill>
+              <a:srgbClr val="DB2777"/>
+            </a:solidFill>
+            <a:prstDash val="solid"/>
+          </a:ln>
+        </p:spPr>
+      </p:sp>
+      <p:sp>
+        <p:nvSpPr>
+          <p:cNvPr id="33" name="Shape 31"/>
+          <p:cNvSpPr/>
+          <p:nvPr/>
+        </p:nvSpPr>
+        <p:spPr>
+          <a:xfrm>
+            <a:off x="2254649" y="4169664"/>
+            <a:ext cx="685800" cy="384048"/>
+          </a:xfrm>
+          <a:prstGeom prst="rect">
+            <a:avLst>
+              <a:gd name="adj" fmla="val 9524"/>
+            </a:avLst>
+          </a:prstGeom>
+          <a:solidFill>
             <a:srgbClr val="FFFFFF"/>
           </a:solidFill>
           <a:ln w="12700">
             <a:solidFill>
-              <a:srgbClr val="0D9488"/>
-            </a:solidFill>
-            <a:prstDash val="solid"/>
-          </a:ln>
-        </p:spPr>
-      </p:sp>
-      <p:sp>
-        <p:nvSpPr>
-          <p:cNvPr id="32" name="Text 30"/>
-          <p:cNvSpPr/>
-          <p:nvPr/>
-        </p:nvSpPr>
-        <p:spPr>
-          <a:xfrm>
-            <a:off x="6428232" y="3364992"/>
-            <a:ext cx="1645920" cy="475488"/>
+              <a:srgbClr val="DB2777"/>
+            </a:solidFill>
+            <a:prstDash val="solid"/>
+          </a:ln>
+        </p:spPr>
+      </p:sp>
+      <p:sp>
+        <p:nvSpPr>
+          <p:cNvPr id="34" name="Text 32"/>
+          <p:cNvSpPr/>
+          <p:nvPr/>
+        </p:nvSpPr>
+        <p:spPr>
+          <a:xfrm>
+            <a:off x="2254649" y="4169664"/>
+            <a:ext cx="685800" cy="384048"/>
           </a:xfrm>
           <a:prstGeom prst="rect">
             <a:avLst/>
@@ -27253,57 +27439,57 @@
               <a:buNone/>
             </a:pPr>
             <a:r>
-              <a:rPr lang="en-US" sz="1400" b="1" dirty="0">
-                <a:solidFill>
-                  <a:srgbClr val="0D9488"/>
+              <a:rPr lang="en-US" sz="900" b="1" dirty="0">
+                <a:solidFill>
+                  <a:srgbClr val="9D174D"/>
                 </a:solidFill>
                 <a:latin typeface="Trebuchet MS" pitchFamily="34" charset="0"/>
                 <a:ea typeface="Trebuchet MS" pitchFamily="34" charset="-122"/>
                 <a:cs typeface="Trebuchet MS" pitchFamily="34" charset="-120"/>
               </a:rPr>
-              <a:t>ter</a:t>
-            </a:r>
-            <a:endParaRPr lang="en-US" sz="1400" dirty="0"/>
-          </a:p>
-        </p:txBody>
-      </p:sp>
-      <p:sp>
-        <p:nvSpPr>
-          <p:cNvPr id="33" name="Shape 31"/>
-          <p:cNvSpPr/>
-          <p:nvPr/>
-        </p:nvSpPr>
-        <p:spPr>
-          <a:xfrm>
-            <a:off x="365760" y="4096512"/>
-            <a:ext cx="1371600" cy="804672"/>
+              <a:t>m</a:t>
+            </a:r>
+            <a:endParaRPr lang="en-US" sz="900" dirty="0"/>
+          </a:p>
+        </p:txBody>
+      </p:sp>
+      <p:sp>
+        <p:nvSpPr>
+          <p:cNvPr id="35" name="Shape 33"/>
+          <p:cNvSpPr/>
+          <p:nvPr/>
+        </p:nvSpPr>
+        <p:spPr>
+          <a:xfrm>
+            <a:off x="3293146" y="4169664"/>
+            <a:ext cx="685800" cy="384048"/>
           </a:xfrm>
           <a:prstGeom prst="rect">
             <a:avLst>
-              <a:gd name="adj" fmla="val 6818"/>
+              <a:gd name="adj" fmla="val 9524"/>
             </a:avLst>
           </a:prstGeom>
           <a:solidFill>
-            <a:srgbClr val="E2E8F0"/>
-          </a:solidFill>
-          <a:ln w="12700">
-            <a:solidFill>
-              <a:srgbClr val="E2E8F0"/>
-            </a:solidFill>
-            <a:prstDash val="solid"/>
-          </a:ln>
-        </p:spPr>
-      </p:sp>
-      <p:sp>
-        <p:nvSpPr>
-          <p:cNvPr id="34" name="Text 32"/>
-          <p:cNvSpPr/>
-          <p:nvPr/>
-        </p:nvSpPr>
-        <p:spPr>
-          <a:xfrm>
-            <a:off x="365760" y="4096512"/>
-            <a:ext cx="1371600" cy="804672"/>
+            <a:srgbClr val="FFFFFF"/>
+          </a:solidFill>
+          <a:ln w="12700">
+            <a:solidFill>
+              <a:srgbClr val="DB2777"/>
+            </a:solidFill>
+            <a:prstDash val="solid"/>
+          </a:ln>
+        </p:spPr>
+      </p:sp>
+      <p:sp>
+        <p:nvSpPr>
+          <p:cNvPr id="36" name="Text 34"/>
+          <p:cNvSpPr/>
+          <p:nvPr/>
+        </p:nvSpPr>
+        <p:spPr>
+          <a:xfrm>
+            <a:off x="3293146" y="4169664"/>
+            <a:ext cx="685800" cy="384048"/>
           </a:xfrm>
           <a:prstGeom prst="rect">
             <a:avLst/>
@@ -27319,38 +27505,38 @@
               <a:buNone/>
             </a:pPr>
             <a:r>
-              <a:rPr lang="en-US" sz="1100" b="1" dirty="0">
-                <a:solidFill>
-                  <a:srgbClr val="475569"/>
+              <a:rPr lang="en-US" sz="900" b="1" dirty="0">
+                <a:solidFill>
+                  <a:srgbClr val="9D174D"/>
                 </a:solidFill>
                 <a:latin typeface="Trebuchet MS" pitchFamily="34" charset="0"/>
                 <a:ea typeface="Trebuchet MS" pitchFamily="34" charset="-122"/>
                 <a:cs typeface="Trebuchet MS" pitchFamily="34" charset="-120"/>
               </a:rPr>
-              <a:t>Phonemes</a:t>
-            </a:r>
-            <a:endParaRPr lang="en-US" sz="1100" dirty="0"/>
-          </a:p>
-        </p:txBody>
-      </p:sp>
-      <p:sp>
-        <p:nvSpPr>
-          <p:cNvPr id="35" name="Shape 33"/>
-          <p:cNvSpPr/>
-          <p:nvPr/>
-        </p:nvSpPr>
-        <p:spPr>
-          <a:xfrm>
-            <a:off x="1874520" y="4096512"/>
-            <a:ext cx="6903720" cy="658368"/>
+              <a:t>i</a:t>
+            </a:r>
+            <a:endParaRPr lang="en-US" sz="900" dirty="0"/>
+          </a:p>
+        </p:txBody>
+      </p:sp>
+      <p:sp>
+        <p:nvSpPr>
+          <p:cNvPr id="37" name="Shape 35"/>
+          <p:cNvSpPr/>
+          <p:nvPr/>
+        </p:nvSpPr>
+        <p:spPr>
+          <a:xfrm>
+            <a:off x="4331643" y="4169664"/>
+            <a:ext cx="685800" cy="384048"/>
           </a:xfrm>
           <a:prstGeom prst="rect">
             <a:avLst>
-              <a:gd name="adj" fmla="val 8333"/>
+              <a:gd name="adj" fmla="val 9524"/>
             </a:avLst>
           </a:prstGeom>
           <a:solidFill>
-            <a:srgbClr val="FCE7F3"/>
+            <a:srgbClr val="FFFFFF"/>
           </a:solidFill>
           <a:ln w="12700">
             <a:solidFill>
@@ -27362,41 +27548,14 @@
       </p:sp>
       <p:sp>
         <p:nvSpPr>
-          <p:cNvPr id="36" name="Shape 34"/>
-          <p:cNvSpPr/>
-          <p:nvPr/>
-        </p:nvSpPr>
-        <p:spPr>
-          <a:xfrm>
-            <a:off x="2023872" y="4169664"/>
-            <a:ext cx="685800" cy="475488"/>
-          </a:xfrm>
-          <a:prstGeom prst="rect">
-            <a:avLst>
-              <a:gd name="adj" fmla="val 7692"/>
-            </a:avLst>
-          </a:prstGeom>
-          <a:solidFill>
-            <a:srgbClr val="FFFFFF"/>
-          </a:solidFill>
-          <a:ln w="12700">
-            <a:solidFill>
-              <a:srgbClr val="DB2777"/>
-            </a:solidFill>
-            <a:prstDash val="solid"/>
-          </a:ln>
-        </p:spPr>
-      </p:sp>
-      <p:sp>
-        <p:nvSpPr>
-          <p:cNvPr id="37" name="Text 35"/>
-          <p:cNvSpPr/>
-          <p:nvPr/>
-        </p:nvSpPr>
-        <p:spPr>
-          <a:xfrm>
-            <a:off x="2023872" y="4169664"/>
-            <a:ext cx="685800" cy="475488"/>
+          <p:cNvPr id="38" name="Text 36"/>
+          <p:cNvSpPr/>
+          <p:nvPr/>
+        </p:nvSpPr>
+        <p:spPr>
+          <a:xfrm>
+            <a:off x="4331643" y="4169664"/>
+            <a:ext cx="685800" cy="384048"/>
           </a:xfrm>
           <a:prstGeom prst="rect">
             <a:avLst/>
@@ -27420,7 +27579,7 @@
                 <a:ea typeface="Trebuchet MS" pitchFamily="34" charset="-122"/>
                 <a:cs typeface="Trebuchet MS" pitchFamily="34" charset="-120"/>
               </a:rPr>
-              <a:t>m</a:t>
+              <a:t>d</a:t>
             </a:r>
             <a:endParaRPr lang="en-US" sz="900" dirty="0"/>
           </a:p>
@@ -27428,18 +27587,18 @@
       </p:sp>
       <p:sp>
         <p:nvSpPr>
-          <p:cNvPr id="38" name="Shape 36"/>
-          <p:cNvSpPr/>
-          <p:nvPr/>
-        </p:nvSpPr>
-        <p:spPr>
-          <a:xfrm>
-            <a:off x="2831592" y="4169664"/>
-            <a:ext cx="685800" cy="475488"/>
+          <p:cNvPr id="39" name="Shape 37"/>
+          <p:cNvSpPr/>
+          <p:nvPr/>
+        </p:nvSpPr>
+        <p:spPr>
+          <a:xfrm>
+            <a:off x="5370141" y="4169664"/>
+            <a:ext cx="685800" cy="384048"/>
           </a:xfrm>
           <a:prstGeom prst="rect">
             <a:avLst>
-              <a:gd name="adj" fmla="val 7692"/>
+              <a:gd name="adj" fmla="val 9524"/>
             </a:avLst>
           </a:prstGeom>
           <a:solidFill>
@@ -27455,14 +27614,14 @@
       </p:sp>
       <p:sp>
         <p:nvSpPr>
-          <p:cNvPr id="39" name="Text 37"/>
-          <p:cNvSpPr/>
-          <p:nvPr/>
-        </p:nvSpPr>
-        <p:spPr>
-          <a:xfrm>
-            <a:off x="2831592" y="4169664"/>
-            <a:ext cx="685800" cy="475488"/>
+          <p:cNvPr id="40" name="Text 38"/>
+          <p:cNvSpPr/>
+          <p:nvPr/>
+        </p:nvSpPr>
+        <p:spPr>
+          <a:xfrm>
+            <a:off x="5370141" y="4169664"/>
+            <a:ext cx="685800" cy="384048"/>
           </a:xfrm>
           <a:prstGeom prst="rect">
             <a:avLst/>
@@ -27486,7 +27645,7 @@
                 <a:ea typeface="Trebuchet MS" pitchFamily="34" charset="-122"/>
                 <a:cs typeface="Trebuchet MS" pitchFamily="34" charset="-120"/>
               </a:rPr>
-              <a:t>i</a:t>
+              <a:t>n</a:t>
             </a:r>
             <a:endParaRPr lang="en-US" sz="900" dirty="0"/>
           </a:p>
@@ -27494,18 +27653,18 @@
       </p:sp>
       <p:sp>
         <p:nvSpPr>
-          <p:cNvPr id="40" name="Shape 38"/>
-          <p:cNvSpPr/>
-          <p:nvPr/>
-        </p:nvSpPr>
-        <p:spPr>
-          <a:xfrm>
-            <a:off x="3639312" y="4169664"/>
-            <a:ext cx="685800" cy="475488"/>
+          <p:cNvPr id="41" name="Shape 39"/>
+          <p:cNvSpPr/>
+          <p:nvPr/>
+        </p:nvSpPr>
+        <p:spPr>
+          <a:xfrm>
+            <a:off x="6408638" y="4169664"/>
+            <a:ext cx="685800" cy="384048"/>
           </a:xfrm>
           <a:prstGeom prst="rect">
             <a:avLst>
-              <a:gd name="adj" fmla="val 7692"/>
+              <a:gd name="adj" fmla="val 9524"/>
             </a:avLst>
           </a:prstGeom>
           <a:solidFill>
@@ -27521,14 +27680,14 @@
       </p:sp>
       <p:sp>
         <p:nvSpPr>
-          <p:cNvPr id="41" name="Text 39"/>
-          <p:cNvSpPr/>
-          <p:nvPr/>
-        </p:nvSpPr>
-        <p:spPr>
-          <a:xfrm>
-            <a:off x="3639312" y="4169664"/>
-            <a:ext cx="685800" cy="475488"/>
+          <p:cNvPr id="42" name="Text 40"/>
+          <p:cNvSpPr/>
+          <p:nvPr/>
+        </p:nvSpPr>
+        <p:spPr>
+          <a:xfrm>
+            <a:off x="6408638" y="4169664"/>
+            <a:ext cx="685800" cy="384048"/>
           </a:xfrm>
           <a:prstGeom prst="rect">
             <a:avLst/>
@@ -27552,7 +27711,7 @@
                 <a:ea typeface="Trebuchet MS" pitchFamily="34" charset="-122"/>
                 <a:cs typeface="Trebuchet MS" pitchFamily="34" charset="-120"/>
               </a:rPr>
-              <a:t>d</a:t>
+              <a:t>igh</a:t>
             </a:r>
             <a:endParaRPr lang="en-US" sz="900" dirty="0"/>
           </a:p>
@@ -27560,18 +27719,57 @@
       </p:sp>
       <p:sp>
         <p:nvSpPr>
-          <p:cNvPr id="42" name="Shape 40"/>
-          <p:cNvSpPr/>
-          <p:nvPr/>
-        </p:nvSpPr>
-        <p:spPr>
-          <a:xfrm>
-            <a:off x="4447032" y="4169664"/>
-            <a:ext cx="685800" cy="475488"/>
+          <p:cNvPr id="43" name="Text 41"/>
+          <p:cNvSpPr/>
+          <p:nvPr/>
+        </p:nvSpPr>
+        <p:spPr>
+          <a:xfrm>
+            <a:off x="6408638" y="4572000"/>
+            <a:ext cx="685800" cy="219456"/>
+          </a:xfrm>
+          <a:prstGeom prst="rect">
+            <a:avLst/>
+          </a:prstGeom>
+          <a:noFill/>
+          <a:ln/>
+        </p:spPr>
+        <p:txBody>
+          <a:bodyPr wrap="square" lIns="0" tIns="0" rIns="0" bIns="0" rtlCol="0" anchor="t"/>
+          <a:lstStyle/>
+          <a:p>
+            <a:pPr algn="ctr" indent="0" marL="0">
+              <a:buNone/>
+            </a:pPr>
+            <a:r>
+              <a:rPr lang="en-US" sz="750" i="1" dirty="0">
+                <a:solidFill>
+                  <a:srgbClr val="94A3B8"/>
+                </a:solidFill>
+                <a:latin typeface="Calibri" pitchFamily="34" charset="0"/>
+                <a:ea typeface="Calibri" pitchFamily="34" charset="-122"/>
+                <a:cs typeface="Calibri" pitchFamily="34" charset="-120"/>
+              </a:rPr>
+              <a:t>/ie/</a:t>
+            </a:r>
+            <a:endParaRPr lang="en-US" sz="750" dirty="0"/>
+          </a:p>
+        </p:txBody>
+      </p:sp>
+      <p:sp>
+        <p:nvSpPr>
+          <p:cNvPr id="44" name="Shape 42"/>
+          <p:cNvSpPr/>
+          <p:nvPr/>
+        </p:nvSpPr>
+        <p:spPr>
+          <a:xfrm>
+            <a:off x="7447135" y="4169664"/>
+            <a:ext cx="685800" cy="384048"/>
           </a:xfrm>
           <a:prstGeom prst="rect">
             <a:avLst>
-              <a:gd name="adj" fmla="val 7692"/>
+              <a:gd name="adj" fmla="val 9524"/>
             </a:avLst>
           </a:prstGeom>
           <a:solidFill>
@@ -27587,14 +27785,14 @@
       </p:sp>
       <p:sp>
         <p:nvSpPr>
-          <p:cNvPr id="43" name="Text 41"/>
-          <p:cNvSpPr/>
-          <p:nvPr/>
-        </p:nvSpPr>
-        <p:spPr>
-          <a:xfrm>
-            <a:off x="4447032" y="4169664"/>
-            <a:ext cx="685800" cy="475488"/>
+          <p:cNvPr id="45" name="Text 43"/>
+          <p:cNvSpPr/>
+          <p:nvPr/>
+        </p:nvSpPr>
+        <p:spPr>
+          <a:xfrm>
+            <a:off x="7447135" y="4169664"/>
+            <a:ext cx="685800" cy="384048"/>
           </a:xfrm>
           <a:prstGeom prst="rect">
             <a:avLst/>
@@ -27618,271 +27816,7 @@
                 <a:ea typeface="Trebuchet MS" pitchFamily="34" charset="-122"/>
                 <a:cs typeface="Trebuchet MS" pitchFamily="34" charset="-120"/>
               </a:rPr>
-              <a:t>w</a:t>
-            </a:r>
-            <a:endParaRPr lang="en-US" sz="900" dirty="0"/>
-          </a:p>
-        </p:txBody>
-      </p:sp>
-      <p:sp>
-        <p:nvSpPr>
-          <p:cNvPr id="44" name="Shape 42"/>
-          <p:cNvSpPr/>
-          <p:nvPr/>
-        </p:nvSpPr>
-        <p:spPr>
-          <a:xfrm>
-            <a:off x="5254752" y="4169664"/>
-            <a:ext cx="685800" cy="475488"/>
-          </a:xfrm>
-          <a:prstGeom prst="rect">
-            <a:avLst>
-              <a:gd name="adj" fmla="val 7692"/>
-            </a:avLst>
-          </a:prstGeom>
-          <a:solidFill>
-            <a:srgbClr val="FFFFFF"/>
-          </a:solidFill>
-          <a:ln w="12700">
-            <a:solidFill>
-              <a:srgbClr val="DB2777"/>
-            </a:solidFill>
-            <a:prstDash val="solid"/>
-          </a:ln>
-        </p:spPr>
-      </p:sp>
-      <p:sp>
-        <p:nvSpPr>
-          <p:cNvPr id="45" name="Text 43"/>
-          <p:cNvSpPr/>
-          <p:nvPr/>
-        </p:nvSpPr>
-        <p:spPr>
-          <a:xfrm>
-            <a:off x="5254752" y="4169664"/>
-            <a:ext cx="685800" cy="475488"/>
-          </a:xfrm>
-          <a:prstGeom prst="rect">
-            <a:avLst/>
-          </a:prstGeom>
-          <a:noFill/>
-          <a:ln/>
-        </p:spPr>
-        <p:txBody>
-          <a:bodyPr wrap="square" lIns="0" tIns="0" rIns="0" bIns="0" rtlCol="0" anchor="ctr"/>
-          <a:lstStyle/>
-          <a:p>
-            <a:pPr algn="ctr" indent="0" marL="0">
-              <a:buNone/>
-            </a:pPr>
-            <a:r>
-              <a:rPr lang="en-US" sz="900" b="1" dirty="0">
-                <a:solidFill>
-                  <a:srgbClr val="9D174D"/>
-                </a:solidFill>
-                <a:latin typeface="Trebuchet MS" pitchFamily="34" charset="0"/>
-                <a:ea typeface="Trebuchet MS" pitchFamily="34" charset="-122"/>
-                <a:cs typeface="Trebuchet MS" pitchFamily="34" charset="-120"/>
-              </a:rPr>
-              <a:t>i</a:t>
-            </a:r>
-            <a:endParaRPr lang="en-US" sz="900" dirty="0"/>
-          </a:p>
-        </p:txBody>
-      </p:sp>
-      <p:sp>
-        <p:nvSpPr>
-          <p:cNvPr id="46" name="Shape 44"/>
-          <p:cNvSpPr/>
-          <p:nvPr/>
-        </p:nvSpPr>
-        <p:spPr>
-          <a:xfrm>
-            <a:off x="6062472" y="4169664"/>
-            <a:ext cx="685800" cy="475488"/>
-          </a:xfrm>
-          <a:prstGeom prst="rect">
-            <a:avLst>
-              <a:gd name="adj" fmla="val 7692"/>
-            </a:avLst>
-          </a:prstGeom>
-          <a:solidFill>
-            <a:srgbClr val="FFFFFF"/>
-          </a:solidFill>
-          <a:ln w="12700">
-            <a:solidFill>
-              <a:srgbClr val="DB2777"/>
-            </a:solidFill>
-            <a:prstDash val="solid"/>
-          </a:ln>
-        </p:spPr>
-      </p:sp>
-      <p:sp>
-        <p:nvSpPr>
-          <p:cNvPr id="47" name="Text 45"/>
-          <p:cNvSpPr/>
-          <p:nvPr/>
-        </p:nvSpPr>
-        <p:spPr>
-          <a:xfrm>
-            <a:off x="6062472" y="4169664"/>
-            <a:ext cx="685800" cy="475488"/>
-          </a:xfrm>
-          <a:prstGeom prst="rect">
-            <a:avLst/>
-          </a:prstGeom>
-          <a:noFill/>
-          <a:ln/>
-        </p:spPr>
-        <p:txBody>
-          <a:bodyPr wrap="square" lIns="0" tIns="0" rIns="0" bIns="0" rtlCol="0" anchor="ctr"/>
-          <a:lstStyle/>
-          <a:p>
-            <a:pPr algn="ctr" indent="0" marL="0">
-              <a:buNone/>
-            </a:pPr>
-            <a:r>
-              <a:rPr lang="en-US" sz="900" b="1" dirty="0">
-                <a:solidFill>
-                  <a:srgbClr val="9D174D"/>
-                </a:solidFill>
-                <a:latin typeface="Trebuchet MS" pitchFamily="34" charset="0"/>
-                <a:ea typeface="Trebuchet MS" pitchFamily="34" charset="-122"/>
-                <a:cs typeface="Trebuchet MS" pitchFamily="34" charset="-120"/>
-              </a:rPr>
-              <a:t>n</a:t>
-            </a:r>
-            <a:endParaRPr lang="en-US" sz="900" dirty="0"/>
-          </a:p>
-        </p:txBody>
-      </p:sp>
-      <p:sp>
-        <p:nvSpPr>
-          <p:cNvPr id="48" name="Shape 46"/>
-          <p:cNvSpPr/>
-          <p:nvPr/>
-        </p:nvSpPr>
-        <p:spPr>
-          <a:xfrm>
-            <a:off x="6870192" y="4169664"/>
-            <a:ext cx="685800" cy="475488"/>
-          </a:xfrm>
-          <a:prstGeom prst="rect">
-            <a:avLst>
-              <a:gd name="adj" fmla="val 7692"/>
-            </a:avLst>
-          </a:prstGeom>
-          <a:solidFill>
-            <a:srgbClr val="FFFFFF"/>
-          </a:solidFill>
-          <a:ln w="12700">
-            <a:solidFill>
-              <a:srgbClr val="DB2777"/>
-            </a:solidFill>
-            <a:prstDash val="solid"/>
-          </a:ln>
-        </p:spPr>
-      </p:sp>
-      <p:sp>
-        <p:nvSpPr>
-          <p:cNvPr id="49" name="Text 47"/>
-          <p:cNvSpPr/>
-          <p:nvPr/>
-        </p:nvSpPr>
-        <p:spPr>
-          <a:xfrm>
-            <a:off x="6870192" y="4169664"/>
-            <a:ext cx="685800" cy="475488"/>
-          </a:xfrm>
-          <a:prstGeom prst="rect">
-            <a:avLst/>
-          </a:prstGeom>
-          <a:noFill/>
-          <a:ln/>
-        </p:spPr>
-        <p:txBody>
-          <a:bodyPr wrap="square" lIns="0" tIns="0" rIns="0" bIns="0" rtlCol="0" anchor="ctr"/>
-          <a:lstStyle/>
-          <a:p>
-            <a:pPr algn="ctr" indent="0" marL="0">
-              <a:buNone/>
-            </a:pPr>
-            <a:r>
-              <a:rPr lang="en-US" sz="900" b="1" dirty="0">
-                <a:solidFill>
-                  <a:srgbClr val="9D174D"/>
-                </a:solidFill>
-                <a:latin typeface="Trebuchet MS" pitchFamily="34" charset="0"/>
-                <a:ea typeface="Trebuchet MS" pitchFamily="34" charset="-122"/>
-                <a:cs typeface="Trebuchet MS" pitchFamily="34" charset="-120"/>
-              </a:rPr>
               <a:t>t</a:t>
-            </a:r>
-            <a:endParaRPr lang="en-US" sz="900" dirty="0"/>
-          </a:p>
-        </p:txBody>
-      </p:sp>
-      <p:sp>
-        <p:nvSpPr>
-          <p:cNvPr id="50" name="Shape 48"/>
-          <p:cNvSpPr/>
-          <p:nvPr/>
-        </p:nvSpPr>
-        <p:spPr>
-          <a:xfrm>
-            <a:off x="7677912" y="4169664"/>
-            <a:ext cx="685800" cy="475488"/>
-          </a:xfrm>
-          <a:prstGeom prst="rect">
-            <a:avLst>
-              <a:gd name="adj" fmla="val 7692"/>
-            </a:avLst>
-          </a:prstGeom>
-          <a:solidFill>
-            <a:srgbClr val="FFFFFF"/>
-          </a:solidFill>
-          <a:ln w="12700">
-            <a:solidFill>
-              <a:srgbClr val="DB2777"/>
-            </a:solidFill>
-            <a:prstDash val="solid"/>
-          </a:ln>
-        </p:spPr>
-      </p:sp>
-      <p:sp>
-        <p:nvSpPr>
-          <p:cNvPr id="51" name="Text 49"/>
-          <p:cNvSpPr/>
-          <p:nvPr/>
-        </p:nvSpPr>
-        <p:spPr>
-          <a:xfrm>
-            <a:off x="7677912" y="4169664"/>
-            <a:ext cx="685800" cy="475488"/>
-          </a:xfrm>
-          <a:prstGeom prst="rect">
-            <a:avLst/>
-          </a:prstGeom>
-          <a:noFill/>
-          <a:ln/>
-        </p:spPr>
-        <p:txBody>
-          <a:bodyPr wrap="square" lIns="0" tIns="0" rIns="0" bIns="0" rtlCol="0" anchor="ctr"/>
-          <a:lstStyle/>
-          <a:p>
-            <a:pPr algn="ctr" indent="0" marL="0">
-              <a:buNone/>
-            </a:pPr>
-            <a:r>
-              <a:rPr lang="en-US" sz="900" b="1" dirty="0">
-                <a:solidFill>
-                  <a:srgbClr val="9D174D"/>
-                </a:solidFill>
-                <a:latin typeface="Trebuchet MS" pitchFamily="34" charset="0"/>
-                <a:ea typeface="Trebuchet MS" pitchFamily="34" charset="-122"/>
-                <a:cs typeface="Trebuchet MS" pitchFamily="34" charset="-120"/>
-              </a:rPr>
-              <a:t>er</a:t>
             </a:r>
             <a:endParaRPr lang="en-US" sz="900" dirty="0"/>
           </a:p>
@@ -28313,7 +28247,7 @@
                 <a:ea typeface="Trebuchet MS" pitchFamily="34" charset="-122"/>
                 <a:cs typeface="Trebuchet MS" pitchFamily="34" charset="-120"/>
               </a:rPr>
-              <a:t>midfield</a:t>
+              <a:t>midway</a:t>
             </a:r>
             <a:endParaRPr lang="en-US" sz="2800" dirty="0"/>
           </a:p>
@@ -29140,7 +29074,7 @@
                 <a:ea typeface="Trebuchet MS" pitchFamily="34" charset="-122"/>
                 <a:cs typeface="Trebuchet MS" pitchFamily="34" charset="-120"/>
               </a:rPr>
-              <a:t>midfield</a:t>
+              <a:t>midway</a:t>
             </a:r>
             <a:endParaRPr lang="en-US" sz="2800" dirty="0"/>
           </a:p>
@@ -29391,7 +29325,7 @@
                 <a:ea typeface="Trebuchet MS" pitchFamily="34" charset="-122"/>
                 <a:cs typeface="Trebuchet MS" pitchFamily="34" charset="-120"/>
               </a:rPr>
-              <a:t>field</a:t>
+              <a:t>way</a:t>
             </a:r>
             <a:endParaRPr lang="en-US" sz="1300" dirty="0"/>
           </a:p>
@@ -29430,7 +29364,7 @@
                 <a:ea typeface="Calibri" pitchFamily="34" charset="-122"/>
                 <a:cs typeface="Calibri" pitchFamily="34" charset="-120"/>
               </a:rPr>
-              <a:t>open area of play</a:t>
+              <a:t>a path or route</a:t>
             </a:r>
             <a:endParaRPr lang="en-US" sz="850" dirty="0"/>
           </a:p>
@@ -30125,7 +30059,7 @@
                 <a:ea typeface="Trebuchet MS" pitchFamily="34" charset="-122"/>
                 <a:cs typeface="Trebuchet MS" pitchFamily="34" charset="-120"/>
               </a:rPr>
-              <a:t>midfield</a:t>
+              <a:t>midway</a:t>
             </a:r>
             <a:endParaRPr lang="en-US" sz="2800" dirty="0"/>
           </a:p>
@@ -30376,7 +30310,7 @@
                 <a:ea typeface="Trebuchet MS" pitchFamily="34" charset="-122"/>
                 <a:cs typeface="Trebuchet MS" pitchFamily="34" charset="-120"/>
               </a:rPr>
-              <a:t>field</a:t>
+              <a:t>way</a:t>
             </a:r>
             <a:endParaRPr lang="en-US" sz="1300" dirty="0"/>
           </a:p>
@@ -30415,7 +30349,7 @@
                 <a:ea typeface="Calibri" pitchFamily="34" charset="-122"/>
                 <a:cs typeface="Calibri" pitchFamily="34" charset="-120"/>
               </a:rPr>
-              <a:t>open area of play</a:t>
+              <a:t>a path or route</a:t>
             </a:r>
             <a:endParaRPr lang="en-US" sz="850" dirty="0"/>
           </a:p>
@@ -30679,7 +30613,7 @@
                 <a:ea typeface="Trebuchet MS" pitchFamily="34" charset="-122"/>
                 <a:cs typeface="Trebuchet MS" pitchFamily="34" charset="-120"/>
               </a:rPr>
-              <a:t>field</a:t>
+              <a:t>way</a:t>
             </a:r>
             <a:endParaRPr lang="en-US" sz="1400" dirty="0"/>
           </a:p>
@@ -31242,7 +31176,7 @@
                 <a:ea typeface="Trebuchet MS" pitchFamily="34" charset="-122"/>
                 <a:cs typeface="Trebuchet MS" pitchFamily="34" charset="-120"/>
               </a:rPr>
-              <a:t>midfield</a:t>
+              <a:t>midway</a:t>
             </a:r>
             <a:endParaRPr lang="en-US" sz="2800" dirty="0"/>
           </a:p>
@@ -31493,7 +31427,7 @@
                 <a:ea typeface="Trebuchet MS" pitchFamily="34" charset="-122"/>
                 <a:cs typeface="Trebuchet MS" pitchFamily="34" charset="-120"/>
               </a:rPr>
-              <a:t>field</a:t>
+              <a:t>way</a:t>
             </a:r>
             <a:endParaRPr lang="en-US" sz="1300" dirty="0"/>
           </a:p>
@@ -31532,7 +31466,7 @@
                 <a:ea typeface="Calibri" pitchFamily="34" charset="-122"/>
                 <a:cs typeface="Calibri" pitchFamily="34" charset="-120"/>
               </a:rPr>
-              <a:t>open area of play</a:t>
+              <a:t>a path or route</a:t>
             </a:r>
             <a:endParaRPr lang="en-US" sz="850" dirty="0"/>
           </a:p>
@@ -31796,7 +31730,7 @@
                 <a:ea typeface="Trebuchet MS" pitchFamily="34" charset="-122"/>
                 <a:cs typeface="Trebuchet MS" pitchFamily="34" charset="-120"/>
               </a:rPr>
-              <a:t>field</a:t>
+              <a:t>way</a:t>
             </a:r>
             <a:endParaRPr lang="en-US" sz="1400" dirty="0"/>
           </a:p>
@@ -31903,7 +31837,7 @@
         </p:nvSpPr>
         <p:spPr>
           <a:xfrm>
-            <a:off x="2124837" y="4169664"/>
+            <a:off x="2427732" y="4169664"/>
             <a:ext cx="685800" cy="475488"/>
           </a:xfrm>
           <a:prstGeom prst="rect">
@@ -31930,7 +31864,7 @@
         </p:nvSpPr>
         <p:spPr>
           <a:xfrm>
-            <a:off x="2124837" y="4169664"/>
+            <a:off x="2427732" y="4169664"/>
             <a:ext cx="685800" cy="475488"/>
           </a:xfrm>
           <a:prstGeom prst="rect">
@@ -31969,7 +31903,7 @@
         </p:nvSpPr>
         <p:spPr>
           <a:xfrm>
-            <a:off x="3033522" y="4169664"/>
+            <a:off x="3639312" y="4169664"/>
             <a:ext cx="685800" cy="475488"/>
           </a:xfrm>
           <a:prstGeom prst="rect">
@@ -31996,7 +31930,7 @@
         </p:nvSpPr>
         <p:spPr>
           <a:xfrm>
-            <a:off x="3033522" y="4169664"/>
+            <a:off x="3639312" y="4169664"/>
             <a:ext cx="685800" cy="475488"/>
           </a:xfrm>
           <a:prstGeom prst="rect">
@@ -32035,7 +31969,7 @@
         </p:nvSpPr>
         <p:spPr>
           <a:xfrm>
-            <a:off x="3942207" y="4169664"/>
+            <a:off x="4850892" y="4169664"/>
             <a:ext cx="685800" cy="475488"/>
           </a:xfrm>
           <a:prstGeom prst="rect">
@@ -32062,7 +31996,7 @@
         </p:nvSpPr>
         <p:spPr>
           <a:xfrm>
-            <a:off x="3942207" y="4169664"/>
+            <a:off x="4850892" y="4169664"/>
             <a:ext cx="685800" cy="475488"/>
           </a:xfrm>
           <a:prstGeom prst="rect">
@@ -32101,7 +32035,7 @@
         </p:nvSpPr>
         <p:spPr>
           <a:xfrm>
-            <a:off x="4850892" y="4169664"/>
+            <a:off x="6062472" y="4169664"/>
             <a:ext cx="685800" cy="475488"/>
           </a:xfrm>
           <a:prstGeom prst="rect">
@@ -32128,7 +32062,7 @@
         </p:nvSpPr>
         <p:spPr>
           <a:xfrm>
-            <a:off x="4850892" y="4169664"/>
+            <a:off x="6062472" y="4169664"/>
             <a:ext cx="685800" cy="475488"/>
           </a:xfrm>
           <a:prstGeom prst="rect">
@@ -32153,7 +32087,7 @@
                 <a:ea typeface="Trebuchet MS" pitchFamily="34" charset="-122"/>
                 <a:cs typeface="Trebuchet MS" pitchFamily="34" charset="-120"/>
               </a:rPr>
-              <a:t>f</a:t>
+              <a:t>w</a:t>
             </a:r>
             <a:endParaRPr lang="en-US" sz="900" dirty="0"/>
           </a:p>
@@ -32167,7 +32101,7 @@
         </p:nvSpPr>
         <p:spPr>
           <a:xfrm>
-            <a:off x="5759577" y="4169664"/>
+            <a:off x="7274052" y="4169664"/>
             <a:ext cx="685800" cy="475488"/>
           </a:xfrm>
           <a:prstGeom prst="rect">
@@ -32194,7 +32128,7 @@
         </p:nvSpPr>
         <p:spPr>
           <a:xfrm>
-            <a:off x="5759577" y="4169664"/>
+            <a:off x="7274052" y="4169664"/>
             <a:ext cx="685800" cy="475488"/>
           </a:xfrm>
           <a:prstGeom prst="rect">
@@ -32219,139 +32153,7 @@
                 <a:ea typeface="Trebuchet MS" pitchFamily="34" charset="-122"/>
                 <a:cs typeface="Trebuchet MS" pitchFamily="34" charset="-120"/>
               </a:rPr>
-              <a:t>ie</a:t>
-            </a:r>
-            <a:endParaRPr lang="en-US" sz="900" dirty="0"/>
-          </a:p>
-        </p:txBody>
-      </p:sp>
-      <p:sp>
-        <p:nvSpPr>
-          <p:cNvPr id="43" name="Shape 41"/>
-          <p:cNvSpPr/>
-          <p:nvPr/>
-        </p:nvSpPr>
-        <p:spPr>
-          <a:xfrm>
-            <a:off x="6668262" y="4169664"/>
-            <a:ext cx="685800" cy="475488"/>
-          </a:xfrm>
-          <a:prstGeom prst="rect">
-            <a:avLst>
-              <a:gd name="adj" fmla="val 7692"/>
-            </a:avLst>
-          </a:prstGeom>
-          <a:solidFill>
-            <a:srgbClr val="FFFFFF"/>
-          </a:solidFill>
-          <a:ln w="12700">
-            <a:solidFill>
-              <a:srgbClr val="DB2777"/>
-            </a:solidFill>
-            <a:prstDash val="solid"/>
-          </a:ln>
-        </p:spPr>
-      </p:sp>
-      <p:sp>
-        <p:nvSpPr>
-          <p:cNvPr id="44" name="Text 42"/>
-          <p:cNvSpPr/>
-          <p:nvPr/>
-        </p:nvSpPr>
-        <p:spPr>
-          <a:xfrm>
-            <a:off x="6668262" y="4169664"/>
-            <a:ext cx="685800" cy="475488"/>
-          </a:xfrm>
-          <a:prstGeom prst="rect">
-            <a:avLst/>
-          </a:prstGeom>
-          <a:noFill/>
-          <a:ln/>
-        </p:spPr>
-        <p:txBody>
-          <a:bodyPr wrap="square" lIns="0" tIns="0" rIns="0" bIns="0" rtlCol="0" anchor="ctr"/>
-          <a:lstStyle/>
-          <a:p>
-            <a:pPr algn="ctr" indent="0" marL="0">
-              <a:buNone/>
-            </a:pPr>
-            <a:r>
-              <a:rPr lang="en-US" sz="900" b="1" dirty="0">
-                <a:solidFill>
-                  <a:srgbClr val="9D174D"/>
-                </a:solidFill>
-                <a:latin typeface="Trebuchet MS" pitchFamily="34" charset="0"/>
-                <a:ea typeface="Trebuchet MS" pitchFamily="34" charset="-122"/>
-                <a:cs typeface="Trebuchet MS" pitchFamily="34" charset="-120"/>
-              </a:rPr>
-              <a:t>l</a:t>
-            </a:r>
-            <a:endParaRPr lang="en-US" sz="900" dirty="0"/>
-          </a:p>
-        </p:txBody>
-      </p:sp>
-      <p:sp>
-        <p:nvSpPr>
-          <p:cNvPr id="45" name="Shape 43"/>
-          <p:cNvSpPr/>
-          <p:nvPr/>
-        </p:nvSpPr>
-        <p:spPr>
-          <a:xfrm>
-            <a:off x="7576947" y="4169664"/>
-            <a:ext cx="685800" cy="475488"/>
-          </a:xfrm>
-          <a:prstGeom prst="rect">
-            <a:avLst>
-              <a:gd name="adj" fmla="val 7692"/>
-            </a:avLst>
-          </a:prstGeom>
-          <a:solidFill>
-            <a:srgbClr val="FFFFFF"/>
-          </a:solidFill>
-          <a:ln w="12700">
-            <a:solidFill>
-              <a:srgbClr val="DB2777"/>
-            </a:solidFill>
-            <a:prstDash val="solid"/>
-          </a:ln>
-        </p:spPr>
-      </p:sp>
-      <p:sp>
-        <p:nvSpPr>
-          <p:cNvPr id="46" name="Text 44"/>
-          <p:cNvSpPr/>
-          <p:nvPr/>
-        </p:nvSpPr>
-        <p:spPr>
-          <a:xfrm>
-            <a:off x="7576947" y="4169664"/>
-            <a:ext cx="685800" cy="475488"/>
-          </a:xfrm>
-          <a:prstGeom prst="rect">
-            <a:avLst/>
-          </a:prstGeom>
-          <a:noFill/>
-          <a:ln/>
-        </p:spPr>
-        <p:txBody>
-          <a:bodyPr wrap="square" lIns="0" tIns="0" rIns="0" bIns="0" rtlCol="0" anchor="ctr"/>
-          <a:lstStyle/>
-          <a:p>
-            <a:pPr algn="ctr" indent="0" marL="0">
-              <a:buNone/>
-            </a:pPr>
-            <a:r>
-              <a:rPr lang="en-US" sz="900" b="1" dirty="0">
-                <a:solidFill>
-                  <a:srgbClr val="9D174D"/>
-                </a:solidFill>
-                <a:latin typeface="Trebuchet MS" pitchFamily="34" charset="0"/>
-                <a:ea typeface="Trebuchet MS" pitchFamily="34" charset="-122"/>
-                <a:cs typeface="Trebuchet MS" pitchFamily="34" charset="-120"/>
-              </a:rPr>
-              <a:t>d</a:t>
+              <a:t>ay</a:t>
             </a:r>
             <a:endParaRPr lang="en-US" sz="900" dirty="0"/>
           </a:p>
@@ -34241,7 +34043,7 @@
                 <a:ea typeface="Trebuchet MS" pitchFamily="34" charset="-122"/>
                 <a:cs typeface="Trebuchet MS" pitchFamily="34" charset="-120"/>
               </a:rPr>
-              <a:t>-er</a:t>
+              <a:t>-s</a:t>
             </a:r>
             <a:endParaRPr lang="en-US" sz="1300" dirty="0"/>
           </a:p>
@@ -34394,7 +34196,7 @@
                 <a:ea typeface="Trebuchet MS" pitchFamily="34" charset="-122"/>
                 <a:cs typeface="Trebuchet MS" pitchFamily="34" charset="-120"/>
               </a:rPr>
-              <a:t>-s</a:t>
+              <a:t>-er</a:t>
             </a:r>
             <a:endParaRPr lang="en-US" sz="1300" dirty="0"/>
           </a:p>
@@ -34483,7 +34285,7 @@
                 <a:ea typeface="Trebuchet MS" pitchFamily="34" charset="-122"/>
                 <a:cs typeface="Trebuchet MS" pitchFamily="34" charset="-120"/>
               </a:rPr>
-              <a:t>term</a:t>
+              <a:t>summer</a:t>
             </a:r>
             <a:endParaRPr lang="en-US" sz="1300" dirty="0"/>
           </a:p>
@@ -34700,7 +34502,7 @@
                 <a:ea typeface="Trebuchet MS" pitchFamily="34" charset="-122"/>
                 <a:cs typeface="Trebuchet MS" pitchFamily="34" charset="-120"/>
               </a:rPr>
-              <a:t>-ing</a:t>
+              <a:t>-night</a:t>
             </a:r>
             <a:endParaRPr lang="en-US" sz="1300" dirty="0"/>
           </a:p>
@@ -34789,7 +34591,7 @@
                 <a:ea typeface="Trebuchet MS" pitchFamily="34" charset="-122"/>
                 <a:cs typeface="Trebuchet MS" pitchFamily="34" charset="-120"/>
               </a:rPr>
-              <a:t>air</a:t>
+              <a:t>term</a:t>
             </a:r>
             <a:endParaRPr lang="en-US" sz="1300" dirty="0"/>
           </a:p>
@@ -34853,7 +34655,7 @@
                 <a:ea typeface="Trebuchet MS" pitchFamily="34" charset="-122"/>
                 <a:cs typeface="Trebuchet MS" pitchFamily="34" charset="-120"/>
               </a:rPr>
-              <a:t>-night</a:t>
+              <a:t>-day</a:t>
             </a:r>
             <a:endParaRPr lang="en-US" sz="1300" dirty="0"/>
           </a:p>
@@ -35222,7 +35024,7 @@
                 <a:ea typeface="Trebuchet MS" pitchFamily="34" charset="-122"/>
                 <a:cs typeface="Trebuchet MS" pitchFamily="34" charset="-120"/>
               </a:rPr>
-              <a:t>midair</a:t>
+              <a:t>midsummer</a:t>
             </a:r>
             <a:endParaRPr lang="en-US" sz="1200" dirty="0"/>
           </a:p>
@@ -36608,7 +36410,7 @@
                 <a:ea typeface="Calibri" pitchFamily="34" charset="-122"/>
                 <a:cs typeface="Calibri" pitchFamily="34" charset="-120"/>
               </a:rPr>
-              <a:t>1.  The prefix 'mid-' means 'middle' or 'in the middle of'.</a:t>
+              <a:t>1.  Midnight means the beginning of the night.</a:t>
             </a:r>
             <a:endParaRPr lang="en-US" sz="1300" dirty="0"/>
           </a:p>
@@ -36631,11 +36433,11 @@
             </a:avLst>
           </a:prstGeom>
           <a:solidFill>
-            <a:srgbClr val="DCFCE7"/>
-          </a:solidFill>
-          <a:ln w="12700">
-            <a:solidFill>
-              <a:srgbClr val="16A34A"/>
+            <a:srgbClr val="FEE2E2"/>
+          </a:solidFill>
+          <a:ln w="12700">
+            <a:solidFill>
+              <a:srgbClr val="DC2626"/>
             </a:solidFill>
             <a:prstDash val="solid"/>
           </a:ln>
@@ -36668,13 +36470,13 @@
             <a:r>
               <a:rPr lang="en-US" sz="1100" b="1" dirty="0">
                 <a:solidFill>
-                  <a:srgbClr val="16A34A"/>
+                  <a:srgbClr val="DC2626"/>
                 </a:solidFill>
                 <a:latin typeface="Trebuchet MS" pitchFamily="34" charset="0"/>
                 <a:ea typeface="Trebuchet MS" pitchFamily="34" charset="-122"/>
                 <a:cs typeface="Trebuchet MS" pitchFamily="34" charset="-120"/>
               </a:rPr>
-              <a:t>TRUE</a:t>
+              <a:t>FALSE</a:t>
             </a:r>
             <a:endParaRPr lang="en-US" sz="1100" dirty="0"/>
           </a:p>
@@ -36747,7 +36549,7 @@
                 <a:ea typeface="Calibri" pitchFamily="34" charset="-122"/>
                 <a:cs typeface="Calibri" pitchFamily="34" charset="-120"/>
               </a:rPr>
-              <a:t>2.  The word 'midnight' means early in the morning.</a:t>
+              <a:t>2.  The prefix 'mid-' means fast or quick.</a:t>
             </a:r>
             <a:endParaRPr lang="en-US" sz="1300" dirty="0"/>
           </a:p>
@@ -36886,7 +36688,7 @@
                 <a:ea typeface="Calibri" pitchFamily="34" charset="-122"/>
                 <a:cs typeface="Calibri" pitchFamily="34" charset="-120"/>
               </a:rPr>
-              <a:t>3.  The prefix 'mid-' comes from Old English.</a:t>
+              <a:t>3.  The prefix 'mid-' means in the middle of something.</a:t>
             </a:r>
             <a:endParaRPr lang="en-US" sz="1300" dirty="0"/>
           </a:p>
@@ -37025,7 +36827,7 @@
                 <a:ea typeface="Calibri" pitchFamily="34" charset="-122"/>
                 <a:cs typeface="Calibri" pitchFamily="34" charset="-120"/>
               </a:rPr>
-              <a:t>4.  'Midway' means halfway or in the middle of a journey.</a:t>
+              <a:t>4.  The prefix 'mid-' comes from Old English.</a:t>
             </a:r>
             <a:endParaRPr lang="en-US" sz="1300" dirty="0"/>
           </a:p>
@@ -37164,7 +36966,7 @@
                 <a:ea typeface="Calibri" pitchFamily="34" charset="-122"/>
                 <a:cs typeface="Calibri" pitchFamily="34" charset="-120"/>
               </a:rPr>
-              <a:t>5.  The prefix 'mid-' means 'after' or 'following'.</a:t>
+              <a:t>5.  Midday refers to the middle of the day, around noon.</a:t>
             </a:r>
             <a:endParaRPr lang="en-US" sz="1300" dirty="0"/>
           </a:p>
@@ -37187,11 +36989,11 @@
             </a:avLst>
           </a:prstGeom>
           <a:solidFill>
-            <a:srgbClr val="FEE2E2"/>
-          </a:solidFill>
-          <a:ln w="12700">
-            <a:solidFill>
-              <a:srgbClr val="DC2626"/>
+            <a:srgbClr val="DCFCE7"/>
+          </a:solidFill>
+          <a:ln w="12700">
+            <a:solidFill>
+              <a:srgbClr val="16A34A"/>
             </a:solidFill>
             <a:prstDash val="solid"/>
           </a:ln>
@@ -37224,13 +37026,13 @@
             <a:r>
               <a:rPr lang="en-US" sz="1100" b="1" dirty="0">
                 <a:solidFill>
-                  <a:srgbClr val="DC2626"/>
+                  <a:srgbClr val="16A34A"/>
                 </a:solidFill>
                 <a:latin typeface="Trebuchet MS" pitchFamily="34" charset="0"/>
                 <a:ea typeface="Trebuchet MS" pitchFamily="34" charset="-122"/>
                 <a:cs typeface="Trebuchet MS" pitchFamily="34" charset="-120"/>
               </a:rPr>
-              <a:t>FALSE</a:t>
+              <a:t>TRUE</a:t>
             </a:r>
             <a:endParaRPr lang="en-US" sz="1100" dirty="0"/>
           </a:p>
@@ -38067,7 +37869,7 @@
                 <a:ea typeface="Trebuchet MS" pitchFamily="34" charset="-122"/>
                 <a:cs typeface="Trebuchet MS" pitchFamily="34" charset="-120"/>
               </a:rPr>
-              <a:t>midair</a:t>
+              <a:t>midsummer</a:t>
             </a:r>
             <a:endParaRPr lang="en-US" sz="1300" dirty="0"/>
           </a:p>
@@ -38920,7 +38722,7 @@
                 <a:ea typeface="Trebuchet MS" pitchFamily="34" charset="-122"/>
                 <a:cs typeface="Trebuchet MS" pitchFamily="34" charset="-120"/>
               </a:rPr>
-              <a:t>-er</a:t>
+              <a:t>-s</a:t>
             </a:r>
             <a:endParaRPr lang="en-US" sz="1300" dirty="0"/>
           </a:p>
@@ -39073,7 +38875,7 @@
                 <a:ea typeface="Trebuchet MS" pitchFamily="34" charset="-122"/>
                 <a:cs typeface="Trebuchet MS" pitchFamily="34" charset="-120"/>
               </a:rPr>
-              <a:t>-s</a:t>
+              <a:t>-er</a:t>
             </a:r>
             <a:endParaRPr lang="en-US" sz="1300" dirty="0"/>
           </a:p>
@@ -39162,7 +38964,7 @@
                 <a:ea typeface="Trebuchet MS" pitchFamily="34" charset="-122"/>
                 <a:cs typeface="Trebuchet MS" pitchFamily="34" charset="-120"/>
               </a:rPr>
-              <a:t>term</a:t>
+              <a:t>summer</a:t>
             </a:r>
             <a:endParaRPr lang="en-US" sz="1300" dirty="0"/>
           </a:p>
@@ -39379,7 +39181,7 @@
                 <a:ea typeface="Trebuchet MS" pitchFamily="34" charset="-122"/>
                 <a:cs typeface="Trebuchet MS" pitchFamily="34" charset="-120"/>
               </a:rPr>
-              <a:t>-ing</a:t>
+              <a:t>-night</a:t>
             </a:r>
             <a:endParaRPr lang="en-US" sz="1300" dirty="0"/>
           </a:p>
@@ -39468,7 +39270,7 @@
                 <a:ea typeface="Trebuchet MS" pitchFamily="34" charset="-122"/>
                 <a:cs typeface="Trebuchet MS" pitchFamily="34" charset="-120"/>
               </a:rPr>
-              <a:t>air</a:t>
+              <a:t>term</a:t>
             </a:r>
             <a:endParaRPr lang="en-US" sz="1300" dirty="0"/>
           </a:p>
@@ -39532,7 +39334,7 @@
                 <a:ea typeface="Trebuchet MS" pitchFamily="34" charset="-122"/>
                 <a:cs typeface="Trebuchet MS" pitchFamily="34" charset="-120"/>
               </a:rPr>
-              <a:t>-night</a:t>
+              <a:t>-day</a:t>
             </a:r>
             <a:endParaRPr lang="en-US" sz="1300" dirty="0"/>
           </a:p>
@@ -39868,7 +39670,7 @@
                 <a:ea typeface="Trebuchet MS" pitchFamily="34" charset="-122"/>
                 <a:cs typeface="Trebuchet MS" pitchFamily="34" charset="-120"/>
               </a:rPr>
-              <a:t>-er</a:t>
+              <a:t>-s</a:t>
             </a:r>
             <a:endParaRPr lang="en-US" sz="1300" dirty="0"/>
           </a:p>
@@ -40443,7 +40245,7 @@
                 <a:ea typeface="Calibri" pitchFamily="34" charset="-122"/>
                 <a:cs typeface="Calibri" pitchFamily="34" charset="-120"/>
               </a:rPr>
-              <a:t>The middle of winter, when it is usually the coldest time of year.</a:t>
+              <a:t>The middle of winter, when the days are shortest and coldest.</a:t>
             </a:r>
             <a:endParaRPr lang="en-US" sz="1200" dirty="0"/>
           </a:p>
@@ -40582,7 +40384,7 @@
                 <a:ea typeface="Calibri" pitchFamily="34" charset="-122"/>
                 <a:cs typeface="Calibri" pitchFamily="34" charset="-120"/>
               </a:rPr>
-              <a:t>The middle area of a sports field, like in soccer or AFL.</a:t>
+              <a:t>The middle area of a sports field, like in football or soccer.</a:t>
             </a:r>
             <a:endParaRPr lang="en-US" sz="1200" dirty="0"/>
           </a:p>
@@ -40721,7 +40523,7 @@
                 <a:ea typeface="Calibri" pitchFamily="34" charset="-122"/>
                 <a:cs typeface="Calibri" pitchFamily="34" charset="-120"/>
               </a:rPr>
-              <a:t>A point in the air, not on the ground and not at the top — in the middle of the air.</a:t>
+              <a:t>The middle of summer, when the days are longest.</a:t>
             </a:r>
             <a:endParaRPr lang="en-US" sz="1200" dirty="0"/>
           </a:p>
@@ -40933,7 +40735,7 @@
                 <a:ea typeface="Trebuchet MS" pitchFamily="34" charset="-122"/>
                 <a:cs typeface="Trebuchet MS" pitchFamily="34" charset="-120"/>
               </a:rPr>
-              <a:t>midair</a:t>
+              <a:t>midsummer</a:t>
             </a:r>
             <a:endParaRPr lang="en-US" sz="1200" dirty="0"/>
           </a:p>
@@ -40999,7 +40801,7 @@
                 <a:ea typeface="Calibri" pitchFamily="34" charset="-122"/>
                 <a:cs typeface="Calibri" pitchFamily="34" charset="-120"/>
               </a:rPr>
-              <a:t>Halfway between two places or points; in the middle of a journey.</a:t>
+              <a:t>Halfway between two places or points.</a:t>
             </a:r>
             <a:endParaRPr lang="en-US" sz="1200" dirty="0"/>
           </a:p>
@@ -41772,7 +41574,7 @@
                 <a:ea typeface="Calibri" pitchFamily="34" charset="-122"/>
                 <a:cs typeface="Calibri" pitchFamily="34" charset="-120"/>
               </a:rPr>
-              <a:t>The students had a snack at midday when the sun was high in the sky.</a:t>
+              <a:t>We stopped for a snack at midday when the sun was high in the sky.</a:t>
             </a:r>
             <a:endParaRPr lang="en-US" sz="1500" dirty="0"/>
           </a:p>
@@ -41936,7 +41738,7 @@
                 <a:ea typeface="Calibri" pitchFamily="34" charset="-122"/>
                 <a:cs typeface="Calibri" pitchFamily="34" charset="-120"/>
               </a:rPr>
-              <a:t>The footballer ran into the midfield to catch the ball during the game.</a:t>
+              <a:t>The footballer ran into the midfield to receive the pass from her teammate.</a:t>
             </a:r>
             <a:endParaRPr lang="en-US" sz="1500" dirty="0"/>
           </a:p>
@@ -42100,7 +41902,7 @@
                 <a:ea typeface="Calibri" pitchFamily="34" charset="-122"/>
                 <a:cs typeface="Calibri" pitchFamily="34" charset="-120"/>
               </a:rPr>
-              <a:t>At midnight, the whole house was dark and everyone was fast asleep.</a:t>
+              <a:t>At midnight, the whole house was silent and everyone was fast asleep.</a:t>
             </a:r>
             <a:endParaRPr lang="en-US" sz="1500" dirty="0"/>
           </a:p>

--- a/output/wordlabs-mid-prefix-3day.pptx
+++ b/output/wordlabs-mid-prefix-3day.pptx
@@ -4240,7 +4240,7 @@
                 <a:ea typeface="Calibri" pitchFamily="34" charset="-122"/>
                 <a:cs typeface="Calibri" pitchFamily="34" charset="-120"/>
               </a:rPr>
-              <a:t>"middle, in the middle"</a:t>
+              <a:t>"middle"</a:t>
             </a:r>
             <a:endParaRPr lang="en-US" sz="2200" dirty="0"/>
           </a:p>
@@ -4279,7 +4279,7 @@
                 <a:ea typeface="Calibri" pitchFamily="34" charset="-122"/>
                 <a:cs typeface="Calibri" pitchFamily="34" charset="-120"/>
               </a:rPr>
-              <a:t>Origin: Old English: midd</a:t>
+              <a:t>Origin: Prefix</a:t>
             </a:r>
             <a:endParaRPr lang="en-US" sz="1300" dirty="0"/>
           </a:p>
@@ -5288,7 +5288,7 @@
                 <a:ea typeface="Calibri" pitchFamily="34" charset="-122"/>
                 <a:cs typeface="Calibri" pitchFamily="34" charset="-120"/>
               </a:rPr>
-              <a:t>Word Labs  •  wordlabs.app  •  Prefix: 'mid-' = middle, in the middle</a:t>
+              <a:t>Word Labs  •  wordlabs.app  •  Prefix: 'mid-' = middle</a:t>
             </a:r>
             <a:endParaRPr lang="en-US" sz="800" dirty="0"/>
           </a:p>
@@ -5928,7 +5928,7 @@
                 <a:ea typeface="Calibri" pitchFamily="34" charset="-122"/>
                 <a:cs typeface="Calibri" pitchFamily="34" charset="-120"/>
               </a:rPr>
-              <a:t>Word Labs  •  wordlabs.app  •  Prefix: 'mid-' = middle, in the middle</a:t>
+              <a:t>Word Labs  •  wordlabs.app  •  Prefix: 'mid-' = middle</a:t>
             </a:r>
             <a:endParaRPr lang="en-US" sz="800" dirty="0"/>
           </a:p>
@@ -6040,7 +6040,7 @@
                 <a:ea typeface="Calibri" pitchFamily="34" charset="-122"/>
                 <a:cs typeface="Calibri" pitchFamily="34" charset="-120"/>
               </a:rPr>
-              <a:t>At </a:t>
+              <a:t>We have a spelling test </a:t>
             </a:r>
             <a:pPr algn="l" indent="0" marL="0">
               <a:buNone/>
@@ -6057,7 +6057,7 @@
                 <a:ea typeface="Calibri" pitchFamily="34" charset="-122"/>
                 <a:cs typeface="Calibri" pitchFamily="34" charset="-120"/>
               </a:rPr>
-              <a:t>midday</a:t>
+              <a:t>midweek</a:t>
             </a:r>
             <a:pPr algn="l" indent="0" marL="0">
               <a:buNone/>
@@ -6071,7 +6071,7 @@
                 <a:ea typeface="Calibri" pitchFamily="34" charset="-122"/>
                 <a:cs typeface="Calibri" pitchFamily="34" charset="-120"/>
               </a:rPr>
-              <a:t>, the </a:t>
+              <a:t>, usually on Wednesday. The </a:t>
             </a:r>
             <a:pPr algn="l" indent="0" marL="0">
               <a:buNone/>
@@ -6088,7 +6088,7 @@
                 <a:ea typeface="Calibri" pitchFamily="34" charset="-122"/>
                 <a:cs typeface="Calibri" pitchFamily="34" charset="-120"/>
               </a:rPr>
-              <a:t>midfielder</a:t>
+              <a:t>midfield</a:t>
             </a:r>
             <a:pPr algn="l" indent="0" marL="0">
               <a:buNone/>
@@ -6102,7 +6102,38 @@
                 <a:ea typeface="Calibri" pitchFamily="34" charset="-122"/>
                 <a:cs typeface="Calibri" pitchFamily="34" charset="-120"/>
               </a:rPr>
-              <a:t> passed the ball across the field.</a:t>
+              <a:t>er controlled the ball well in </a:t>
+            </a:r>
+            <a:pPr algn="l" indent="0" marL="0">
+              <a:buNone/>
+            </a:pPr>
+            <a:r>
+              <a:rPr lang="en-US" sz="1800" b="1" dirty="0">
+                <a:solidFill>
+                  <a:srgbClr val="0D9488"/>
+                </a:solidFill>
+                <a:highlight>
+                  <a:srgbClr val="CCFBF1"/>
+                </a:highlight>
+                <a:latin typeface="Calibri" pitchFamily="34" charset="0"/>
+                <a:ea typeface="Calibri" pitchFamily="34" charset="-122"/>
+                <a:cs typeface="Calibri" pitchFamily="34" charset="-120"/>
+              </a:rPr>
+              <a:t>midfield</a:t>
+            </a:r>
+            <a:pPr algn="l" indent="0" marL="0">
+              <a:buNone/>
+            </a:pPr>
+            <a:r>
+              <a:rPr lang="en-US" sz="1800" dirty="0">
+                <a:solidFill>
+                  <a:srgbClr val="0F172A"/>
+                </a:solidFill>
+                <a:latin typeface="Calibri" pitchFamily="34" charset="0"/>
+                <a:ea typeface="Calibri" pitchFamily="34" charset="-122"/>
+                <a:cs typeface="Calibri" pitchFamily="34" charset="-120"/>
+              </a:rPr>
+              <a:t> before passing it forward.</a:t>
             </a:r>
             <a:endParaRPr lang="en-US" sz="1800" dirty="0"/>
           </a:p>
@@ -6257,7 +6288,7 @@
                 <a:ea typeface="Trebuchet MS" pitchFamily="34" charset="-122"/>
                 <a:cs typeface="Trebuchet MS" pitchFamily="34" charset="-120"/>
               </a:rPr>
-              <a:t>midday</a:t>
+              <a:t>midweek</a:t>
             </a:r>
             <a:endParaRPr lang="en-US" sz="1400" dirty="0"/>
           </a:p>
@@ -6385,7 +6416,7 @@
                 <a:ea typeface="Trebuchet MS" pitchFamily="34" charset="-122"/>
                 <a:cs typeface="Trebuchet MS" pitchFamily="34" charset="-120"/>
               </a:rPr>
-              <a:t>midfielder</a:t>
+              <a:t>midfield</a:t>
             </a:r>
             <a:endParaRPr lang="en-US" sz="1400" dirty="0"/>
           </a:p>
@@ -6716,7 +6747,7 @@
                 <a:ea typeface="Calibri" pitchFamily="34" charset="-122"/>
                 <a:cs typeface="Calibri" pitchFamily="34" charset="-120"/>
               </a:rPr>
-              <a:t>Word Labs  •  wordlabs.app  •  Prefix: 'mid-' = middle, in the middle</a:t>
+              <a:t>Word Labs  •  wordlabs.app  •  Prefix: 'mid-' = middle</a:t>
             </a:r>
             <a:endParaRPr lang="en-US" sz="800" dirty="0"/>
           </a:p>
@@ -6855,7 +6886,7 @@
                 <a:ea typeface="Trebuchet MS" pitchFamily="34" charset="-122"/>
                 <a:cs typeface="Trebuchet MS" pitchFamily="34" charset="-120"/>
               </a:rPr>
-              <a:t>midday</a:t>
+              <a:t>midweek</a:t>
             </a:r>
             <a:endParaRPr lang="en-US" sz="2800" dirty="0"/>
           </a:p>
@@ -7543,7 +7574,7 @@
                 <a:ea typeface="Calibri" pitchFamily="34" charset="-122"/>
                 <a:cs typeface="Calibri" pitchFamily="34" charset="-120"/>
               </a:rPr>
-              <a:t>Word Labs  •  wordlabs.app  •  Prefix: 'mid-' = middle, in the middle</a:t>
+              <a:t>Word Labs  •  wordlabs.app  •  Prefix: 'mid-' = middle</a:t>
             </a:r>
             <a:endParaRPr lang="en-US" sz="800" dirty="0"/>
           </a:p>
@@ -7682,7 +7713,7 @@
                 <a:ea typeface="Trebuchet MS" pitchFamily="34" charset="-122"/>
                 <a:cs typeface="Trebuchet MS" pitchFamily="34" charset="-120"/>
               </a:rPr>
-              <a:t>midday</a:t>
+              <a:t>midweek</a:t>
             </a:r>
             <a:endParaRPr lang="en-US" sz="2800" dirty="0"/>
           </a:p>
@@ -7933,7 +7964,7 @@
                 <a:ea typeface="Trebuchet MS" pitchFamily="34" charset="-122"/>
                 <a:cs typeface="Trebuchet MS" pitchFamily="34" charset="-120"/>
               </a:rPr>
-              <a:t>day</a:t>
+              <a:t>week</a:t>
             </a:r>
             <a:endParaRPr lang="en-US" sz="1300" dirty="0"/>
           </a:p>
@@ -7972,7 +8003,7 @@
                 <a:ea typeface="Calibri" pitchFamily="34" charset="-122"/>
                 <a:cs typeface="Calibri" pitchFamily="34" charset="-120"/>
               </a:rPr>
-              <a:t>the day</a:t>
+              <a:t>a period of seven days</a:t>
             </a:r>
             <a:endParaRPr lang="en-US" sz="850" dirty="0"/>
           </a:p>
@@ -8528,7 +8559,7 @@
                 <a:ea typeface="Calibri" pitchFamily="34" charset="-122"/>
                 <a:cs typeface="Calibri" pitchFamily="34" charset="-120"/>
               </a:rPr>
-              <a:t>Word Labs  •  wordlabs.app  •  Prefix: 'mid-' = middle, in the middle</a:t>
+              <a:t>Word Labs  •  wordlabs.app  •  Prefix: 'mid-' = middle</a:t>
             </a:r>
             <a:endParaRPr lang="en-US" sz="800" dirty="0"/>
           </a:p>
@@ -8667,7 +8698,7 @@
                 <a:ea typeface="Trebuchet MS" pitchFamily="34" charset="-122"/>
                 <a:cs typeface="Trebuchet MS" pitchFamily="34" charset="-120"/>
               </a:rPr>
-              <a:t>midday</a:t>
+              <a:t>midweek</a:t>
             </a:r>
             <a:endParaRPr lang="en-US" sz="2800" dirty="0"/>
           </a:p>
@@ -8918,7 +8949,7 @@
                 <a:ea typeface="Trebuchet MS" pitchFamily="34" charset="-122"/>
                 <a:cs typeface="Trebuchet MS" pitchFamily="34" charset="-120"/>
               </a:rPr>
-              <a:t>day</a:t>
+              <a:t>week</a:t>
             </a:r>
             <a:endParaRPr lang="en-US" sz="1300" dirty="0"/>
           </a:p>
@@ -8957,7 +8988,7 @@
                 <a:ea typeface="Calibri" pitchFamily="34" charset="-122"/>
                 <a:cs typeface="Calibri" pitchFamily="34" charset="-120"/>
               </a:rPr>
-              <a:t>the day</a:t>
+              <a:t>a period of seven days</a:t>
             </a:r>
             <a:endParaRPr lang="en-US" sz="850" dirty="0"/>
           </a:p>
@@ -9221,7 +9252,7 @@
                 <a:ea typeface="Trebuchet MS" pitchFamily="34" charset="-122"/>
                 <a:cs typeface="Trebuchet MS" pitchFamily="34" charset="-120"/>
               </a:rPr>
-              <a:t>day</a:t>
+              <a:t>week</a:t>
             </a:r>
             <a:endParaRPr lang="en-US" sz="1400" dirty="0"/>
           </a:p>
@@ -9645,7 +9676,7 @@
                 <a:ea typeface="Calibri" pitchFamily="34" charset="-122"/>
                 <a:cs typeface="Calibri" pitchFamily="34" charset="-120"/>
               </a:rPr>
-              <a:t>Word Labs  •  wordlabs.app  •  Prefix: 'mid-' = middle, in the middle</a:t>
+              <a:t>Word Labs  •  wordlabs.app  •  Prefix: 'mid-' = middle</a:t>
             </a:r>
             <a:endParaRPr lang="en-US" sz="800" dirty="0"/>
           </a:p>
@@ -9784,7 +9815,7 @@
                 <a:ea typeface="Trebuchet MS" pitchFamily="34" charset="-122"/>
                 <a:cs typeface="Trebuchet MS" pitchFamily="34" charset="-120"/>
               </a:rPr>
-              <a:t>midday</a:t>
+              <a:t>midweek</a:t>
             </a:r>
             <a:endParaRPr lang="en-US" sz="2800" dirty="0"/>
           </a:p>
@@ -10035,7 +10066,7 @@
                 <a:ea typeface="Trebuchet MS" pitchFamily="34" charset="-122"/>
                 <a:cs typeface="Trebuchet MS" pitchFamily="34" charset="-120"/>
               </a:rPr>
-              <a:t>day</a:t>
+              <a:t>week</a:t>
             </a:r>
             <a:endParaRPr lang="en-US" sz="1300" dirty="0"/>
           </a:p>
@@ -10074,7 +10105,7 @@
                 <a:ea typeface="Calibri" pitchFamily="34" charset="-122"/>
                 <a:cs typeface="Calibri" pitchFamily="34" charset="-120"/>
               </a:rPr>
-              <a:t>the day</a:t>
+              <a:t>a period of seven days</a:t>
             </a:r>
             <a:endParaRPr lang="en-US" sz="850" dirty="0"/>
           </a:p>
@@ -10338,7 +10369,7 @@
                 <a:ea typeface="Trebuchet MS" pitchFamily="34" charset="-122"/>
                 <a:cs typeface="Trebuchet MS" pitchFamily="34" charset="-120"/>
               </a:rPr>
-              <a:t>day</a:t>
+              <a:t>week</a:t>
             </a:r>
             <a:endParaRPr lang="en-US" sz="1400" dirty="0"/>
           </a:p>
@@ -10445,7 +10476,7 @@
         </p:nvSpPr>
         <p:spPr>
           <a:xfrm>
-            <a:off x="2427732" y="4169664"/>
+            <a:off x="2254649" y="4169664"/>
             <a:ext cx="685800" cy="475488"/>
           </a:xfrm>
           <a:prstGeom prst="rect">
@@ -10472,7 +10503,7 @@
         </p:nvSpPr>
         <p:spPr>
           <a:xfrm>
-            <a:off x="2427732" y="4169664"/>
+            <a:off x="2254649" y="4169664"/>
             <a:ext cx="685800" cy="475488"/>
           </a:xfrm>
           <a:prstGeom prst="rect">
@@ -10511,7 +10542,7 @@
         </p:nvSpPr>
         <p:spPr>
           <a:xfrm>
-            <a:off x="3639312" y="4169664"/>
+            <a:off x="3293146" y="4169664"/>
             <a:ext cx="685800" cy="475488"/>
           </a:xfrm>
           <a:prstGeom prst="rect">
@@ -10538,7 +10569,7 @@
         </p:nvSpPr>
         <p:spPr>
           <a:xfrm>
-            <a:off x="3639312" y="4169664"/>
+            <a:off x="3293146" y="4169664"/>
             <a:ext cx="685800" cy="475488"/>
           </a:xfrm>
           <a:prstGeom prst="rect">
@@ -10577,7 +10608,7 @@
         </p:nvSpPr>
         <p:spPr>
           <a:xfrm>
-            <a:off x="4850892" y="4169664"/>
+            <a:off x="4331643" y="4169664"/>
             <a:ext cx="685800" cy="475488"/>
           </a:xfrm>
           <a:prstGeom prst="rect">
@@ -10604,7 +10635,7 @@
         </p:nvSpPr>
         <p:spPr>
           <a:xfrm>
-            <a:off x="4850892" y="4169664"/>
+            <a:off x="4331643" y="4169664"/>
             <a:ext cx="685800" cy="475488"/>
           </a:xfrm>
           <a:prstGeom prst="rect">
@@ -10643,7 +10674,7 @@
         </p:nvSpPr>
         <p:spPr>
           <a:xfrm>
-            <a:off x="6062472" y="4169664"/>
+            <a:off x="5370141" y="4169664"/>
             <a:ext cx="685800" cy="475488"/>
           </a:xfrm>
           <a:prstGeom prst="rect">
@@ -10670,7 +10701,7 @@
         </p:nvSpPr>
         <p:spPr>
           <a:xfrm>
-            <a:off x="6062472" y="4169664"/>
+            <a:off x="5370141" y="4169664"/>
             <a:ext cx="685800" cy="475488"/>
           </a:xfrm>
           <a:prstGeom prst="rect">
@@ -10695,7 +10726,7 @@
                 <a:ea typeface="Trebuchet MS" pitchFamily="34" charset="-122"/>
                 <a:cs typeface="Trebuchet MS" pitchFamily="34" charset="-120"/>
               </a:rPr>
-              <a:t>d</a:t>
+              <a:t>w</a:t>
             </a:r>
             <a:endParaRPr lang="en-US" sz="900" dirty="0"/>
           </a:p>
@@ -10709,7 +10740,7 @@
         </p:nvSpPr>
         <p:spPr>
           <a:xfrm>
-            <a:off x="7274052" y="4169664"/>
+            <a:off x="6408638" y="4169664"/>
             <a:ext cx="685800" cy="475488"/>
           </a:xfrm>
           <a:prstGeom prst="rect">
@@ -10736,7 +10767,7 @@
         </p:nvSpPr>
         <p:spPr>
           <a:xfrm>
-            <a:off x="7274052" y="4169664"/>
+            <a:off x="6408638" y="4169664"/>
             <a:ext cx="685800" cy="475488"/>
           </a:xfrm>
           <a:prstGeom prst="rect">
@@ -10761,7 +10792,73 @@
                 <a:ea typeface="Trebuchet MS" pitchFamily="34" charset="-122"/>
                 <a:cs typeface="Trebuchet MS" pitchFamily="34" charset="-120"/>
               </a:rPr>
-              <a:t>ay</a:t>
+              <a:t>ee</a:t>
+            </a:r>
+            <a:endParaRPr lang="en-US" sz="900" dirty="0"/>
+          </a:p>
+        </p:txBody>
+      </p:sp>
+      <p:sp>
+        <p:nvSpPr>
+          <p:cNvPr id="43" name="Shape 41"/>
+          <p:cNvSpPr/>
+          <p:nvPr/>
+        </p:nvSpPr>
+        <p:spPr>
+          <a:xfrm>
+            <a:off x="7447135" y="4169664"/>
+            <a:ext cx="685800" cy="475488"/>
+          </a:xfrm>
+          <a:prstGeom prst="rect">
+            <a:avLst>
+              <a:gd name="adj" fmla="val 7692"/>
+            </a:avLst>
+          </a:prstGeom>
+          <a:solidFill>
+            <a:srgbClr val="FFFFFF"/>
+          </a:solidFill>
+          <a:ln w="12700">
+            <a:solidFill>
+              <a:srgbClr val="DB2777"/>
+            </a:solidFill>
+            <a:prstDash val="solid"/>
+          </a:ln>
+        </p:spPr>
+      </p:sp>
+      <p:sp>
+        <p:nvSpPr>
+          <p:cNvPr id="44" name="Text 42"/>
+          <p:cNvSpPr/>
+          <p:nvPr/>
+        </p:nvSpPr>
+        <p:spPr>
+          <a:xfrm>
+            <a:off x="7447135" y="4169664"/>
+            <a:ext cx="685800" cy="475488"/>
+          </a:xfrm>
+          <a:prstGeom prst="rect">
+            <a:avLst/>
+          </a:prstGeom>
+          <a:noFill/>
+          <a:ln/>
+        </p:spPr>
+        <p:txBody>
+          <a:bodyPr wrap="square" lIns="0" tIns="0" rIns="0" bIns="0" rtlCol="0" anchor="ctr"/>
+          <a:lstStyle/>
+          <a:p>
+            <a:pPr algn="ctr" indent="0" marL="0">
+              <a:buNone/>
+            </a:pPr>
+            <a:r>
+              <a:rPr lang="en-US" sz="900" b="1" dirty="0">
+                <a:solidFill>
+                  <a:srgbClr val="9D174D"/>
+                </a:solidFill>
+                <a:latin typeface="Trebuchet MS" pitchFamily="34" charset="0"/>
+                <a:ea typeface="Trebuchet MS" pitchFamily="34" charset="-122"/>
+                <a:cs typeface="Trebuchet MS" pitchFamily="34" charset="-120"/>
+              </a:rPr>
+              <a:t>k</a:t>
             </a:r>
             <a:endParaRPr lang="en-US" sz="900" dirty="0"/>
           </a:p>
@@ -11053,7 +11150,7 @@
                 <a:ea typeface="Calibri" pitchFamily="34" charset="-122"/>
                 <a:cs typeface="Calibri" pitchFamily="34" charset="-120"/>
               </a:rPr>
-              <a:t>Word Labs  •  wordlabs.app  •  Prefix: 'mid-' = middle, in the middle</a:t>
+              <a:t>Word Labs  •  wordlabs.app  •  Prefix: 'mid-' = middle</a:t>
             </a:r>
             <a:endParaRPr lang="en-US" sz="800" dirty="0"/>
           </a:p>
@@ -11192,7 +11289,7 @@
                 <a:ea typeface="Trebuchet MS" pitchFamily="34" charset="-122"/>
                 <a:cs typeface="Trebuchet MS" pitchFamily="34" charset="-120"/>
               </a:rPr>
-              <a:t>midfielder</a:t>
+              <a:t>midfield</a:t>
             </a:r>
             <a:endParaRPr lang="en-US" sz="2800" dirty="0"/>
           </a:p>
@@ -11880,7 +11977,7 @@
                 <a:ea typeface="Calibri" pitchFamily="34" charset="-122"/>
                 <a:cs typeface="Calibri" pitchFamily="34" charset="-120"/>
               </a:rPr>
-              <a:t>Word Labs  •  wordlabs.app  •  Prefix: 'mid-' = middle, in the middle</a:t>
+              <a:t>Word Labs  •  wordlabs.app  •  Prefix: 'mid-' = middle</a:t>
             </a:r>
             <a:endParaRPr lang="en-US" sz="800" dirty="0"/>
           </a:p>
@@ -12019,7 +12116,7 @@
                 <a:ea typeface="Trebuchet MS" pitchFamily="34" charset="-122"/>
                 <a:cs typeface="Trebuchet MS" pitchFamily="34" charset="-120"/>
               </a:rPr>
-              <a:t>midfielder</a:t>
+              <a:t>midfield</a:t>
             </a:r>
             <a:endParaRPr lang="en-US" sz="2800" dirty="0"/>
           </a:p>
@@ -12099,7 +12196,7 @@
         </p:nvSpPr>
         <p:spPr>
           <a:xfrm>
-            <a:off x="2221992" y="2258568"/>
+            <a:off x="2938272" y="2258568"/>
             <a:ext cx="1828800" cy="292608"/>
           </a:xfrm>
           <a:prstGeom prst="rect">
@@ -12133,7 +12230,7 @@
         </p:nvSpPr>
         <p:spPr>
           <a:xfrm>
-            <a:off x="2221992" y="2258568"/>
+            <a:off x="2938272" y="2258568"/>
             <a:ext cx="1828800" cy="292608"/>
           </a:xfrm>
           <a:prstGeom prst="rect">
@@ -12172,7 +12269,7 @@
         </p:nvSpPr>
         <p:spPr>
           <a:xfrm>
-            <a:off x="2221992" y="2569464"/>
+            <a:off x="2938272" y="2569464"/>
             <a:ext cx="1828800" cy="201168"/>
           </a:xfrm>
           <a:prstGeom prst="rect">
@@ -12211,7 +12308,7 @@
         </p:nvSpPr>
         <p:spPr>
           <a:xfrm>
-            <a:off x="4370832" y="2258568"/>
+            <a:off x="5803392" y="2258568"/>
             <a:ext cx="1828800" cy="292608"/>
           </a:xfrm>
           <a:prstGeom prst="rect">
@@ -12245,7 +12342,7 @@
         </p:nvSpPr>
         <p:spPr>
           <a:xfrm>
-            <a:off x="4370832" y="2258568"/>
+            <a:off x="5803392" y="2258568"/>
             <a:ext cx="1828800" cy="292608"/>
           </a:xfrm>
           <a:prstGeom prst="rect">
@@ -12284,7 +12381,7 @@
         </p:nvSpPr>
         <p:spPr>
           <a:xfrm>
-            <a:off x="4370832" y="2569464"/>
+            <a:off x="5803392" y="2569464"/>
             <a:ext cx="1828800" cy="201168"/>
           </a:xfrm>
           <a:prstGeom prst="rect">
@@ -12309,7 +12406,7 @@
                 <a:ea typeface="Calibri" pitchFamily="34" charset="-122"/>
                 <a:cs typeface="Calibri" pitchFamily="34" charset="-120"/>
               </a:rPr>
-              <a:t>open area</a:t>
+              <a:t>an open area of land</a:t>
             </a:r>
             <a:endParaRPr lang="en-US" sz="850" dirty="0"/>
           </a:p>
@@ -12323,30 +12420,23 @@
         </p:nvSpPr>
         <p:spPr>
           <a:xfrm>
-            <a:off x="6519672" y="2258568"/>
-            <a:ext cx="1828800" cy="292608"/>
+            <a:off x="365760" y="3273552"/>
+            <a:ext cx="1371600" cy="658368"/>
           </a:xfrm>
           <a:prstGeom prst="rect">
             <a:avLst>
-              <a:gd name="adj" fmla="val 25000"/>
+              <a:gd name="adj" fmla="val 8333"/>
             </a:avLst>
           </a:prstGeom>
           <a:solidFill>
-            <a:srgbClr val="FCE7F3"/>
-          </a:solidFill>
-          <a:ln w="19050">
-            <a:solidFill>
-              <a:srgbClr val="DB2777"/>
-            </a:solidFill>
-            <a:prstDash val="solid"/>
-          </a:ln>
-          <a:effectLst>
-            <a:outerShdw sx="100000" sy="100000" kx="0" ky="0" algn="bl" rotWithShape="0" blurRad="101600" dist="38100" dir="8100000">
-              <a:srgbClr val="000000">
-                <a:alpha val="12000"/>
-              </a:srgbClr>
-            </a:outerShdw>
-          </a:effectLst>
+            <a:srgbClr val="E2E8F0"/>
+          </a:solidFill>
+          <a:ln w="12700">
+            <a:solidFill>
+              <a:srgbClr val="E2E8F0"/>
+            </a:solidFill>
+            <a:prstDash val="solid"/>
+          </a:ln>
         </p:spPr>
       </p:sp>
       <p:sp>
@@ -12357,8 +12447,8 @@
         </p:nvSpPr>
         <p:spPr>
           <a:xfrm>
-            <a:off x="6519672" y="2258568"/>
-            <a:ext cx="1828800" cy="292608"/>
+            <a:off x="365760" y="3273552"/>
+            <a:ext cx="1371600" cy="658368"/>
           </a:xfrm>
           <a:prstGeom prst="rect">
             <a:avLst/>
@@ -12374,73 +12464,100 @@
               <a:buNone/>
             </a:pPr>
             <a:r>
-              <a:rPr lang="en-US" sz="1300" b="1" dirty="0">
-                <a:solidFill>
-                  <a:srgbClr val="9D174D"/>
+              <a:rPr lang="en-US" sz="1100" b="1" dirty="0">
+                <a:solidFill>
+                  <a:srgbClr val="475569"/>
                 </a:solidFill>
                 <a:latin typeface="Trebuchet MS" pitchFamily="34" charset="0"/>
                 <a:ea typeface="Trebuchet MS" pitchFamily="34" charset="-122"/>
                 <a:cs typeface="Trebuchet MS" pitchFamily="34" charset="-120"/>
               </a:rPr>
-              <a:t>er</a:t>
-            </a:r>
-            <a:endParaRPr lang="en-US" sz="1300" dirty="0"/>
-          </a:p>
-        </p:txBody>
-      </p:sp>
-      <p:sp>
-        <p:nvSpPr>
-          <p:cNvPr id="24" name="Text 22"/>
-          <p:cNvSpPr/>
-          <p:nvPr/>
-        </p:nvSpPr>
-        <p:spPr>
-          <a:xfrm>
-            <a:off x="6519672" y="2569464"/>
-            <a:ext cx="1828800" cy="201168"/>
-          </a:xfrm>
-          <a:prstGeom prst="rect">
-            <a:avLst/>
-          </a:prstGeom>
-          <a:noFill/>
-          <a:ln/>
-        </p:spPr>
-        <p:txBody>
-          <a:bodyPr wrap="square" lIns="0" tIns="0" rIns="0" bIns="0" rtlCol="0" anchor="t"/>
-          <a:lstStyle/>
-          <a:p>
-            <a:pPr algn="ctr" indent="0" marL="0">
-              <a:buNone/>
-            </a:pPr>
-            <a:r>
-              <a:rPr lang="en-US" sz="850" dirty="0">
-                <a:solidFill>
-                  <a:srgbClr val="475569"/>
+              <a:t>Syllables</a:t>
+            </a:r>
+            <a:endParaRPr lang="en-US" sz="1100" dirty="0"/>
+          </a:p>
+        </p:txBody>
+      </p:sp>
+      <p:sp>
+        <p:nvSpPr>
+          <p:cNvPr id="24" name="Shape 22"/>
+          <p:cNvSpPr/>
+          <p:nvPr/>
+        </p:nvSpPr>
+        <p:spPr>
+          <a:xfrm>
+            <a:off x="1874520" y="3273552"/>
+            <a:ext cx="6903720" cy="658368"/>
+          </a:xfrm>
+          <a:prstGeom prst="rect">
+            <a:avLst>
+              <a:gd name="adj" fmla="val 8333"/>
+            </a:avLst>
+          </a:prstGeom>
+          <a:solidFill>
+            <a:srgbClr val="F8FAFC"/>
+          </a:solidFill>
+          <a:ln w="12700">
+            <a:solidFill>
+              <a:srgbClr val="E2E8F0"/>
+            </a:solidFill>
+            <a:prstDash val="dash"/>
+          </a:ln>
+        </p:spPr>
+      </p:sp>
+      <p:sp>
+        <p:nvSpPr>
+          <p:cNvPr id="25" name="Text 23"/>
+          <p:cNvSpPr/>
+          <p:nvPr/>
+        </p:nvSpPr>
+        <p:spPr>
+          <a:xfrm>
+            <a:off x="1874520" y="3273552"/>
+            <a:ext cx="6903720" cy="658368"/>
+          </a:xfrm>
+          <a:prstGeom prst="rect">
+            <a:avLst/>
+          </a:prstGeom>
+          <a:noFill/>
+          <a:ln/>
+        </p:spPr>
+        <p:txBody>
+          <a:bodyPr wrap="square" rtlCol="0" anchor="ctr"/>
+          <a:lstStyle/>
+          <a:p>
+            <a:pPr algn="ctr" indent="0" marL="0">
+              <a:buNone/>
+            </a:pPr>
+            <a:r>
+              <a:rPr lang="en-US" sz="1100" i="1" dirty="0">
+                <a:solidFill>
+                  <a:srgbClr val="CBD5E1"/>
                 </a:solidFill>
                 <a:latin typeface="Calibri" pitchFamily="34" charset="0"/>
                 <a:ea typeface="Calibri" pitchFamily="34" charset="-122"/>
                 <a:cs typeface="Calibri" pitchFamily="34" charset="-120"/>
               </a:rPr>
-              <a:t>a person who does</a:t>
-            </a:r>
-            <a:endParaRPr lang="en-US" sz="850" dirty="0"/>
-          </a:p>
-        </p:txBody>
-      </p:sp>
-      <p:sp>
-        <p:nvSpPr>
-          <p:cNvPr id="25" name="Shape 23"/>
-          <p:cNvSpPr/>
-          <p:nvPr/>
-        </p:nvSpPr>
-        <p:spPr>
-          <a:xfrm>
-            <a:off x="365760" y="3273552"/>
-            <a:ext cx="1371600" cy="658368"/>
+              <a:t>Write here...</a:t>
+            </a:r>
+            <a:endParaRPr lang="en-US" sz="1100" dirty="0"/>
+          </a:p>
+        </p:txBody>
+      </p:sp>
+      <p:sp>
+        <p:nvSpPr>
+          <p:cNvPr id="26" name="Shape 24"/>
+          <p:cNvSpPr/>
+          <p:nvPr/>
+        </p:nvSpPr>
+        <p:spPr>
+          <a:xfrm>
+            <a:off x="365760" y="4096512"/>
+            <a:ext cx="1371600" cy="804672"/>
           </a:xfrm>
           <a:prstGeom prst="rect">
             <a:avLst>
-              <a:gd name="adj" fmla="val 8333"/>
+              <a:gd name="adj" fmla="val 6818"/>
             </a:avLst>
           </a:prstGeom>
           <a:solidFill>
@@ -12456,14 +12573,14 @@
       </p:sp>
       <p:sp>
         <p:nvSpPr>
-          <p:cNvPr id="26" name="Text 24"/>
-          <p:cNvSpPr/>
-          <p:nvPr/>
-        </p:nvSpPr>
-        <p:spPr>
-          <a:xfrm>
-            <a:off x="365760" y="3273552"/>
-            <a:ext cx="1371600" cy="658368"/>
+          <p:cNvPr id="27" name="Text 25"/>
+          <p:cNvSpPr/>
+          <p:nvPr/>
+        </p:nvSpPr>
+        <p:spPr>
+          <a:xfrm>
+            <a:off x="365760" y="4096512"/>
+            <a:ext cx="1371600" cy="804672"/>
           </a:xfrm>
           <a:prstGeom prst="rect">
             <a:avLst/>
@@ -12487,7 +12604,7 @@
                 <a:ea typeface="Trebuchet MS" pitchFamily="34" charset="-122"/>
                 <a:cs typeface="Trebuchet MS" pitchFamily="34" charset="-120"/>
               </a:rPr>
-              <a:t>Syllables</a:t>
+              <a:t>Phonemes</a:t>
             </a:r>
             <a:endParaRPr lang="en-US" sz="1100" dirty="0"/>
           </a:p>
@@ -12495,80 +12612,14 @@
       </p:sp>
       <p:sp>
         <p:nvSpPr>
-          <p:cNvPr id="27" name="Shape 25"/>
-          <p:cNvSpPr/>
-          <p:nvPr/>
-        </p:nvSpPr>
-        <p:spPr>
-          <a:xfrm>
-            <a:off x="1874520" y="3273552"/>
-            <a:ext cx="6903720" cy="658368"/>
-          </a:xfrm>
-          <a:prstGeom prst="rect">
-            <a:avLst>
-              <a:gd name="adj" fmla="val 8333"/>
-            </a:avLst>
-          </a:prstGeom>
-          <a:solidFill>
-            <a:srgbClr val="F8FAFC"/>
-          </a:solidFill>
-          <a:ln w="12700">
-            <a:solidFill>
-              <a:srgbClr val="E2E8F0"/>
-            </a:solidFill>
-            <a:prstDash val="dash"/>
-          </a:ln>
-        </p:spPr>
-      </p:sp>
-      <p:sp>
-        <p:nvSpPr>
-          <p:cNvPr id="28" name="Text 26"/>
-          <p:cNvSpPr/>
-          <p:nvPr/>
-        </p:nvSpPr>
-        <p:spPr>
-          <a:xfrm>
-            <a:off x="1874520" y="3273552"/>
-            <a:ext cx="6903720" cy="658368"/>
-          </a:xfrm>
-          <a:prstGeom prst="rect">
-            <a:avLst/>
-          </a:prstGeom>
-          <a:noFill/>
-          <a:ln/>
-        </p:spPr>
-        <p:txBody>
-          <a:bodyPr wrap="square" rtlCol="0" anchor="ctr"/>
-          <a:lstStyle/>
-          <a:p>
-            <a:pPr algn="ctr" indent="0" marL="0">
-              <a:buNone/>
-            </a:pPr>
-            <a:r>
-              <a:rPr lang="en-US" sz="1100" i="1" dirty="0">
-                <a:solidFill>
-                  <a:srgbClr val="CBD5E1"/>
-                </a:solidFill>
-                <a:latin typeface="Calibri" pitchFamily="34" charset="0"/>
-                <a:ea typeface="Calibri" pitchFamily="34" charset="-122"/>
-                <a:cs typeface="Calibri" pitchFamily="34" charset="-120"/>
-              </a:rPr>
-              <a:t>Write here...</a:t>
-            </a:r>
-            <a:endParaRPr lang="en-US" sz="1100" dirty="0"/>
-          </a:p>
-        </p:txBody>
-      </p:sp>
-      <p:sp>
-        <p:nvSpPr>
-          <p:cNvPr id="29" name="Shape 27"/>
-          <p:cNvSpPr/>
-          <p:nvPr/>
-        </p:nvSpPr>
-        <p:spPr>
-          <a:xfrm>
-            <a:off x="365760" y="4096512"/>
-            <a:ext cx="1371600" cy="804672"/>
+          <p:cNvPr id="28" name="Shape 26"/>
+          <p:cNvSpPr/>
+          <p:nvPr/>
+        </p:nvSpPr>
+        <p:spPr>
+          <a:xfrm>
+            <a:off x="1874520" y="4096512"/>
+            <a:ext cx="6903720" cy="804672"/>
           </a:xfrm>
           <a:prstGeom prst="rect">
             <a:avLst>
@@ -12576,85 +12627,19 @@
             </a:avLst>
           </a:prstGeom>
           <a:solidFill>
-            <a:srgbClr val="E2E8F0"/>
+            <a:srgbClr val="F8FAFC"/>
           </a:solidFill>
           <a:ln w="12700">
             <a:solidFill>
               <a:srgbClr val="E2E8F0"/>
             </a:solidFill>
-            <a:prstDash val="solid"/>
-          </a:ln>
-        </p:spPr>
-      </p:sp>
-      <p:sp>
-        <p:nvSpPr>
-          <p:cNvPr id="30" name="Text 28"/>
-          <p:cNvSpPr/>
-          <p:nvPr/>
-        </p:nvSpPr>
-        <p:spPr>
-          <a:xfrm>
-            <a:off x="365760" y="4096512"/>
-            <a:ext cx="1371600" cy="804672"/>
-          </a:xfrm>
-          <a:prstGeom prst="rect">
-            <a:avLst/>
-          </a:prstGeom>
-          <a:noFill/>
-          <a:ln/>
-        </p:spPr>
-        <p:txBody>
-          <a:bodyPr wrap="square" lIns="0" tIns="0" rIns="0" bIns="0" rtlCol="0" anchor="ctr"/>
-          <a:lstStyle/>
-          <a:p>
-            <a:pPr algn="ctr" indent="0" marL="0">
-              <a:buNone/>
-            </a:pPr>
-            <a:r>
-              <a:rPr lang="en-US" sz="1100" b="1" dirty="0">
-                <a:solidFill>
-                  <a:srgbClr val="475569"/>
-                </a:solidFill>
-                <a:latin typeface="Trebuchet MS" pitchFamily="34" charset="0"/>
-                <a:ea typeface="Trebuchet MS" pitchFamily="34" charset="-122"/>
-                <a:cs typeface="Trebuchet MS" pitchFamily="34" charset="-120"/>
-              </a:rPr>
-              <a:t>Phonemes</a:t>
-            </a:r>
-            <a:endParaRPr lang="en-US" sz="1100" dirty="0"/>
-          </a:p>
-        </p:txBody>
-      </p:sp>
-      <p:sp>
-        <p:nvSpPr>
-          <p:cNvPr id="31" name="Shape 29"/>
-          <p:cNvSpPr/>
-          <p:nvPr/>
-        </p:nvSpPr>
-        <p:spPr>
-          <a:xfrm>
-            <a:off x="1874520" y="4096512"/>
-            <a:ext cx="6903720" cy="804672"/>
-          </a:xfrm>
-          <a:prstGeom prst="rect">
-            <a:avLst>
-              <a:gd name="adj" fmla="val 6818"/>
-            </a:avLst>
-          </a:prstGeom>
-          <a:solidFill>
-            <a:srgbClr val="F8FAFC"/>
-          </a:solidFill>
-          <a:ln w="12700">
-            <a:solidFill>
-              <a:srgbClr val="E2E8F0"/>
-            </a:solidFill>
             <a:prstDash val="dash"/>
           </a:ln>
         </p:spPr>
       </p:sp>
       <p:sp>
         <p:nvSpPr>
-          <p:cNvPr id="32" name="Text 30"/>
+          <p:cNvPr id="29" name="Text 27"/>
           <p:cNvSpPr/>
           <p:nvPr/>
         </p:nvSpPr>
@@ -12977,7 +12962,7 @@
                 <a:ea typeface="Calibri" pitchFamily="34" charset="-122"/>
                 <a:cs typeface="Calibri" pitchFamily="34" charset="-120"/>
               </a:rPr>
-              <a:t>Word Labs  •  wordlabs.app  •  Prefix: 'mid-' = middle, in the middle</a:t>
+              <a:t>Word Labs  •  wordlabs.app  •  Prefix: 'mid-' = middle</a:t>
             </a:r>
             <a:endParaRPr lang="en-US" sz="800" dirty="0"/>
           </a:p>
@@ -13116,7 +13101,7 @@
                 <a:ea typeface="Trebuchet MS" pitchFamily="34" charset="-122"/>
                 <a:cs typeface="Trebuchet MS" pitchFamily="34" charset="-120"/>
               </a:rPr>
-              <a:t>midfielder</a:t>
+              <a:t>midfield</a:t>
             </a:r>
             <a:endParaRPr lang="en-US" sz="2800" dirty="0"/>
           </a:p>
@@ -13196,7 +13181,7 @@
         </p:nvSpPr>
         <p:spPr>
           <a:xfrm>
-            <a:off x="2221992" y="2258568"/>
+            <a:off x="2938272" y="2258568"/>
             <a:ext cx="1828800" cy="292608"/>
           </a:xfrm>
           <a:prstGeom prst="rect">
@@ -13230,7 +13215,7 @@
         </p:nvSpPr>
         <p:spPr>
           <a:xfrm>
-            <a:off x="2221992" y="2258568"/>
+            <a:off x="2938272" y="2258568"/>
             <a:ext cx="1828800" cy="292608"/>
           </a:xfrm>
           <a:prstGeom prst="rect">
@@ -13269,7 +13254,7 @@
         </p:nvSpPr>
         <p:spPr>
           <a:xfrm>
-            <a:off x="2221992" y="2569464"/>
+            <a:off x="2938272" y="2569464"/>
             <a:ext cx="1828800" cy="201168"/>
           </a:xfrm>
           <a:prstGeom prst="rect">
@@ -13308,7 +13293,7 @@
         </p:nvSpPr>
         <p:spPr>
           <a:xfrm>
-            <a:off x="4370832" y="2258568"/>
+            <a:off x="5803392" y="2258568"/>
             <a:ext cx="1828800" cy="292608"/>
           </a:xfrm>
           <a:prstGeom prst="rect">
@@ -13342,7 +13327,7 @@
         </p:nvSpPr>
         <p:spPr>
           <a:xfrm>
-            <a:off x="4370832" y="2258568"/>
+            <a:off x="5803392" y="2258568"/>
             <a:ext cx="1828800" cy="292608"/>
           </a:xfrm>
           <a:prstGeom prst="rect">
@@ -13381,7 +13366,7 @@
         </p:nvSpPr>
         <p:spPr>
           <a:xfrm>
-            <a:off x="4370832" y="2569464"/>
+            <a:off x="5803392" y="2569464"/>
             <a:ext cx="1828800" cy="201168"/>
           </a:xfrm>
           <a:prstGeom prst="rect">
@@ -13406,7 +13391,7 @@
                 <a:ea typeface="Calibri" pitchFamily="34" charset="-122"/>
                 <a:cs typeface="Calibri" pitchFamily="34" charset="-120"/>
               </a:rPr>
-              <a:t>open area</a:t>
+              <a:t>an open area of land</a:t>
             </a:r>
             <a:endParaRPr lang="en-US" sz="850" dirty="0"/>
           </a:p>
@@ -13420,30 +13405,23 @@
         </p:nvSpPr>
         <p:spPr>
           <a:xfrm>
-            <a:off x="6519672" y="2258568"/>
-            <a:ext cx="1828800" cy="292608"/>
+            <a:off x="365760" y="3273552"/>
+            <a:ext cx="1371600" cy="658368"/>
           </a:xfrm>
           <a:prstGeom prst="rect">
             <a:avLst>
-              <a:gd name="adj" fmla="val 25000"/>
+              <a:gd name="adj" fmla="val 8333"/>
             </a:avLst>
           </a:prstGeom>
           <a:solidFill>
-            <a:srgbClr val="FCE7F3"/>
-          </a:solidFill>
-          <a:ln w="19050">
-            <a:solidFill>
-              <a:srgbClr val="DB2777"/>
-            </a:solidFill>
-            <a:prstDash val="solid"/>
-          </a:ln>
-          <a:effectLst>
-            <a:outerShdw sx="100000" sy="100000" kx="0" ky="0" algn="bl" rotWithShape="0" blurRad="101600" dist="38100" dir="8100000">
-              <a:srgbClr val="000000">
-                <a:alpha val="12000"/>
-              </a:srgbClr>
-            </a:outerShdw>
-          </a:effectLst>
+            <a:srgbClr val="E2E8F0"/>
+          </a:solidFill>
+          <a:ln w="12700">
+            <a:solidFill>
+              <a:srgbClr val="E2E8F0"/>
+            </a:solidFill>
+            <a:prstDash val="solid"/>
+          </a:ln>
         </p:spPr>
       </p:sp>
       <p:sp>
@@ -13454,8 +13432,8 @@
         </p:nvSpPr>
         <p:spPr>
           <a:xfrm>
-            <a:off x="6519672" y="2258568"/>
-            <a:ext cx="1828800" cy="292608"/>
+            <a:off x="365760" y="3273552"/>
+            <a:ext cx="1371600" cy="658368"/>
           </a:xfrm>
           <a:prstGeom prst="rect">
             <a:avLst/>
@@ -13471,69 +13449,30 @@
               <a:buNone/>
             </a:pPr>
             <a:r>
-              <a:rPr lang="en-US" sz="1300" b="1" dirty="0">
-                <a:solidFill>
-                  <a:srgbClr val="9D174D"/>
+              <a:rPr lang="en-US" sz="1100" b="1" dirty="0">
+                <a:solidFill>
+                  <a:srgbClr val="475569"/>
                 </a:solidFill>
                 <a:latin typeface="Trebuchet MS" pitchFamily="34" charset="0"/>
                 <a:ea typeface="Trebuchet MS" pitchFamily="34" charset="-122"/>
                 <a:cs typeface="Trebuchet MS" pitchFamily="34" charset="-120"/>
               </a:rPr>
-              <a:t>er</a:t>
-            </a:r>
-            <a:endParaRPr lang="en-US" sz="1300" dirty="0"/>
-          </a:p>
-        </p:txBody>
-      </p:sp>
-      <p:sp>
-        <p:nvSpPr>
-          <p:cNvPr id="24" name="Text 22"/>
-          <p:cNvSpPr/>
-          <p:nvPr/>
-        </p:nvSpPr>
-        <p:spPr>
-          <a:xfrm>
-            <a:off x="6519672" y="2569464"/>
-            <a:ext cx="1828800" cy="201168"/>
-          </a:xfrm>
-          <a:prstGeom prst="rect">
-            <a:avLst/>
-          </a:prstGeom>
-          <a:noFill/>
-          <a:ln/>
-        </p:spPr>
-        <p:txBody>
-          <a:bodyPr wrap="square" lIns="0" tIns="0" rIns="0" bIns="0" rtlCol="0" anchor="t"/>
-          <a:lstStyle/>
-          <a:p>
-            <a:pPr algn="ctr" indent="0" marL="0">
-              <a:buNone/>
-            </a:pPr>
-            <a:r>
-              <a:rPr lang="en-US" sz="850" dirty="0">
-                <a:solidFill>
-                  <a:srgbClr val="475569"/>
-                </a:solidFill>
-                <a:latin typeface="Calibri" pitchFamily="34" charset="0"/>
-                <a:ea typeface="Calibri" pitchFamily="34" charset="-122"/>
-                <a:cs typeface="Calibri" pitchFamily="34" charset="-120"/>
-              </a:rPr>
-              <a:t>a person who does</a:t>
-            </a:r>
-            <a:endParaRPr lang="en-US" sz="850" dirty="0"/>
-          </a:p>
-        </p:txBody>
-      </p:sp>
-      <p:sp>
-        <p:nvSpPr>
-          <p:cNvPr id="25" name="Shape 23"/>
-          <p:cNvSpPr/>
-          <p:nvPr/>
-        </p:nvSpPr>
-        <p:spPr>
-          <a:xfrm>
-            <a:off x="365760" y="3273552"/>
-            <a:ext cx="1371600" cy="658368"/>
+              <a:t>Syllables</a:t>
+            </a:r>
+            <a:endParaRPr lang="en-US" sz="1100" dirty="0"/>
+          </a:p>
+        </p:txBody>
+      </p:sp>
+      <p:sp>
+        <p:nvSpPr>
+          <p:cNvPr id="24" name="Shape 22"/>
+          <p:cNvSpPr/>
+          <p:nvPr/>
+        </p:nvSpPr>
+        <p:spPr>
+          <a:xfrm>
+            <a:off x="1874520" y="3273552"/>
+            <a:ext cx="6903720" cy="658368"/>
           </a:xfrm>
           <a:prstGeom prst="rect">
             <a:avLst>
@@ -13541,11 +13480,38 @@
             </a:avLst>
           </a:prstGeom>
           <a:solidFill>
-            <a:srgbClr val="E2E8F0"/>
-          </a:solidFill>
-          <a:ln w="12700">
-            <a:solidFill>
-              <a:srgbClr val="E2E8F0"/>
+            <a:srgbClr val="CCFBF1"/>
+          </a:solidFill>
+          <a:ln w="12700">
+            <a:solidFill>
+              <a:srgbClr val="0D9488"/>
+            </a:solidFill>
+            <a:prstDash val="solid"/>
+          </a:ln>
+        </p:spPr>
+      </p:sp>
+      <p:sp>
+        <p:nvSpPr>
+          <p:cNvPr id="25" name="Shape 23"/>
+          <p:cNvSpPr/>
+          <p:nvPr/>
+        </p:nvSpPr>
+        <p:spPr>
+          <a:xfrm>
+            <a:off x="2999232" y="3364992"/>
+            <a:ext cx="1645920" cy="475488"/>
+          </a:xfrm>
+          <a:prstGeom prst="rect">
+            <a:avLst>
+              <a:gd name="adj" fmla="val 9615"/>
+            </a:avLst>
+          </a:prstGeom>
+          <a:solidFill>
+            <a:srgbClr val="FFFFFF"/>
+          </a:solidFill>
+          <a:ln w="12700">
+            <a:solidFill>
+              <a:srgbClr val="0D9488"/>
             </a:solidFill>
             <a:prstDash val="solid"/>
           </a:ln>
@@ -13559,8 +13525,8 @@
         </p:nvSpPr>
         <p:spPr>
           <a:xfrm>
-            <a:off x="365760" y="3273552"/>
-            <a:ext cx="1371600" cy="658368"/>
+            <a:off x="2999232" y="3364992"/>
+            <a:ext cx="1645920" cy="475488"/>
           </a:xfrm>
           <a:prstGeom prst="rect">
             <a:avLst/>
@@ -13576,46 +13542,58 @@
               <a:buNone/>
             </a:pPr>
             <a:r>
-              <a:rPr lang="en-US" sz="1100" b="1" dirty="0">
-                <a:solidFill>
-                  <a:srgbClr val="475569"/>
+              <a:rPr lang="en-US" sz="1400" b="1" dirty="0">
+                <a:solidFill>
+                  <a:srgbClr val="0D9488"/>
                 </a:solidFill>
                 <a:latin typeface="Trebuchet MS" pitchFamily="34" charset="0"/>
                 <a:ea typeface="Trebuchet MS" pitchFamily="34" charset="-122"/>
                 <a:cs typeface="Trebuchet MS" pitchFamily="34" charset="-120"/>
               </a:rPr>
-              <a:t>Syllables</a:t>
-            </a:r>
-            <a:endParaRPr lang="en-US" sz="1100" dirty="0"/>
-          </a:p>
-        </p:txBody>
-      </p:sp>
-      <p:sp>
-        <p:nvSpPr>
-          <p:cNvPr id="27" name="Shape 25"/>
-          <p:cNvSpPr/>
-          <p:nvPr/>
-        </p:nvSpPr>
-        <p:spPr>
-          <a:xfrm>
-            <a:off x="1874520" y="3273552"/>
-            <a:ext cx="6903720" cy="658368"/>
-          </a:xfrm>
-          <a:prstGeom prst="rect">
-            <a:avLst>
-              <a:gd name="adj" fmla="val 8333"/>
-            </a:avLst>
-          </a:prstGeom>
-          <a:solidFill>
-            <a:srgbClr val="CCFBF1"/>
-          </a:solidFill>
-          <a:ln w="12700">
-            <a:solidFill>
-              <a:srgbClr val="0D9488"/>
-            </a:solidFill>
-            <a:prstDash val="solid"/>
-          </a:ln>
-        </p:spPr>
+              <a:t>mid</a:t>
+            </a:r>
+            <a:endParaRPr lang="en-US" sz="1400" dirty="0"/>
+          </a:p>
+        </p:txBody>
+      </p:sp>
+      <p:sp>
+        <p:nvSpPr>
+          <p:cNvPr id="27" name="Text 25"/>
+          <p:cNvSpPr/>
+          <p:nvPr/>
+        </p:nvSpPr>
+        <p:spPr>
+          <a:xfrm>
+            <a:off x="4645152" y="3364992"/>
+            <a:ext cx="1097280" cy="475488"/>
+          </a:xfrm>
+          <a:prstGeom prst="rect">
+            <a:avLst/>
+          </a:prstGeom>
+          <a:noFill/>
+          <a:ln/>
+        </p:spPr>
+        <p:txBody>
+          <a:bodyPr wrap="square" lIns="0" tIns="0" rIns="0" bIns="0" rtlCol="0" anchor="ctr"/>
+          <a:lstStyle/>
+          <a:p>
+            <a:pPr algn="ctr" indent="0" marL="0">
+              <a:buNone/>
+            </a:pPr>
+            <a:r>
+              <a:rPr lang="en-US" sz="1600" b="1" dirty="0">
+                <a:solidFill>
+                  <a:srgbClr val="0D9488"/>
+                </a:solidFill>
+                <a:latin typeface="Trebuchet MS" pitchFamily="34" charset="0"/>
+                <a:ea typeface="Trebuchet MS" pitchFamily="34" charset="-122"/>
+                <a:cs typeface="Trebuchet MS" pitchFamily="34" charset="-120"/>
+              </a:rPr>
+              <a:t>·</a:t>
+            </a:r>
+            <a:endParaRPr lang="en-US" sz="1600" dirty="0"/>
+          </a:p>
+        </p:txBody>
       </p:sp>
       <p:sp>
         <p:nvSpPr>
@@ -13625,7 +13603,7 @@
         </p:nvSpPr>
         <p:spPr>
           <a:xfrm>
-            <a:off x="2313432" y="3364992"/>
+            <a:off x="5742432" y="3364992"/>
             <a:ext cx="1645920" cy="475488"/>
           </a:xfrm>
           <a:prstGeom prst="rect">
@@ -13652,7 +13630,7 @@
         </p:nvSpPr>
         <p:spPr>
           <a:xfrm>
-            <a:off x="2313432" y="3364992"/>
+            <a:off x="5742432" y="3364992"/>
             <a:ext cx="1645920" cy="475488"/>
           </a:xfrm>
           <a:prstGeom prst="rect">
@@ -13677,7 +13655,7 @@
                 <a:ea typeface="Trebuchet MS" pitchFamily="34" charset="-122"/>
                 <a:cs typeface="Trebuchet MS" pitchFamily="34" charset="-120"/>
               </a:rPr>
-              <a:t>mid</a:t>
+              <a:t>field</a:t>
             </a:r>
             <a:endParaRPr lang="en-US" sz="1400" dirty="0"/>
           </a:p>
@@ -13685,14 +13663,41 @@
       </p:sp>
       <p:sp>
         <p:nvSpPr>
-          <p:cNvPr id="30" name="Text 28"/>
-          <p:cNvSpPr/>
-          <p:nvPr/>
-        </p:nvSpPr>
-        <p:spPr>
-          <a:xfrm>
-            <a:off x="3959352" y="3364992"/>
-            <a:ext cx="411480" cy="475488"/>
+          <p:cNvPr id="30" name="Shape 28"/>
+          <p:cNvSpPr/>
+          <p:nvPr/>
+        </p:nvSpPr>
+        <p:spPr>
+          <a:xfrm>
+            <a:off x="365760" y="4096512"/>
+            <a:ext cx="1371600" cy="804672"/>
+          </a:xfrm>
+          <a:prstGeom prst="rect">
+            <a:avLst>
+              <a:gd name="adj" fmla="val 6818"/>
+            </a:avLst>
+          </a:prstGeom>
+          <a:solidFill>
+            <a:srgbClr val="E2E8F0"/>
+          </a:solidFill>
+          <a:ln w="12700">
+            <a:solidFill>
+              <a:srgbClr val="E2E8F0"/>
+            </a:solidFill>
+            <a:prstDash val="solid"/>
+          </a:ln>
+        </p:spPr>
+      </p:sp>
+      <p:sp>
+        <p:nvSpPr>
+          <p:cNvPr id="31" name="Text 29"/>
+          <p:cNvSpPr/>
+          <p:nvPr/>
+        </p:nvSpPr>
+        <p:spPr>
+          <a:xfrm>
+            <a:off x="365760" y="4096512"/>
+            <a:ext cx="1371600" cy="804672"/>
           </a:xfrm>
           <a:prstGeom prst="rect">
             <a:avLst/>
@@ -13708,201 +13713,30 @@
               <a:buNone/>
             </a:pPr>
             <a:r>
-              <a:rPr lang="en-US" sz="1600" b="1" dirty="0">
-                <a:solidFill>
-                  <a:srgbClr val="0D9488"/>
+              <a:rPr lang="en-US" sz="1100" b="1" dirty="0">
+                <a:solidFill>
+                  <a:srgbClr val="475569"/>
                 </a:solidFill>
                 <a:latin typeface="Trebuchet MS" pitchFamily="34" charset="0"/>
                 <a:ea typeface="Trebuchet MS" pitchFamily="34" charset="-122"/>
                 <a:cs typeface="Trebuchet MS" pitchFamily="34" charset="-120"/>
               </a:rPr>
-              <a:t>·</a:t>
-            </a:r>
-            <a:endParaRPr lang="en-US" sz="1600" dirty="0"/>
-          </a:p>
-        </p:txBody>
-      </p:sp>
-      <p:sp>
-        <p:nvSpPr>
-          <p:cNvPr id="31" name="Shape 29"/>
-          <p:cNvSpPr/>
-          <p:nvPr/>
-        </p:nvSpPr>
-        <p:spPr>
-          <a:xfrm>
-            <a:off x="4370832" y="3364992"/>
-            <a:ext cx="1645920" cy="475488"/>
-          </a:xfrm>
-          <a:prstGeom prst="rect">
-            <a:avLst>
-              <a:gd name="adj" fmla="val 9615"/>
-            </a:avLst>
-          </a:prstGeom>
-          <a:solidFill>
-            <a:srgbClr val="FFFFFF"/>
-          </a:solidFill>
-          <a:ln w="12700">
-            <a:solidFill>
-              <a:srgbClr val="0D9488"/>
-            </a:solidFill>
-            <a:prstDash val="solid"/>
-          </a:ln>
-        </p:spPr>
-      </p:sp>
-      <p:sp>
-        <p:nvSpPr>
-          <p:cNvPr id="32" name="Text 30"/>
-          <p:cNvSpPr/>
-          <p:nvPr/>
-        </p:nvSpPr>
-        <p:spPr>
-          <a:xfrm>
-            <a:off x="4370832" y="3364992"/>
-            <a:ext cx="1645920" cy="475488"/>
-          </a:xfrm>
-          <a:prstGeom prst="rect">
-            <a:avLst/>
-          </a:prstGeom>
-          <a:noFill/>
-          <a:ln/>
-        </p:spPr>
-        <p:txBody>
-          <a:bodyPr wrap="square" lIns="0" tIns="0" rIns="0" bIns="0" rtlCol="0" anchor="ctr"/>
-          <a:lstStyle/>
-          <a:p>
-            <a:pPr algn="ctr" indent="0" marL="0">
-              <a:buNone/>
-            </a:pPr>
-            <a:r>
-              <a:rPr lang="en-US" sz="1400" b="1" dirty="0">
-                <a:solidFill>
-                  <a:srgbClr val="0D9488"/>
-                </a:solidFill>
-                <a:latin typeface="Trebuchet MS" pitchFamily="34" charset="0"/>
-                <a:ea typeface="Trebuchet MS" pitchFamily="34" charset="-122"/>
-                <a:cs typeface="Trebuchet MS" pitchFamily="34" charset="-120"/>
-              </a:rPr>
-              <a:t>field</a:t>
-            </a:r>
-            <a:endParaRPr lang="en-US" sz="1400" dirty="0"/>
-          </a:p>
-        </p:txBody>
-      </p:sp>
-      <p:sp>
-        <p:nvSpPr>
-          <p:cNvPr id="33" name="Text 31"/>
-          <p:cNvSpPr/>
-          <p:nvPr/>
-        </p:nvSpPr>
-        <p:spPr>
-          <a:xfrm>
-            <a:off x="6016752" y="3364992"/>
-            <a:ext cx="411480" cy="475488"/>
-          </a:xfrm>
-          <a:prstGeom prst="rect">
-            <a:avLst/>
-          </a:prstGeom>
-          <a:noFill/>
-          <a:ln/>
-        </p:spPr>
-        <p:txBody>
-          <a:bodyPr wrap="square" lIns="0" tIns="0" rIns="0" bIns="0" rtlCol="0" anchor="ctr"/>
-          <a:lstStyle/>
-          <a:p>
-            <a:pPr algn="ctr" indent="0" marL="0">
-              <a:buNone/>
-            </a:pPr>
-            <a:r>
-              <a:rPr lang="en-US" sz="1600" b="1" dirty="0">
-                <a:solidFill>
-                  <a:srgbClr val="0D9488"/>
-                </a:solidFill>
-                <a:latin typeface="Trebuchet MS" pitchFamily="34" charset="0"/>
-                <a:ea typeface="Trebuchet MS" pitchFamily="34" charset="-122"/>
-                <a:cs typeface="Trebuchet MS" pitchFamily="34" charset="-120"/>
-              </a:rPr>
-              <a:t>·</a:t>
-            </a:r>
-            <a:endParaRPr lang="en-US" sz="1600" dirty="0"/>
-          </a:p>
-        </p:txBody>
-      </p:sp>
-      <p:sp>
-        <p:nvSpPr>
-          <p:cNvPr id="34" name="Shape 32"/>
-          <p:cNvSpPr/>
-          <p:nvPr/>
-        </p:nvSpPr>
-        <p:spPr>
-          <a:xfrm>
-            <a:off x="6428232" y="3364992"/>
-            <a:ext cx="1645920" cy="475488"/>
-          </a:xfrm>
-          <a:prstGeom prst="rect">
-            <a:avLst>
-              <a:gd name="adj" fmla="val 9615"/>
-            </a:avLst>
-          </a:prstGeom>
-          <a:solidFill>
-            <a:srgbClr val="FFFFFF"/>
-          </a:solidFill>
-          <a:ln w="12700">
-            <a:solidFill>
-              <a:srgbClr val="0D9488"/>
-            </a:solidFill>
-            <a:prstDash val="solid"/>
-          </a:ln>
-        </p:spPr>
-      </p:sp>
-      <p:sp>
-        <p:nvSpPr>
-          <p:cNvPr id="35" name="Text 33"/>
-          <p:cNvSpPr/>
-          <p:nvPr/>
-        </p:nvSpPr>
-        <p:spPr>
-          <a:xfrm>
-            <a:off x="6428232" y="3364992"/>
-            <a:ext cx="1645920" cy="475488"/>
-          </a:xfrm>
-          <a:prstGeom prst="rect">
-            <a:avLst/>
-          </a:prstGeom>
-          <a:noFill/>
-          <a:ln/>
-        </p:spPr>
-        <p:txBody>
-          <a:bodyPr wrap="square" lIns="0" tIns="0" rIns="0" bIns="0" rtlCol="0" anchor="ctr"/>
-          <a:lstStyle/>
-          <a:p>
-            <a:pPr algn="ctr" indent="0" marL="0">
-              <a:buNone/>
-            </a:pPr>
-            <a:r>
-              <a:rPr lang="en-US" sz="1400" b="1" dirty="0">
-                <a:solidFill>
-                  <a:srgbClr val="0D9488"/>
-                </a:solidFill>
-                <a:latin typeface="Trebuchet MS" pitchFamily="34" charset="0"/>
-                <a:ea typeface="Trebuchet MS" pitchFamily="34" charset="-122"/>
-                <a:cs typeface="Trebuchet MS" pitchFamily="34" charset="-120"/>
-              </a:rPr>
-              <a:t>er</a:t>
-            </a:r>
-            <a:endParaRPr lang="en-US" sz="1400" dirty="0"/>
-          </a:p>
-        </p:txBody>
-      </p:sp>
-      <p:sp>
-        <p:nvSpPr>
-          <p:cNvPr id="36" name="Shape 34"/>
-          <p:cNvSpPr/>
-          <p:nvPr/>
-        </p:nvSpPr>
-        <p:spPr>
-          <a:xfrm>
-            <a:off x="365760" y="4096512"/>
-            <a:ext cx="1371600" cy="804672"/>
+              <a:t>Phonemes</a:t>
+            </a:r>
+            <a:endParaRPr lang="en-US" sz="1100" dirty="0"/>
+          </a:p>
+        </p:txBody>
+      </p:sp>
+      <p:sp>
+        <p:nvSpPr>
+          <p:cNvPr id="32" name="Shape 30"/>
+          <p:cNvSpPr/>
+          <p:nvPr/>
+        </p:nvSpPr>
+        <p:spPr>
+          <a:xfrm>
+            <a:off x="1874520" y="4096512"/>
+            <a:ext cx="6903720" cy="804672"/>
           </a:xfrm>
           <a:prstGeom prst="rect">
             <a:avLst>
@@ -13910,85 +13744,19 @@
             </a:avLst>
           </a:prstGeom>
           <a:solidFill>
-            <a:srgbClr val="E2E8F0"/>
+            <a:srgbClr val="F8FAFC"/>
           </a:solidFill>
           <a:ln w="12700">
             <a:solidFill>
               <a:srgbClr val="E2E8F0"/>
             </a:solidFill>
-            <a:prstDash val="solid"/>
-          </a:ln>
-        </p:spPr>
-      </p:sp>
-      <p:sp>
-        <p:nvSpPr>
-          <p:cNvPr id="37" name="Text 35"/>
-          <p:cNvSpPr/>
-          <p:nvPr/>
-        </p:nvSpPr>
-        <p:spPr>
-          <a:xfrm>
-            <a:off x="365760" y="4096512"/>
-            <a:ext cx="1371600" cy="804672"/>
-          </a:xfrm>
-          <a:prstGeom prst="rect">
-            <a:avLst/>
-          </a:prstGeom>
-          <a:noFill/>
-          <a:ln/>
-        </p:spPr>
-        <p:txBody>
-          <a:bodyPr wrap="square" lIns="0" tIns="0" rIns="0" bIns="0" rtlCol="0" anchor="ctr"/>
-          <a:lstStyle/>
-          <a:p>
-            <a:pPr algn="ctr" indent="0" marL="0">
-              <a:buNone/>
-            </a:pPr>
-            <a:r>
-              <a:rPr lang="en-US" sz="1100" b="1" dirty="0">
-                <a:solidFill>
-                  <a:srgbClr val="475569"/>
-                </a:solidFill>
-                <a:latin typeface="Trebuchet MS" pitchFamily="34" charset="0"/>
-                <a:ea typeface="Trebuchet MS" pitchFamily="34" charset="-122"/>
-                <a:cs typeface="Trebuchet MS" pitchFamily="34" charset="-120"/>
-              </a:rPr>
-              <a:t>Phonemes</a:t>
-            </a:r>
-            <a:endParaRPr lang="en-US" sz="1100" dirty="0"/>
-          </a:p>
-        </p:txBody>
-      </p:sp>
-      <p:sp>
-        <p:nvSpPr>
-          <p:cNvPr id="38" name="Shape 36"/>
-          <p:cNvSpPr/>
-          <p:nvPr/>
-        </p:nvSpPr>
-        <p:spPr>
-          <a:xfrm>
-            <a:off x="1874520" y="4096512"/>
-            <a:ext cx="6903720" cy="804672"/>
-          </a:xfrm>
-          <a:prstGeom prst="rect">
-            <a:avLst>
-              <a:gd name="adj" fmla="val 6818"/>
-            </a:avLst>
-          </a:prstGeom>
-          <a:solidFill>
-            <a:srgbClr val="F8FAFC"/>
-          </a:solidFill>
-          <a:ln w="12700">
-            <a:solidFill>
-              <a:srgbClr val="E2E8F0"/>
-            </a:solidFill>
             <a:prstDash val="dash"/>
           </a:ln>
         </p:spPr>
       </p:sp>
       <p:sp>
         <p:nvSpPr>
-          <p:cNvPr id="39" name="Text 37"/>
+          <p:cNvPr id="33" name="Text 31"/>
           <p:cNvSpPr/>
           <p:nvPr/>
         </p:nvSpPr>
@@ -14220,7 +13988,7 @@
                 <a:ea typeface="Calibri" pitchFamily="34" charset="-122"/>
                 <a:cs typeface="Calibri" pitchFamily="34" charset="-120"/>
               </a:rPr>
-              <a:t>Prefix 'mid-' — middle, in the middle</a:t>
+              <a:t>Prefix 'mid-' — middle</a:t>
             </a:r>
             <a:endParaRPr lang="en-US" sz="1600" dirty="0"/>
           </a:p>
@@ -14576,7 +14344,7 @@
                 <a:ea typeface="Calibri" pitchFamily="34" charset="-122"/>
                 <a:cs typeface="Calibri" pitchFamily="34" charset="-120"/>
               </a:rPr>
-              <a:t>Word Labs  •  wordlabs.app  •  Prefix: 'mid-' = middle, in the middle</a:t>
+              <a:t>Word Labs  •  wordlabs.app  •  Prefix: 'mid-' = middle</a:t>
             </a:r>
             <a:endParaRPr lang="en-US" sz="800" dirty="0"/>
           </a:p>
@@ -14715,7 +14483,7 @@
                 <a:ea typeface="Trebuchet MS" pitchFamily="34" charset="-122"/>
                 <a:cs typeface="Trebuchet MS" pitchFamily="34" charset="-120"/>
               </a:rPr>
-              <a:t>midfielder</a:t>
+              <a:t>midfield</a:t>
             </a:r>
             <a:endParaRPr lang="en-US" sz="2800" dirty="0"/>
           </a:p>
@@ -14795,7 +14563,7 @@
         </p:nvSpPr>
         <p:spPr>
           <a:xfrm>
-            <a:off x="2221992" y="2258568"/>
+            <a:off x="2938272" y="2258568"/>
             <a:ext cx="1828800" cy="292608"/>
           </a:xfrm>
           <a:prstGeom prst="rect">
@@ -14829,7 +14597,7 @@
         </p:nvSpPr>
         <p:spPr>
           <a:xfrm>
-            <a:off x="2221992" y="2258568"/>
+            <a:off x="2938272" y="2258568"/>
             <a:ext cx="1828800" cy="292608"/>
           </a:xfrm>
           <a:prstGeom prst="rect">
@@ -14868,7 +14636,7 @@
         </p:nvSpPr>
         <p:spPr>
           <a:xfrm>
-            <a:off x="2221992" y="2569464"/>
+            <a:off x="2938272" y="2569464"/>
             <a:ext cx="1828800" cy="201168"/>
           </a:xfrm>
           <a:prstGeom prst="rect">
@@ -14907,7 +14675,7 @@
         </p:nvSpPr>
         <p:spPr>
           <a:xfrm>
-            <a:off x="4370832" y="2258568"/>
+            <a:off x="5803392" y="2258568"/>
             <a:ext cx="1828800" cy="292608"/>
           </a:xfrm>
           <a:prstGeom prst="rect">
@@ -14941,7 +14709,7 @@
         </p:nvSpPr>
         <p:spPr>
           <a:xfrm>
-            <a:off x="4370832" y="2258568"/>
+            <a:off x="5803392" y="2258568"/>
             <a:ext cx="1828800" cy="292608"/>
           </a:xfrm>
           <a:prstGeom prst="rect">
@@ -14980,7 +14748,7 @@
         </p:nvSpPr>
         <p:spPr>
           <a:xfrm>
-            <a:off x="4370832" y="2569464"/>
+            <a:off x="5803392" y="2569464"/>
             <a:ext cx="1828800" cy="201168"/>
           </a:xfrm>
           <a:prstGeom prst="rect">
@@ -15005,7 +14773,7 @@
                 <a:ea typeface="Calibri" pitchFamily="34" charset="-122"/>
                 <a:cs typeface="Calibri" pitchFamily="34" charset="-120"/>
               </a:rPr>
-              <a:t>open area</a:t>
+              <a:t>an open area of land</a:t>
             </a:r>
             <a:endParaRPr lang="en-US" sz="850" dirty="0"/>
           </a:p>
@@ -15019,30 +14787,23 @@
         </p:nvSpPr>
         <p:spPr>
           <a:xfrm>
-            <a:off x="6519672" y="2258568"/>
-            <a:ext cx="1828800" cy="292608"/>
+            <a:off x="365760" y="3273552"/>
+            <a:ext cx="1371600" cy="658368"/>
           </a:xfrm>
           <a:prstGeom prst="rect">
             <a:avLst>
-              <a:gd name="adj" fmla="val 25000"/>
+              <a:gd name="adj" fmla="val 8333"/>
             </a:avLst>
           </a:prstGeom>
           <a:solidFill>
-            <a:srgbClr val="FCE7F3"/>
-          </a:solidFill>
-          <a:ln w="19050">
-            <a:solidFill>
-              <a:srgbClr val="DB2777"/>
-            </a:solidFill>
-            <a:prstDash val="solid"/>
-          </a:ln>
-          <a:effectLst>
-            <a:outerShdw sx="100000" sy="100000" kx="0" ky="0" algn="bl" rotWithShape="0" blurRad="101600" dist="38100" dir="8100000">
-              <a:srgbClr val="000000">
-                <a:alpha val="12000"/>
-              </a:srgbClr>
-            </a:outerShdw>
-          </a:effectLst>
+            <a:srgbClr val="E2E8F0"/>
+          </a:solidFill>
+          <a:ln w="12700">
+            <a:solidFill>
+              <a:srgbClr val="E2E8F0"/>
+            </a:solidFill>
+            <a:prstDash val="solid"/>
+          </a:ln>
         </p:spPr>
       </p:sp>
       <p:sp>
@@ -15053,8 +14814,8 @@
         </p:nvSpPr>
         <p:spPr>
           <a:xfrm>
-            <a:off x="6519672" y="2258568"/>
-            <a:ext cx="1828800" cy="292608"/>
+            <a:off x="365760" y="3273552"/>
+            <a:ext cx="1371600" cy="658368"/>
           </a:xfrm>
           <a:prstGeom prst="rect">
             <a:avLst/>
@@ -15070,69 +14831,30 @@
               <a:buNone/>
             </a:pPr>
             <a:r>
-              <a:rPr lang="en-US" sz="1300" b="1" dirty="0">
-                <a:solidFill>
-                  <a:srgbClr val="9D174D"/>
+              <a:rPr lang="en-US" sz="1100" b="1" dirty="0">
+                <a:solidFill>
+                  <a:srgbClr val="475569"/>
                 </a:solidFill>
                 <a:latin typeface="Trebuchet MS" pitchFamily="34" charset="0"/>
                 <a:ea typeface="Trebuchet MS" pitchFamily="34" charset="-122"/>
                 <a:cs typeface="Trebuchet MS" pitchFamily="34" charset="-120"/>
               </a:rPr>
-              <a:t>er</a:t>
-            </a:r>
-            <a:endParaRPr lang="en-US" sz="1300" dirty="0"/>
-          </a:p>
-        </p:txBody>
-      </p:sp>
-      <p:sp>
-        <p:nvSpPr>
-          <p:cNvPr id="24" name="Text 22"/>
-          <p:cNvSpPr/>
-          <p:nvPr/>
-        </p:nvSpPr>
-        <p:spPr>
-          <a:xfrm>
-            <a:off x="6519672" y="2569464"/>
-            <a:ext cx="1828800" cy="201168"/>
-          </a:xfrm>
-          <a:prstGeom prst="rect">
-            <a:avLst/>
-          </a:prstGeom>
-          <a:noFill/>
-          <a:ln/>
-        </p:spPr>
-        <p:txBody>
-          <a:bodyPr wrap="square" lIns="0" tIns="0" rIns="0" bIns="0" rtlCol="0" anchor="t"/>
-          <a:lstStyle/>
-          <a:p>
-            <a:pPr algn="ctr" indent="0" marL="0">
-              <a:buNone/>
-            </a:pPr>
-            <a:r>
-              <a:rPr lang="en-US" sz="850" dirty="0">
-                <a:solidFill>
-                  <a:srgbClr val="475569"/>
-                </a:solidFill>
-                <a:latin typeface="Calibri" pitchFamily="34" charset="0"/>
-                <a:ea typeface="Calibri" pitchFamily="34" charset="-122"/>
-                <a:cs typeface="Calibri" pitchFamily="34" charset="-120"/>
-              </a:rPr>
-              <a:t>a person who does</a:t>
-            </a:r>
-            <a:endParaRPr lang="en-US" sz="850" dirty="0"/>
-          </a:p>
-        </p:txBody>
-      </p:sp>
-      <p:sp>
-        <p:nvSpPr>
-          <p:cNvPr id="25" name="Shape 23"/>
-          <p:cNvSpPr/>
-          <p:nvPr/>
-        </p:nvSpPr>
-        <p:spPr>
-          <a:xfrm>
-            <a:off x="365760" y="3273552"/>
-            <a:ext cx="1371600" cy="658368"/>
+              <a:t>Syllables</a:t>
+            </a:r>
+            <a:endParaRPr lang="en-US" sz="1100" dirty="0"/>
+          </a:p>
+        </p:txBody>
+      </p:sp>
+      <p:sp>
+        <p:nvSpPr>
+          <p:cNvPr id="24" name="Shape 22"/>
+          <p:cNvSpPr/>
+          <p:nvPr/>
+        </p:nvSpPr>
+        <p:spPr>
+          <a:xfrm>
+            <a:off x="1874520" y="3273552"/>
+            <a:ext cx="6903720" cy="658368"/>
           </a:xfrm>
           <a:prstGeom prst="rect">
             <a:avLst>
@@ -15140,11 +14862,38 @@
             </a:avLst>
           </a:prstGeom>
           <a:solidFill>
-            <a:srgbClr val="E2E8F0"/>
-          </a:solidFill>
-          <a:ln w="12700">
-            <a:solidFill>
-              <a:srgbClr val="E2E8F0"/>
+            <a:srgbClr val="CCFBF1"/>
+          </a:solidFill>
+          <a:ln w="12700">
+            <a:solidFill>
+              <a:srgbClr val="0D9488"/>
+            </a:solidFill>
+            <a:prstDash val="solid"/>
+          </a:ln>
+        </p:spPr>
+      </p:sp>
+      <p:sp>
+        <p:nvSpPr>
+          <p:cNvPr id="25" name="Shape 23"/>
+          <p:cNvSpPr/>
+          <p:nvPr/>
+        </p:nvSpPr>
+        <p:spPr>
+          <a:xfrm>
+            <a:off x="2999232" y="3364992"/>
+            <a:ext cx="1645920" cy="475488"/>
+          </a:xfrm>
+          <a:prstGeom prst="rect">
+            <a:avLst>
+              <a:gd name="adj" fmla="val 9615"/>
+            </a:avLst>
+          </a:prstGeom>
+          <a:solidFill>
+            <a:srgbClr val="FFFFFF"/>
+          </a:solidFill>
+          <a:ln w="12700">
+            <a:solidFill>
+              <a:srgbClr val="0D9488"/>
             </a:solidFill>
             <a:prstDash val="solid"/>
           </a:ln>
@@ -15158,8 +14907,8 @@
         </p:nvSpPr>
         <p:spPr>
           <a:xfrm>
-            <a:off x="365760" y="3273552"/>
-            <a:ext cx="1371600" cy="658368"/>
+            <a:off x="2999232" y="3364992"/>
+            <a:ext cx="1645920" cy="475488"/>
           </a:xfrm>
           <a:prstGeom prst="rect">
             <a:avLst/>
@@ -15175,15 +14924,186 @@
               <a:buNone/>
             </a:pPr>
             <a:r>
-              <a:rPr lang="en-US" sz="1100" b="1" dirty="0">
-                <a:solidFill>
-                  <a:srgbClr val="475569"/>
+              <a:rPr lang="en-US" sz="1400" b="1" dirty="0">
+                <a:solidFill>
+                  <a:srgbClr val="0D9488"/>
                 </a:solidFill>
                 <a:latin typeface="Trebuchet MS" pitchFamily="34" charset="0"/>
                 <a:ea typeface="Trebuchet MS" pitchFamily="34" charset="-122"/>
                 <a:cs typeface="Trebuchet MS" pitchFamily="34" charset="-120"/>
               </a:rPr>
-              <a:t>Syllables</a:t>
+              <a:t>mid</a:t>
+            </a:r>
+            <a:endParaRPr lang="en-US" sz="1400" dirty="0"/>
+          </a:p>
+        </p:txBody>
+      </p:sp>
+      <p:sp>
+        <p:nvSpPr>
+          <p:cNvPr id="27" name="Text 25"/>
+          <p:cNvSpPr/>
+          <p:nvPr/>
+        </p:nvSpPr>
+        <p:spPr>
+          <a:xfrm>
+            <a:off x="4645152" y="3364992"/>
+            <a:ext cx="1097280" cy="475488"/>
+          </a:xfrm>
+          <a:prstGeom prst="rect">
+            <a:avLst/>
+          </a:prstGeom>
+          <a:noFill/>
+          <a:ln/>
+        </p:spPr>
+        <p:txBody>
+          <a:bodyPr wrap="square" lIns="0" tIns="0" rIns="0" bIns="0" rtlCol="0" anchor="ctr"/>
+          <a:lstStyle/>
+          <a:p>
+            <a:pPr algn="ctr" indent="0" marL="0">
+              <a:buNone/>
+            </a:pPr>
+            <a:r>
+              <a:rPr lang="en-US" sz="1600" b="1" dirty="0">
+                <a:solidFill>
+                  <a:srgbClr val="0D9488"/>
+                </a:solidFill>
+                <a:latin typeface="Trebuchet MS" pitchFamily="34" charset="0"/>
+                <a:ea typeface="Trebuchet MS" pitchFamily="34" charset="-122"/>
+                <a:cs typeface="Trebuchet MS" pitchFamily="34" charset="-120"/>
+              </a:rPr>
+              <a:t>·</a:t>
+            </a:r>
+            <a:endParaRPr lang="en-US" sz="1600" dirty="0"/>
+          </a:p>
+        </p:txBody>
+      </p:sp>
+      <p:sp>
+        <p:nvSpPr>
+          <p:cNvPr id="28" name="Shape 26"/>
+          <p:cNvSpPr/>
+          <p:nvPr/>
+        </p:nvSpPr>
+        <p:spPr>
+          <a:xfrm>
+            <a:off x="5742432" y="3364992"/>
+            <a:ext cx="1645920" cy="475488"/>
+          </a:xfrm>
+          <a:prstGeom prst="rect">
+            <a:avLst>
+              <a:gd name="adj" fmla="val 9615"/>
+            </a:avLst>
+          </a:prstGeom>
+          <a:solidFill>
+            <a:srgbClr val="FFFFFF"/>
+          </a:solidFill>
+          <a:ln w="12700">
+            <a:solidFill>
+              <a:srgbClr val="0D9488"/>
+            </a:solidFill>
+            <a:prstDash val="solid"/>
+          </a:ln>
+        </p:spPr>
+      </p:sp>
+      <p:sp>
+        <p:nvSpPr>
+          <p:cNvPr id="29" name="Text 27"/>
+          <p:cNvSpPr/>
+          <p:nvPr/>
+        </p:nvSpPr>
+        <p:spPr>
+          <a:xfrm>
+            <a:off x="5742432" y="3364992"/>
+            <a:ext cx="1645920" cy="475488"/>
+          </a:xfrm>
+          <a:prstGeom prst="rect">
+            <a:avLst/>
+          </a:prstGeom>
+          <a:noFill/>
+          <a:ln/>
+        </p:spPr>
+        <p:txBody>
+          <a:bodyPr wrap="square" lIns="0" tIns="0" rIns="0" bIns="0" rtlCol="0" anchor="ctr"/>
+          <a:lstStyle/>
+          <a:p>
+            <a:pPr algn="ctr" indent="0" marL="0">
+              <a:buNone/>
+            </a:pPr>
+            <a:r>
+              <a:rPr lang="en-US" sz="1400" b="1" dirty="0">
+                <a:solidFill>
+                  <a:srgbClr val="0D9488"/>
+                </a:solidFill>
+                <a:latin typeface="Trebuchet MS" pitchFamily="34" charset="0"/>
+                <a:ea typeface="Trebuchet MS" pitchFamily="34" charset="-122"/>
+                <a:cs typeface="Trebuchet MS" pitchFamily="34" charset="-120"/>
+              </a:rPr>
+              <a:t>field</a:t>
+            </a:r>
+            <a:endParaRPr lang="en-US" sz="1400" dirty="0"/>
+          </a:p>
+        </p:txBody>
+      </p:sp>
+      <p:sp>
+        <p:nvSpPr>
+          <p:cNvPr id="30" name="Shape 28"/>
+          <p:cNvSpPr/>
+          <p:nvPr/>
+        </p:nvSpPr>
+        <p:spPr>
+          <a:xfrm>
+            <a:off x="365760" y="4096512"/>
+            <a:ext cx="1371600" cy="804672"/>
+          </a:xfrm>
+          <a:prstGeom prst="rect">
+            <a:avLst>
+              <a:gd name="adj" fmla="val 6818"/>
+            </a:avLst>
+          </a:prstGeom>
+          <a:solidFill>
+            <a:srgbClr val="E2E8F0"/>
+          </a:solidFill>
+          <a:ln w="12700">
+            <a:solidFill>
+              <a:srgbClr val="E2E8F0"/>
+            </a:solidFill>
+            <a:prstDash val="solid"/>
+          </a:ln>
+        </p:spPr>
+      </p:sp>
+      <p:sp>
+        <p:nvSpPr>
+          <p:cNvPr id="31" name="Text 29"/>
+          <p:cNvSpPr/>
+          <p:nvPr/>
+        </p:nvSpPr>
+        <p:spPr>
+          <a:xfrm>
+            <a:off x="365760" y="4096512"/>
+            <a:ext cx="1371600" cy="804672"/>
+          </a:xfrm>
+          <a:prstGeom prst="rect">
+            <a:avLst/>
+          </a:prstGeom>
+          <a:noFill/>
+          <a:ln/>
+        </p:spPr>
+        <p:txBody>
+          <a:bodyPr wrap="square" lIns="0" tIns="0" rIns="0" bIns="0" rtlCol="0" anchor="ctr"/>
+          <a:lstStyle/>
+          <a:p>
+            <a:pPr algn="ctr" indent="0" marL="0">
+              <a:buNone/>
+            </a:pPr>
+            <a:r>
+              <a:rPr lang="en-US" sz="1100" b="1" dirty="0">
+                <a:solidFill>
+                  <a:srgbClr val="475569"/>
+                </a:solidFill>
+                <a:latin typeface="Trebuchet MS" pitchFamily="34" charset="0"/>
+                <a:ea typeface="Trebuchet MS" pitchFamily="34" charset="-122"/>
+                <a:cs typeface="Trebuchet MS" pitchFamily="34" charset="-120"/>
+              </a:rPr>
+              <a:t>Phonemes</a:t>
             </a:r>
             <a:endParaRPr lang="en-US" sz="1100" dirty="0"/>
           </a:p>
@@ -15191,13 +15111,13 @@
       </p:sp>
       <p:sp>
         <p:nvSpPr>
-          <p:cNvPr id="27" name="Shape 25"/>
-          <p:cNvSpPr/>
-          <p:nvPr/>
-        </p:nvSpPr>
-        <p:spPr>
-          <a:xfrm>
-            <a:off x="1874520" y="3273552"/>
+          <p:cNvPr id="32" name="Shape 30"/>
+          <p:cNvSpPr/>
+          <p:nvPr/>
+        </p:nvSpPr>
+        <p:spPr>
+          <a:xfrm>
+            <a:off x="1874520" y="4096512"/>
             <a:ext cx="6903720" cy="658368"/>
           </a:xfrm>
           <a:prstGeom prst="rect">
@@ -15206,30 +15126,30 @@
             </a:avLst>
           </a:prstGeom>
           <a:solidFill>
-            <a:srgbClr val="CCFBF1"/>
-          </a:solidFill>
-          <a:ln w="12700">
-            <a:solidFill>
-              <a:srgbClr val="0D9488"/>
-            </a:solidFill>
-            <a:prstDash val="solid"/>
-          </a:ln>
-        </p:spPr>
-      </p:sp>
-      <p:sp>
-        <p:nvSpPr>
-          <p:cNvPr id="28" name="Shape 26"/>
-          <p:cNvSpPr/>
-          <p:nvPr/>
-        </p:nvSpPr>
-        <p:spPr>
-          <a:xfrm>
-            <a:off x="2313432" y="3364992"/>
-            <a:ext cx="1645920" cy="475488"/>
+            <a:srgbClr val="FCE7F3"/>
+          </a:solidFill>
+          <a:ln w="12700">
+            <a:solidFill>
+              <a:srgbClr val="DB2777"/>
+            </a:solidFill>
+            <a:prstDash val="solid"/>
+          </a:ln>
+        </p:spPr>
+      </p:sp>
+      <p:sp>
+        <p:nvSpPr>
+          <p:cNvPr id="33" name="Shape 31"/>
+          <p:cNvSpPr/>
+          <p:nvPr/>
+        </p:nvSpPr>
+        <p:spPr>
+          <a:xfrm>
+            <a:off x="2124837" y="4169664"/>
+            <a:ext cx="685800" cy="475488"/>
           </a:xfrm>
           <a:prstGeom prst="rect">
             <a:avLst>
-              <a:gd name="adj" fmla="val 9615"/>
+              <a:gd name="adj" fmla="val 7692"/>
             </a:avLst>
           </a:prstGeom>
           <a:solidFill>
@@ -15237,22 +15157,22 @@
           </a:solidFill>
           <a:ln w="12700">
             <a:solidFill>
-              <a:srgbClr val="0D9488"/>
-            </a:solidFill>
-            <a:prstDash val="solid"/>
-          </a:ln>
-        </p:spPr>
-      </p:sp>
-      <p:sp>
-        <p:nvSpPr>
-          <p:cNvPr id="29" name="Text 27"/>
-          <p:cNvSpPr/>
-          <p:nvPr/>
-        </p:nvSpPr>
-        <p:spPr>
-          <a:xfrm>
-            <a:off x="2313432" y="3364992"/>
-            <a:ext cx="1645920" cy="475488"/>
+              <a:srgbClr val="DB2777"/>
+            </a:solidFill>
+            <a:prstDash val="solid"/>
+          </a:ln>
+        </p:spPr>
+      </p:sp>
+      <p:sp>
+        <p:nvSpPr>
+          <p:cNvPr id="34" name="Text 32"/>
+          <p:cNvSpPr/>
+          <p:nvPr/>
+        </p:nvSpPr>
+        <p:spPr>
+          <a:xfrm>
+            <a:off x="2124837" y="4169664"/>
+            <a:ext cx="685800" cy="475488"/>
           </a:xfrm>
           <a:prstGeom prst="rect">
             <a:avLst/>
@@ -15268,30 +15188,57 @@
               <a:buNone/>
             </a:pPr>
             <a:r>
-              <a:rPr lang="en-US" sz="1400" b="1" dirty="0">
-                <a:solidFill>
-                  <a:srgbClr val="0D9488"/>
+              <a:rPr lang="en-US" sz="900" b="1" dirty="0">
+                <a:solidFill>
+                  <a:srgbClr val="9D174D"/>
                 </a:solidFill>
                 <a:latin typeface="Trebuchet MS" pitchFamily="34" charset="0"/>
                 <a:ea typeface="Trebuchet MS" pitchFamily="34" charset="-122"/>
                 <a:cs typeface="Trebuchet MS" pitchFamily="34" charset="-120"/>
               </a:rPr>
-              <a:t>mid</a:t>
-            </a:r>
-            <a:endParaRPr lang="en-US" sz="1400" dirty="0"/>
-          </a:p>
-        </p:txBody>
-      </p:sp>
-      <p:sp>
-        <p:nvSpPr>
-          <p:cNvPr id="30" name="Text 28"/>
-          <p:cNvSpPr/>
-          <p:nvPr/>
-        </p:nvSpPr>
-        <p:spPr>
-          <a:xfrm>
-            <a:off x="3959352" y="3364992"/>
-            <a:ext cx="411480" cy="475488"/>
+              <a:t>m</a:t>
+            </a:r>
+            <a:endParaRPr lang="en-US" sz="900" dirty="0"/>
+          </a:p>
+        </p:txBody>
+      </p:sp>
+      <p:sp>
+        <p:nvSpPr>
+          <p:cNvPr id="35" name="Shape 33"/>
+          <p:cNvSpPr/>
+          <p:nvPr/>
+        </p:nvSpPr>
+        <p:spPr>
+          <a:xfrm>
+            <a:off x="3033522" y="4169664"/>
+            <a:ext cx="685800" cy="475488"/>
+          </a:xfrm>
+          <a:prstGeom prst="rect">
+            <a:avLst>
+              <a:gd name="adj" fmla="val 7692"/>
+            </a:avLst>
+          </a:prstGeom>
+          <a:solidFill>
+            <a:srgbClr val="FFFFFF"/>
+          </a:solidFill>
+          <a:ln w="12700">
+            <a:solidFill>
+              <a:srgbClr val="DB2777"/>
+            </a:solidFill>
+            <a:prstDash val="solid"/>
+          </a:ln>
+        </p:spPr>
+      </p:sp>
+      <p:sp>
+        <p:nvSpPr>
+          <p:cNvPr id="36" name="Text 34"/>
+          <p:cNvSpPr/>
+          <p:nvPr/>
+        </p:nvSpPr>
+        <p:spPr>
+          <a:xfrm>
+            <a:off x="3033522" y="4169664"/>
+            <a:ext cx="685800" cy="475488"/>
           </a:xfrm>
           <a:prstGeom prst="rect">
             <a:avLst/>
@@ -15307,34 +15254,34 @@
               <a:buNone/>
             </a:pPr>
             <a:r>
-              <a:rPr lang="en-US" sz="1600" b="1" dirty="0">
-                <a:solidFill>
-                  <a:srgbClr val="0D9488"/>
+              <a:rPr lang="en-US" sz="900" b="1" dirty="0">
+                <a:solidFill>
+                  <a:srgbClr val="9D174D"/>
                 </a:solidFill>
                 <a:latin typeface="Trebuchet MS" pitchFamily="34" charset="0"/>
                 <a:ea typeface="Trebuchet MS" pitchFamily="34" charset="-122"/>
                 <a:cs typeface="Trebuchet MS" pitchFamily="34" charset="-120"/>
               </a:rPr>
-              <a:t>·</a:t>
-            </a:r>
-            <a:endParaRPr lang="en-US" sz="1600" dirty="0"/>
-          </a:p>
-        </p:txBody>
-      </p:sp>
-      <p:sp>
-        <p:nvSpPr>
-          <p:cNvPr id="31" name="Shape 29"/>
-          <p:cNvSpPr/>
-          <p:nvPr/>
-        </p:nvSpPr>
-        <p:spPr>
-          <a:xfrm>
-            <a:off x="4370832" y="3364992"/>
-            <a:ext cx="1645920" cy="475488"/>
+              <a:t>i</a:t>
+            </a:r>
+            <a:endParaRPr lang="en-US" sz="900" dirty="0"/>
+          </a:p>
+        </p:txBody>
+      </p:sp>
+      <p:sp>
+        <p:nvSpPr>
+          <p:cNvPr id="37" name="Shape 35"/>
+          <p:cNvSpPr/>
+          <p:nvPr/>
+        </p:nvSpPr>
+        <p:spPr>
+          <a:xfrm>
+            <a:off x="3942207" y="4169664"/>
+            <a:ext cx="685800" cy="475488"/>
           </a:xfrm>
           <a:prstGeom prst="rect">
             <a:avLst>
-              <a:gd name="adj" fmla="val 9615"/>
+              <a:gd name="adj" fmla="val 7692"/>
             </a:avLst>
           </a:prstGeom>
           <a:solidFill>
@@ -15342,22 +15289,22 @@
           </a:solidFill>
           <a:ln w="12700">
             <a:solidFill>
-              <a:srgbClr val="0D9488"/>
-            </a:solidFill>
-            <a:prstDash val="solid"/>
-          </a:ln>
-        </p:spPr>
-      </p:sp>
-      <p:sp>
-        <p:nvSpPr>
-          <p:cNvPr id="32" name="Text 30"/>
-          <p:cNvSpPr/>
-          <p:nvPr/>
-        </p:nvSpPr>
-        <p:spPr>
-          <a:xfrm>
-            <a:off x="4370832" y="3364992"/>
-            <a:ext cx="1645920" cy="475488"/>
+              <a:srgbClr val="DB2777"/>
+            </a:solidFill>
+            <a:prstDash val="solid"/>
+          </a:ln>
+        </p:spPr>
+      </p:sp>
+      <p:sp>
+        <p:nvSpPr>
+          <p:cNvPr id="38" name="Text 36"/>
+          <p:cNvSpPr/>
+          <p:nvPr/>
+        </p:nvSpPr>
+        <p:spPr>
+          <a:xfrm>
+            <a:off x="3942207" y="4169664"/>
+            <a:ext cx="685800" cy="475488"/>
           </a:xfrm>
           <a:prstGeom prst="rect">
             <a:avLst/>
@@ -15373,30 +15320,57 @@
               <a:buNone/>
             </a:pPr>
             <a:r>
-              <a:rPr lang="en-US" sz="1400" b="1" dirty="0">
-                <a:solidFill>
-                  <a:srgbClr val="0D9488"/>
+              <a:rPr lang="en-US" sz="900" b="1" dirty="0">
+                <a:solidFill>
+                  <a:srgbClr val="9D174D"/>
                 </a:solidFill>
                 <a:latin typeface="Trebuchet MS" pitchFamily="34" charset="0"/>
                 <a:ea typeface="Trebuchet MS" pitchFamily="34" charset="-122"/>
                 <a:cs typeface="Trebuchet MS" pitchFamily="34" charset="-120"/>
               </a:rPr>
-              <a:t>field</a:t>
-            </a:r>
-            <a:endParaRPr lang="en-US" sz="1400" dirty="0"/>
-          </a:p>
-        </p:txBody>
-      </p:sp>
-      <p:sp>
-        <p:nvSpPr>
-          <p:cNvPr id="33" name="Text 31"/>
-          <p:cNvSpPr/>
-          <p:nvPr/>
-        </p:nvSpPr>
-        <p:spPr>
-          <a:xfrm>
-            <a:off x="6016752" y="3364992"/>
-            <a:ext cx="411480" cy="475488"/>
+              <a:t>d</a:t>
+            </a:r>
+            <a:endParaRPr lang="en-US" sz="900" dirty="0"/>
+          </a:p>
+        </p:txBody>
+      </p:sp>
+      <p:sp>
+        <p:nvSpPr>
+          <p:cNvPr id="39" name="Shape 37"/>
+          <p:cNvSpPr/>
+          <p:nvPr/>
+        </p:nvSpPr>
+        <p:spPr>
+          <a:xfrm>
+            <a:off x="4850892" y="4169664"/>
+            <a:ext cx="685800" cy="475488"/>
+          </a:xfrm>
+          <a:prstGeom prst="rect">
+            <a:avLst>
+              <a:gd name="adj" fmla="val 7692"/>
+            </a:avLst>
+          </a:prstGeom>
+          <a:solidFill>
+            <a:srgbClr val="FFFFFF"/>
+          </a:solidFill>
+          <a:ln w="12700">
+            <a:solidFill>
+              <a:srgbClr val="DB2777"/>
+            </a:solidFill>
+            <a:prstDash val="solid"/>
+          </a:ln>
+        </p:spPr>
+      </p:sp>
+      <p:sp>
+        <p:nvSpPr>
+          <p:cNvPr id="40" name="Text 38"/>
+          <p:cNvSpPr/>
+          <p:nvPr/>
+        </p:nvSpPr>
+        <p:spPr>
+          <a:xfrm>
+            <a:off x="4850892" y="4169664"/>
+            <a:ext cx="685800" cy="475488"/>
           </a:xfrm>
           <a:prstGeom prst="rect">
             <a:avLst/>
@@ -15412,34 +15386,34 @@
               <a:buNone/>
             </a:pPr>
             <a:r>
-              <a:rPr lang="en-US" sz="1600" b="1" dirty="0">
-                <a:solidFill>
-                  <a:srgbClr val="0D9488"/>
+              <a:rPr lang="en-US" sz="900" b="1" dirty="0">
+                <a:solidFill>
+                  <a:srgbClr val="9D174D"/>
                 </a:solidFill>
                 <a:latin typeface="Trebuchet MS" pitchFamily="34" charset="0"/>
                 <a:ea typeface="Trebuchet MS" pitchFamily="34" charset="-122"/>
                 <a:cs typeface="Trebuchet MS" pitchFamily="34" charset="-120"/>
               </a:rPr>
-              <a:t>·</a:t>
-            </a:r>
-            <a:endParaRPr lang="en-US" sz="1600" dirty="0"/>
-          </a:p>
-        </p:txBody>
-      </p:sp>
-      <p:sp>
-        <p:nvSpPr>
-          <p:cNvPr id="34" name="Shape 32"/>
-          <p:cNvSpPr/>
-          <p:nvPr/>
-        </p:nvSpPr>
-        <p:spPr>
-          <a:xfrm>
-            <a:off x="6428232" y="3364992"/>
-            <a:ext cx="1645920" cy="475488"/>
+              <a:t>f</a:t>
+            </a:r>
+            <a:endParaRPr lang="en-US" sz="900" dirty="0"/>
+          </a:p>
+        </p:txBody>
+      </p:sp>
+      <p:sp>
+        <p:nvSpPr>
+          <p:cNvPr id="41" name="Shape 39"/>
+          <p:cNvSpPr/>
+          <p:nvPr/>
+        </p:nvSpPr>
+        <p:spPr>
+          <a:xfrm>
+            <a:off x="5759577" y="4169664"/>
+            <a:ext cx="685800" cy="475488"/>
           </a:xfrm>
           <a:prstGeom prst="rect">
             <a:avLst>
-              <a:gd name="adj" fmla="val 9615"/>
+              <a:gd name="adj" fmla="val 7692"/>
             </a:avLst>
           </a:prstGeom>
           <a:solidFill>
@@ -15447,22 +15421,22 @@
           </a:solidFill>
           <a:ln w="12700">
             <a:solidFill>
-              <a:srgbClr val="0D9488"/>
-            </a:solidFill>
-            <a:prstDash val="solid"/>
-          </a:ln>
-        </p:spPr>
-      </p:sp>
-      <p:sp>
-        <p:nvSpPr>
-          <p:cNvPr id="35" name="Text 33"/>
-          <p:cNvSpPr/>
-          <p:nvPr/>
-        </p:nvSpPr>
-        <p:spPr>
-          <a:xfrm>
-            <a:off x="6428232" y="3364992"/>
-            <a:ext cx="1645920" cy="475488"/>
+              <a:srgbClr val="DB2777"/>
+            </a:solidFill>
+            <a:prstDash val="solid"/>
+          </a:ln>
+        </p:spPr>
+      </p:sp>
+      <p:sp>
+        <p:nvSpPr>
+          <p:cNvPr id="42" name="Text 40"/>
+          <p:cNvSpPr/>
+          <p:nvPr/>
+        </p:nvSpPr>
+        <p:spPr>
+          <a:xfrm>
+            <a:off x="5759577" y="4169664"/>
+            <a:ext cx="685800" cy="475488"/>
           </a:xfrm>
           <a:prstGeom prst="rect">
             <a:avLst/>
@@ -15478,57 +15452,57 @@
               <a:buNone/>
             </a:pPr>
             <a:r>
-              <a:rPr lang="en-US" sz="1400" b="1" dirty="0">
-                <a:solidFill>
-                  <a:srgbClr val="0D9488"/>
+              <a:rPr lang="en-US" sz="900" b="1" dirty="0">
+                <a:solidFill>
+                  <a:srgbClr val="9D174D"/>
                 </a:solidFill>
                 <a:latin typeface="Trebuchet MS" pitchFamily="34" charset="0"/>
                 <a:ea typeface="Trebuchet MS" pitchFamily="34" charset="-122"/>
                 <a:cs typeface="Trebuchet MS" pitchFamily="34" charset="-120"/>
               </a:rPr>
-              <a:t>er</a:t>
-            </a:r>
-            <a:endParaRPr lang="en-US" sz="1400" dirty="0"/>
-          </a:p>
-        </p:txBody>
-      </p:sp>
-      <p:sp>
-        <p:nvSpPr>
-          <p:cNvPr id="36" name="Shape 34"/>
-          <p:cNvSpPr/>
-          <p:nvPr/>
-        </p:nvSpPr>
-        <p:spPr>
-          <a:xfrm>
-            <a:off x="365760" y="4096512"/>
-            <a:ext cx="1371600" cy="804672"/>
+              <a:t>ie</a:t>
+            </a:r>
+            <a:endParaRPr lang="en-US" sz="900" dirty="0"/>
+          </a:p>
+        </p:txBody>
+      </p:sp>
+      <p:sp>
+        <p:nvSpPr>
+          <p:cNvPr id="43" name="Shape 41"/>
+          <p:cNvSpPr/>
+          <p:nvPr/>
+        </p:nvSpPr>
+        <p:spPr>
+          <a:xfrm>
+            <a:off x="6668262" y="4169664"/>
+            <a:ext cx="685800" cy="475488"/>
           </a:xfrm>
           <a:prstGeom prst="rect">
             <a:avLst>
-              <a:gd name="adj" fmla="val 6818"/>
+              <a:gd name="adj" fmla="val 7692"/>
             </a:avLst>
           </a:prstGeom>
           <a:solidFill>
-            <a:srgbClr val="E2E8F0"/>
-          </a:solidFill>
-          <a:ln w="12700">
-            <a:solidFill>
-              <a:srgbClr val="E2E8F0"/>
-            </a:solidFill>
-            <a:prstDash val="solid"/>
-          </a:ln>
-        </p:spPr>
-      </p:sp>
-      <p:sp>
-        <p:nvSpPr>
-          <p:cNvPr id="37" name="Text 35"/>
-          <p:cNvSpPr/>
-          <p:nvPr/>
-        </p:nvSpPr>
-        <p:spPr>
-          <a:xfrm>
-            <a:off x="365760" y="4096512"/>
-            <a:ext cx="1371600" cy="804672"/>
+            <a:srgbClr val="FFFFFF"/>
+          </a:solidFill>
+          <a:ln w="12700">
+            <a:solidFill>
+              <a:srgbClr val="DB2777"/>
+            </a:solidFill>
+            <a:prstDash val="solid"/>
+          </a:ln>
+        </p:spPr>
+      </p:sp>
+      <p:sp>
+        <p:nvSpPr>
+          <p:cNvPr id="44" name="Text 42"/>
+          <p:cNvSpPr/>
+          <p:nvPr/>
+        </p:nvSpPr>
+        <p:spPr>
+          <a:xfrm>
+            <a:off x="6668262" y="4169664"/>
+            <a:ext cx="685800" cy="475488"/>
           </a:xfrm>
           <a:prstGeom prst="rect">
             <a:avLst/>
@@ -15544,56 +15518,29 @@
               <a:buNone/>
             </a:pPr>
             <a:r>
-              <a:rPr lang="en-US" sz="1100" b="1" dirty="0">
-                <a:solidFill>
-                  <a:srgbClr val="475569"/>
+              <a:rPr lang="en-US" sz="900" b="1" dirty="0">
+                <a:solidFill>
+                  <a:srgbClr val="9D174D"/>
                 </a:solidFill>
                 <a:latin typeface="Trebuchet MS" pitchFamily="34" charset="0"/>
                 <a:ea typeface="Trebuchet MS" pitchFamily="34" charset="-122"/>
                 <a:cs typeface="Trebuchet MS" pitchFamily="34" charset="-120"/>
               </a:rPr>
-              <a:t>Phonemes</a:t>
-            </a:r>
-            <a:endParaRPr lang="en-US" sz="1100" dirty="0"/>
-          </a:p>
-        </p:txBody>
-      </p:sp>
-      <p:sp>
-        <p:nvSpPr>
-          <p:cNvPr id="38" name="Shape 36"/>
-          <p:cNvSpPr/>
-          <p:nvPr/>
-        </p:nvSpPr>
-        <p:spPr>
-          <a:xfrm>
-            <a:off x="1874520" y="4096512"/>
-            <a:ext cx="6903720" cy="658368"/>
-          </a:xfrm>
-          <a:prstGeom prst="rect">
-            <a:avLst>
-              <a:gd name="adj" fmla="val 8333"/>
-            </a:avLst>
-          </a:prstGeom>
-          <a:solidFill>
-            <a:srgbClr val="FCE7F3"/>
-          </a:solidFill>
-          <a:ln w="12700">
-            <a:solidFill>
-              <a:srgbClr val="DB2777"/>
-            </a:solidFill>
-            <a:prstDash val="solid"/>
-          </a:ln>
-        </p:spPr>
-      </p:sp>
-      <p:sp>
-        <p:nvSpPr>
-          <p:cNvPr id="39" name="Shape 37"/>
-          <p:cNvSpPr/>
-          <p:nvPr/>
-        </p:nvSpPr>
-        <p:spPr>
-          <a:xfrm>
-            <a:off x="2023872" y="4169664"/>
+              <a:t>l</a:t>
+            </a:r>
+            <a:endParaRPr lang="en-US" sz="900" dirty="0"/>
+          </a:p>
+        </p:txBody>
+      </p:sp>
+      <p:sp>
+        <p:nvSpPr>
+          <p:cNvPr id="45" name="Shape 43"/>
+          <p:cNvSpPr/>
+          <p:nvPr/>
+        </p:nvSpPr>
+        <p:spPr>
+          <a:xfrm>
+            <a:off x="7576947" y="4169664"/>
             <a:ext cx="685800" cy="475488"/>
           </a:xfrm>
           <a:prstGeom prst="rect">
@@ -15614,13 +15561,13 @@
       </p:sp>
       <p:sp>
         <p:nvSpPr>
-          <p:cNvPr id="40" name="Text 38"/>
-          <p:cNvSpPr/>
-          <p:nvPr/>
-        </p:nvSpPr>
-        <p:spPr>
-          <a:xfrm>
-            <a:off x="2023872" y="4169664"/>
+          <p:cNvPr id="46" name="Text 44"/>
+          <p:cNvSpPr/>
+          <p:nvPr/>
+        </p:nvSpPr>
+        <p:spPr>
+          <a:xfrm>
+            <a:off x="7576947" y="4169664"/>
             <a:ext cx="685800" cy="475488"/>
           </a:xfrm>
           <a:prstGeom prst="rect">
@@ -15645,469 +15592,7 @@
                 <a:ea typeface="Trebuchet MS" pitchFamily="34" charset="-122"/>
                 <a:cs typeface="Trebuchet MS" pitchFamily="34" charset="-120"/>
               </a:rPr>
-              <a:t>m</a:t>
-            </a:r>
-            <a:endParaRPr lang="en-US" sz="900" dirty="0"/>
-          </a:p>
-        </p:txBody>
-      </p:sp>
-      <p:sp>
-        <p:nvSpPr>
-          <p:cNvPr id="41" name="Shape 39"/>
-          <p:cNvSpPr/>
-          <p:nvPr/>
-        </p:nvSpPr>
-        <p:spPr>
-          <a:xfrm>
-            <a:off x="2831592" y="4169664"/>
-            <a:ext cx="685800" cy="475488"/>
-          </a:xfrm>
-          <a:prstGeom prst="rect">
-            <a:avLst>
-              <a:gd name="adj" fmla="val 7692"/>
-            </a:avLst>
-          </a:prstGeom>
-          <a:solidFill>
-            <a:srgbClr val="FFFFFF"/>
-          </a:solidFill>
-          <a:ln w="12700">
-            <a:solidFill>
-              <a:srgbClr val="DB2777"/>
-            </a:solidFill>
-            <a:prstDash val="solid"/>
-          </a:ln>
-        </p:spPr>
-      </p:sp>
-      <p:sp>
-        <p:nvSpPr>
-          <p:cNvPr id="42" name="Text 40"/>
-          <p:cNvSpPr/>
-          <p:nvPr/>
-        </p:nvSpPr>
-        <p:spPr>
-          <a:xfrm>
-            <a:off x="2831592" y="4169664"/>
-            <a:ext cx="685800" cy="475488"/>
-          </a:xfrm>
-          <a:prstGeom prst="rect">
-            <a:avLst/>
-          </a:prstGeom>
-          <a:noFill/>
-          <a:ln/>
-        </p:spPr>
-        <p:txBody>
-          <a:bodyPr wrap="square" lIns="0" tIns="0" rIns="0" bIns="0" rtlCol="0" anchor="ctr"/>
-          <a:lstStyle/>
-          <a:p>
-            <a:pPr algn="ctr" indent="0" marL="0">
-              <a:buNone/>
-            </a:pPr>
-            <a:r>
-              <a:rPr lang="en-US" sz="900" b="1" dirty="0">
-                <a:solidFill>
-                  <a:srgbClr val="9D174D"/>
-                </a:solidFill>
-                <a:latin typeface="Trebuchet MS" pitchFamily="34" charset="0"/>
-                <a:ea typeface="Trebuchet MS" pitchFamily="34" charset="-122"/>
-                <a:cs typeface="Trebuchet MS" pitchFamily="34" charset="-120"/>
-              </a:rPr>
-              <a:t>i</a:t>
-            </a:r>
-            <a:endParaRPr lang="en-US" sz="900" dirty="0"/>
-          </a:p>
-        </p:txBody>
-      </p:sp>
-      <p:sp>
-        <p:nvSpPr>
-          <p:cNvPr id="43" name="Shape 41"/>
-          <p:cNvSpPr/>
-          <p:nvPr/>
-        </p:nvSpPr>
-        <p:spPr>
-          <a:xfrm>
-            <a:off x="3639312" y="4169664"/>
-            <a:ext cx="685800" cy="475488"/>
-          </a:xfrm>
-          <a:prstGeom prst="rect">
-            <a:avLst>
-              <a:gd name="adj" fmla="val 7692"/>
-            </a:avLst>
-          </a:prstGeom>
-          <a:solidFill>
-            <a:srgbClr val="FFFFFF"/>
-          </a:solidFill>
-          <a:ln w="12700">
-            <a:solidFill>
-              <a:srgbClr val="DB2777"/>
-            </a:solidFill>
-            <a:prstDash val="solid"/>
-          </a:ln>
-        </p:spPr>
-      </p:sp>
-      <p:sp>
-        <p:nvSpPr>
-          <p:cNvPr id="44" name="Text 42"/>
-          <p:cNvSpPr/>
-          <p:nvPr/>
-        </p:nvSpPr>
-        <p:spPr>
-          <a:xfrm>
-            <a:off x="3639312" y="4169664"/>
-            <a:ext cx="685800" cy="475488"/>
-          </a:xfrm>
-          <a:prstGeom prst="rect">
-            <a:avLst/>
-          </a:prstGeom>
-          <a:noFill/>
-          <a:ln/>
-        </p:spPr>
-        <p:txBody>
-          <a:bodyPr wrap="square" lIns="0" tIns="0" rIns="0" bIns="0" rtlCol="0" anchor="ctr"/>
-          <a:lstStyle/>
-          <a:p>
-            <a:pPr algn="ctr" indent="0" marL="0">
-              <a:buNone/>
-            </a:pPr>
-            <a:r>
-              <a:rPr lang="en-US" sz="900" b="1" dirty="0">
-                <a:solidFill>
-                  <a:srgbClr val="9D174D"/>
-                </a:solidFill>
-                <a:latin typeface="Trebuchet MS" pitchFamily="34" charset="0"/>
-                <a:ea typeface="Trebuchet MS" pitchFamily="34" charset="-122"/>
-                <a:cs typeface="Trebuchet MS" pitchFamily="34" charset="-120"/>
-              </a:rPr>
               <a:t>d</a:t>
-            </a:r>
-            <a:endParaRPr lang="en-US" sz="900" dirty="0"/>
-          </a:p>
-        </p:txBody>
-      </p:sp>
-      <p:sp>
-        <p:nvSpPr>
-          <p:cNvPr id="45" name="Shape 43"/>
-          <p:cNvSpPr/>
-          <p:nvPr/>
-        </p:nvSpPr>
-        <p:spPr>
-          <a:xfrm>
-            <a:off x="4447032" y="4169664"/>
-            <a:ext cx="685800" cy="475488"/>
-          </a:xfrm>
-          <a:prstGeom prst="rect">
-            <a:avLst>
-              <a:gd name="adj" fmla="val 7692"/>
-            </a:avLst>
-          </a:prstGeom>
-          <a:solidFill>
-            <a:srgbClr val="FFFFFF"/>
-          </a:solidFill>
-          <a:ln w="12700">
-            <a:solidFill>
-              <a:srgbClr val="DB2777"/>
-            </a:solidFill>
-            <a:prstDash val="solid"/>
-          </a:ln>
-        </p:spPr>
-      </p:sp>
-      <p:sp>
-        <p:nvSpPr>
-          <p:cNvPr id="46" name="Text 44"/>
-          <p:cNvSpPr/>
-          <p:nvPr/>
-        </p:nvSpPr>
-        <p:spPr>
-          <a:xfrm>
-            <a:off x="4447032" y="4169664"/>
-            <a:ext cx="685800" cy="475488"/>
-          </a:xfrm>
-          <a:prstGeom prst="rect">
-            <a:avLst/>
-          </a:prstGeom>
-          <a:noFill/>
-          <a:ln/>
-        </p:spPr>
-        <p:txBody>
-          <a:bodyPr wrap="square" lIns="0" tIns="0" rIns="0" bIns="0" rtlCol="0" anchor="ctr"/>
-          <a:lstStyle/>
-          <a:p>
-            <a:pPr algn="ctr" indent="0" marL="0">
-              <a:buNone/>
-            </a:pPr>
-            <a:r>
-              <a:rPr lang="en-US" sz="900" b="1" dirty="0">
-                <a:solidFill>
-                  <a:srgbClr val="9D174D"/>
-                </a:solidFill>
-                <a:latin typeface="Trebuchet MS" pitchFamily="34" charset="0"/>
-                <a:ea typeface="Trebuchet MS" pitchFamily="34" charset="-122"/>
-                <a:cs typeface="Trebuchet MS" pitchFamily="34" charset="-120"/>
-              </a:rPr>
-              <a:t>f</a:t>
-            </a:r>
-            <a:endParaRPr lang="en-US" sz="900" dirty="0"/>
-          </a:p>
-        </p:txBody>
-      </p:sp>
-      <p:sp>
-        <p:nvSpPr>
-          <p:cNvPr id="47" name="Shape 45"/>
-          <p:cNvSpPr/>
-          <p:nvPr/>
-        </p:nvSpPr>
-        <p:spPr>
-          <a:xfrm>
-            <a:off x="5254752" y="4169664"/>
-            <a:ext cx="685800" cy="475488"/>
-          </a:xfrm>
-          <a:prstGeom prst="rect">
-            <a:avLst>
-              <a:gd name="adj" fmla="val 7692"/>
-            </a:avLst>
-          </a:prstGeom>
-          <a:solidFill>
-            <a:srgbClr val="FFFFFF"/>
-          </a:solidFill>
-          <a:ln w="12700">
-            <a:solidFill>
-              <a:srgbClr val="DB2777"/>
-            </a:solidFill>
-            <a:prstDash val="solid"/>
-          </a:ln>
-        </p:spPr>
-      </p:sp>
-      <p:sp>
-        <p:nvSpPr>
-          <p:cNvPr id="48" name="Text 46"/>
-          <p:cNvSpPr/>
-          <p:nvPr/>
-        </p:nvSpPr>
-        <p:spPr>
-          <a:xfrm>
-            <a:off x="5254752" y="4169664"/>
-            <a:ext cx="685800" cy="475488"/>
-          </a:xfrm>
-          <a:prstGeom prst="rect">
-            <a:avLst/>
-          </a:prstGeom>
-          <a:noFill/>
-          <a:ln/>
-        </p:spPr>
-        <p:txBody>
-          <a:bodyPr wrap="square" lIns="0" tIns="0" rIns="0" bIns="0" rtlCol="0" anchor="ctr"/>
-          <a:lstStyle/>
-          <a:p>
-            <a:pPr algn="ctr" indent="0" marL="0">
-              <a:buNone/>
-            </a:pPr>
-            <a:r>
-              <a:rPr lang="en-US" sz="900" b="1" dirty="0">
-                <a:solidFill>
-                  <a:srgbClr val="9D174D"/>
-                </a:solidFill>
-                <a:latin typeface="Trebuchet MS" pitchFamily="34" charset="0"/>
-                <a:ea typeface="Trebuchet MS" pitchFamily="34" charset="-122"/>
-                <a:cs typeface="Trebuchet MS" pitchFamily="34" charset="-120"/>
-              </a:rPr>
-              <a:t>ie</a:t>
-            </a:r>
-            <a:endParaRPr lang="en-US" sz="900" dirty="0"/>
-          </a:p>
-        </p:txBody>
-      </p:sp>
-      <p:sp>
-        <p:nvSpPr>
-          <p:cNvPr id="49" name="Shape 47"/>
-          <p:cNvSpPr/>
-          <p:nvPr/>
-        </p:nvSpPr>
-        <p:spPr>
-          <a:xfrm>
-            <a:off x="6062472" y="4169664"/>
-            <a:ext cx="685800" cy="475488"/>
-          </a:xfrm>
-          <a:prstGeom prst="rect">
-            <a:avLst>
-              <a:gd name="adj" fmla="val 7692"/>
-            </a:avLst>
-          </a:prstGeom>
-          <a:solidFill>
-            <a:srgbClr val="FFFFFF"/>
-          </a:solidFill>
-          <a:ln w="12700">
-            <a:solidFill>
-              <a:srgbClr val="DB2777"/>
-            </a:solidFill>
-            <a:prstDash val="solid"/>
-          </a:ln>
-        </p:spPr>
-      </p:sp>
-      <p:sp>
-        <p:nvSpPr>
-          <p:cNvPr id="50" name="Text 48"/>
-          <p:cNvSpPr/>
-          <p:nvPr/>
-        </p:nvSpPr>
-        <p:spPr>
-          <a:xfrm>
-            <a:off x="6062472" y="4169664"/>
-            <a:ext cx="685800" cy="475488"/>
-          </a:xfrm>
-          <a:prstGeom prst="rect">
-            <a:avLst/>
-          </a:prstGeom>
-          <a:noFill/>
-          <a:ln/>
-        </p:spPr>
-        <p:txBody>
-          <a:bodyPr wrap="square" lIns="0" tIns="0" rIns="0" bIns="0" rtlCol="0" anchor="ctr"/>
-          <a:lstStyle/>
-          <a:p>
-            <a:pPr algn="ctr" indent="0" marL="0">
-              <a:buNone/>
-            </a:pPr>
-            <a:r>
-              <a:rPr lang="en-US" sz="900" b="1" dirty="0">
-                <a:solidFill>
-                  <a:srgbClr val="9D174D"/>
-                </a:solidFill>
-                <a:latin typeface="Trebuchet MS" pitchFamily="34" charset="0"/>
-                <a:ea typeface="Trebuchet MS" pitchFamily="34" charset="-122"/>
-                <a:cs typeface="Trebuchet MS" pitchFamily="34" charset="-120"/>
-              </a:rPr>
-              <a:t>l</a:t>
-            </a:r>
-            <a:endParaRPr lang="en-US" sz="900" dirty="0"/>
-          </a:p>
-        </p:txBody>
-      </p:sp>
-      <p:sp>
-        <p:nvSpPr>
-          <p:cNvPr id="51" name="Shape 49"/>
-          <p:cNvSpPr/>
-          <p:nvPr/>
-        </p:nvSpPr>
-        <p:spPr>
-          <a:xfrm>
-            <a:off x="6870192" y="4169664"/>
-            <a:ext cx="685800" cy="475488"/>
-          </a:xfrm>
-          <a:prstGeom prst="rect">
-            <a:avLst>
-              <a:gd name="adj" fmla="val 7692"/>
-            </a:avLst>
-          </a:prstGeom>
-          <a:solidFill>
-            <a:srgbClr val="FFFFFF"/>
-          </a:solidFill>
-          <a:ln w="12700">
-            <a:solidFill>
-              <a:srgbClr val="DB2777"/>
-            </a:solidFill>
-            <a:prstDash val="solid"/>
-          </a:ln>
-        </p:spPr>
-      </p:sp>
-      <p:sp>
-        <p:nvSpPr>
-          <p:cNvPr id="52" name="Text 50"/>
-          <p:cNvSpPr/>
-          <p:nvPr/>
-        </p:nvSpPr>
-        <p:spPr>
-          <a:xfrm>
-            <a:off x="6870192" y="4169664"/>
-            <a:ext cx="685800" cy="475488"/>
-          </a:xfrm>
-          <a:prstGeom prst="rect">
-            <a:avLst/>
-          </a:prstGeom>
-          <a:noFill/>
-          <a:ln/>
-        </p:spPr>
-        <p:txBody>
-          <a:bodyPr wrap="square" lIns="0" tIns="0" rIns="0" bIns="0" rtlCol="0" anchor="ctr"/>
-          <a:lstStyle/>
-          <a:p>
-            <a:pPr algn="ctr" indent="0" marL="0">
-              <a:buNone/>
-            </a:pPr>
-            <a:r>
-              <a:rPr lang="en-US" sz="900" b="1" dirty="0">
-                <a:solidFill>
-                  <a:srgbClr val="9D174D"/>
-                </a:solidFill>
-                <a:latin typeface="Trebuchet MS" pitchFamily="34" charset="0"/>
-                <a:ea typeface="Trebuchet MS" pitchFamily="34" charset="-122"/>
-                <a:cs typeface="Trebuchet MS" pitchFamily="34" charset="-120"/>
-              </a:rPr>
-              <a:t>d</a:t>
-            </a:r>
-            <a:endParaRPr lang="en-US" sz="900" dirty="0"/>
-          </a:p>
-        </p:txBody>
-      </p:sp>
-      <p:sp>
-        <p:nvSpPr>
-          <p:cNvPr id="53" name="Shape 51"/>
-          <p:cNvSpPr/>
-          <p:nvPr/>
-        </p:nvSpPr>
-        <p:spPr>
-          <a:xfrm>
-            <a:off x="7677912" y="4169664"/>
-            <a:ext cx="685800" cy="475488"/>
-          </a:xfrm>
-          <a:prstGeom prst="rect">
-            <a:avLst>
-              <a:gd name="adj" fmla="val 7692"/>
-            </a:avLst>
-          </a:prstGeom>
-          <a:solidFill>
-            <a:srgbClr val="FFFFFF"/>
-          </a:solidFill>
-          <a:ln w="12700">
-            <a:solidFill>
-              <a:srgbClr val="DB2777"/>
-            </a:solidFill>
-            <a:prstDash val="solid"/>
-          </a:ln>
-        </p:spPr>
-      </p:sp>
-      <p:sp>
-        <p:nvSpPr>
-          <p:cNvPr id="54" name="Text 52"/>
-          <p:cNvSpPr/>
-          <p:nvPr/>
-        </p:nvSpPr>
-        <p:spPr>
-          <a:xfrm>
-            <a:off x="7677912" y="4169664"/>
-            <a:ext cx="685800" cy="475488"/>
-          </a:xfrm>
-          <a:prstGeom prst="rect">
-            <a:avLst/>
-          </a:prstGeom>
-          <a:noFill/>
-          <a:ln/>
-        </p:spPr>
-        <p:txBody>
-          <a:bodyPr wrap="square" lIns="0" tIns="0" rIns="0" bIns="0" rtlCol="0" anchor="ctr"/>
-          <a:lstStyle/>
-          <a:p>
-            <a:pPr algn="ctr" indent="0" marL="0">
-              <a:buNone/>
-            </a:pPr>
-            <a:r>
-              <a:rPr lang="en-US" sz="900" b="1" dirty="0">
-                <a:solidFill>
-                  <a:srgbClr val="9D174D"/>
-                </a:solidFill>
-                <a:latin typeface="Trebuchet MS" pitchFamily="34" charset="0"/>
-                <a:ea typeface="Trebuchet MS" pitchFamily="34" charset="-122"/>
-                <a:cs typeface="Trebuchet MS" pitchFamily="34" charset="-120"/>
-              </a:rPr>
-              <a:t>er</a:t>
             </a:r>
             <a:endParaRPr lang="en-US" sz="900" dirty="0"/>
           </a:p>
@@ -16681,7 +16166,7 @@
                 <a:ea typeface="Calibri" pitchFamily="34" charset="-122"/>
                 <a:cs typeface="Calibri" pitchFamily="34" charset="-120"/>
               </a:rPr>
-              <a:t>Word Labs  •  wordlabs.app  •  Prefix: 'mid-' = middle, in the middle</a:t>
+              <a:t>Word Labs  •  wordlabs.app  •  Prefix: 'mid-' = middle</a:t>
             </a:r>
             <a:endParaRPr lang="en-US" sz="800" dirty="0"/>
           </a:p>
@@ -17015,7 +16500,7 @@
                 <a:ea typeface="Trebuchet MS" pitchFamily="34" charset="-122"/>
                 <a:cs typeface="Trebuchet MS" pitchFamily="34" charset="-120"/>
               </a:rPr>
-              <a:t>2</a:t>
+              <a:t>0</a:t>
             </a:r>
             <a:pPr algn="ctr" indent="0" marL="0">
               <a:buNone/>
@@ -17029,7 +16514,7 @@
                 <a:ea typeface="Trebuchet MS" pitchFamily="34" charset="-122"/>
                 <a:cs typeface="Trebuchet MS" pitchFamily="34" charset="-120"/>
               </a:rPr>
-              <a:t>  punctuation marks</a:t>
+              <a:t>  punctuation mark</a:t>
             </a:r>
             <a:endParaRPr lang="en-US" sz="2800" dirty="0"/>
           </a:p>
@@ -17321,7 +16806,7 @@
                 <a:ea typeface="Calibri" pitchFamily="34" charset="-122"/>
                 <a:cs typeface="Calibri" pitchFamily="34" charset="-120"/>
               </a:rPr>
-              <a:t>Word Labs  •  wordlabs.app  •  Prefix: 'mid-' = middle, in the middle</a:t>
+              <a:t>Word Labs  •  wordlabs.app  •  Prefix: 'mid-' = middle</a:t>
             </a:r>
             <a:endParaRPr lang="en-US" sz="800" dirty="0"/>
           </a:p>
@@ -17433,7 +16918,7 @@
                 <a:ea typeface="Calibri" pitchFamily="34" charset="-122"/>
                 <a:cs typeface="Calibri" pitchFamily="34" charset="-120"/>
               </a:rPr>
-              <a:t>On </a:t>
+              <a:t>Birmingham is a big city in the </a:t>
             </a:r>
             <a:pPr algn="l" indent="0" marL="0">
               <a:buNone/>
@@ -17450,7 +16935,7 @@
                 <a:ea typeface="Calibri" pitchFamily="34" charset="-122"/>
                 <a:cs typeface="Calibri" pitchFamily="34" charset="-120"/>
               </a:rPr>
-              <a:t>midsummer</a:t>
+              <a:t>midlands</a:t>
             </a:r>
             <a:pPr algn="l" indent="0" marL="0">
               <a:buNone/>
@@ -17464,7 +16949,7 @@
                 <a:ea typeface="Calibri" pitchFamily="34" charset="-122"/>
                 <a:cs typeface="Calibri" pitchFamily="34" charset="-120"/>
               </a:rPr>
-              <a:t> evenings, we stayed up past </a:t>
+              <a:t> of England. The clock struck </a:t>
             </a:r>
             <a:pPr algn="l" indent="0" marL="0">
               <a:buNone/>
@@ -17495,7 +16980,7 @@
                 <a:ea typeface="Calibri" pitchFamily="34" charset="-122"/>
                 <a:cs typeface="Calibri" pitchFamily="34" charset="-120"/>
               </a:rPr>
-              <a:t> and walked the </a:t>
+              <a:t> and the new year began. The rest stop was at the </a:t>
             </a:r>
             <a:pPr algn="l" indent="0" marL="0">
               <a:buNone/>
@@ -17512,7 +16997,7 @@
                 <a:ea typeface="Calibri" pitchFamily="34" charset="-122"/>
                 <a:cs typeface="Calibri" pitchFamily="34" charset="-120"/>
               </a:rPr>
-              <a:t>midway</a:t>
+              <a:t>midpoint</a:t>
             </a:r>
             <a:pPr algn="l" indent="0" marL="0">
               <a:buNone/>
@@ -17526,7 +17011,7 @@
                 <a:ea typeface="Calibri" pitchFamily="34" charset="-122"/>
                 <a:cs typeface="Calibri" pitchFamily="34" charset="-120"/>
               </a:rPr>
-              <a:t> path home.</a:t>
+              <a:t> of our long car journey.</a:t>
             </a:r>
             <a:endParaRPr lang="en-US" sz="1800" dirty="0"/>
           </a:p>
@@ -17681,7 +17166,7 @@
                 <a:ea typeface="Trebuchet MS" pitchFamily="34" charset="-122"/>
                 <a:cs typeface="Trebuchet MS" pitchFamily="34" charset="-120"/>
               </a:rPr>
-              <a:t>midsummer</a:t>
+              <a:t>midlands</a:t>
             </a:r>
             <a:endParaRPr lang="en-US" sz="1400" dirty="0"/>
           </a:p>
@@ -17937,7 +17422,7 @@
                 <a:ea typeface="Trebuchet MS" pitchFamily="34" charset="-122"/>
                 <a:cs typeface="Trebuchet MS" pitchFamily="34" charset="-120"/>
               </a:rPr>
-              <a:t>midway</a:t>
+              <a:t>midpoint</a:t>
             </a:r>
             <a:endParaRPr lang="en-US" sz="1400" dirty="0"/>
           </a:p>
@@ -18268,7 +17753,7 @@
                 <a:ea typeface="Calibri" pitchFamily="34" charset="-122"/>
                 <a:cs typeface="Calibri" pitchFamily="34" charset="-120"/>
               </a:rPr>
-              <a:t>Word Labs  •  wordlabs.app  •  Prefix: 'mid-' = middle, in the middle</a:t>
+              <a:t>Word Labs  •  wordlabs.app  •  Prefix: 'mid-' = middle</a:t>
             </a:r>
             <a:endParaRPr lang="en-US" sz="800" dirty="0"/>
           </a:p>
@@ -18407,7 +17892,7 @@
                 <a:ea typeface="Trebuchet MS" pitchFamily="34" charset="-122"/>
                 <a:cs typeface="Trebuchet MS" pitchFamily="34" charset="-120"/>
               </a:rPr>
-              <a:t>midsummer</a:t>
+              <a:t>midlands</a:t>
             </a:r>
             <a:endParaRPr lang="en-US" sz="2800" dirty="0"/>
           </a:p>
@@ -19095,7 +18580,7 @@
                 <a:ea typeface="Calibri" pitchFamily="34" charset="-122"/>
                 <a:cs typeface="Calibri" pitchFamily="34" charset="-120"/>
               </a:rPr>
-              <a:t>Word Labs  •  wordlabs.app  •  Prefix: 'mid-' = middle, in the middle</a:t>
+              <a:t>Word Labs  •  wordlabs.app  •  Prefix: 'mid-' = middle</a:t>
             </a:r>
             <a:endParaRPr lang="en-US" sz="800" dirty="0"/>
           </a:p>
@@ -19234,7 +18719,7 @@
                 <a:ea typeface="Trebuchet MS" pitchFamily="34" charset="-122"/>
                 <a:cs typeface="Trebuchet MS" pitchFamily="34" charset="-120"/>
               </a:rPr>
-              <a:t>midsummer</a:t>
+              <a:t>midlands</a:t>
             </a:r>
             <a:endParaRPr lang="en-US" sz="2800" dirty="0"/>
           </a:p>
@@ -19314,7 +18799,7 @@
         </p:nvSpPr>
         <p:spPr>
           <a:xfrm>
-            <a:off x="2938272" y="2258568"/>
+            <a:off x="2221992" y="2258568"/>
             <a:ext cx="1828800" cy="292608"/>
           </a:xfrm>
           <a:prstGeom prst="rect">
@@ -19348,7 +18833,7 @@
         </p:nvSpPr>
         <p:spPr>
           <a:xfrm>
-            <a:off x="2938272" y="2258568"/>
+            <a:off x="2221992" y="2258568"/>
             <a:ext cx="1828800" cy="292608"/>
           </a:xfrm>
           <a:prstGeom prst="rect">
@@ -19387,7 +18872,7 @@
         </p:nvSpPr>
         <p:spPr>
           <a:xfrm>
-            <a:off x="2938272" y="2569464"/>
+            <a:off x="2221992" y="2569464"/>
             <a:ext cx="1828800" cy="201168"/>
           </a:xfrm>
           <a:prstGeom prst="rect">
@@ -19426,7 +18911,7 @@
         </p:nvSpPr>
         <p:spPr>
           <a:xfrm>
-            <a:off x="5803392" y="2258568"/>
+            <a:off x="4370832" y="2258568"/>
             <a:ext cx="1828800" cy="292608"/>
           </a:xfrm>
           <a:prstGeom prst="rect">
@@ -19460,7 +18945,7 @@
         </p:nvSpPr>
         <p:spPr>
           <a:xfrm>
-            <a:off x="5803392" y="2258568"/>
+            <a:off x="4370832" y="2258568"/>
             <a:ext cx="1828800" cy="292608"/>
           </a:xfrm>
           <a:prstGeom prst="rect">
@@ -19485,7 +18970,7 @@
                 <a:ea typeface="Trebuchet MS" pitchFamily="34" charset="-122"/>
                 <a:cs typeface="Trebuchet MS" pitchFamily="34" charset="-120"/>
               </a:rPr>
-              <a:t>summer</a:t>
+              <a:t>land</a:t>
             </a:r>
             <a:endParaRPr lang="en-US" sz="1300" dirty="0"/>
           </a:p>
@@ -19499,7 +18984,7 @@
         </p:nvSpPr>
         <p:spPr>
           <a:xfrm>
-            <a:off x="5803392" y="2569464"/>
+            <a:off x="4370832" y="2569464"/>
             <a:ext cx="1828800" cy="201168"/>
           </a:xfrm>
           <a:prstGeom prst="rect">
@@ -19524,7 +19009,7 @@
                 <a:ea typeface="Calibri" pitchFamily="34" charset="-122"/>
                 <a:cs typeface="Calibri" pitchFamily="34" charset="-120"/>
               </a:rPr>
-              <a:t>the warmest season</a:t>
+              <a:t>an area of ground; to arrive</a:t>
             </a:r>
             <a:endParaRPr lang="en-US" sz="850" dirty="0"/>
           </a:p>
@@ -19533,6 +19018,118 @@
       <p:sp>
         <p:nvSpPr>
           <p:cNvPr id="22" name="Shape 20"/>
+          <p:cNvSpPr/>
+          <p:nvPr/>
+        </p:nvSpPr>
+        <p:spPr>
+          <a:xfrm>
+            <a:off x="6519672" y="2258568"/>
+            <a:ext cx="1828800" cy="292608"/>
+          </a:xfrm>
+          <a:prstGeom prst="rect">
+            <a:avLst>
+              <a:gd name="adj" fmla="val 25000"/>
+            </a:avLst>
+          </a:prstGeom>
+          <a:solidFill>
+            <a:srgbClr val="FCE7F3"/>
+          </a:solidFill>
+          <a:ln w="19050">
+            <a:solidFill>
+              <a:srgbClr val="DB2777"/>
+            </a:solidFill>
+            <a:prstDash val="solid"/>
+          </a:ln>
+          <a:effectLst>
+            <a:outerShdw sx="100000" sy="100000" kx="0" ky="0" algn="bl" rotWithShape="0" blurRad="101600" dist="38100" dir="8100000">
+              <a:srgbClr val="000000">
+                <a:alpha val="12000"/>
+              </a:srgbClr>
+            </a:outerShdw>
+          </a:effectLst>
+        </p:spPr>
+      </p:sp>
+      <p:sp>
+        <p:nvSpPr>
+          <p:cNvPr id="23" name="Text 21"/>
+          <p:cNvSpPr/>
+          <p:nvPr/>
+        </p:nvSpPr>
+        <p:spPr>
+          <a:xfrm>
+            <a:off x="6519672" y="2258568"/>
+            <a:ext cx="1828800" cy="292608"/>
+          </a:xfrm>
+          <a:prstGeom prst="rect">
+            <a:avLst/>
+          </a:prstGeom>
+          <a:noFill/>
+          <a:ln/>
+        </p:spPr>
+        <p:txBody>
+          <a:bodyPr wrap="square" lIns="0" tIns="0" rIns="0" bIns="0" rtlCol="0" anchor="ctr"/>
+          <a:lstStyle/>
+          <a:p>
+            <a:pPr algn="ctr" indent="0" marL="0">
+              <a:buNone/>
+            </a:pPr>
+            <a:r>
+              <a:rPr lang="en-US" sz="1300" b="1" dirty="0">
+                <a:solidFill>
+                  <a:srgbClr val="9D174D"/>
+                </a:solidFill>
+                <a:latin typeface="Trebuchet MS" pitchFamily="34" charset="0"/>
+                <a:ea typeface="Trebuchet MS" pitchFamily="34" charset="-122"/>
+                <a:cs typeface="Trebuchet MS" pitchFamily="34" charset="-120"/>
+              </a:rPr>
+              <a:t>s</a:t>
+            </a:r>
+            <a:endParaRPr lang="en-US" sz="1300" dirty="0"/>
+          </a:p>
+        </p:txBody>
+      </p:sp>
+      <p:sp>
+        <p:nvSpPr>
+          <p:cNvPr id="24" name="Text 22"/>
+          <p:cNvSpPr/>
+          <p:nvPr/>
+        </p:nvSpPr>
+        <p:spPr>
+          <a:xfrm>
+            <a:off x="6519672" y="2569464"/>
+            <a:ext cx="1828800" cy="201168"/>
+          </a:xfrm>
+          <a:prstGeom prst="rect">
+            <a:avLst/>
+          </a:prstGeom>
+          <a:noFill/>
+          <a:ln/>
+        </p:spPr>
+        <p:txBody>
+          <a:bodyPr wrap="square" lIns="0" tIns="0" rIns="0" bIns="0" rtlCol="0" anchor="t"/>
+          <a:lstStyle/>
+          <a:p>
+            <a:pPr algn="ctr" indent="0" marL="0">
+              <a:buNone/>
+            </a:pPr>
+            <a:r>
+              <a:rPr lang="en-US" sz="850" dirty="0">
+                <a:solidFill>
+                  <a:srgbClr val="475569"/>
+                </a:solidFill>
+                <a:latin typeface="Calibri" pitchFamily="34" charset="0"/>
+                <a:ea typeface="Calibri" pitchFamily="34" charset="-122"/>
+                <a:cs typeface="Calibri" pitchFamily="34" charset="-120"/>
+              </a:rPr>
+              <a:t>plural or present tense</a:t>
+            </a:r>
+            <a:endParaRPr lang="en-US" sz="850" dirty="0"/>
+          </a:p>
+        </p:txBody>
+      </p:sp>
+      <p:sp>
+        <p:nvSpPr>
+          <p:cNvPr id="25" name="Shape 23"/>
           <p:cNvSpPr/>
           <p:nvPr/>
         </p:nvSpPr>
@@ -19559,7 +19156,7 @@
       </p:sp>
       <p:sp>
         <p:nvSpPr>
-          <p:cNvPr id="23" name="Text 21"/>
+          <p:cNvPr id="26" name="Text 24"/>
           <p:cNvSpPr/>
           <p:nvPr/>
         </p:nvSpPr>
@@ -19598,7 +19195,7 @@
       </p:sp>
       <p:sp>
         <p:nvSpPr>
-          <p:cNvPr id="24" name="Shape 22"/>
+          <p:cNvPr id="27" name="Shape 25"/>
           <p:cNvSpPr/>
           <p:nvPr/>
         </p:nvSpPr>
@@ -19625,7 +19222,7 @@
       </p:sp>
       <p:sp>
         <p:nvSpPr>
-          <p:cNvPr id="25" name="Text 23"/>
+          <p:cNvPr id="28" name="Text 26"/>
           <p:cNvSpPr/>
           <p:nvPr/>
         </p:nvSpPr>
@@ -19664,7 +19261,7 @@
       </p:sp>
       <p:sp>
         <p:nvSpPr>
-          <p:cNvPr id="26" name="Shape 24"/>
+          <p:cNvPr id="29" name="Shape 27"/>
           <p:cNvSpPr/>
           <p:nvPr/>
         </p:nvSpPr>
@@ -19691,7 +19288,7 @@
       </p:sp>
       <p:sp>
         <p:nvSpPr>
-          <p:cNvPr id="27" name="Text 25"/>
+          <p:cNvPr id="30" name="Text 28"/>
           <p:cNvSpPr/>
           <p:nvPr/>
         </p:nvSpPr>
@@ -19730,7 +19327,7 @@
       </p:sp>
       <p:sp>
         <p:nvSpPr>
-          <p:cNvPr id="28" name="Shape 26"/>
+          <p:cNvPr id="31" name="Shape 29"/>
           <p:cNvSpPr/>
           <p:nvPr/>
         </p:nvSpPr>
@@ -19757,7 +19354,7 @@
       </p:sp>
       <p:sp>
         <p:nvSpPr>
-          <p:cNvPr id="29" name="Text 27"/>
+          <p:cNvPr id="32" name="Text 30"/>
           <p:cNvSpPr/>
           <p:nvPr/>
         </p:nvSpPr>
@@ -20080,7 +19677,7 @@
                 <a:ea typeface="Calibri" pitchFamily="34" charset="-122"/>
                 <a:cs typeface="Calibri" pitchFamily="34" charset="-120"/>
               </a:rPr>
-              <a:t>Word Labs  •  wordlabs.app  •  Prefix: 'mid-' = middle, in the middle</a:t>
+              <a:t>Word Labs  •  wordlabs.app  •  Prefix: 'mid-' = middle</a:t>
             </a:r>
             <a:endParaRPr lang="en-US" sz="800" dirty="0"/>
           </a:p>
@@ -20219,7 +19816,7 @@
                 <a:ea typeface="Trebuchet MS" pitchFamily="34" charset="-122"/>
                 <a:cs typeface="Trebuchet MS" pitchFamily="34" charset="-120"/>
               </a:rPr>
-              <a:t>midsummer</a:t>
+              <a:t>midlands</a:t>
             </a:r>
             <a:endParaRPr lang="en-US" sz="2800" dirty="0"/>
           </a:p>
@@ -20299,7 +19896,7 @@
         </p:nvSpPr>
         <p:spPr>
           <a:xfrm>
-            <a:off x="2938272" y="2258568"/>
+            <a:off x="2221992" y="2258568"/>
             <a:ext cx="1828800" cy="292608"/>
           </a:xfrm>
           <a:prstGeom prst="rect">
@@ -20333,7 +19930,7 @@
         </p:nvSpPr>
         <p:spPr>
           <a:xfrm>
-            <a:off x="2938272" y="2258568"/>
+            <a:off x="2221992" y="2258568"/>
             <a:ext cx="1828800" cy="292608"/>
           </a:xfrm>
           <a:prstGeom prst="rect">
@@ -20372,7 +19969,7 @@
         </p:nvSpPr>
         <p:spPr>
           <a:xfrm>
-            <a:off x="2938272" y="2569464"/>
+            <a:off x="2221992" y="2569464"/>
             <a:ext cx="1828800" cy="201168"/>
           </a:xfrm>
           <a:prstGeom prst="rect">
@@ -20411,7 +20008,7 @@
         </p:nvSpPr>
         <p:spPr>
           <a:xfrm>
-            <a:off x="5803392" y="2258568"/>
+            <a:off x="4370832" y="2258568"/>
             <a:ext cx="1828800" cy="292608"/>
           </a:xfrm>
           <a:prstGeom prst="rect">
@@ -20445,7 +20042,7 @@
         </p:nvSpPr>
         <p:spPr>
           <a:xfrm>
-            <a:off x="5803392" y="2258568"/>
+            <a:off x="4370832" y="2258568"/>
             <a:ext cx="1828800" cy="292608"/>
           </a:xfrm>
           <a:prstGeom prst="rect">
@@ -20470,7 +20067,7 @@
                 <a:ea typeface="Trebuchet MS" pitchFamily="34" charset="-122"/>
                 <a:cs typeface="Trebuchet MS" pitchFamily="34" charset="-120"/>
               </a:rPr>
-              <a:t>summer</a:t>
+              <a:t>land</a:t>
             </a:r>
             <a:endParaRPr lang="en-US" sz="1300" dirty="0"/>
           </a:p>
@@ -20484,7 +20081,7 @@
         </p:nvSpPr>
         <p:spPr>
           <a:xfrm>
-            <a:off x="5803392" y="2569464"/>
+            <a:off x="4370832" y="2569464"/>
             <a:ext cx="1828800" cy="201168"/>
           </a:xfrm>
           <a:prstGeom prst="rect">
@@ -20509,7 +20106,7 @@
                 <a:ea typeface="Calibri" pitchFamily="34" charset="-122"/>
                 <a:cs typeface="Calibri" pitchFamily="34" charset="-120"/>
               </a:rPr>
-              <a:t>the warmest season</a:t>
+              <a:t>an area of ground; to arrive</a:t>
             </a:r>
             <a:endParaRPr lang="en-US" sz="850" dirty="0"/>
           </a:p>
@@ -20518,6 +20115,118 @@
       <p:sp>
         <p:nvSpPr>
           <p:cNvPr id="22" name="Shape 20"/>
+          <p:cNvSpPr/>
+          <p:nvPr/>
+        </p:nvSpPr>
+        <p:spPr>
+          <a:xfrm>
+            <a:off x="6519672" y="2258568"/>
+            <a:ext cx="1828800" cy="292608"/>
+          </a:xfrm>
+          <a:prstGeom prst="rect">
+            <a:avLst>
+              <a:gd name="adj" fmla="val 25000"/>
+            </a:avLst>
+          </a:prstGeom>
+          <a:solidFill>
+            <a:srgbClr val="FCE7F3"/>
+          </a:solidFill>
+          <a:ln w="19050">
+            <a:solidFill>
+              <a:srgbClr val="DB2777"/>
+            </a:solidFill>
+            <a:prstDash val="solid"/>
+          </a:ln>
+          <a:effectLst>
+            <a:outerShdw sx="100000" sy="100000" kx="0" ky="0" algn="bl" rotWithShape="0" blurRad="101600" dist="38100" dir="8100000">
+              <a:srgbClr val="000000">
+                <a:alpha val="12000"/>
+              </a:srgbClr>
+            </a:outerShdw>
+          </a:effectLst>
+        </p:spPr>
+      </p:sp>
+      <p:sp>
+        <p:nvSpPr>
+          <p:cNvPr id="23" name="Text 21"/>
+          <p:cNvSpPr/>
+          <p:nvPr/>
+        </p:nvSpPr>
+        <p:spPr>
+          <a:xfrm>
+            <a:off x="6519672" y="2258568"/>
+            <a:ext cx="1828800" cy="292608"/>
+          </a:xfrm>
+          <a:prstGeom prst="rect">
+            <a:avLst/>
+          </a:prstGeom>
+          <a:noFill/>
+          <a:ln/>
+        </p:spPr>
+        <p:txBody>
+          <a:bodyPr wrap="square" lIns="0" tIns="0" rIns="0" bIns="0" rtlCol="0" anchor="ctr"/>
+          <a:lstStyle/>
+          <a:p>
+            <a:pPr algn="ctr" indent="0" marL="0">
+              <a:buNone/>
+            </a:pPr>
+            <a:r>
+              <a:rPr lang="en-US" sz="1300" b="1" dirty="0">
+                <a:solidFill>
+                  <a:srgbClr val="9D174D"/>
+                </a:solidFill>
+                <a:latin typeface="Trebuchet MS" pitchFamily="34" charset="0"/>
+                <a:ea typeface="Trebuchet MS" pitchFamily="34" charset="-122"/>
+                <a:cs typeface="Trebuchet MS" pitchFamily="34" charset="-120"/>
+              </a:rPr>
+              <a:t>s</a:t>
+            </a:r>
+            <a:endParaRPr lang="en-US" sz="1300" dirty="0"/>
+          </a:p>
+        </p:txBody>
+      </p:sp>
+      <p:sp>
+        <p:nvSpPr>
+          <p:cNvPr id="24" name="Text 22"/>
+          <p:cNvSpPr/>
+          <p:nvPr/>
+        </p:nvSpPr>
+        <p:spPr>
+          <a:xfrm>
+            <a:off x="6519672" y="2569464"/>
+            <a:ext cx="1828800" cy="201168"/>
+          </a:xfrm>
+          <a:prstGeom prst="rect">
+            <a:avLst/>
+          </a:prstGeom>
+          <a:noFill/>
+          <a:ln/>
+        </p:spPr>
+        <p:txBody>
+          <a:bodyPr wrap="square" lIns="0" tIns="0" rIns="0" bIns="0" rtlCol="0" anchor="t"/>
+          <a:lstStyle/>
+          <a:p>
+            <a:pPr algn="ctr" indent="0" marL="0">
+              <a:buNone/>
+            </a:pPr>
+            <a:r>
+              <a:rPr lang="en-US" sz="850" dirty="0">
+                <a:solidFill>
+                  <a:srgbClr val="475569"/>
+                </a:solidFill>
+                <a:latin typeface="Calibri" pitchFamily="34" charset="0"/>
+                <a:ea typeface="Calibri" pitchFamily="34" charset="-122"/>
+                <a:cs typeface="Calibri" pitchFamily="34" charset="-120"/>
+              </a:rPr>
+              <a:t>plural or present tense</a:t>
+            </a:r>
+            <a:endParaRPr lang="en-US" sz="850" dirty="0"/>
+          </a:p>
+        </p:txBody>
+      </p:sp>
+      <p:sp>
+        <p:nvSpPr>
+          <p:cNvPr id="25" name="Shape 23"/>
           <p:cNvSpPr/>
           <p:nvPr/>
         </p:nvSpPr>
@@ -20544,7 +20253,7 @@
       </p:sp>
       <p:sp>
         <p:nvSpPr>
-          <p:cNvPr id="23" name="Text 21"/>
+          <p:cNvPr id="26" name="Text 24"/>
           <p:cNvSpPr/>
           <p:nvPr/>
         </p:nvSpPr>
@@ -20583,7 +20292,7 @@
       </p:sp>
       <p:sp>
         <p:nvSpPr>
-          <p:cNvPr id="24" name="Shape 22"/>
+          <p:cNvPr id="27" name="Shape 25"/>
           <p:cNvSpPr/>
           <p:nvPr/>
         </p:nvSpPr>
@@ -20610,13 +20319,13 @@
       </p:sp>
       <p:sp>
         <p:nvSpPr>
-          <p:cNvPr id="25" name="Shape 23"/>
-          <p:cNvSpPr/>
-          <p:nvPr/>
-        </p:nvSpPr>
-        <p:spPr>
-          <a:xfrm>
-            <a:off x="2313432" y="3364992"/>
+          <p:cNvPr id="28" name="Shape 26"/>
+          <p:cNvSpPr/>
+          <p:nvPr/>
+        </p:nvSpPr>
+        <p:spPr>
+          <a:xfrm>
+            <a:off x="2999232" y="3364992"/>
             <a:ext cx="1645920" cy="475488"/>
           </a:xfrm>
           <a:prstGeom prst="rect">
@@ -20637,13 +20346,13 @@
       </p:sp>
       <p:sp>
         <p:nvSpPr>
-          <p:cNvPr id="26" name="Text 24"/>
-          <p:cNvSpPr/>
-          <p:nvPr/>
-        </p:nvSpPr>
-        <p:spPr>
-          <a:xfrm>
-            <a:off x="2313432" y="3364992"/>
+          <p:cNvPr id="29" name="Text 27"/>
+          <p:cNvSpPr/>
+          <p:nvPr/>
+        </p:nvSpPr>
+        <p:spPr>
+          <a:xfrm>
+            <a:off x="2999232" y="3364992"/>
             <a:ext cx="1645920" cy="475488"/>
           </a:xfrm>
           <a:prstGeom prst="rect">
@@ -20676,14 +20385,14 @@
       </p:sp>
       <p:sp>
         <p:nvSpPr>
-          <p:cNvPr id="27" name="Text 25"/>
-          <p:cNvSpPr/>
-          <p:nvPr/>
-        </p:nvSpPr>
-        <p:spPr>
-          <a:xfrm>
-            <a:off x="3959352" y="3364992"/>
-            <a:ext cx="411480" cy="475488"/>
+          <p:cNvPr id="30" name="Text 28"/>
+          <p:cNvSpPr/>
+          <p:nvPr/>
+        </p:nvSpPr>
+        <p:spPr>
+          <a:xfrm>
+            <a:off x="4645152" y="3364992"/>
+            <a:ext cx="1097280" cy="475488"/>
           </a:xfrm>
           <a:prstGeom prst="rect">
             <a:avLst/>
@@ -20715,13 +20424,13 @@
       </p:sp>
       <p:sp>
         <p:nvSpPr>
-          <p:cNvPr id="28" name="Shape 26"/>
-          <p:cNvSpPr/>
-          <p:nvPr/>
-        </p:nvSpPr>
-        <p:spPr>
-          <a:xfrm>
-            <a:off x="4370832" y="3364992"/>
+          <p:cNvPr id="31" name="Shape 29"/>
+          <p:cNvSpPr/>
+          <p:nvPr/>
+        </p:nvSpPr>
+        <p:spPr>
+          <a:xfrm>
+            <a:off x="5742432" y="3364992"/>
             <a:ext cx="1645920" cy="475488"/>
           </a:xfrm>
           <a:prstGeom prst="rect">
@@ -20742,13 +20451,13 @@
       </p:sp>
       <p:sp>
         <p:nvSpPr>
-          <p:cNvPr id="29" name="Text 27"/>
-          <p:cNvSpPr/>
-          <p:nvPr/>
-        </p:nvSpPr>
-        <p:spPr>
-          <a:xfrm>
-            <a:off x="4370832" y="3364992"/>
+          <p:cNvPr id="32" name="Text 30"/>
+          <p:cNvSpPr/>
+          <p:nvPr/>
+        </p:nvSpPr>
+        <p:spPr>
+          <a:xfrm>
+            <a:off x="5742432" y="3364992"/>
             <a:ext cx="1645920" cy="475488"/>
           </a:xfrm>
           <a:prstGeom prst="rect">
@@ -20773,112 +20482,7 @@
                 <a:ea typeface="Trebuchet MS" pitchFamily="34" charset="-122"/>
                 <a:cs typeface="Trebuchet MS" pitchFamily="34" charset="-120"/>
               </a:rPr>
-              <a:t>sum</a:t>
-            </a:r>
-            <a:endParaRPr lang="en-US" sz="1400" dirty="0"/>
-          </a:p>
-        </p:txBody>
-      </p:sp>
-      <p:sp>
-        <p:nvSpPr>
-          <p:cNvPr id="30" name="Text 28"/>
-          <p:cNvSpPr/>
-          <p:nvPr/>
-        </p:nvSpPr>
-        <p:spPr>
-          <a:xfrm>
-            <a:off x="6016752" y="3364992"/>
-            <a:ext cx="411480" cy="475488"/>
-          </a:xfrm>
-          <a:prstGeom prst="rect">
-            <a:avLst/>
-          </a:prstGeom>
-          <a:noFill/>
-          <a:ln/>
-        </p:spPr>
-        <p:txBody>
-          <a:bodyPr wrap="square" lIns="0" tIns="0" rIns="0" bIns="0" rtlCol="0" anchor="ctr"/>
-          <a:lstStyle/>
-          <a:p>
-            <a:pPr algn="ctr" indent="0" marL="0">
-              <a:buNone/>
-            </a:pPr>
-            <a:r>
-              <a:rPr lang="en-US" sz="1600" b="1" dirty="0">
-                <a:solidFill>
-                  <a:srgbClr val="0D9488"/>
-                </a:solidFill>
-                <a:latin typeface="Trebuchet MS" pitchFamily="34" charset="0"/>
-                <a:ea typeface="Trebuchet MS" pitchFamily="34" charset="-122"/>
-                <a:cs typeface="Trebuchet MS" pitchFamily="34" charset="-120"/>
-              </a:rPr>
-              <a:t>·</a:t>
-            </a:r>
-            <a:endParaRPr lang="en-US" sz="1600" dirty="0"/>
-          </a:p>
-        </p:txBody>
-      </p:sp>
-      <p:sp>
-        <p:nvSpPr>
-          <p:cNvPr id="31" name="Shape 29"/>
-          <p:cNvSpPr/>
-          <p:nvPr/>
-        </p:nvSpPr>
-        <p:spPr>
-          <a:xfrm>
-            <a:off x="6428232" y="3364992"/>
-            <a:ext cx="1645920" cy="475488"/>
-          </a:xfrm>
-          <a:prstGeom prst="rect">
-            <a:avLst>
-              <a:gd name="adj" fmla="val 9615"/>
-            </a:avLst>
-          </a:prstGeom>
-          <a:solidFill>
-            <a:srgbClr val="FFFFFF"/>
-          </a:solidFill>
-          <a:ln w="12700">
-            <a:solidFill>
-              <a:srgbClr val="0D9488"/>
-            </a:solidFill>
-            <a:prstDash val="solid"/>
-          </a:ln>
-        </p:spPr>
-      </p:sp>
-      <p:sp>
-        <p:nvSpPr>
-          <p:cNvPr id="32" name="Text 30"/>
-          <p:cNvSpPr/>
-          <p:nvPr/>
-        </p:nvSpPr>
-        <p:spPr>
-          <a:xfrm>
-            <a:off x="6428232" y="3364992"/>
-            <a:ext cx="1645920" cy="475488"/>
-          </a:xfrm>
-          <a:prstGeom prst="rect">
-            <a:avLst/>
-          </a:prstGeom>
-          <a:noFill/>
-          <a:ln/>
-        </p:spPr>
-        <p:txBody>
-          <a:bodyPr wrap="square" lIns="0" tIns="0" rIns="0" bIns="0" rtlCol="0" anchor="ctr"/>
-          <a:lstStyle/>
-          <a:p>
-            <a:pPr algn="ctr" indent="0" marL="0">
-              <a:buNone/>
-            </a:pPr>
-            <a:r>
-              <a:rPr lang="en-US" sz="1400" b="1" dirty="0">
-                <a:solidFill>
-                  <a:srgbClr val="0D9488"/>
-                </a:solidFill>
-                <a:latin typeface="Trebuchet MS" pitchFamily="34" charset="0"/>
-                <a:ea typeface="Trebuchet MS" pitchFamily="34" charset="-122"/>
-                <a:cs typeface="Trebuchet MS" pitchFamily="34" charset="-120"/>
-              </a:rPr>
-              <a:t>mer</a:t>
+              <a:t>lands</a:t>
             </a:r>
             <a:endParaRPr lang="en-US" sz="1400" dirty="0"/>
           </a:p>
@@ -21302,7 +20906,7 @@
                 <a:ea typeface="Calibri" pitchFamily="34" charset="-122"/>
                 <a:cs typeface="Calibri" pitchFamily="34" charset="-120"/>
               </a:rPr>
-              <a:t>Word Labs  •  wordlabs.app  •  Prefix: 'mid-' = middle, in the middle</a:t>
+              <a:t>Word Labs  •  wordlabs.app  •  Prefix: 'mid-' = middle</a:t>
             </a:r>
             <a:endParaRPr lang="en-US" sz="800" dirty="0"/>
           </a:p>
@@ -21441,7 +21045,7 @@
                 <a:ea typeface="Trebuchet MS" pitchFamily="34" charset="-122"/>
                 <a:cs typeface="Trebuchet MS" pitchFamily="34" charset="-120"/>
               </a:rPr>
-              <a:t>midsummer</a:t>
+              <a:t>midlands</a:t>
             </a:r>
             <a:endParaRPr lang="en-US" sz="2800" dirty="0"/>
           </a:p>
@@ -21521,7 +21125,7 @@
         </p:nvSpPr>
         <p:spPr>
           <a:xfrm>
-            <a:off x="2938272" y="2258568"/>
+            <a:off x="2221992" y="2258568"/>
             <a:ext cx="1828800" cy="292608"/>
           </a:xfrm>
           <a:prstGeom prst="rect">
@@ -21555,7 +21159,7 @@
         </p:nvSpPr>
         <p:spPr>
           <a:xfrm>
-            <a:off x="2938272" y="2258568"/>
+            <a:off x="2221992" y="2258568"/>
             <a:ext cx="1828800" cy="292608"/>
           </a:xfrm>
           <a:prstGeom prst="rect">
@@ -21594,7 +21198,7 @@
         </p:nvSpPr>
         <p:spPr>
           <a:xfrm>
-            <a:off x="2938272" y="2569464"/>
+            <a:off x="2221992" y="2569464"/>
             <a:ext cx="1828800" cy="201168"/>
           </a:xfrm>
           <a:prstGeom prst="rect">
@@ -21633,7 +21237,7 @@
         </p:nvSpPr>
         <p:spPr>
           <a:xfrm>
-            <a:off x="5803392" y="2258568"/>
+            <a:off x="4370832" y="2258568"/>
             <a:ext cx="1828800" cy="292608"/>
           </a:xfrm>
           <a:prstGeom prst="rect">
@@ -21667,7 +21271,7 @@
         </p:nvSpPr>
         <p:spPr>
           <a:xfrm>
-            <a:off x="5803392" y="2258568"/>
+            <a:off x="4370832" y="2258568"/>
             <a:ext cx="1828800" cy="292608"/>
           </a:xfrm>
           <a:prstGeom prst="rect">
@@ -21692,7 +21296,7 @@
                 <a:ea typeface="Trebuchet MS" pitchFamily="34" charset="-122"/>
                 <a:cs typeface="Trebuchet MS" pitchFamily="34" charset="-120"/>
               </a:rPr>
-              <a:t>summer</a:t>
+              <a:t>land</a:t>
             </a:r>
             <a:endParaRPr lang="en-US" sz="1300" dirty="0"/>
           </a:p>
@@ -21706,7 +21310,7 @@
         </p:nvSpPr>
         <p:spPr>
           <a:xfrm>
-            <a:off x="5803392" y="2569464"/>
+            <a:off x="4370832" y="2569464"/>
             <a:ext cx="1828800" cy="201168"/>
           </a:xfrm>
           <a:prstGeom prst="rect">
@@ -21731,7 +21335,7 @@
                 <a:ea typeface="Calibri" pitchFamily="34" charset="-122"/>
                 <a:cs typeface="Calibri" pitchFamily="34" charset="-120"/>
               </a:rPr>
-              <a:t>the warmest season</a:t>
+              <a:t>an area of ground; to arrive</a:t>
             </a:r>
             <a:endParaRPr lang="en-US" sz="850" dirty="0"/>
           </a:p>
@@ -21740,6 +21344,118 @@
       <p:sp>
         <p:nvSpPr>
           <p:cNvPr id="22" name="Shape 20"/>
+          <p:cNvSpPr/>
+          <p:nvPr/>
+        </p:nvSpPr>
+        <p:spPr>
+          <a:xfrm>
+            <a:off x="6519672" y="2258568"/>
+            <a:ext cx="1828800" cy="292608"/>
+          </a:xfrm>
+          <a:prstGeom prst="rect">
+            <a:avLst>
+              <a:gd name="adj" fmla="val 25000"/>
+            </a:avLst>
+          </a:prstGeom>
+          <a:solidFill>
+            <a:srgbClr val="FCE7F3"/>
+          </a:solidFill>
+          <a:ln w="19050">
+            <a:solidFill>
+              <a:srgbClr val="DB2777"/>
+            </a:solidFill>
+            <a:prstDash val="solid"/>
+          </a:ln>
+          <a:effectLst>
+            <a:outerShdw sx="100000" sy="100000" kx="0" ky="0" algn="bl" rotWithShape="0" blurRad="101600" dist="38100" dir="8100000">
+              <a:srgbClr val="000000">
+                <a:alpha val="12000"/>
+              </a:srgbClr>
+            </a:outerShdw>
+          </a:effectLst>
+        </p:spPr>
+      </p:sp>
+      <p:sp>
+        <p:nvSpPr>
+          <p:cNvPr id="23" name="Text 21"/>
+          <p:cNvSpPr/>
+          <p:nvPr/>
+        </p:nvSpPr>
+        <p:spPr>
+          <a:xfrm>
+            <a:off x="6519672" y="2258568"/>
+            <a:ext cx="1828800" cy="292608"/>
+          </a:xfrm>
+          <a:prstGeom prst="rect">
+            <a:avLst/>
+          </a:prstGeom>
+          <a:noFill/>
+          <a:ln/>
+        </p:spPr>
+        <p:txBody>
+          <a:bodyPr wrap="square" lIns="0" tIns="0" rIns="0" bIns="0" rtlCol="0" anchor="ctr"/>
+          <a:lstStyle/>
+          <a:p>
+            <a:pPr algn="ctr" indent="0" marL="0">
+              <a:buNone/>
+            </a:pPr>
+            <a:r>
+              <a:rPr lang="en-US" sz="1300" b="1" dirty="0">
+                <a:solidFill>
+                  <a:srgbClr val="9D174D"/>
+                </a:solidFill>
+                <a:latin typeface="Trebuchet MS" pitchFamily="34" charset="0"/>
+                <a:ea typeface="Trebuchet MS" pitchFamily="34" charset="-122"/>
+                <a:cs typeface="Trebuchet MS" pitchFamily="34" charset="-120"/>
+              </a:rPr>
+              <a:t>s</a:t>
+            </a:r>
+            <a:endParaRPr lang="en-US" sz="1300" dirty="0"/>
+          </a:p>
+        </p:txBody>
+      </p:sp>
+      <p:sp>
+        <p:nvSpPr>
+          <p:cNvPr id="24" name="Text 22"/>
+          <p:cNvSpPr/>
+          <p:nvPr/>
+        </p:nvSpPr>
+        <p:spPr>
+          <a:xfrm>
+            <a:off x="6519672" y="2569464"/>
+            <a:ext cx="1828800" cy="201168"/>
+          </a:xfrm>
+          <a:prstGeom prst="rect">
+            <a:avLst/>
+          </a:prstGeom>
+          <a:noFill/>
+          <a:ln/>
+        </p:spPr>
+        <p:txBody>
+          <a:bodyPr wrap="square" lIns="0" tIns="0" rIns="0" bIns="0" rtlCol="0" anchor="t"/>
+          <a:lstStyle/>
+          <a:p>
+            <a:pPr algn="ctr" indent="0" marL="0">
+              <a:buNone/>
+            </a:pPr>
+            <a:r>
+              <a:rPr lang="en-US" sz="850" dirty="0">
+                <a:solidFill>
+                  <a:srgbClr val="475569"/>
+                </a:solidFill>
+                <a:latin typeface="Calibri" pitchFamily="34" charset="0"/>
+                <a:ea typeface="Calibri" pitchFamily="34" charset="-122"/>
+                <a:cs typeface="Calibri" pitchFamily="34" charset="-120"/>
+              </a:rPr>
+              <a:t>plural or present tense</a:t>
+            </a:r>
+            <a:endParaRPr lang="en-US" sz="850" dirty="0"/>
+          </a:p>
+        </p:txBody>
+      </p:sp>
+      <p:sp>
+        <p:nvSpPr>
+          <p:cNvPr id="25" name="Shape 23"/>
           <p:cNvSpPr/>
           <p:nvPr/>
         </p:nvSpPr>
@@ -21766,7 +21482,7 @@
       </p:sp>
       <p:sp>
         <p:nvSpPr>
-          <p:cNvPr id="23" name="Text 21"/>
+          <p:cNvPr id="26" name="Text 24"/>
           <p:cNvSpPr/>
           <p:nvPr/>
         </p:nvSpPr>
@@ -21805,7 +21521,7 @@
       </p:sp>
       <p:sp>
         <p:nvSpPr>
-          <p:cNvPr id="24" name="Shape 22"/>
+          <p:cNvPr id="27" name="Shape 25"/>
           <p:cNvSpPr/>
           <p:nvPr/>
         </p:nvSpPr>
@@ -21832,13 +21548,13 @@
       </p:sp>
       <p:sp>
         <p:nvSpPr>
-          <p:cNvPr id="25" name="Shape 23"/>
-          <p:cNvSpPr/>
-          <p:nvPr/>
-        </p:nvSpPr>
-        <p:spPr>
-          <a:xfrm>
-            <a:off x="2313432" y="3364992"/>
+          <p:cNvPr id="28" name="Shape 26"/>
+          <p:cNvSpPr/>
+          <p:nvPr/>
+        </p:nvSpPr>
+        <p:spPr>
+          <a:xfrm>
+            <a:off x="2999232" y="3364992"/>
             <a:ext cx="1645920" cy="475488"/>
           </a:xfrm>
           <a:prstGeom prst="rect">
@@ -21859,13 +21575,13 @@
       </p:sp>
       <p:sp>
         <p:nvSpPr>
-          <p:cNvPr id="26" name="Text 24"/>
-          <p:cNvSpPr/>
-          <p:nvPr/>
-        </p:nvSpPr>
-        <p:spPr>
-          <a:xfrm>
-            <a:off x="2313432" y="3364992"/>
+          <p:cNvPr id="29" name="Text 27"/>
+          <p:cNvSpPr/>
+          <p:nvPr/>
+        </p:nvSpPr>
+        <p:spPr>
+          <a:xfrm>
+            <a:off x="2999232" y="3364992"/>
             <a:ext cx="1645920" cy="475488"/>
           </a:xfrm>
           <a:prstGeom prst="rect">
@@ -21898,14 +21614,14 @@
       </p:sp>
       <p:sp>
         <p:nvSpPr>
-          <p:cNvPr id="27" name="Text 25"/>
-          <p:cNvSpPr/>
-          <p:nvPr/>
-        </p:nvSpPr>
-        <p:spPr>
-          <a:xfrm>
-            <a:off x="3959352" y="3364992"/>
-            <a:ext cx="411480" cy="475488"/>
+          <p:cNvPr id="30" name="Text 28"/>
+          <p:cNvSpPr/>
+          <p:nvPr/>
+        </p:nvSpPr>
+        <p:spPr>
+          <a:xfrm>
+            <a:off x="4645152" y="3364992"/>
+            <a:ext cx="1097280" cy="475488"/>
           </a:xfrm>
           <a:prstGeom prst="rect">
             <a:avLst/>
@@ -21937,13 +21653,13 @@
       </p:sp>
       <p:sp>
         <p:nvSpPr>
-          <p:cNvPr id="28" name="Shape 26"/>
-          <p:cNvSpPr/>
-          <p:nvPr/>
-        </p:nvSpPr>
-        <p:spPr>
-          <a:xfrm>
-            <a:off x="4370832" y="3364992"/>
+          <p:cNvPr id="31" name="Shape 29"/>
+          <p:cNvSpPr/>
+          <p:nvPr/>
+        </p:nvSpPr>
+        <p:spPr>
+          <a:xfrm>
+            <a:off x="5742432" y="3364992"/>
             <a:ext cx="1645920" cy="475488"/>
           </a:xfrm>
           <a:prstGeom prst="rect">
@@ -21964,13 +21680,13 @@
       </p:sp>
       <p:sp>
         <p:nvSpPr>
-          <p:cNvPr id="29" name="Text 27"/>
-          <p:cNvSpPr/>
-          <p:nvPr/>
-        </p:nvSpPr>
-        <p:spPr>
-          <a:xfrm>
-            <a:off x="4370832" y="3364992"/>
+          <p:cNvPr id="32" name="Text 30"/>
+          <p:cNvSpPr/>
+          <p:nvPr/>
+        </p:nvSpPr>
+        <p:spPr>
+          <a:xfrm>
+            <a:off x="5742432" y="3364992"/>
             <a:ext cx="1645920" cy="475488"/>
           </a:xfrm>
           <a:prstGeom prst="rect">
@@ -21995,7 +21711,7 @@
                 <a:ea typeface="Trebuchet MS" pitchFamily="34" charset="-122"/>
                 <a:cs typeface="Trebuchet MS" pitchFamily="34" charset="-120"/>
               </a:rPr>
-              <a:t>sum</a:t>
+              <a:t>lands</a:t>
             </a:r>
             <a:endParaRPr lang="en-US" sz="1400" dirty="0"/>
           </a:p>
@@ -22003,14 +21719,41 @@
       </p:sp>
       <p:sp>
         <p:nvSpPr>
-          <p:cNvPr id="30" name="Text 28"/>
-          <p:cNvSpPr/>
-          <p:nvPr/>
-        </p:nvSpPr>
-        <p:spPr>
-          <a:xfrm>
-            <a:off x="6016752" y="3364992"/>
-            <a:ext cx="411480" cy="475488"/>
+          <p:cNvPr id="33" name="Shape 31"/>
+          <p:cNvSpPr/>
+          <p:nvPr/>
+        </p:nvSpPr>
+        <p:spPr>
+          <a:xfrm>
+            <a:off x="365760" y="4096512"/>
+            <a:ext cx="1371600" cy="804672"/>
+          </a:xfrm>
+          <a:prstGeom prst="rect">
+            <a:avLst>
+              <a:gd name="adj" fmla="val 6818"/>
+            </a:avLst>
+          </a:prstGeom>
+          <a:solidFill>
+            <a:srgbClr val="E2E8F0"/>
+          </a:solidFill>
+          <a:ln w="12700">
+            <a:solidFill>
+              <a:srgbClr val="E2E8F0"/>
+            </a:solidFill>
+            <a:prstDash val="solid"/>
+          </a:ln>
+        </p:spPr>
+      </p:sp>
+      <p:sp>
+        <p:nvSpPr>
+          <p:cNvPr id="34" name="Text 32"/>
+          <p:cNvSpPr/>
+          <p:nvPr/>
+        </p:nvSpPr>
+        <p:spPr>
+          <a:xfrm>
+            <a:off x="365760" y="4096512"/>
+            <a:ext cx="1371600" cy="804672"/>
           </a:xfrm>
           <a:prstGeom prst="rect">
             <a:avLst/>
@@ -22026,57 +21769,84 @@
               <a:buNone/>
             </a:pPr>
             <a:r>
-              <a:rPr lang="en-US" sz="1600" b="1" dirty="0">
-                <a:solidFill>
-                  <a:srgbClr val="0D9488"/>
+              <a:rPr lang="en-US" sz="1100" b="1" dirty="0">
+                <a:solidFill>
+                  <a:srgbClr val="475569"/>
                 </a:solidFill>
                 <a:latin typeface="Trebuchet MS" pitchFamily="34" charset="0"/>
                 <a:ea typeface="Trebuchet MS" pitchFamily="34" charset="-122"/>
                 <a:cs typeface="Trebuchet MS" pitchFamily="34" charset="-120"/>
               </a:rPr>
-              <a:t>·</a:t>
-            </a:r>
-            <a:endParaRPr lang="en-US" sz="1600" dirty="0"/>
-          </a:p>
-        </p:txBody>
-      </p:sp>
-      <p:sp>
-        <p:nvSpPr>
-          <p:cNvPr id="31" name="Shape 29"/>
-          <p:cNvSpPr/>
-          <p:nvPr/>
-        </p:nvSpPr>
-        <p:spPr>
-          <a:xfrm>
-            <a:off x="6428232" y="3364992"/>
-            <a:ext cx="1645920" cy="475488"/>
+              <a:t>Phonemes</a:t>
+            </a:r>
+            <a:endParaRPr lang="en-US" sz="1100" dirty="0"/>
+          </a:p>
+        </p:txBody>
+      </p:sp>
+      <p:sp>
+        <p:nvSpPr>
+          <p:cNvPr id="35" name="Shape 33"/>
+          <p:cNvSpPr/>
+          <p:nvPr/>
+        </p:nvSpPr>
+        <p:spPr>
+          <a:xfrm>
+            <a:off x="1874520" y="4096512"/>
+            <a:ext cx="6903720" cy="658368"/>
           </a:xfrm>
           <a:prstGeom prst="rect">
             <a:avLst>
-              <a:gd name="adj" fmla="val 9615"/>
+              <a:gd name="adj" fmla="val 8333"/>
             </a:avLst>
           </a:prstGeom>
           <a:solidFill>
+            <a:srgbClr val="FCE7F3"/>
+          </a:solidFill>
+          <a:ln w="12700">
+            <a:solidFill>
+              <a:srgbClr val="DB2777"/>
+            </a:solidFill>
+            <a:prstDash val="solid"/>
+          </a:ln>
+        </p:spPr>
+      </p:sp>
+      <p:sp>
+        <p:nvSpPr>
+          <p:cNvPr id="36" name="Shape 34"/>
+          <p:cNvSpPr/>
+          <p:nvPr/>
+        </p:nvSpPr>
+        <p:spPr>
+          <a:xfrm>
+            <a:off x="2023872" y="4169664"/>
+            <a:ext cx="685800" cy="475488"/>
+          </a:xfrm>
+          <a:prstGeom prst="rect">
+            <a:avLst>
+              <a:gd name="adj" fmla="val 7692"/>
+            </a:avLst>
+          </a:prstGeom>
+          <a:solidFill>
             <a:srgbClr val="FFFFFF"/>
           </a:solidFill>
           <a:ln w="12700">
             <a:solidFill>
-              <a:srgbClr val="0D9488"/>
-            </a:solidFill>
-            <a:prstDash val="solid"/>
-          </a:ln>
-        </p:spPr>
-      </p:sp>
-      <p:sp>
-        <p:nvSpPr>
-          <p:cNvPr id="32" name="Text 30"/>
-          <p:cNvSpPr/>
-          <p:nvPr/>
-        </p:nvSpPr>
-        <p:spPr>
-          <a:xfrm>
-            <a:off x="6428232" y="3364992"/>
-            <a:ext cx="1645920" cy="475488"/>
+              <a:srgbClr val="DB2777"/>
+            </a:solidFill>
+            <a:prstDash val="solid"/>
+          </a:ln>
+        </p:spPr>
+      </p:sp>
+      <p:sp>
+        <p:nvSpPr>
+          <p:cNvPr id="37" name="Text 35"/>
+          <p:cNvSpPr/>
+          <p:nvPr/>
+        </p:nvSpPr>
+        <p:spPr>
+          <a:xfrm>
+            <a:off x="2023872" y="4169664"/>
+            <a:ext cx="685800" cy="475488"/>
           </a:xfrm>
           <a:prstGeom prst="rect">
             <a:avLst/>
@@ -22092,57 +21862,57 @@
               <a:buNone/>
             </a:pPr>
             <a:r>
-              <a:rPr lang="en-US" sz="1400" b="1" dirty="0">
-                <a:solidFill>
-                  <a:srgbClr val="0D9488"/>
+              <a:rPr lang="en-US" sz="900" b="1" dirty="0">
+                <a:solidFill>
+                  <a:srgbClr val="9D174D"/>
                 </a:solidFill>
                 <a:latin typeface="Trebuchet MS" pitchFamily="34" charset="0"/>
                 <a:ea typeface="Trebuchet MS" pitchFamily="34" charset="-122"/>
                 <a:cs typeface="Trebuchet MS" pitchFamily="34" charset="-120"/>
               </a:rPr>
-              <a:t>mer</a:t>
-            </a:r>
-            <a:endParaRPr lang="en-US" sz="1400" dirty="0"/>
-          </a:p>
-        </p:txBody>
-      </p:sp>
-      <p:sp>
-        <p:nvSpPr>
-          <p:cNvPr id="33" name="Shape 31"/>
-          <p:cNvSpPr/>
-          <p:nvPr/>
-        </p:nvSpPr>
-        <p:spPr>
-          <a:xfrm>
-            <a:off x="365760" y="4096512"/>
-            <a:ext cx="1371600" cy="804672"/>
+              <a:t>m</a:t>
+            </a:r>
+            <a:endParaRPr lang="en-US" sz="900" dirty="0"/>
+          </a:p>
+        </p:txBody>
+      </p:sp>
+      <p:sp>
+        <p:nvSpPr>
+          <p:cNvPr id="38" name="Shape 36"/>
+          <p:cNvSpPr/>
+          <p:nvPr/>
+        </p:nvSpPr>
+        <p:spPr>
+          <a:xfrm>
+            <a:off x="2831592" y="4169664"/>
+            <a:ext cx="685800" cy="475488"/>
           </a:xfrm>
           <a:prstGeom prst="rect">
             <a:avLst>
-              <a:gd name="adj" fmla="val 6818"/>
+              <a:gd name="adj" fmla="val 7692"/>
             </a:avLst>
           </a:prstGeom>
           <a:solidFill>
-            <a:srgbClr val="E2E8F0"/>
-          </a:solidFill>
-          <a:ln w="12700">
-            <a:solidFill>
-              <a:srgbClr val="E2E8F0"/>
-            </a:solidFill>
-            <a:prstDash val="solid"/>
-          </a:ln>
-        </p:spPr>
-      </p:sp>
-      <p:sp>
-        <p:nvSpPr>
-          <p:cNvPr id="34" name="Text 32"/>
-          <p:cNvSpPr/>
-          <p:nvPr/>
-        </p:nvSpPr>
-        <p:spPr>
-          <a:xfrm>
-            <a:off x="365760" y="4096512"/>
-            <a:ext cx="1371600" cy="804672"/>
+            <a:srgbClr val="FFFFFF"/>
+          </a:solidFill>
+          <a:ln w="12700">
+            <a:solidFill>
+              <a:srgbClr val="DB2777"/>
+            </a:solidFill>
+            <a:prstDash val="solid"/>
+          </a:ln>
+        </p:spPr>
+      </p:sp>
+      <p:sp>
+        <p:nvSpPr>
+          <p:cNvPr id="39" name="Text 37"/>
+          <p:cNvSpPr/>
+          <p:nvPr/>
+        </p:nvSpPr>
+        <p:spPr>
+          <a:xfrm>
+            <a:off x="2831592" y="4169664"/>
+            <a:ext cx="685800" cy="475488"/>
           </a:xfrm>
           <a:prstGeom prst="rect">
             <a:avLst/>
@@ -22158,56 +21928,29 @@
               <a:buNone/>
             </a:pPr>
             <a:r>
-              <a:rPr lang="en-US" sz="1100" b="1" dirty="0">
-                <a:solidFill>
-                  <a:srgbClr val="475569"/>
+              <a:rPr lang="en-US" sz="900" b="1" dirty="0">
+                <a:solidFill>
+                  <a:srgbClr val="9D174D"/>
                 </a:solidFill>
                 <a:latin typeface="Trebuchet MS" pitchFamily="34" charset="0"/>
                 <a:ea typeface="Trebuchet MS" pitchFamily="34" charset="-122"/>
                 <a:cs typeface="Trebuchet MS" pitchFamily="34" charset="-120"/>
               </a:rPr>
-              <a:t>Phonemes</a:t>
-            </a:r>
-            <a:endParaRPr lang="en-US" sz="1100" dirty="0"/>
-          </a:p>
-        </p:txBody>
-      </p:sp>
-      <p:sp>
-        <p:nvSpPr>
-          <p:cNvPr id="35" name="Shape 33"/>
-          <p:cNvSpPr/>
-          <p:nvPr/>
-        </p:nvSpPr>
-        <p:spPr>
-          <a:xfrm>
-            <a:off x="1874520" y="4096512"/>
-            <a:ext cx="6903720" cy="658368"/>
-          </a:xfrm>
-          <a:prstGeom prst="rect">
-            <a:avLst>
-              <a:gd name="adj" fmla="val 8333"/>
-            </a:avLst>
-          </a:prstGeom>
-          <a:solidFill>
-            <a:srgbClr val="FCE7F3"/>
-          </a:solidFill>
-          <a:ln w="12700">
-            <a:solidFill>
-              <a:srgbClr val="DB2777"/>
-            </a:solidFill>
-            <a:prstDash val="solid"/>
-          </a:ln>
-        </p:spPr>
-      </p:sp>
-      <p:sp>
-        <p:nvSpPr>
-          <p:cNvPr id="36" name="Shape 34"/>
-          <p:cNvSpPr/>
-          <p:nvPr/>
-        </p:nvSpPr>
-        <p:spPr>
-          <a:xfrm>
-            <a:off x="2124837" y="4169664"/>
+              <a:t>i</a:t>
+            </a:r>
+            <a:endParaRPr lang="en-US" sz="900" dirty="0"/>
+          </a:p>
+        </p:txBody>
+      </p:sp>
+      <p:sp>
+        <p:nvSpPr>
+          <p:cNvPr id="40" name="Shape 38"/>
+          <p:cNvSpPr/>
+          <p:nvPr/>
+        </p:nvSpPr>
+        <p:spPr>
+          <a:xfrm>
+            <a:off x="3639312" y="4169664"/>
             <a:ext cx="685800" cy="475488"/>
           </a:xfrm>
           <a:prstGeom prst="rect">
@@ -22228,13 +21971,13 @@
       </p:sp>
       <p:sp>
         <p:nvSpPr>
-          <p:cNvPr id="37" name="Text 35"/>
-          <p:cNvSpPr/>
-          <p:nvPr/>
-        </p:nvSpPr>
-        <p:spPr>
-          <a:xfrm>
-            <a:off x="2124837" y="4169664"/>
+          <p:cNvPr id="41" name="Text 39"/>
+          <p:cNvSpPr/>
+          <p:nvPr/>
+        </p:nvSpPr>
+        <p:spPr>
+          <a:xfrm>
+            <a:off x="3639312" y="4169664"/>
             <a:ext cx="685800" cy="475488"/>
           </a:xfrm>
           <a:prstGeom prst="rect">
@@ -22259,7 +22002,7 @@
                 <a:ea typeface="Trebuchet MS" pitchFamily="34" charset="-122"/>
                 <a:cs typeface="Trebuchet MS" pitchFamily="34" charset="-120"/>
               </a:rPr>
-              <a:t>m</a:t>
+              <a:t>d</a:t>
             </a:r>
             <a:endParaRPr lang="en-US" sz="900" dirty="0"/>
           </a:p>
@@ -22267,13 +22010,13 @@
       </p:sp>
       <p:sp>
         <p:nvSpPr>
-          <p:cNvPr id="38" name="Shape 36"/>
-          <p:cNvSpPr/>
-          <p:nvPr/>
-        </p:nvSpPr>
-        <p:spPr>
-          <a:xfrm>
-            <a:off x="3033522" y="4169664"/>
+          <p:cNvPr id="42" name="Shape 40"/>
+          <p:cNvSpPr/>
+          <p:nvPr/>
+        </p:nvSpPr>
+        <p:spPr>
+          <a:xfrm>
+            <a:off x="4447032" y="4169664"/>
             <a:ext cx="685800" cy="475488"/>
           </a:xfrm>
           <a:prstGeom prst="rect">
@@ -22294,13 +22037,13 @@
       </p:sp>
       <p:sp>
         <p:nvSpPr>
-          <p:cNvPr id="39" name="Text 37"/>
-          <p:cNvSpPr/>
-          <p:nvPr/>
-        </p:nvSpPr>
-        <p:spPr>
-          <a:xfrm>
-            <a:off x="3033522" y="4169664"/>
+          <p:cNvPr id="43" name="Text 41"/>
+          <p:cNvSpPr/>
+          <p:nvPr/>
+        </p:nvSpPr>
+        <p:spPr>
+          <a:xfrm>
+            <a:off x="4447032" y="4169664"/>
             <a:ext cx="685800" cy="475488"/>
           </a:xfrm>
           <a:prstGeom prst="rect">
@@ -22325,7 +22068,7 @@
                 <a:ea typeface="Trebuchet MS" pitchFamily="34" charset="-122"/>
                 <a:cs typeface="Trebuchet MS" pitchFamily="34" charset="-120"/>
               </a:rPr>
-              <a:t>i</a:t>
+              <a:t>l</a:t>
             </a:r>
             <a:endParaRPr lang="en-US" sz="900" dirty="0"/>
           </a:p>
@@ -22333,13 +22076,13 @@
       </p:sp>
       <p:sp>
         <p:nvSpPr>
-          <p:cNvPr id="40" name="Shape 38"/>
-          <p:cNvSpPr/>
-          <p:nvPr/>
-        </p:nvSpPr>
-        <p:spPr>
-          <a:xfrm>
-            <a:off x="3942207" y="4169664"/>
+          <p:cNvPr id="44" name="Shape 42"/>
+          <p:cNvSpPr/>
+          <p:nvPr/>
+        </p:nvSpPr>
+        <p:spPr>
+          <a:xfrm>
+            <a:off x="5254752" y="4169664"/>
             <a:ext cx="685800" cy="475488"/>
           </a:xfrm>
           <a:prstGeom prst="rect">
@@ -22360,13 +22103,13 @@
       </p:sp>
       <p:sp>
         <p:nvSpPr>
-          <p:cNvPr id="41" name="Text 39"/>
-          <p:cNvSpPr/>
-          <p:nvPr/>
-        </p:nvSpPr>
-        <p:spPr>
-          <a:xfrm>
-            <a:off x="3942207" y="4169664"/>
+          <p:cNvPr id="45" name="Text 43"/>
+          <p:cNvSpPr/>
+          <p:nvPr/>
+        </p:nvSpPr>
+        <p:spPr>
+          <a:xfrm>
+            <a:off x="5254752" y="4169664"/>
             <a:ext cx="685800" cy="475488"/>
           </a:xfrm>
           <a:prstGeom prst="rect">
@@ -22391,7 +22134,7 @@
                 <a:ea typeface="Trebuchet MS" pitchFamily="34" charset="-122"/>
                 <a:cs typeface="Trebuchet MS" pitchFamily="34" charset="-120"/>
               </a:rPr>
-              <a:t>d</a:t>
+              <a:t>a</a:t>
             </a:r>
             <a:endParaRPr lang="en-US" sz="900" dirty="0"/>
           </a:p>
@@ -22399,13 +22142,13 @@
       </p:sp>
       <p:sp>
         <p:nvSpPr>
-          <p:cNvPr id="42" name="Shape 40"/>
-          <p:cNvSpPr/>
-          <p:nvPr/>
-        </p:nvSpPr>
-        <p:spPr>
-          <a:xfrm>
-            <a:off x="4850892" y="4169664"/>
+          <p:cNvPr id="46" name="Shape 44"/>
+          <p:cNvSpPr/>
+          <p:nvPr/>
+        </p:nvSpPr>
+        <p:spPr>
+          <a:xfrm>
+            <a:off x="6062472" y="4169664"/>
             <a:ext cx="685800" cy="475488"/>
           </a:xfrm>
           <a:prstGeom prst="rect">
@@ -22426,13 +22169,13 @@
       </p:sp>
       <p:sp>
         <p:nvSpPr>
-          <p:cNvPr id="43" name="Text 41"/>
-          <p:cNvSpPr/>
-          <p:nvPr/>
-        </p:nvSpPr>
-        <p:spPr>
-          <a:xfrm>
-            <a:off x="4850892" y="4169664"/>
+          <p:cNvPr id="47" name="Text 45"/>
+          <p:cNvSpPr/>
+          <p:nvPr/>
+        </p:nvSpPr>
+        <p:spPr>
+          <a:xfrm>
+            <a:off x="6062472" y="4169664"/>
             <a:ext cx="685800" cy="475488"/>
           </a:xfrm>
           <a:prstGeom prst="rect">
@@ -22457,7 +22200,7 @@
                 <a:ea typeface="Trebuchet MS" pitchFamily="34" charset="-122"/>
                 <a:cs typeface="Trebuchet MS" pitchFamily="34" charset="-120"/>
               </a:rPr>
-              <a:t>s</a:t>
+              <a:t>n</a:t>
             </a:r>
             <a:endParaRPr lang="en-US" sz="900" dirty="0"/>
           </a:p>
@@ -22465,13 +22208,13 @@
       </p:sp>
       <p:sp>
         <p:nvSpPr>
-          <p:cNvPr id="44" name="Shape 42"/>
-          <p:cNvSpPr/>
-          <p:nvPr/>
-        </p:nvSpPr>
-        <p:spPr>
-          <a:xfrm>
-            <a:off x="5759577" y="4169664"/>
+          <p:cNvPr id="48" name="Shape 46"/>
+          <p:cNvSpPr/>
+          <p:nvPr/>
+        </p:nvSpPr>
+        <p:spPr>
+          <a:xfrm>
+            <a:off x="6870192" y="4169664"/>
             <a:ext cx="685800" cy="475488"/>
           </a:xfrm>
           <a:prstGeom prst="rect">
@@ -22492,13 +22235,13 @@
       </p:sp>
       <p:sp>
         <p:nvSpPr>
-          <p:cNvPr id="45" name="Text 43"/>
-          <p:cNvSpPr/>
-          <p:nvPr/>
-        </p:nvSpPr>
-        <p:spPr>
-          <a:xfrm>
-            <a:off x="5759577" y="4169664"/>
+          <p:cNvPr id="49" name="Text 47"/>
+          <p:cNvSpPr/>
+          <p:nvPr/>
+        </p:nvSpPr>
+        <p:spPr>
+          <a:xfrm>
+            <a:off x="6870192" y="4169664"/>
             <a:ext cx="685800" cy="475488"/>
           </a:xfrm>
           <a:prstGeom prst="rect">
@@ -22523,7 +22266,7 @@
                 <a:ea typeface="Trebuchet MS" pitchFamily="34" charset="-122"/>
                 <a:cs typeface="Trebuchet MS" pitchFamily="34" charset="-120"/>
               </a:rPr>
-              <a:t>u</a:t>
+              <a:t>d</a:t>
             </a:r>
             <a:endParaRPr lang="en-US" sz="900" dirty="0"/>
           </a:p>
@@ -22531,13 +22274,13 @@
       </p:sp>
       <p:sp>
         <p:nvSpPr>
-          <p:cNvPr id="46" name="Shape 44"/>
-          <p:cNvSpPr/>
-          <p:nvPr/>
-        </p:nvSpPr>
-        <p:spPr>
-          <a:xfrm>
-            <a:off x="6668262" y="4169664"/>
+          <p:cNvPr id="50" name="Shape 48"/>
+          <p:cNvSpPr/>
+          <p:nvPr/>
+        </p:nvSpPr>
+        <p:spPr>
+          <a:xfrm>
+            <a:off x="7677912" y="4169664"/>
             <a:ext cx="685800" cy="475488"/>
           </a:xfrm>
           <a:prstGeom prst="rect">
@@ -22558,13 +22301,13 @@
       </p:sp>
       <p:sp>
         <p:nvSpPr>
-          <p:cNvPr id="47" name="Text 45"/>
-          <p:cNvSpPr/>
-          <p:nvPr/>
-        </p:nvSpPr>
-        <p:spPr>
-          <a:xfrm>
-            <a:off x="6668262" y="4169664"/>
+          <p:cNvPr id="51" name="Text 49"/>
+          <p:cNvSpPr/>
+          <p:nvPr/>
+        </p:nvSpPr>
+        <p:spPr>
+          <a:xfrm>
+            <a:off x="7677912" y="4169664"/>
             <a:ext cx="685800" cy="475488"/>
           </a:xfrm>
           <a:prstGeom prst="rect">
@@ -22589,73 +22332,7 @@
                 <a:ea typeface="Trebuchet MS" pitchFamily="34" charset="-122"/>
                 <a:cs typeface="Trebuchet MS" pitchFamily="34" charset="-120"/>
               </a:rPr>
-              <a:t>mm</a:t>
-            </a:r>
-            <a:endParaRPr lang="en-US" sz="900" dirty="0"/>
-          </a:p>
-        </p:txBody>
-      </p:sp>
-      <p:sp>
-        <p:nvSpPr>
-          <p:cNvPr id="48" name="Shape 46"/>
-          <p:cNvSpPr/>
-          <p:nvPr/>
-        </p:nvSpPr>
-        <p:spPr>
-          <a:xfrm>
-            <a:off x="7576947" y="4169664"/>
-            <a:ext cx="685800" cy="475488"/>
-          </a:xfrm>
-          <a:prstGeom prst="rect">
-            <a:avLst>
-              <a:gd name="adj" fmla="val 7692"/>
-            </a:avLst>
-          </a:prstGeom>
-          <a:solidFill>
-            <a:srgbClr val="FFFFFF"/>
-          </a:solidFill>
-          <a:ln w="12700">
-            <a:solidFill>
-              <a:srgbClr val="DB2777"/>
-            </a:solidFill>
-            <a:prstDash val="solid"/>
-          </a:ln>
-        </p:spPr>
-      </p:sp>
-      <p:sp>
-        <p:nvSpPr>
-          <p:cNvPr id="49" name="Text 47"/>
-          <p:cNvSpPr/>
-          <p:nvPr/>
-        </p:nvSpPr>
-        <p:spPr>
-          <a:xfrm>
-            <a:off x="7576947" y="4169664"/>
-            <a:ext cx="685800" cy="475488"/>
-          </a:xfrm>
-          <a:prstGeom prst="rect">
-            <a:avLst/>
-          </a:prstGeom>
-          <a:noFill/>
-          <a:ln/>
-        </p:spPr>
-        <p:txBody>
-          <a:bodyPr wrap="square" lIns="0" tIns="0" rIns="0" bIns="0" rtlCol="0" anchor="ctr"/>
-          <a:lstStyle/>
-          <a:p>
-            <a:pPr algn="ctr" indent="0" marL="0">
-              <a:buNone/>
-            </a:pPr>
-            <a:r>
-              <a:rPr lang="en-US" sz="900" b="1" dirty="0">
-                <a:solidFill>
-                  <a:srgbClr val="9D174D"/>
-                </a:solidFill>
-                <a:latin typeface="Trebuchet MS" pitchFamily="34" charset="0"/>
-                <a:ea typeface="Trebuchet MS" pitchFamily="34" charset="-122"/>
-                <a:cs typeface="Trebuchet MS" pitchFamily="34" charset="-120"/>
-              </a:rPr>
-              <a:t>er</a:t>
+              <a:t>s</a:t>
             </a:r>
             <a:endParaRPr lang="en-US" sz="900" dirty="0"/>
           </a:p>
@@ -22947,7 +22624,7 @@
                 <a:ea typeface="Calibri" pitchFamily="34" charset="-122"/>
                 <a:cs typeface="Calibri" pitchFamily="34" charset="-120"/>
               </a:rPr>
-              <a:t>Word Labs  •  wordlabs.app  •  Prefix: 'mid-' = middle, in the middle</a:t>
+              <a:t>Word Labs  •  wordlabs.app  •  Prefix: 'mid-' = middle</a:t>
             </a:r>
             <a:endParaRPr lang="en-US" sz="800" dirty="0"/>
           </a:p>
@@ -23774,7 +23451,7 @@
                 <a:ea typeface="Calibri" pitchFamily="34" charset="-122"/>
                 <a:cs typeface="Calibri" pitchFamily="34" charset="-120"/>
               </a:rPr>
-              <a:t>Word Labs  •  wordlabs.app  •  Prefix: 'mid-' = middle, in the middle</a:t>
+              <a:t>Word Labs  •  wordlabs.app  •  Prefix: 'mid-' = middle</a:t>
             </a:r>
             <a:endParaRPr lang="en-US" sz="800" dirty="0"/>
           </a:p>
@@ -24203,7 +23880,7 @@
                 <a:ea typeface="Calibri" pitchFamily="34" charset="-122"/>
                 <a:cs typeface="Calibri" pitchFamily="34" charset="-120"/>
               </a:rPr>
-              <a:t>the dark time of day</a:t>
+              <a:t>the time of darkness</a:t>
             </a:r>
             <a:endParaRPr lang="en-US" sz="850" dirty="0"/>
           </a:p>
@@ -24759,7 +24436,7 @@
                 <a:ea typeface="Calibri" pitchFamily="34" charset="-122"/>
                 <a:cs typeface="Calibri" pitchFamily="34" charset="-120"/>
               </a:rPr>
-              <a:t>Word Labs  •  wordlabs.app  •  Prefix: 'mid-' = middle, in the middle</a:t>
+              <a:t>Word Labs  •  wordlabs.app  •  Prefix: 'mid-' = middle</a:t>
             </a:r>
             <a:endParaRPr lang="en-US" sz="800" dirty="0"/>
           </a:p>
@@ -24832,7 +24509,7 @@
                 <a:ea typeface="Trebuchet MS" pitchFamily="34" charset="-122"/>
                 <a:cs typeface="Trebuchet MS" pitchFamily="34" charset="-120"/>
               </a:rPr>
-              <a:t>We are learning that the prefix 'mid-' means 'middle, in the middle'.</a:t>
+              <a:t>We are learning that the prefix 'mid-' means 'middle'.</a:t>
             </a:r>
             <a:endParaRPr lang="en-US" sz="2000" dirty="0"/>
           </a:p>
@@ -25478,7 +25155,7 @@
                 <a:ea typeface="Calibri" pitchFamily="34" charset="-122"/>
                 <a:cs typeface="Calibri" pitchFamily="34" charset="-120"/>
               </a:rPr>
-              <a:t>Word Labs  •  wordlabs.app  •  Prefix: 'mid-' = middle, in the middle</a:t>
+              <a:t>Word Labs  •  wordlabs.app  •  Prefix: 'mid-' = middle</a:t>
             </a:r>
             <a:endParaRPr lang="en-US" sz="800" dirty="0"/>
           </a:p>
@@ -25907,7 +25584,7 @@
                 <a:ea typeface="Calibri" pitchFamily="34" charset="-122"/>
                 <a:cs typeface="Calibri" pitchFamily="34" charset="-120"/>
               </a:rPr>
-              <a:t>the dark time of day</a:t>
+              <a:t>the time of darkness</a:t>
             </a:r>
             <a:endParaRPr lang="en-US" sz="850" dirty="0"/>
           </a:p>
@@ -26595,7 +26272,7 @@
                 <a:ea typeface="Calibri" pitchFamily="34" charset="-122"/>
                 <a:cs typeface="Calibri" pitchFamily="34" charset="-120"/>
               </a:rPr>
-              <a:t>Word Labs  •  wordlabs.app  •  Prefix: 'mid-' = middle, in the middle</a:t>
+              <a:t>Word Labs  •  wordlabs.app  •  Prefix: 'mid-' = middle</a:t>
             </a:r>
             <a:endParaRPr lang="en-US" sz="800" dirty="0"/>
           </a:p>
@@ -27024,7 +26701,7 @@
                 <a:ea typeface="Calibri" pitchFamily="34" charset="-122"/>
                 <a:cs typeface="Calibri" pitchFamily="34" charset="-120"/>
               </a:rPr>
-              <a:t>the dark time of day</a:t>
+              <a:t>the time of darkness</a:t>
             </a:r>
             <a:endParaRPr lang="en-US" sz="850" dirty="0"/>
           </a:p>
@@ -27369,11 +27046,11 @@
         <p:spPr>
           <a:xfrm>
             <a:off x="1874520" y="4096512"/>
-            <a:ext cx="6903720" cy="804672"/>
+            <a:ext cx="6903720" cy="658368"/>
           </a:xfrm>
           <a:prstGeom prst="rect">
             <a:avLst>
-              <a:gd name="adj" fmla="val 6818"/>
+              <a:gd name="adj" fmla="val 8333"/>
             </a:avLst>
           </a:prstGeom>
           <a:solidFill>
@@ -27396,11 +27073,11 @@
         <p:spPr>
           <a:xfrm>
             <a:off x="2254649" y="4169664"/>
-            <a:ext cx="685800" cy="384048"/>
+            <a:ext cx="685800" cy="475488"/>
           </a:xfrm>
           <a:prstGeom prst="rect">
             <a:avLst>
-              <a:gd name="adj" fmla="val 9524"/>
+              <a:gd name="adj" fmla="val 7692"/>
             </a:avLst>
           </a:prstGeom>
           <a:solidFill>
@@ -27423,7 +27100,7 @@
         <p:spPr>
           <a:xfrm>
             <a:off x="2254649" y="4169664"/>
-            <a:ext cx="685800" cy="384048"/>
+            <a:ext cx="685800" cy="475488"/>
           </a:xfrm>
           <a:prstGeom prst="rect">
             <a:avLst/>
@@ -27462,11 +27139,11 @@
         <p:spPr>
           <a:xfrm>
             <a:off x="3293146" y="4169664"/>
-            <a:ext cx="685800" cy="384048"/>
+            <a:ext cx="685800" cy="475488"/>
           </a:xfrm>
           <a:prstGeom prst="rect">
             <a:avLst>
-              <a:gd name="adj" fmla="val 9524"/>
+              <a:gd name="adj" fmla="val 7692"/>
             </a:avLst>
           </a:prstGeom>
           <a:solidFill>
@@ -27489,7 +27166,7 @@
         <p:spPr>
           <a:xfrm>
             <a:off x="3293146" y="4169664"/>
-            <a:ext cx="685800" cy="384048"/>
+            <a:ext cx="685800" cy="475488"/>
           </a:xfrm>
           <a:prstGeom prst="rect">
             <a:avLst/>
@@ -27528,11 +27205,11 @@
         <p:spPr>
           <a:xfrm>
             <a:off x="4331643" y="4169664"/>
-            <a:ext cx="685800" cy="384048"/>
+            <a:ext cx="685800" cy="475488"/>
           </a:xfrm>
           <a:prstGeom prst="rect">
             <a:avLst>
-              <a:gd name="adj" fmla="val 9524"/>
+              <a:gd name="adj" fmla="val 7692"/>
             </a:avLst>
           </a:prstGeom>
           <a:solidFill>
@@ -27555,7 +27232,7 @@
         <p:spPr>
           <a:xfrm>
             <a:off x="4331643" y="4169664"/>
-            <a:ext cx="685800" cy="384048"/>
+            <a:ext cx="685800" cy="475488"/>
           </a:xfrm>
           <a:prstGeom prst="rect">
             <a:avLst/>
@@ -27594,11 +27271,11 @@
         <p:spPr>
           <a:xfrm>
             <a:off x="5370141" y="4169664"/>
-            <a:ext cx="685800" cy="384048"/>
+            <a:ext cx="685800" cy="475488"/>
           </a:xfrm>
           <a:prstGeom prst="rect">
             <a:avLst>
-              <a:gd name="adj" fmla="val 9524"/>
+              <a:gd name="adj" fmla="val 7692"/>
             </a:avLst>
           </a:prstGeom>
           <a:solidFill>
@@ -27621,7 +27298,7 @@
         <p:spPr>
           <a:xfrm>
             <a:off x="5370141" y="4169664"/>
-            <a:ext cx="685800" cy="384048"/>
+            <a:ext cx="685800" cy="475488"/>
           </a:xfrm>
           <a:prstGeom prst="rect">
             <a:avLst/>
@@ -27660,11 +27337,11 @@
         <p:spPr>
           <a:xfrm>
             <a:off x="6408638" y="4169664"/>
-            <a:ext cx="685800" cy="384048"/>
+            <a:ext cx="685800" cy="475488"/>
           </a:xfrm>
           <a:prstGeom prst="rect">
             <a:avLst>
-              <a:gd name="adj" fmla="val 9524"/>
+              <a:gd name="adj" fmla="val 7692"/>
             </a:avLst>
           </a:prstGeom>
           <a:solidFill>
@@ -27687,7 +27364,7 @@
         <p:spPr>
           <a:xfrm>
             <a:off x="6408638" y="4169664"/>
-            <a:ext cx="685800" cy="384048"/>
+            <a:ext cx="685800" cy="475488"/>
           </a:xfrm>
           <a:prstGeom prst="rect">
             <a:avLst/>
@@ -27719,57 +27396,18 @@
       </p:sp>
       <p:sp>
         <p:nvSpPr>
-          <p:cNvPr id="43" name="Text 41"/>
-          <p:cNvSpPr/>
-          <p:nvPr/>
-        </p:nvSpPr>
-        <p:spPr>
-          <a:xfrm>
-            <a:off x="6408638" y="4572000"/>
-            <a:ext cx="685800" cy="219456"/>
-          </a:xfrm>
-          <a:prstGeom prst="rect">
-            <a:avLst/>
-          </a:prstGeom>
-          <a:noFill/>
-          <a:ln/>
-        </p:spPr>
-        <p:txBody>
-          <a:bodyPr wrap="square" lIns="0" tIns="0" rIns="0" bIns="0" rtlCol="0" anchor="t"/>
-          <a:lstStyle/>
-          <a:p>
-            <a:pPr algn="ctr" indent="0" marL="0">
-              <a:buNone/>
-            </a:pPr>
-            <a:r>
-              <a:rPr lang="en-US" sz="750" i="1" dirty="0">
-                <a:solidFill>
-                  <a:srgbClr val="94A3B8"/>
-                </a:solidFill>
-                <a:latin typeface="Calibri" pitchFamily="34" charset="0"/>
-                <a:ea typeface="Calibri" pitchFamily="34" charset="-122"/>
-                <a:cs typeface="Calibri" pitchFamily="34" charset="-120"/>
-              </a:rPr>
-              <a:t>/ie/</a:t>
-            </a:r>
-            <a:endParaRPr lang="en-US" sz="750" dirty="0"/>
-          </a:p>
-        </p:txBody>
-      </p:sp>
-      <p:sp>
-        <p:nvSpPr>
-          <p:cNvPr id="44" name="Shape 42"/>
+          <p:cNvPr id="43" name="Shape 41"/>
           <p:cNvSpPr/>
           <p:nvPr/>
         </p:nvSpPr>
         <p:spPr>
           <a:xfrm>
             <a:off x="7447135" y="4169664"/>
-            <a:ext cx="685800" cy="384048"/>
+            <a:ext cx="685800" cy="475488"/>
           </a:xfrm>
           <a:prstGeom prst="rect">
             <a:avLst>
-              <a:gd name="adj" fmla="val 9524"/>
+              <a:gd name="adj" fmla="val 7692"/>
             </a:avLst>
           </a:prstGeom>
           <a:solidFill>
@@ -27785,14 +27423,14 @@
       </p:sp>
       <p:sp>
         <p:nvSpPr>
-          <p:cNvPr id="45" name="Text 43"/>
+          <p:cNvPr id="44" name="Text 42"/>
           <p:cNvSpPr/>
           <p:nvPr/>
         </p:nvSpPr>
         <p:spPr>
           <a:xfrm>
             <a:off x="7447135" y="4169664"/>
-            <a:ext cx="685800" cy="384048"/>
+            <a:ext cx="685800" cy="475488"/>
           </a:xfrm>
           <a:prstGeom prst="rect">
             <a:avLst/>
@@ -28108,7 +27746,7 @@
                 <a:ea typeface="Calibri" pitchFamily="34" charset="-122"/>
                 <a:cs typeface="Calibri" pitchFamily="34" charset="-120"/>
               </a:rPr>
-              <a:t>Word Labs  •  wordlabs.app  •  Prefix: 'mid-' = middle, in the middle</a:t>
+              <a:t>Word Labs  •  wordlabs.app  •  Prefix: 'mid-' = middle</a:t>
             </a:r>
             <a:endParaRPr lang="en-US" sz="800" dirty="0"/>
           </a:p>
@@ -28247,7 +27885,7 @@
                 <a:ea typeface="Trebuchet MS" pitchFamily="34" charset="-122"/>
                 <a:cs typeface="Trebuchet MS" pitchFamily="34" charset="-120"/>
               </a:rPr>
-              <a:t>midway</a:t>
+              <a:t>midpoint</a:t>
             </a:r>
             <a:endParaRPr lang="en-US" sz="2800" dirty="0"/>
           </a:p>
@@ -28935,7 +28573,7 @@
                 <a:ea typeface="Calibri" pitchFamily="34" charset="-122"/>
                 <a:cs typeface="Calibri" pitchFamily="34" charset="-120"/>
               </a:rPr>
-              <a:t>Word Labs  •  wordlabs.app  •  Prefix: 'mid-' = middle, in the middle</a:t>
+              <a:t>Word Labs  •  wordlabs.app  •  Prefix: 'mid-' = middle</a:t>
             </a:r>
             <a:endParaRPr lang="en-US" sz="800" dirty="0"/>
           </a:p>
@@ -29074,7 +28712,7 @@
                 <a:ea typeface="Trebuchet MS" pitchFamily="34" charset="-122"/>
                 <a:cs typeface="Trebuchet MS" pitchFamily="34" charset="-120"/>
               </a:rPr>
-              <a:t>midway</a:t>
+              <a:t>midpoint</a:t>
             </a:r>
             <a:endParaRPr lang="en-US" sz="2800" dirty="0"/>
           </a:p>
@@ -29325,7 +28963,7 @@
                 <a:ea typeface="Trebuchet MS" pitchFamily="34" charset="-122"/>
                 <a:cs typeface="Trebuchet MS" pitchFamily="34" charset="-120"/>
               </a:rPr>
-              <a:t>way</a:t>
+              <a:t>point</a:t>
             </a:r>
             <a:endParaRPr lang="en-US" sz="1300" dirty="0"/>
           </a:p>
@@ -29364,7 +29002,7 @@
                 <a:ea typeface="Calibri" pitchFamily="34" charset="-122"/>
                 <a:cs typeface="Calibri" pitchFamily="34" charset="-120"/>
               </a:rPr>
-              <a:t>a path or route</a:t>
+              <a:t>a specific spot or tip</a:t>
             </a:r>
             <a:endParaRPr lang="en-US" sz="850" dirty="0"/>
           </a:p>
@@ -29920,7 +29558,7 @@
                 <a:ea typeface="Calibri" pitchFamily="34" charset="-122"/>
                 <a:cs typeface="Calibri" pitchFamily="34" charset="-120"/>
               </a:rPr>
-              <a:t>Word Labs  •  wordlabs.app  •  Prefix: 'mid-' = middle, in the middle</a:t>
+              <a:t>Word Labs  •  wordlabs.app  •  Prefix: 'mid-' = middle</a:t>
             </a:r>
             <a:endParaRPr lang="en-US" sz="800" dirty="0"/>
           </a:p>
@@ -30059,7 +29697,7 @@
                 <a:ea typeface="Trebuchet MS" pitchFamily="34" charset="-122"/>
                 <a:cs typeface="Trebuchet MS" pitchFamily="34" charset="-120"/>
               </a:rPr>
-              <a:t>midway</a:t>
+              <a:t>midpoint</a:t>
             </a:r>
             <a:endParaRPr lang="en-US" sz="2800" dirty="0"/>
           </a:p>
@@ -30310,7 +29948,7 @@
                 <a:ea typeface="Trebuchet MS" pitchFamily="34" charset="-122"/>
                 <a:cs typeface="Trebuchet MS" pitchFamily="34" charset="-120"/>
               </a:rPr>
-              <a:t>way</a:t>
+              <a:t>point</a:t>
             </a:r>
             <a:endParaRPr lang="en-US" sz="1300" dirty="0"/>
           </a:p>
@@ -30349,7 +29987,7 @@
                 <a:ea typeface="Calibri" pitchFamily="34" charset="-122"/>
                 <a:cs typeface="Calibri" pitchFamily="34" charset="-120"/>
               </a:rPr>
-              <a:t>a path or route</a:t>
+              <a:t>a specific spot or tip</a:t>
             </a:r>
             <a:endParaRPr lang="en-US" sz="850" dirty="0"/>
           </a:p>
@@ -30613,7 +30251,7 @@
                 <a:ea typeface="Trebuchet MS" pitchFamily="34" charset="-122"/>
                 <a:cs typeface="Trebuchet MS" pitchFamily="34" charset="-120"/>
               </a:rPr>
-              <a:t>way</a:t>
+              <a:t>point</a:t>
             </a:r>
             <a:endParaRPr lang="en-US" sz="1400" dirty="0"/>
           </a:p>
@@ -31037,7 +30675,7 @@
                 <a:ea typeface="Calibri" pitchFamily="34" charset="-122"/>
                 <a:cs typeface="Calibri" pitchFamily="34" charset="-120"/>
               </a:rPr>
-              <a:t>Word Labs  •  wordlabs.app  •  Prefix: 'mid-' = middle, in the middle</a:t>
+              <a:t>Word Labs  •  wordlabs.app  •  Prefix: 'mid-' = middle</a:t>
             </a:r>
             <a:endParaRPr lang="en-US" sz="800" dirty="0"/>
           </a:p>
@@ -31176,7 +30814,7 @@
                 <a:ea typeface="Trebuchet MS" pitchFamily="34" charset="-122"/>
                 <a:cs typeface="Trebuchet MS" pitchFamily="34" charset="-120"/>
               </a:rPr>
-              <a:t>midway</a:t>
+              <a:t>midpoint</a:t>
             </a:r>
             <a:endParaRPr lang="en-US" sz="2800" dirty="0"/>
           </a:p>
@@ -31427,7 +31065,7 @@
                 <a:ea typeface="Trebuchet MS" pitchFamily="34" charset="-122"/>
                 <a:cs typeface="Trebuchet MS" pitchFamily="34" charset="-120"/>
               </a:rPr>
-              <a:t>way</a:t>
+              <a:t>point</a:t>
             </a:r>
             <a:endParaRPr lang="en-US" sz="1300" dirty="0"/>
           </a:p>
@@ -31466,7 +31104,7 @@
                 <a:ea typeface="Calibri" pitchFamily="34" charset="-122"/>
                 <a:cs typeface="Calibri" pitchFamily="34" charset="-120"/>
               </a:rPr>
-              <a:t>a path or route</a:t>
+              <a:t>a specific spot or tip</a:t>
             </a:r>
             <a:endParaRPr lang="en-US" sz="850" dirty="0"/>
           </a:p>
@@ -31730,7 +31368,7 @@
                 <a:ea typeface="Trebuchet MS" pitchFamily="34" charset="-122"/>
                 <a:cs typeface="Trebuchet MS" pitchFamily="34" charset="-120"/>
               </a:rPr>
-              <a:t>way</a:t>
+              <a:t>point</a:t>
             </a:r>
             <a:endParaRPr lang="en-US" sz="1400" dirty="0"/>
           </a:p>
@@ -31837,7 +31475,7 @@
         </p:nvSpPr>
         <p:spPr>
           <a:xfrm>
-            <a:off x="2427732" y="4169664"/>
+            <a:off x="2124837" y="4169664"/>
             <a:ext cx="685800" cy="475488"/>
           </a:xfrm>
           <a:prstGeom prst="rect">
@@ -31864,7 +31502,7 @@
         </p:nvSpPr>
         <p:spPr>
           <a:xfrm>
-            <a:off x="2427732" y="4169664"/>
+            <a:off x="2124837" y="4169664"/>
             <a:ext cx="685800" cy="475488"/>
           </a:xfrm>
           <a:prstGeom prst="rect">
@@ -31903,7 +31541,7 @@
         </p:nvSpPr>
         <p:spPr>
           <a:xfrm>
-            <a:off x="3639312" y="4169664"/>
+            <a:off x="3033522" y="4169664"/>
             <a:ext cx="685800" cy="475488"/>
           </a:xfrm>
           <a:prstGeom prst="rect">
@@ -31930,7 +31568,7 @@
         </p:nvSpPr>
         <p:spPr>
           <a:xfrm>
-            <a:off x="3639312" y="4169664"/>
+            <a:off x="3033522" y="4169664"/>
             <a:ext cx="685800" cy="475488"/>
           </a:xfrm>
           <a:prstGeom prst="rect">
@@ -31969,7 +31607,7 @@
         </p:nvSpPr>
         <p:spPr>
           <a:xfrm>
-            <a:off x="4850892" y="4169664"/>
+            <a:off x="3942207" y="4169664"/>
             <a:ext cx="685800" cy="475488"/>
           </a:xfrm>
           <a:prstGeom prst="rect">
@@ -31996,7 +31634,7 @@
         </p:nvSpPr>
         <p:spPr>
           <a:xfrm>
-            <a:off x="4850892" y="4169664"/>
+            <a:off x="3942207" y="4169664"/>
             <a:ext cx="685800" cy="475488"/>
           </a:xfrm>
           <a:prstGeom prst="rect">
@@ -32035,7 +31673,7 @@
         </p:nvSpPr>
         <p:spPr>
           <a:xfrm>
-            <a:off x="6062472" y="4169664"/>
+            <a:off x="4850892" y="4169664"/>
             <a:ext cx="685800" cy="475488"/>
           </a:xfrm>
           <a:prstGeom prst="rect">
@@ -32062,7 +31700,7 @@
         </p:nvSpPr>
         <p:spPr>
           <a:xfrm>
-            <a:off x="6062472" y="4169664"/>
+            <a:off x="4850892" y="4169664"/>
             <a:ext cx="685800" cy="475488"/>
           </a:xfrm>
           <a:prstGeom prst="rect">
@@ -32087,7 +31725,7 @@
                 <a:ea typeface="Trebuchet MS" pitchFamily="34" charset="-122"/>
                 <a:cs typeface="Trebuchet MS" pitchFamily="34" charset="-120"/>
               </a:rPr>
-              <a:t>w</a:t>
+              <a:t>p</a:t>
             </a:r>
             <a:endParaRPr lang="en-US" sz="900" dirty="0"/>
           </a:p>
@@ -32101,7 +31739,7 @@
         </p:nvSpPr>
         <p:spPr>
           <a:xfrm>
-            <a:off x="7274052" y="4169664"/>
+            <a:off x="5759577" y="4169664"/>
             <a:ext cx="685800" cy="475488"/>
           </a:xfrm>
           <a:prstGeom prst="rect">
@@ -32128,7 +31766,7 @@
         </p:nvSpPr>
         <p:spPr>
           <a:xfrm>
-            <a:off x="7274052" y="4169664"/>
+            <a:off x="5759577" y="4169664"/>
             <a:ext cx="685800" cy="475488"/>
           </a:xfrm>
           <a:prstGeom prst="rect">
@@ -32153,7 +31791,139 @@
                 <a:ea typeface="Trebuchet MS" pitchFamily="34" charset="-122"/>
                 <a:cs typeface="Trebuchet MS" pitchFamily="34" charset="-120"/>
               </a:rPr>
-              <a:t>ay</a:t>
+              <a:t>oi</a:t>
+            </a:r>
+            <a:endParaRPr lang="en-US" sz="900" dirty="0"/>
+          </a:p>
+        </p:txBody>
+      </p:sp>
+      <p:sp>
+        <p:nvSpPr>
+          <p:cNvPr id="43" name="Shape 41"/>
+          <p:cNvSpPr/>
+          <p:nvPr/>
+        </p:nvSpPr>
+        <p:spPr>
+          <a:xfrm>
+            <a:off x="6668262" y="4169664"/>
+            <a:ext cx="685800" cy="475488"/>
+          </a:xfrm>
+          <a:prstGeom prst="rect">
+            <a:avLst>
+              <a:gd name="adj" fmla="val 7692"/>
+            </a:avLst>
+          </a:prstGeom>
+          <a:solidFill>
+            <a:srgbClr val="FFFFFF"/>
+          </a:solidFill>
+          <a:ln w="12700">
+            <a:solidFill>
+              <a:srgbClr val="DB2777"/>
+            </a:solidFill>
+            <a:prstDash val="solid"/>
+          </a:ln>
+        </p:spPr>
+      </p:sp>
+      <p:sp>
+        <p:nvSpPr>
+          <p:cNvPr id="44" name="Text 42"/>
+          <p:cNvSpPr/>
+          <p:nvPr/>
+        </p:nvSpPr>
+        <p:spPr>
+          <a:xfrm>
+            <a:off x="6668262" y="4169664"/>
+            <a:ext cx="685800" cy="475488"/>
+          </a:xfrm>
+          <a:prstGeom prst="rect">
+            <a:avLst/>
+          </a:prstGeom>
+          <a:noFill/>
+          <a:ln/>
+        </p:spPr>
+        <p:txBody>
+          <a:bodyPr wrap="square" lIns="0" tIns="0" rIns="0" bIns="0" rtlCol="0" anchor="ctr"/>
+          <a:lstStyle/>
+          <a:p>
+            <a:pPr algn="ctr" indent="0" marL="0">
+              <a:buNone/>
+            </a:pPr>
+            <a:r>
+              <a:rPr lang="en-US" sz="900" b="1" dirty="0">
+                <a:solidFill>
+                  <a:srgbClr val="9D174D"/>
+                </a:solidFill>
+                <a:latin typeface="Trebuchet MS" pitchFamily="34" charset="0"/>
+                <a:ea typeface="Trebuchet MS" pitchFamily="34" charset="-122"/>
+                <a:cs typeface="Trebuchet MS" pitchFamily="34" charset="-120"/>
+              </a:rPr>
+              <a:t>n</a:t>
+            </a:r>
+            <a:endParaRPr lang="en-US" sz="900" dirty="0"/>
+          </a:p>
+        </p:txBody>
+      </p:sp>
+      <p:sp>
+        <p:nvSpPr>
+          <p:cNvPr id="45" name="Shape 43"/>
+          <p:cNvSpPr/>
+          <p:nvPr/>
+        </p:nvSpPr>
+        <p:spPr>
+          <a:xfrm>
+            <a:off x="7576947" y="4169664"/>
+            <a:ext cx="685800" cy="475488"/>
+          </a:xfrm>
+          <a:prstGeom prst="rect">
+            <a:avLst>
+              <a:gd name="adj" fmla="val 7692"/>
+            </a:avLst>
+          </a:prstGeom>
+          <a:solidFill>
+            <a:srgbClr val="FFFFFF"/>
+          </a:solidFill>
+          <a:ln w="12700">
+            <a:solidFill>
+              <a:srgbClr val="DB2777"/>
+            </a:solidFill>
+            <a:prstDash val="solid"/>
+          </a:ln>
+        </p:spPr>
+      </p:sp>
+      <p:sp>
+        <p:nvSpPr>
+          <p:cNvPr id="46" name="Text 44"/>
+          <p:cNvSpPr/>
+          <p:nvPr/>
+        </p:nvSpPr>
+        <p:spPr>
+          <a:xfrm>
+            <a:off x="7576947" y="4169664"/>
+            <a:ext cx="685800" cy="475488"/>
+          </a:xfrm>
+          <a:prstGeom prst="rect">
+            <a:avLst/>
+          </a:prstGeom>
+          <a:noFill/>
+          <a:ln/>
+        </p:spPr>
+        <p:txBody>
+          <a:bodyPr wrap="square" lIns="0" tIns="0" rIns="0" bIns="0" rtlCol="0" anchor="ctr"/>
+          <a:lstStyle/>
+          <a:p>
+            <a:pPr algn="ctr" indent="0" marL="0">
+              <a:buNone/>
+            </a:pPr>
+            <a:r>
+              <a:rPr lang="en-US" sz="900" b="1" dirty="0">
+                <a:solidFill>
+                  <a:srgbClr val="9D174D"/>
+                </a:solidFill>
+                <a:latin typeface="Trebuchet MS" pitchFamily="34" charset="0"/>
+                <a:ea typeface="Trebuchet MS" pitchFamily="34" charset="-122"/>
+                <a:cs typeface="Trebuchet MS" pitchFamily="34" charset="-120"/>
+              </a:rPr>
+              <a:t>t</a:t>
             </a:r>
             <a:endParaRPr lang="en-US" sz="900" dirty="0"/>
           </a:p>
@@ -32445,7 +32215,7 @@
                 <a:ea typeface="Calibri" pitchFamily="34" charset="-122"/>
                 <a:cs typeface="Calibri" pitchFamily="34" charset="-120"/>
               </a:rPr>
-              <a:t>Word Labs  •  wordlabs.app  •  Prefix: 'mid-' = middle, in the middle</a:t>
+              <a:t>Word Labs  •  wordlabs.app  •  Prefix: 'mid-' = middle</a:t>
             </a:r>
             <a:endParaRPr lang="en-US" sz="800" dirty="0"/>
           </a:p>
@@ -33614,7 +33384,7 @@
                 <a:ea typeface="Calibri" pitchFamily="34" charset="-122"/>
                 <a:cs typeface="Calibri" pitchFamily="34" charset="-120"/>
               </a:rPr>
-              <a:t>Word Labs  •  wordlabs.app  •  Prefix: 'mid-' = middle, in the middle</a:t>
+              <a:t>Word Labs  •  wordlabs.app  •  Prefix: 'mid-' = middle</a:t>
             </a:r>
             <a:endParaRPr lang="en-US" sz="800" dirty="0"/>
           </a:p>
@@ -34132,7 +33902,7 @@
                 <a:ea typeface="Trebuchet MS" pitchFamily="34" charset="-122"/>
                 <a:cs typeface="Trebuchet MS" pitchFamily="34" charset="-120"/>
               </a:rPr>
-              <a:t>night</a:t>
+              <a:t>field</a:t>
             </a:r>
             <a:endParaRPr lang="en-US" sz="1300" dirty="0"/>
           </a:p>
@@ -34153,7 +33923,7 @@
             <a:avLst/>
           </a:prstGeom>
           <a:solidFill>
-            <a:srgbClr val="FCE7F3"/>
+            <a:srgbClr val="F1F5F9"/>
           </a:solidFill>
           <a:ln w="12700">
             <a:solidFill>
@@ -34165,18 +33935,68 @@
       </p:sp>
       <p:sp>
         <p:nvSpPr>
-          <p:cNvPr id="27" name="Text 25"/>
-          <p:cNvSpPr/>
-          <p:nvPr/>
-        </p:nvSpPr>
-        <p:spPr>
-          <a:xfrm>
-            <a:off x="5943600" y="1984248"/>
+          <p:cNvPr id="27" name="Shape 25"/>
+          <p:cNvSpPr/>
+          <p:nvPr/>
+        </p:nvSpPr>
+        <p:spPr>
+          <a:xfrm>
+            <a:off x="365760" y="2404872"/>
+            <a:ext cx="2468880" cy="402336"/>
+          </a:xfrm>
+          <a:prstGeom prst="rect">
+            <a:avLst/>
+          </a:prstGeom>
+          <a:solidFill>
+            <a:srgbClr val="F8FAFC"/>
+          </a:solidFill>
+          <a:ln w="12700">
+            <a:solidFill>
+              <a:srgbClr val="E2E8F0"/>
+            </a:solidFill>
+            <a:prstDash val="solid"/>
+          </a:ln>
+        </p:spPr>
+      </p:sp>
+      <p:sp>
+        <p:nvSpPr>
+          <p:cNvPr id="28" name="Shape 26"/>
+          <p:cNvSpPr/>
+          <p:nvPr/>
+        </p:nvSpPr>
+        <p:spPr>
+          <a:xfrm>
+            <a:off x="2971800" y="2404872"/>
             <a:ext cx="2834640" cy="402336"/>
           </a:xfrm>
           <a:prstGeom prst="rect">
             <a:avLst/>
           </a:prstGeom>
+          <a:solidFill>
+            <a:srgbClr val="CCFBF1"/>
+          </a:solidFill>
+          <a:ln w="12700">
+            <a:solidFill>
+              <a:srgbClr val="E2E8F0"/>
+            </a:solidFill>
+            <a:prstDash val="solid"/>
+          </a:ln>
+        </p:spPr>
+      </p:sp>
+      <p:sp>
+        <p:nvSpPr>
+          <p:cNvPr id="29" name="Text 27"/>
+          <p:cNvSpPr/>
+          <p:nvPr/>
+        </p:nvSpPr>
+        <p:spPr>
+          <a:xfrm>
+            <a:off x="2971800" y="2404872"/>
+            <a:ext cx="2834640" cy="402336"/>
+          </a:xfrm>
+          <a:prstGeom prst="rect">
+            <a:avLst/>
+          </a:prstGeom>
           <a:noFill/>
           <a:ln/>
         </p:spPr>
@@ -34190,13 +34010,13 @@
             <a:r>
               <a:rPr lang="en-US" sz="1300" b="1" dirty="0">
                 <a:solidFill>
-                  <a:srgbClr val="9D174D"/>
+                  <a:srgbClr val="0F766E"/>
                 </a:solidFill>
                 <a:latin typeface="Trebuchet MS" pitchFamily="34" charset="0"/>
                 <a:ea typeface="Trebuchet MS" pitchFamily="34" charset="-122"/>
                 <a:cs typeface="Trebuchet MS" pitchFamily="34" charset="-120"/>
               </a:rPr>
-              <a:t>-er</a:t>
+              <a:t>land</a:t>
             </a:r>
             <a:endParaRPr lang="en-US" sz="1300" dirty="0"/>
           </a:p>
@@ -34204,20 +34024,45 @@
       </p:sp>
       <p:sp>
         <p:nvSpPr>
-          <p:cNvPr id="28" name="Shape 26"/>
-          <p:cNvSpPr/>
-          <p:nvPr/>
-        </p:nvSpPr>
-        <p:spPr>
-          <a:xfrm>
-            <a:off x="365760" y="2404872"/>
+          <p:cNvPr id="30" name="Shape 28"/>
+          <p:cNvSpPr/>
+          <p:nvPr/>
+        </p:nvSpPr>
+        <p:spPr>
+          <a:xfrm>
+            <a:off x="5943600" y="2404872"/>
+            <a:ext cx="2834640" cy="402336"/>
+          </a:xfrm>
+          <a:prstGeom prst="rect">
+            <a:avLst/>
+          </a:prstGeom>
+          <a:solidFill>
+            <a:srgbClr val="F8FAFC"/>
+          </a:solidFill>
+          <a:ln w="12700">
+            <a:solidFill>
+              <a:srgbClr val="E2E8F0"/>
+            </a:solidFill>
+            <a:prstDash val="solid"/>
+          </a:ln>
+        </p:spPr>
+      </p:sp>
+      <p:sp>
+        <p:nvSpPr>
+          <p:cNvPr id="31" name="Shape 29"/>
+          <p:cNvSpPr/>
+          <p:nvPr/>
+        </p:nvSpPr>
+        <p:spPr>
+          <a:xfrm>
+            <a:off x="365760" y="2825496"/>
             <a:ext cx="2468880" cy="402336"/>
           </a:xfrm>
           <a:prstGeom prst="rect">
             <a:avLst/>
           </a:prstGeom>
           <a:solidFill>
-            <a:srgbClr val="F8FAFC"/>
+            <a:srgbClr val="F1F5F9"/>
           </a:solidFill>
           <a:ln w="12700">
             <a:solidFill>
@@ -34229,13 +34074,13 @@
       </p:sp>
       <p:sp>
         <p:nvSpPr>
-          <p:cNvPr id="29" name="Shape 27"/>
-          <p:cNvSpPr/>
-          <p:nvPr/>
-        </p:nvSpPr>
-        <p:spPr>
-          <a:xfrm>
-            <a:off x="2971800" y="2404872"/>
+          <p:cNvPr id="32" name="Shape 30"/>
+          <p:cNvSpPr/>
+          <p:nvPr/>
+        </p:nvSpPr>
+        <p:spPr>
+          <a:xfrm>
+            <a:off x="2971800" y="2825496"/>
             <a:ext cx="2834640" cy="402336"/>
           </a:xfrm>
           <a:prstGeom prst="rect">
@@ -34254,13 +34099,13 @@
       </p:sp>
       <p:sp>
         <p:nvSpPr>
-          <p:cNvPr id="30" name="Text 28"/>
-          <p:cNvSpPr/>
-          <p:nvPr/>
-        </p:nvSpPr>
-        <p:spPr>
-          <a:xfrm>
-            <a:off x="2971800" y="2404872"/>
+          <p:cNvPr id="33" name="Text 31"/>
+          <p:cNvSpPr/>
+          <p:nvPr/>
+        </p:nvSpPr>
+        <p:spPr>
+          <a:xfrm>
+            <a:off x="2971800" y="2825496"/>
             <a:ext cx="2834640" cy="402336"/>
           </a:xfrm>
           <a:prstGeom prst="rect">
@@ -34285,7 +34130,7 @@
                 <a:ea typeface="Trebuchet MS" pitchFamily="34" charset="-122"/>
                 <a:cs typeface="Trebuchet MS" pitchFamily="34" charset="-120"/>
               </a:rPr>
-              <a:t>summer</a:t>
+              <a:t>night</a:t>
             </a:r>
             <a:endParaRPr lang="en-US" sz="1300" dirty="0"/>
           </a:p>
@@ -34293,20 +34138,20 @@
       </p:sp>
       <p:sp>
         <p:nvSpPr>
-          <p:cNvPr id="31" name="Shape 29"/>
-          <p:cNvSpPr/>
-          <p:nvPr/>
-        </p:nvSpPr>
-        <p:spPr>
-          <a:xfrm>
-            <a:off x="5943600" y="2404872"/>
+          <p:cNvPr id="34" name="Shape 32"/>
+          <p:cNvSpPr/>
+          <p:nvPr/>
+        </p:nvSpPr>
+        <p:spPr>
+          <a:xfrm>
+            <a:off x="5943600" y="2825496"/>
             <a:ext cx="2834640" cy="402336"/>
           </a:xfrm>
           <a:prstGeom prst="rect">
             <a:avLst/>
           </a:prstGeom>
           <a:solidFill>
-            <a:srgbClr val="FCE7F3"/>
+            <a:srgbClr val="F1F5F9"/>
           </a:solidFill>
           <a:ln w="12700">
             <a:solidFill>
@@ -34318,18 +34163,68 @@
       </p:sp>
       <p:sp>
         <p:nvSpPr>
-          <p:cNvPr id="32" name="Text 30"/>
-          <p:cNvSpPr/>
-          <p:nvPr/>
-        </p:nvSpPr>
-        <p:spPr>
-          <a:xfrm>
-            <a:off x="5943600" y="2404872"/>
+          <p:cNvPr id="35" name="Shape 33"/>
+          <p:cNvSpPr/>
+          <p:nvPr/>
+        </p:nvSpPr>
+        <p:spPr>
+          <a:xfrm>
+            <a:off x="365760" y="3246120"/>
+            <a:ext cx="2468880" cy="402336"/>
+          </a:xfrm>
+          <a:prstGeom prst="rect">
+            <a:avLst/>
+          </a:prstGeom>
+          <a:solidFill>
+            <a:srgbClr val="F8FAFC"/>
+          </a:solidFill>
+          <a:ln w="12700">
+            <a:solidFill>
+              <a:srgbClr val="E2E8F0"/>
+            </a:solidFill>
+            <a:prstDash val="solid"/>
+          </a:ln>
+        </p:spPr>
+      </p:sp>
+      <p:sp>
+        <p:nvSpPr>
+          <p:cNvPr id="36" name="Shape 34"/>
+          <p:cNvSpPr/>
+          <p:nvPr/>
+        </p:nvSpPr>
+        <p:spPr>
+          <a:xfrm>
+            <a:off x="2971800" y="3246120"/>
             <a:ext cx="2834640" cy="402336"/>
           </a:xfrm>
           <a:prstGeom prst="rect">
             <a:avLst/>
           </a:prstGeom>
+          <a:solidFill>
+            <a:srgbClr val="CCFBF1"/>
+          </a:solidFill>
+          <a:ln w="12700">
+            <a:solidFill>
+              <a:srgbClr val="E2E8F0"/>
+            </a:solidFill>
+            <a:prstDash val="solid"/>
+          </a:ln>
+        </p:spPr>
+      </p:sp>
+      <p:sp>
+        <p:nvSpPr>
+          <p:cNvPr id="37" name="Text 35"/>
+          <p:cNvSpPr/>
+          <p:nvPr/>
+        </p:nvSpPr>
+        <p:spPr>
+          <a:xfrm>
+            <a:off x="2971800" y="3246120"/>
+            <a:ext cx="2834640" cy="402336"/>
+          </a:xfrm>
+          <a:prstGeom prst="rect">
+            <a:avLst/>
+          </a:prstGeom>
           <a:noFill/>
           <a:ln/>
         </p:spPr>
@@ -34343,13 +34238,13 @@
             <a:r>
               <a:rPr lang="en-US" sz="1300" b="1" dirty="0">
                 <a:solidFill>
-                  <a:srgbClr val="9D174D"/>
+                  <a:srgbClr val="0F766E"/>
                 </a:solidFill>
                 <a:latin typeface="Trebuchet MS" pitchFamily="34" charset="0"/>
                 <a:ea typeface="Trebuchet MS" pitchFamily="34" charset="-122"/>
                 <a:cs typeface="Trebuchet MS" pitchFamily="34" charset="-120"/>
               </a:rPr>
-              <a:t>-ed</a:t>
+              <a:t>point</a:t>
             </a:r>
             <a:endParaRPr lang="en-US" sz="1300" dirty="0"/>
           </a:p>
@@ -34357,13 +34252,38 @@
       </p:sp>
       <p:sp>
         <p:nvSpPr>
-          <p:cNvPr id="33" name="Shape 31"/>
-          <p:cNvSpPr/>
-          <p:nvPr/>
-        </p:nvSpPr>
-        <p:spPr>
-          <a:xfrm>
-            <a:off x="365760" y="2825496"/>
+          <p:cNvPr id="38" name="Shape 36"/>
+          <p:cNvSpPr/>
+          <p:nvPr/>
+        </p:nvSpPr>
+        <p:spPr>
+          <a:xfrm>
+            <a:off x="5943600" y="3246120"/>
+            <a:ext cx="2834640" cy="402336"/>
+          </a:xfrm>
+          <a:prstGeom prst="rect">
+            <a:avLst/>
+          </a:prstGeom>
+          <a:solidFill>
+            <a:srgbClr val="F8FAFC"/>
+          </a:solidFill>
+          <a:ln w="12700">
+            <a:solidFill>
+              <a:srgbClr val="E2E8F0"/>
+            </a:solidFill>
+            <a:prstDash val="solid"/>
+          </a:ln>
+        </p:spPr>
+      </p:sp>
+      <p:sp>
+        <p:nvSpPr>
+          <p:cNvPr id="39" name="Shape 37"/>
+          <p:cNvSpPr/>
+          <p:nvPr/>
+        </p:nvSpPr>
+        <p:spPr>
+          <a:xfrm>
+            <a:off x="365760" y="3666744"/>
             <a:ext cx="2468880" cy="402336"/>
           </a:xfrm>
           <a:prstGeom prst="rect">
@@ -34382,13 +34302,13 @@
       </p:sp>
       <p:sp>
         <p:nvSpPr>
-          <p:cNvPr id="34" name="Shape 32"/>
-          <p:cNvSpPr/>
-          <p:nvPr/>
-        </p:nvSpPr>
-        <p:spPr>
-          <a:xfrm>
-            <a:off x="2971800" y="2825496"/>
+          <p:cNvPr id="40" name="Shape 38"/>
+          <p:cNvSpPr/>
+          <p:nvPr/>
+        </p:nvSpPr>
+        <p:spPr>
+          <a:xfrm>
+            <a:off x="2971800" y="3666744"/>
             <a:ext cx="2834640" cy="402336"/>
           </a:xfrm>
           <a:prstGeom prst="rect">
@@ -34407,13 +34327,13 @@
       </p:sp>
       <p:sp>
         <p:nvSpPr>
-          <p:cNvPr id="35" name="Text 33"/>
-          <p:cNvSpPr/>
-          <p:nvPr/>
-        </p:nvSpPr>
-        <p:spPr>
-          <a:xfrm>
-            <a:off x="2971800" y="2825496"/>
+          <p:cNvPr id="41" name="Text 39"/>
+          <p:cNvSpPr/>
+          <p:nvPr/>
+        </p:nvSpPr>
+        <p:spPr>
+          <a:xfrm>
+            <a:off x="2971800" y="3666744"/>
             <a:ext cx="2834640" cy="402336"/>
           </a:xfrm>
           <a:prstGeom prst="rect">
@@ -34438,7 +34358,7 @@
                 <a:ea typeface="Trebuchet MS" pitchFamily="34" charset="-122"/>
                 <a:cs typeface="Trebuchet MS" pitchFamily="34" charset="-120"/>
               </a:rPr>
-              <a:t>field</a:t>
+              <a:t>way</a:t>
             </a:r>
             <a:endParaRPr lang="en-US" sz="1300" dirty="0"/>
           </a:p>
@@ -34446,20 +34366,20 @@
       </p:sp>
       <p:sp>
         <p:nvSpPr>
-          <p:cNvPr id="36" name="Shape 34"/>
-          <p:cNvSpPr/>
-          <p:nvPr/>
-        </p:nvSpPr>
-        <p:spPr>
-          <a:xfrm>
-            <a:off x="5943600" y="2825496"/>
+          <p:cNvPr id="42" name="Shape 40"/>
+          <p:cNvSpPr/>
+          <p:nvPr/>
+        </p:nvSpPr>
+        <p:spPr>
+          <a:xfrm>
+            <a:off x="5943600" y="3666744"/>
             <a:ext cx="2834640" cy="402336"/>
           </a:xfrm>
           <a:prstGeom prst="rect">
             <a:avLst/>
           </a:prstGeom>
           <a:solidFill>
-            <a:srgbClr val="FCE7F3"/>
+            <a:srgbClr val="F1F5F9"/>
           </a:solidFill>
           <a:ln w="12700">
             <a:solidFill>
@@ -34471,14 +34391,14 @@
       </p:sp>
       <p:sp>
         <p:nvSpPr>
-          <p:cNvPr id="37" name="Text 35"/>
-          <p:cNvSpPr/>
-          <p:nvPr/>
-        </p:nvSpPr>
-        <p:spPr>
-          <a:xfrm>
-            <a:off x="5943600" y="2825496"/>
-            <a:ext cx="2834640" cy="402336"/>
+          <p:cNvPr id="43" name="Text 41"/>
+          <p:cNvSpPr/>
+          <p:nvPr/>
+        </p:nvSpPr>
+        <p:spPr>
+          <a:xfrm>
+            <a:off x="365760" y="3611880"/>
+            <a:ext cx="1828800" cy="347472"/>
           </a:xfrm>
           <a:prstGeom prst="rect">
             <a:avLst/>
@@ -34490,84 +34410,61 @@
           <a:bodyPr wrap="square" lIns="0" tIns="0" rIns="0" bIns="0" rtlCol="0" anchor="ctr"/>
           <a:lstStyle/>
           <a:p>
-            <a:pPr algn="ctr" indent="0" marL="0">
-              <a:buNone/>
-            </a:pPr>
-            <a:r>
-              <a:rPr lang="en-US" sz="1300" b="1" dirty="0">
-                <a:solidFill>
-                  <a:srgbClr val="9D174D"/>
+            <a:pPr algn="l" indent="0" marL="0">
+              <a:buNone/>
+            </a:pPr>
+            <a:r>
+              <a:rPr lang="en-US" sz="1200" b="1" dirty="0">
+                <a:solidFill>
+                  <a:srgbClr val="0F172A"/>
                 </a:solidFill>
                 <a:latin typeface="Trebuchet MS" pitchFamily="34" charset="0"/>
                 <a:ea typeface="Trebuchet MS" pitchFamily="34" charset="-122"/>
                 <a:cs typeface="Trebuchet MS" pitchFamily="34" charset="-120"/>
               </a:rPr>
-              <a:t>-night</a:t>
-            </a:r>
-            <a:endParaRPr lang="en-US" sz="1300" dirty="0"/>
-          </a:p>
-        </p:txBody>
-      </p:sp>
-      <p:sp>
-        <p:nvSpPr>
-          <p:cNvPr id="38" name="Shape 36"/>
-          <p:cNvSpPr/>
-          <p:nvPr/>
-        </p:nvSpPr>
-        <p:spPr>
-          <a:xfrm>
-            <a:off x="365760" y="3246120"/>
-            <a:ext cx="2468880" cy="402336"/>
-          </a:xfrm>
-          <a:prstGeom prst="rect">
-            <a:avLst/>
-          </a:prstGeom>
-          <a:solidFill>
-            <a:srgbClr val="F8FAFC"/>
-          </a:solidFill>
-          <a:ln w="12700">
-            <a:solidFill>
-              <a:srgbClr val="E2E8F0"/>
-            </a:solidFill>
-            <a:prstDash val="solid"/>
-          </a:ln>
-        </p:spPr>
-      </p:sp>
-      <p:sp>
-        <p:nvSpPr>
-          <p:cNvPr id="39" name="Shape 37"/>
-          <p:cNvSpPr/>
-          <p:nvPr/>
-        </p:nvSpPr>
-        <p:spPr>
-          <a:xfrm>
-            <a:off x="2971800" y="3246120"/>
-            <a:ext cx="2834640" cy="402336"/>
-          </a:xfrm>
-          <a:prstGeom prst="rect">
-            <a:avLst/>
-          </a:prstGeom>
-          <a:solidFill>
-            <a:srgbClr val="CCFBF1"/>
-          </a:solidFill>
-          <a:ln w="12700">
-            <a:solidFill>
-              <a:srgbClr val="E2E8F0"/>
-            </a:solidFill>
-            <a:prstDash val="solid"/>
-          </a:ln>
-        </p:spPr>
-      </p:sp>
-      <p:sp>
-        <p:nvSpPr>
-          <p:cNvPr id="40" name="Text 38"/>
-          <p:cNvSpPr/>
-          <p:nvPr/>
-        </p:nvSpPr>
-        <p:spPr>
-          <a:xfrm>
-            <a:off x="2971800" y="3246120"/>
-            <a:ext cx="2834640" cy="402336"/>
+              <a:t>Sample words:</a:t>
+            </a:r>
+            <a:endParaRPr lang="en-US" sz="1200" dirty="0"/>
+          </a:p>
+        </p:txBody>
+      </p:sp>
+      <p:sp>
+        <p:nvSpPr>
+          <p:cNvPr id="44" name="Shape 42"/>
+          <p:cNvSpPr/>
+          <p:nvPr/>
+        </p:nvSpPr>
+        <p:spPr>
+          <a:xfrm>
+            <a:off x="365760" y="4023360"/>
+            <a:ext cx="2011680" cy="402336"/>
+          </a:xfrm>
+          <a:prstGeom prst="rect">
+            <a:avLst>
+              <a:gd name="adj" fmla="val 13636"/>
+            </a:avLst>
+          </a:prstGeom>
+          <a:solidFill>
+            <a:srgbClr val="EEF2FF"/>
+          </a:solidFill>
+          <a:ln w="12700">
+            <a:solidFill>
+              <a:srgbClr val="6366F1"/>
+            </a:solidFill>
+            <a:prstDash val="solid"/>
+          </a:ln>
+        </p:spPr>
+      </p:sp>
+      <p:sp>
+        <p:nvSpPr>
+          <p:cNvPr id="45" name="Text 43"/>
+          <p:cNvSpPr/>
+          <p:nvPr/>
+        </p:nvSpPr>
+        <p:spPr>
+          <a:xfrm>
+            <a:off x="365760" y="4023360"/>
+            <a:ext cx="2011680" cy="402336"/>
           </a:xfrm>
           <a:prstGeom prst="rect">
             <a:avLst/>
@@ -34583,55 +34480,57 @@
               <a:buNone/>
             </a:pPr>
             <a:r>
-              <a:rPr lang="en-US" sz="1300" b="1" dirty="0">
-                <a:solidFill>
-                  <a:srgbClr val="0F766E"/>
+              <a:rPr lang="en-US" sz="1200" b="1" dirty="0">
+                <a:solidFill>
+                  <a:srgbClr val="4338CA"/>
                 </a:solidFill>
                 <a:latin typeface="Trebuchet MS" pitchFamily="34" charset="0"/>
                 <a:ea typeface="Trebuchet MS" pitchFamily="34" charset="-122"/>
                 <a:cs typeface="Trebuchet MS" pitchFamily="34" charset="-120"/>
               </a:rPr>
-              <a:t>term</a:t>
-            </a:r>
-            <a:endParaRPr lang="en-US" sz="1300" dirty="0"/>
-          </a:p>
-        </p:txBody>
-      </p:sp>
-      <p:sp>
-        <p:nvSpPr>
-          <p:cNvPr id="41" name="Shape 39"/>
-          <p:cNvSpPr/>
-          <p:nvPr/>
-        </p:nvSpPr>
-        <p:spPr>
-          <a:xfrm>
-            <a:off x="5943600" y="3246120"/>
-            <a:ext cx="2834640" cy="402336"/>
-          </a:xfrm>
-          <a:prstGeom prst="rect">
-            <a:avLst/>
-          </a:prstGeom>
-          <a:solidFill>
-            <a:srgbClr val="FCE7F3"/>
-          </a:solidFill>
-          <a:ln w="12700">
-            <a:solidFill>
-              <a:srgbClr val="E2E8F0"/>
-            </a:solidFill>
-            <a:prstDash val="solid"/>
-          </a:ln>
-        </p:spPr>
-      </p:sp>
-      <p:sp>
-        <p:nvSpPr>
-          <p:cNvPr id="42" name="Text 40"/>
-          <p:cNvSpPr/>
-          <p:nvPr/>
-        </p:nvSpPr>
-        <p:spPr>
-          <a:xfrm>
-            <a:off x="5943600" y="3246120"/>
-            <a:ext cx="2834640" cy="402336"/>
+              <a:t>midday</a:t>
+            </a:r>
+            <a:endParaRPr lang="en-US" sz="1200" dirty="0"/>
+          </a:p>
+        </p:txBody>
+      </p:sp>
+      <p:sp>
+        <p:nvSpPr>
+          <p:cNvPr id="46" name="Shape 44"/>
+          <p:cNvSpPr/>
+          <p:nvPr/>
+        </p:nvSpPr>
+        <p:spPr>
+          <a:xfrm>
+            <a:off x="2542032" y="4023360"/>
+            <a:ext cx="2011680" cy="402336"/>
+          </a:xfrm>
+          <a:prstGeom prst="rect">
+            <a:avLst>
+              <a:gd name="adj" fmla="val 13636"/>
+            </a:avLst>
+          </a:prstGeom>
+          <a:solidFill>
+            <a:srgbClr val="EEF2FF"/>
+          </a:solidFill>
+          <a:ln w="12700">
+            <a:solidFill>
+              <a:srgbClr val="6366F1"/>
+            </a:solidFill>
+            <a:prstDash val="solid"/>
+          </a:ln>
+        </p:spPr>
+      </p:sp>
+      <p:sp>
+        <p:nvSpPr>
+          <p:cNvPr id="47" name="Text 45"/>
+          <p:cNvSpPr/>
+          <p:nvPr/>
+        </p:nvSpPr>
+        <p:spPr>
+          <a:xfrm>
+            <a:off x="2542032" y="4023360"/>
+            <a:ext cx="2011680" cy="402336"/>
           </a:xfrm>
           <a:prstGeom prst="rect">
             <a:avLst/>
@@ -34647,30 +34546,57 @@
               <a:buNone/>
             </a:pPr>
             <a:r>
-              <a:rPr lang="en-US" sz="1300" b="1" dirty="0">
-                <a:solidFill>
-                  <a:srgbClr val="9D174D"/>
+              <a:rPr lang="en-US" sz="1200" b="1" dirty="0">
+                <a:solidFill>
+                  <a:srgbClr val="4338CA"/>
                 </a:solidFill>
                 <a:latin typeface="Trebuchet MS" pitchFamily="34" charset="0"/>
                 <a:ea typeface="Trebuchet MS" pitchFamily="34" charset="-122"/>
                 <a:cs typeface="Trebuchet MS" pitchFamily="34" charset="-120"/>
               </a:rPr>
-              <a:t>-day</a:t>
-            </a:r>
-            <a:endParaRPr lang="en-US" sz="1300" dirty="0"/>
-          </a:p>
-        </p:txBody>
-      </p:sp>
-      <p:sp>
-        <p:nvSpPr>
-          <p:cNvPr id="43" name="Text 41"/>
-          <p:cNvSpPr/>
-          <p:nvPr/>
-        </p:nvSpPr>
-        <p:spPr>
-          <a:xfrm>
-            <a:off x="365760" y="3611880"/>
-            <a:ext cx="1828800" cy="347472"/>
+              <a:t>midway</a:t>
+            </a:r>
+            <a:endParaRPr lang="en-US" sz="1200" dirty="0"/>
+          </a:p>
+        </p:txBody>
+      </p:sp>
+      <p:sp>
+        <p:nvSpPr>
+          <p:cNvPr id="48" name="Shape 46"/>
+          <p:cNvSpPr/>
+          <p:nvPr/>
+        </p:nvSpPr>
+        <p:spPr>
+          <a:xfrm>
+            <a:off x="4718304" y="4023360"/>
+            <a:ext cx="2011680" cy="402336"/>
+          </a:xfrm>
+          <a:prstGeom prst="rect">
+            <a:avLst>
+              <a:gd name="adj" fmla="val 13636"/>
+            </a:avLst>
+          </a:prstGeom>
+          <a:solidFill>
+            <a:srgbClr val="EEF2FF"/>
+          </a:solidFill>
+          <a:ln w="12700">
+            <a:solidFill>
+              <a:srgbClr val="6366F1"/>
+            </a:solidFill>
+            <a:prstDash val="solid"/>
+          </a:ln>
+        </p:spPr>
+      </p:sp>
+      <p:sp>
+        <p:nvSpPr>
+          <p:cNvPr id="49" name="Text 47"/>
+          <p:cNvSpPr/>
+          <p:nvPr/>
+        </p:nvSpPr>
+        <p:spPr>
+          <a:xfrm>
+            <a:off x="4718304" y="4023360"/>
+            <a:ext cx="2011680" cy="402336"/>
           </a:xfrm>
           <a:prstGeom prst="rect">
             <a:avLst/>
@@ -34682,547 +34608,19 @@
           <a:bodyPr wrap="square" lIns="0" tIns="0" rIns="0" bIns="0" rtlCol="0" anchor="ctr"/>
           <a:lstStyle/>
           <a:p>
-            <a:pPr algn="l" indent="0" marL="0">
+            <a:pPr algn="ctr" indent="0" marL="0">
               <a:buNone/>
             </a:pPr>
             <a:r>
               <a:rPr lang="en-US" sz="1200" b="1" dirty="0">
                 <a:solidFill>
-                  <a:srgbClr val="0F172A"/>
+                  <a:srgbClr val="4338CA"/>
                 </a:solidFill>
                 <a:latin typeface="Trebuchet MS" pitchFamily="34" charset="0"/>
                 <a:ea typeface="Trebuchet MS" pitchFamily="34" charset="-122"/>
                 <a:cs typeface="Trebuchet MS" pitchFamily="34" charset="-120"/>
               </a:rPr>
-              <a:t>Sample words:</a:t>
-            </a:r>
-            <a:endParaRPr lang="en-US" sz="1200" dirty="0"/>
-          </a:p>
-        </p:txBody>
-      </p:sp>
-      <p:sp>
-        <p:nvSpPr>
-          <p:cNvPr id="44" name="Shape 42"/>
-          <p:cNvSpPr/>
-          <p:nvPr/>
-        </p:nvSpPr>
-        <p:spPr>
-          <a:xfrm>
-            <a:off x="365760" y="4023360"/>
-            <a:ext cx="2011680" cy="402336"/>
-          </a:xfrm>
-          <a:prstGeom prst="rect">
-            <a:avLst>
-              <a:gd name="adj" fmla="val 13636"/>
-            </a:avLst>
-          </a:prstGeom>
-          <a:solidFill>
-            <a:srgbClr val="EEF2FF"/>
-          </a:solidFill>
-          <a:ln w="12700">
-            <a:solidFill>
-              <a:srgbClr val="6366F1"/>
-            </a:solidFill>
-            <a:prstDash val="solid"/>
-          </a:ln>
-        </p:spPr>
-      </p:sp>
-      <p:sp>
-        <p:nvSpPr>
-          <p:cNvPr id="45" name="Text 43"/>
-          <p:cNvSpPr/>
-          <p:nvPr/>
-        </p:nvSpPr>
-        <p:spPr>
-          <a:xfrm>
-            <a:off x="365760" y="4023360"/>
-            <a:ext cx="2011680" cy="402336"/>
-          </a:xfrm>
-          <a:prstGeom prst="rect">
-            <a:avLst/>
-          </a:prstGeom>
-          <a:noFill/>
-          <a:ln/>
-        </p:spPr>
-        <p:txBody>
-          <a:bodyPr wrap="square" lIns="0" tIns="0" rIns="0" bIns="0" rtlCol="0" anchor="ctr"/>
-          <a:lstStyle/>
-          <a:p>
-            <a:pPr algn="ctr" indent="0" marL="0">
-              <a:buNone/>
-            </a:pPr>
-            <a:r>
-              <a:rPr lang="en-US" sz="1200" b="1" dirty="0">
-                <a:solidFill>
-                  <a:srgbClr val="4338CA"/>
-                </a:solidFill>
-                <a:latin typeface="Trebuchet MS" pitchFamily="34" charset="0"/>
-                <a:ea typeface="Trebuchet MS" pitchFamily="34" charset="-122"/>
-                <a:cs typeface="Trebuchet MS" pitchFamily="34" charset="-120"/>
-              </a:rPr>
-              <a:t>midday</a:t>
-            </a:r>
-            <a:endParaRPr lang="en-US" sz="1200" dirty="0"/>
-          </a:p>
-        </p:txBody>
-      </p:sp>
-      <p:sp>
-        <p:nvSpPr>
-          <p:cNvPr id="46" name="Shape 44"/>
-          <p:cNvSpPr/>
-          <p:nvPr/>
-        </p:nvSpPr>
-        <p:spPr>
-          <a:xfrm>
-            <a:off x="2542032" y="4023360"/>
-            <a:ext cx="2011680" cy="402336"/>
-          </a:xfrm>
-          <a:prstGeom prst="rect">
-            <a:avLst>
-              <a:gd name="adj" fmla="val 13636"/>
-            </a:avLst>
-          </a:prstGeom>
-          <a:solidFill>
-            <a:srgbClr val="EEF2FF"/>
-          </a:solidFill>
-          <a:ln w="12700">
-            <a:solidFill>
-              <a:srgbClr val="6366F1"/>
-            </a:solidFill>
-            <a:prstDash val="solid"/>
-          </a:ln>
-        </p:spPr>
-      </p:sp>
-      <p:sp>
-        <p:nvSpPr>
-          <p:cNvPr id="47" name="Text 45"/>
-          <p:cNvSpPr/>
-          <p:nvPr/>
-        </p:nvSpPr>
-        <p:spPr>
-          <a:xfrm>
-            <a:off x="2542032" y="4023360"/>
-            <a:ext cx="2011680" cy="402336"/>
-          </a:xfrm>
-          <a:prstGeom prst="rect">
-            <a:avLst/>
-          </a:prstGeom>
-          <a:noFill/>
-          <a:ln/>
-        </p:spPr>
-        <p:txBody>
-          <a:bodyPr wrap="square" lIns="0" tIns="0" rIns="0" bIns="0" rtlCol="0" anchor="ctr"/>
-          <a:lstStyle/>
-          <a:p>
-            <a:pPr algn="ctr" indent="0" marL="0">
-              <a:buNone/>
-            </a:pPr>
-            <a:r>
-              <a:rPr lang="en-US" sz="1200" b="1" dirty="0">
-                <a:solidFill>
-                  <a:srgbClr val="4338CA"/>
-                </a:solidFill>
-                <a:latin typeface="Trebuchet MS" pitchFamily="34" charset="0"/>
-                <a:ea typeface="Trebuchet MS" pitchFamily="34" charset="-122"/>
-                <a:cs typeface="Trebuchet MS" pitchFamily="34" charset="-120"/>
-              </a:rPr>
-              <a:t>midnight</a:t>
-            </a:r>
-            <a:endParaRPr lang="en-US" sz="1200" dirty="0"/>
-          </a:p>
-        </p:txBody>
-      </p:sp>
-      <p:sp>
-        <p:nvSpPr>
-          <p:cNvPr id="48" name="Shape 46"/>
-          <p:cNvSpPr/>
-          <p:nvPr/>
-        </p:nvSpPr>
-        <p:spPr>
-          <a:xfrm>
-            <a:off x="4718304" y="4023360"/>
-            <a:ext cx="2011680" cy="402336"/>
-          </a:xfrm>
-          <a:prstGeom prst="rect">
-            <a:avLst>
-              <a:gd name="adj" fmla="val 13636"/>
-            </a:avLst>
-          </a:prstGeom>
-          <a:solidFill>
-            <a:srgbClr val="EEF2FF"/>
-          </a:solidFill>
-          <a:ln w="12700">
-            <a:solidFill>
-              <a:srgbClr val="6366F1"/>
-            </a:solidFill>
-            <a:prstDash val="solid"/>
-          </a:ln>
-        </p:spPr>
-      </p:sp>
-      <p:sp>
-        <p:nvSpPr>
-          <p:cNvPr id="49" name="Text 47"/>
-          <p:cNvSpPr/>
-          <p:nvPr/>
-        </p:nvSpPr>
-        <p:spPr>
-          <a:xfrm>
-            <a:off x="4718304" y="4023360"/>
-            <a:ext cx="2011680" cy="402336"/>
-          </a:xfrm>
-          <a:prstGeom prst="rect">
-            <a:avLst/>
-          </a:prstGeom>
-          <a:noFill/>
-          <a:ln/>
-        </p:spPr>
-        <p:txBody>
-          <a:bodyPr wrap="square" lIns="0" tIns="0" rIns="0" bIns="0" rtlCol="0" anchor="ctr"/>
-          <a:lstStyle/>
-          <a:p>
-            <a:pPr algn="ctr" indent="0" marL="0">
-              <a:buNone/>
-            </a:pPr>
-            <a:r>
-              <a:rPr lang="en-US" sz="1200" b="1" dirty="0">
-                <a:solidFill>
-                  <a:srgbClr val="4338CA"/>
-                </a:solidFill>
-                <a:latin typeface="Trebuchet MS" pitchFamily="34" charset="0"/>
-                <a:ea typeface="Trebuchet MS" pitchFamily="34" charset="-122"/>
-                <a:cs typeface="Trebuchet MS" pitchFamily="34" charset="-120"/>
-              </a:rPr>
-              <a:t>midterm</a:t>
-            </a:r>
-            <a:endParaRPr lang="en-US" sz="1200" dirty="0"/>
-          </a:p>
-        </p:txBody>
-      </p:sp>
-      <p:sp>
-        <p:nvSpPr>
-          <p:cNvPr id="50" name="Shape 48"/>
-          <p:cNvSpPr/>
-          <p:nvPr/>
-        </p:nvSpPr>
-        <p:spPr>
-          <a:xfrm>
-            <a:off x="6894576" y="4023360"/>
-            <a:ext cx="2011680" cy="402336"/>
-          </a:xfrm>
-          <a:prstGeom prst="rect">
-            <a:avLst>
-              <a:gd name="adj" fmla="val 13636"/>
-            </a:avLst>
-          </a:prstGeom>
-          <a:solidFill>
-            <a:srgbClr val="EEF2FF"/>
-          </a:solidFill>
-          <a:ln w="12700">
-            <a:solidFill>
-              <a:srgbClr val="6366F1"/>
-            </a:solidFill>
-            <a:prstDash val="solid"/>
-          </a:ln>
-        </p:spPr>
-      </p:sp>
-      <p:sp>
-        <p:nvSpPr>
-          <p:cNvPr id="51" name="Text 49"/>
-          <p:cNvSpPr/>
-          <p:nvPr/>
-        </p:nvSpPr>
-        <p:spPr>
-          <a:xfrm>
-            <a:off x="6894576" y="4023360"/>
-            <a:ext cx="2011680" cy="402336"/>
-          </a:xfrm>
-          <a:prstGeom prst="rect">
-            <a:avLst/>
-          </a:prstGeom>
-          <a:noFill/>
-          <a:ln/>
-        </p:spPr>
-        <p:txBody>
-          <a:bodyPr wrap="square" lIns="0" tIns="0" rIns="0" bIns="0" rtlCol="0" anchor="ctr"/>
-          <a:lstStyle/>
-          <a:p>
-            <a:pPr algn="ctr" indent="0" marL="0">
-              <a:buNone/>
-            </a:pPr>
-            <a:r>
-              <a:rPr lang="en-US" sz="1200" b="1" dirty="0">
-                <a:solidFill>
-                  <a:srgbClr val="4338CA"/>
-                </a:solidFill>
-                <a:latin typeface="Trebuchet MS" pitchFamily="34" charset="0"/>
-                <a:ea typeface="Trebuchet MS" pitchFamily="34" charset="-122"/>
-                <a:cs typeface="Trebuchet MS" pitchFamily="34" charset="-120"/>
-              </a:rPr>
-              <a:t>midfield</a:t>
-            </a:r>
-            <a:endParaRPr lang="en-US" sz="1200" dirty="0"/>
-          </a:p>
-        </p:txBody>
-      </p:sp>
-      <p:sp>
-        <p:nvSpPr>
-          <p:cNvPr id="52" name="Shape 50"/>
-          <p:cNvSpPr/>
-          <p:nvPr/>
-        </p:nvSpPr>
-        <p:spPr>
-          <a:xfrm>
-            <a:off x="365760" y="4498848"/>
-            <a:ext cx="2011680" cy="402336"/>
-          </a:xfrm>
-          <a:prstGeom prst="rect">
-            <a:avLst>
-              <a:gd name="adj" fmla="val 13636"/>
-            </a:avLst>
-          </a:prstGeom>
-          <a:solidFill>
-            <a:srgbClr val="EEF2FF"/>
-          </a:solidFill>
-          <a:ln w="12700">
-            <a:solidFill>
-              <a:srgbClr val="6366F1"/>
-            </a:solidFill>
-            <a:prstDash val="solid"/>
-          </a:ln>
-        </p:spPr>
-      </p:sp>
-      <p:sp>
-        <p:nvSpPr>
-          <p:cNvPr id="53" name="Text 51"/>
-          <p:cNvSpPr/>
-          <p:nvPr/>
-        </p:nvSpPr>
-        <p:spPr>
-          <a:xfrm>
-            <a:off x="365760" y="4498848"/>
-            <a:ext cx="2011680" cy="402336"/>
-          </a:xfrm>
-          <a:prstGeom prst="rect">
-            <a:avLst/>
-          </a:prstGeom>
-          <a:noFill/>
-          <a:ln/>
-        </p:spPr>
-        <p:txBody>
-          <a:bodyPr wrap="square" lIns="0" tIns="0" rIns="0" bIns="0" rtlCol="0" anchor="ctr"/>
-          <a:lstStyle/>
-          <a:p>
-            <a:pPr algn="ctr" indent="0" marL="0">
-              <a:buNone/>
-            </a:pPr>
-            <a:r>
-              <a:rPr lang="en-US" sz="1200" b="1" dirty="0">
-                <a:solidFill>
-                  <a:srgbClr val="4338CA"/>
-                </a:solidFill>
-                <a:latin typeface="Trebuchet MS" pitchFamily="34" charset="0"/>
-                <a:ea typeface="Trebuchet MS" pitchFamily="34" charset="-122"/>
-                <a:cs typeface="Trebuchet MS" pitchFamily="34" charset="-120"/>
-              </a:rPr>
-              <a:t>midsummer</a:t>
-            </a:r>
-            <a:endParaRPr lang="en-US" sz="1200" dirty="0"/>
-          </a:p>
-        </p:txBody>
-      </p:sp>
-      <p:sp>
-        <p:nvSpPr>
-          <p:cNvPr id="54" name="Shape 52"/>
-          <p:cNvSpPr/>
-          <p:nvPr/>
-        </p:nvSpPr>
-        <p:spPr>
-          <a:xfrm>
-            <a:off x="2542032" y="4498848"/>
-            <a:ext cx="2011680" cy="402336"/>
-          </a:xfrm>
-          <a:prstGeom prst="rect">
-            <a:avLst>
-              <a:gd name="adj" fmla="val 13636"/>
-            </a:avLst>
-          </a:prstGeom>
-          <a:solidFill>
-            <a:srgbClr val="EEF2FF"/>
-          </a:solidFill>
-          <a:ln w="12700">
-            <a:solidFill>
-              <a:srgbClr val="6366F1"/>
-            </a:solidFill>
-            <a:prstDash val="solid"/>
-          </a:ln>
-        </p:spPr>
-      </p:sp>
-      <p:sp>
-        <p:nvSpPr>
-          <p:cNvPr id="55" name="Text 53"/>
-          <p:cNvSpPr/>
-          <p:nvPr/>
-        </p:nvSpPr>
-        <p:spPr>
-          <a:xfrm>
-            <a:off x="2542032" y="4498848"/>
-            <a:ext cx="2011680" cy="402336"/>
-          </a:xfrm>
-          <a:prstGeom prst="rect">
-            <a:avLst/>
-          </a:prstGeom>
-          <a:noFill/>
-          <a:ln/>
-        </p:spPr>
-        <p:txBody>
-          <a:bodyPr wrap="square" lIns="0" tIns="0" rIns="0" bIns="0" rtlCol="0" anchor="ctr"/>
-          <a:lstStyle/>
-          <a:p>
-            <a:pPr algn="ctr" indent="0" marL="0">
-              <a:buNone/>
-            </a:pPr>
-            <a:r>
-              <a:rPr lang="en-US" sz="1200" b="1" dirty="0">
-                <a:solidFill>
-                  <a:srgbClr val="4338CA"/>
-                </a:solidFill>
-                <a:latin typeface="Trebuchet MS" pitchFamily="34" charset="0"/>
-                <a:ea typeface="Trebuchet MS" pitchFamily="34" charset="-122"/>
-                <a:cs typeface="Trebuchet MS" pitchFamily="34" charset="-120"/>
-              </a:rPr>
-              <a:t>midway</a:t>
-            </a:r>
-            <a:endParaRPr lang="en-US" sz="1200" dirty="0"/>
-          </a:p>
-        </p:txBody>
-      </p:sp>
-      <p:sp>
-        <p:nvSpPr>
-          <p:cNvPr id="56" name="Shape 54"/>
-          <p:cNvSpPr/>
-          <p:nvPr/>
-        </p:nvSpPr>
-        <p:spPr>
-          <a:xfrm>
-            <a:off x="4718304" y="4498848"/>
-            <a:ext cx="2011680" cy="402336"/>
-          </a:xfrm>
-          <a:prstGeom prst="rect">
-            <a:avLst>
-              <a:gd name="adj" fmla="val 13636"/>
-            </a:avLst>
-          </a:prstGeom>
-          <a:solidFill>
-            <a:srgbClr val="EEF2FF"/>
-          </a:solidFill>
-          <a:ln w="12700">
-            <a:solidFill>
-              <a:srgbClr val="6366F1"/>
-            </a:solidFill>
-            <a:prstDash val="solid"/>
-          </a:ln>
-        </p:spPr>
-      </p:sp>
-      <p:sp>
-        <p:nvSpPr>
-          <p:cNvPr id="57" name="Text 55"/>
-          <p:cNvSpPr/>
-          <p:nvPr/>
-        </p:nvSpPr>
-        <p:spPr>
-          <a:xfrm>
-            <a:off x="4718304" y="4498848"/>
-            <a:ext cx="2011680" cy="402336"/>
-          </a:xfrm>
-          <a:prstGeom prst="rect">
-            <a:avLst/>
-          </a:prstGeom>
-          <a:noFill/>
-          <a:ln/>
-        </p:spPr>
-        <p:txBody>
-          <a:bodyPr wrap="square" lIns="0" tIns="0" rIns="0" bIns="0" rtlCol="0" anchor="ctr"/>
-          <a:lstStyle/>
-          <a:p>
-            <a:pPr algn="ctr" indent="0" marL="0">
-              <a:buNone/>
-            </a:pPr>
-            <a:r>
-              <a:rPr lang="en-US" sz="1200" b="1" dirty="0">
-                <a:solidFill>
-                  <a:srgbClr val="4338CA"/>
-                </a:solidFill>
-                <a:latin typeface="Trebuchet MS" pitchFamily="34" charset="0"/>
-                <a:ea typeface="Trebuchet MS" pitchFamily="34" charset="-122"/>
-                <a:cs typeface="Trebuchet MS" pitchFamily="34" charset="-120"/>
-              </a:rPr>
-              <a:t>midwinter</a:t>
-            </a:r>
-            <a:endParaRPr lang="en-US" sz="1200" dirty="0"/>
-          </a:p>
-        </p:txBody>
-      </p:sp>
-      <p:sp>
-        <p:nvSpPr>
-          <p:cNvPr id="58" name="Shape 56"/>
-          <p:cNvSpPr/>
-          <p:nvPr/>
-        </p:nvSpPr>
-        <p:spPr>
-          <a:xfrm>
-            <a:off x="6894576" y="4498848"/>
-            <a:ext cx="2011680" cy="402336"/>
-          </a:xfrm>
-          <a:prstGeom prst="rect">
-            <a:avLst>
-              <a:gd name="adj" fmla="val 13636"/>
-            </a:avLst>
-          </a:prstGeom>
-          <a:solidFill>
-            <a:srgbClr val="EEF2FF"/>
-          </a:solidFill>
-          <a:ln w="12700">
-            <a:solidFill>
-              <a:srgbClr val="6366F1"/>
-            </a:solidFill>
-            <a:prstDash val="solid"/>
-          </a:ln>
-        </p:spPr>
-      </p:sp>
-      <p:sp>
-        <p:nvSpPr>
-          <p:cNvPr id="59" name="Text 57"/>
-          <p:cNvSpPr/>
-          <p:nvPr/>
-        </p:nvSpPr>
-        <p:spPr>
-          <a:xfrm>
-            <a:off x="6894576" y="4498848"/>
-            <a:ext cx="2011680" cy="402336"/>
-          </a:xfrm>
-          <a:prstGeom prst="rect">
-            <a:avLst/>
-          </a:prstGeom>
-          <a:noFill/>
-          <a:ln/>
-        </p:spPr>
-        <p:txBody>
-          <a:bodyPr wrap="square" lIns="0" tIns="0" rIns="0" bIns="0" rtlCol="0" anchor="ctr"/>
-          <a:lstStyle/>
-          <a:p>
-            <a:pPr algn="ctr" indent="0" marL="0">
-              <a:buNone/>
-            </a:pPr>
-            <a:r>
-              <a:rPr lang="en-US" sz="1200" b="1" dirty="0">
-                <a:solidFill>
-                  <a:srgbClr val="4338CA"/>
-                </a:solidFill>
-                <a:latin typeface="Trebuchet MS" pitchFamily="34" charset="0"/>
-                <a:ea typeface="Trebuchet MS" pitchFamily="34" charset="-122"/>
-                <a:cs typeface="Trebuchet MS" pitchFamily="34" charset="-120"/>
-              </a:rPr>
-              <a:t>midfielder</a:t>
+              <a:t>midland</a:t>
             </a:r>
             <a:endParaRPr lang="en-US" sz="1200" dirty="0"/>
           </a:p>
@@ -35514,7 +34912,7 @@
                 <a:ea typeface="Calibri" pitchFamily="34" charset="-122"/>
                 <a:cs typeface="Calibri" pitchFamily="34" charset="-120"/>
               </a:rPr>
-              <a:t>Word Labs  •  wordlabs.app  •  Prefix: 'mid-' = middle, in the middle</a:t>
+              <a:t>Word Labs  •  wordlabs.app  •  Prefix: 'mid-' = middle</a:t>
             </a:r>
             <a:endParaRPr lang="en-US" sz="800" dirty="0"/>
           </a:p>
@@ -35678,7 +35076,7 @@
                 <a:ea typeface="Calibri" pitchFamily="34" charset="-122"/>
                 <a:cs typeface="Calibri" pitchFamily="34" charset="-120"/>
               </a:rPr>
-              <a:t>A meaningful word part added to the beginning of a root to change its meaning. The prefix 'mid-' means 'middle, in the middle'.</a:t>
+              <a:t>A meaningful word part added to the beginning of a root to change its meaning. The prefix 'mid-' means 'middle'.</a:t>
             </a:r>
             <a:endParaRPr lang="en-US" sz="1350" dirty="0"/>
           </a:p>
@@ -36298,7 +35696,7 @@
                 <a:ea typeface="Calibri" pitchFamily="34" charset="-122"/>
                 <a:cs typeface="Calibri" pitchFamily="34" charset="-120"/>
               </a:rPr>
-              <a:t>Word Labs  •  wordlabs.app  •  Prefix: 'mid-' = middle, in the middle</a:t>
+              <a:t>Word Labs  •  wordlabs.app  •  Prefix: 'mid-' = middle</a:t>
             </a:r>
             <a:endParaRPr lang="en-US" sz="800" dirty="0"/>
           </a:p>
@@ -36410,7 +35808,7 @@
                 <a:ea typeface="Calibri" pitchFamily="34" charset="-122"/>
                 <a:cs typeface="Calibri" pitchFamily="34" charset="-120"/>
               </a:rPr>
-              <a:t>1.  Midnight means the beginning of the night.</a:t>
+              <a:t>1.  'midway' means 'at the very beginning'.</a:t>
             </a:r>
             <a:endParaRPr lang="en-US" sz="1300" dirty="0"/>
           </a:p>
@@ -36549,7 +35947,7 @@
                 <a:ea typeface="Calibri" pitchFamily="34" charset="-122"/>
                 <a:cs typeface="Calibri" pitchFamily="34" charset="-120"/>
               </a:rPr>
-              <a:t>2.  The prefix 'mid-' means fast or quick.</a:t>
+              <a:t>2.  'midday' means 'the middle of the night'.</a:t>
             </a:r>
             <a:endParaRPr lang="en-US" sz="1300" dirty="0"/>
           </a:p>
@@ -36688,7 +36086,7 @@
                 <a:ea typeface="Calibri" pitchFamily="34" charset="-122"/>
                 <a:cs typeface="Calibri" pitchFamily="34" charset="-120"/>
               </a:rPr>
-              <a:t>3.  The prefix 'mid-' means in the middle of something.</a:t>
+              <a:t>3.  'midday' means 'twelve o'clock in the middle of the day; noon'.</a:t>
             </a:r>
             <a:endParaRPr lang="en-US" sz="1300" dirty="0"/>
           </a:p>
@@ -36827,7 +36225,7 @@
                 <a:ea typeface="Calibri" pitchFamily="34" charset="-122"/>
                 <a:cs typeface="Calibri" pitchFamily="34" charset="-120"/>
               </a:rPr>
-              <a:t>4.  The prefix 'mid-' comes from Old English.</a:t>
+              <a:t>4.  'mid' means 'middle'.</a:t>
             </a:r>
             <a:endParaRPr lang="en-US" sz="1300" dirty="0"/>
           </a:p>
@@ -36966,7 +36364,7 @@
                 <a:ea typeface="Calibri" pitchFamily="34" charset="-122"/>
                 <a:cs typeface="Calibri" pitchFamily="34" charset="-120"/>
               </a:rPr>
-              <a:t>5.  Midday refers to the middle of the day, around noon.</a:t>
+              <a:t>5.  'midway' means 'in the middle of a distance or period of time; halfway'.</a:t>
             </a:r>
             <a:endParaRPr lang="en-US" sz="1300" dirty="0"/>
           </a:p>
@@ -37324,7 +36722,7 @@
                 <a:ea typeface="Calibri" pitchFamily="34" charset="-122"/>
                 <a:cs typeface="Calibri" pitchFamily="34" charset="-120"/>
               </a:rPr>
-              <a:t>Word Labs  •  wordlabs.app  •  Prefix: 'mid-' = middle, in the middle</a:t>
+              <a:t>Word Labs  •  wordlabs.app  •  Prefix: 'mid-' = middle</a:t>
             </a:r>
             <a:endParaRPr lang="en-US" sz="800" dirty="0"/>
           </a:p>
@@ -37461,7 +36859,7 @@
                 <a:ea typeface="Trebuchet MS" pitchFamily="34" charset="-122"/>
                 <a:cs typeface="Trebuchet MS" pitchFamily="34" charset="-120"/>
               </a:rPr>
-              <a:t>middle, in the middle</a:t>
+              <a:t>middle</a:t>
             </a:r>
             <a:endParaRPr lang="en-US" sz="2000" dirty="0"/>
           </a:p>
@@ -37500,7 +36898,7 @@
                 <a:ea typeface="Calibri" pitchFamily="34" charset="-122"/>
                 <a:cs typeface="Calibri" pitchFamily="34" charset="-120"/>
               </a:rPr>
-              <a:t>Origin: Old English: midd</a:t>
+              <a:t>Origin: Prefix</a:t>
             </a:r>
             <a:endParaRPr lang="en-US" sz="1100" dirty="0"/>
           </a:p>
@@ -37671,7 +37069,7 @@
                 <a:ea typeface="Trebuchet MS" pitchFamily="34" charset="-122"/>
                 <a:cs typeface="Trebuchet MS" pitchFamily="34" charset="-120"/>
               </a:rPr>
-              <a:t>midnight</a:t>
+              <a:t>midway</a:t>
             </a:r>
             <a:endParaRPr lang="en-US" sz="1300" dirty="0"/>
           </a:p>
@@ -37737,271 +37135,7 @@
                 <a:ea typeface="Trebuchet MS" pitchFamily="34" charset="-122"/>
                 <a:cs typeface="Trebuchet MS" pitchFamily="34" charset="-120"/>
               </a:rPr>
-              <a:t>midterm</a:t>
-            </a:r>
-            <a:endParaRPr lang="en-US" sz="1300" dirty="0"/>
-          </a:p>
-        </p:txBody>
-      </p:sp>
-      <p:sp>
-        <p:nvSpPr>
-          <p:cNvPr id="22" name="Shape 20"/>
-          <p:cNvSpPr/>
-          <p:nvPr/>
-        </p:nvSpPr>
-        <p:spPr>
-          <a:xfrm>
-            <a:off x="6812280" y="2743200"/>
-            <a:ext cx="2011680" cy="502920"/>
-          </a:xfrm>
-          <a:prstGeom prst="rect">
-            <a:avLst>
-              <a:gd name="adj" fmla="val 14545"/>
-            </a:avLst>
-          </a:prstGeom>
-          <a:solidFill>
-            <a:srgbClr val="EEF2FF"/>
-          </a:solidFill>
-          <a:ln w="12700">
-            <a:solidFill>
-              <a:srgbClr val="6366F1"/>
-            </a:solidFill>
-            <a:prstDash val="solid"/>
-          </a:ln>
-        </p:spPr>
-      </p:sp>
-      <p:sp>
-        <p:nvSpPr>
-          <p:cNvPr id="23" name="Text 21"/>
-          <p:cNvSpPr/>
-          <p:nvPr/>
-        </p:nvSpPr>
-        <p:spPr>
-          <a:xfrm>
-            <a:off x="6812280" y="2743200"/>
-            <a:ext cx="2011680" cy="502920"/>
-          </a:xfrm>
-          <a:prstGeom prst="rect">
-            <a:avLst/>
-          </a:prstGeom>
-          <a:noFill/>
-          <a:ln/>
-        </p:spPr>
-        <p:txBody>
-          <a:bodyPr wrap="square" lIns="0" tIns="0" rIns="0" bIns="0" rtlCol="0" anchor="ctr"/>
-          <a:lstStyle/>
-          <a:p>
-            <a:pPr algn="ctr" indent="0" marL="0">
-              <a:buNone/>
-            </a:pPr>
-            <a:r>
-              <a:rPr lang="en-US" sz="1300" b="1" dirty="0">
-                <a:solidFill>
-                  <a:srgbClr val="4338CA"/>
-                </a:solidFill>
-                <a:latin typeface="Trebuchet MS" pitchFamily="34" charset="0"/>
-                <a:ea typeface="Trebuchet MS" pitchFamily="34" charset="-122"/>
-                <a:cs typeface="Trebuchet MS" pitchFamily="34" charset="-120"/>
-              </a:rPr>
-              <a:t>midfield</a:t>
-            </a:r>
-            <a:endParaRPr lang="en-US" sz="1300" dirty="0"/>
-          </a:p>
-        </p:txBody>
-      </p:sp>
-      <p:sp>
-        <p:nvSpPr>
-          <p:cNvPr id="24" name="Shape 22"/>
-          <p:cNvSpPr/>
-          <p:nvPr/>
-        </p:nvSpPr>
-        <p:spPr>
-          <a:xfrm>
-            <a:off x="365760" y="3401568"/>
-            <a:ext cx="2011680" cy="502920"/>
-          </a:xfrm>
-          <a:prstGeom prst="rect">
-            <a:avLst>
-              <a:gd name="adj" fmla="val 14545"/>
-            </a:avLst>
-          </a:prstGeom>
-          <a:solidFill>
-            <a:srgbClr val="EEF2FF"/>
-          </a:solidFill>
-          <a:ln w="12700">
-            <a:solidFill>
-              <a:srgbClr val="6366F1"/>
-            </a:solidFill>
-            <a:prstDash val="solid"/>
-          </a:ln>
-        </p:spPr>
-      </p:sp>
-      <p:sp>
-        <p:nvSpPr>
-          <p:cNvPr id="25" name="Text 23"/>
-          <p:cNvSpPr/>
-          <p:nvPr/>
-        </p:nvSpPr>
-        <p:spPr>
-          <a:xfrm>
-            <a:off x="365760" y="3401568"/>
-            <a:ext cx="2011680" cy="502920"/>
-          </a:xfrm>
-          <a:prstGeom prst="rect">
-            <a:avLst/>
-          </a:prstGeom>
-          <a:noFill/>
-          <a:ln/>
-        </p:spPr>
-        <p:txBody>
-          <a:bodyPr wrap="square" lIns="0" tIns="0" rIns="0" bIns="0" rtlCol="0" anchor="ctr"/>
-          <a:lstStyle/>
-          <a:p>
-            <a:pPr algn="ctr" indent="0" marL="0">
-              <a:buNone/>
-            </a:pPr>
-            <a:r>
-              <a:rPr lang="en-US" sz="1300" b="1" dirty="0">
-                <a:solidFill>
-                  <a:srgbClr val="4338CA"/>
-                </a:solidFill>
-                <a:latin typeface="Trebuchet MS" pitchFamily="34" charset="0"/>
-                <a:ea typeface="Trebuchet MS" pitchFamily="34" charset="-122"/>
-                <a:cs typeface="Trebuchet MS" pitchFamily="34" charset="-120"/>
-              </a:rPr>
-              <a:t>midsummer</a:t>
-            </a:r>
-            <a:endParaRPr lang="en-US" sz="1300" dirty="0"/>
-          </a:p>
-        </p:txBody>
-      </p:sp>
-      <p:sp>
-        <p:nvSpPr>
-          <p:cNvPr id="26" name="Shape 24"/>
-          <p:cNvSpPr/>
-          <p:nvPr/>
-        </p:nvSpPr>
-        <p:spPr>
-          <a:xfrm>
-            <a:off x="2514600" y="3401568"/>
-            <a:ext cx="2011680" cy="502920"/>
-          </a:xfrm>
-          <a:prstGeom prst="rect">
-            <a:avLst>
-              <a:gd name="adj" fmla="val 14545"/>
-            </a:avLst>
-          </a:prstGeom>
-          <a:solidFill>
-            <a:srgbClr val="EEF2FF"/>
-          </a:solidFill>
-          <a:ln w="12700">
-            <a:solidFill>
-              <a:srgbClr val="6366F1"/>
-            </a:solidFill>
-            <a:prstDash val="solid"/>
-          </a:ln>
-        </p:spPr>
-      </p:sp>
-      <p:sp>
-        <p:nvSpPr>
-          <p:cNvPr id="27" name="Text 25"/>
-          <p:cNvSpPr/>
-          <p:nvPr/>
-        </p:nvSpPr>
-        <p:spPr>
-          <a:xfrm>
-            <a:off x="2514600" y="3401568"/>
-            <a:ext cx="2011680" cy="502920"/>
-          </a:xfrm>
-          <a:prstGeom prst="rect">
-            <a:avLst/>
-          </a:prstGeom>
-          <a:noFill/>
-          <a:ln/>
-        </p:spPr>
-        <p:txBody>
-          <a:bodyPr wrap="square" lIns="0" tIns="0" rIns="0" bIns="0" rtlCol="0" anchor="ctr"/>
-          <a:lstStyle/>
-          <a:p>
-            <a:pPr algn="ctr" indent="0" marL="0">
-              <a:buNone/>
-            </a:pPr>
-            <a:r>
-              <a:rPr lang="en-US" sz="1300" b="1" dirty="0">
-                <a:solidFill>
-                  <a:srgbClr val="4338CA"/>
-                </a:solidFill>
-                <a:latin typeface="Trebuchet MS" pitchFamily="34" charset="0"/>
-                <a:ea typeface="Trebuchet MS" pitchFamily="34" charset="-122"/>
-                <a:cs typeface="Trebuchet MS" pitchFamily="34" charset="-120"/>
-              </a:rPr>
-              <a:t>midway</a:t>
-            </a:r>
-            <a:endParaRPr lang="en-US" sz="1300" dirty="0"/>
-          </a:p>
-        </p:txBody>
-      </p:sp>
-      <p:sp>
-        <p:nvSpPr>
-          <p:cNvPr id="28" name="Shape 26"/>
-          <p:cNvSpPr/>
-          <p:nvPr/>
-        </p:nvSpPr>
-        <p:spPr>
-          <a:xfrm>
-            <a:off x="4663440" y="3401568"/>
-            <a:ext cx="2011680" cy="502920"/>
-          </a:xfrm>
-          <a:prstGeom prst="rect">
-            <a:avLst>
-              <a:gd name="adj" fmla="val 14545"/>
-            </a:avLst>
-          </a:prstGeom>
-          <a:solidFill>
-            <a:srgbClr val="EEF2FF"/>
-          </a:solidFill>
-          <a:ln w="12700">
-            <a:solidFill>
-              <a:srgbClr val="6366F1"/>
-            </a:solidFill>
-            <a:prstDash val="solid"/>
-          </a:ln>
-        </p:spPr>
-      </p:sp>
-      <p:sp>
-        <p:nvSpPr>
-          <p:cNvPr id="29" name="Text 27"/>
-          <p:cNvSpPr/>
-          <p:nvPr/>
-        </p:nvSpPr>
-        <p:spPr>
-          <a:xfrm>
-            <a:off x="4663440" y="3401568"/>
-            <a:ext cx="2011680" cy="502920"/>
-          </a:xfrm>
-          <a:prstGeom prst="rect">
-            <a:avLst/>
-          </a:prstGeom>
-          <a:noFill/>
-          <a:ln/>
-        </p:spPr>
-        <p:txBody>
-          <a:bodyPr wrap="square" lIns="0" tIns="0" rIns="0" bIns="0" rtlCol="0" anchor="ctr"/>
-          <a:lstStyle/>
-          <a:p>
-            <a:pPr algn="ctr" indent="0" marL="0">
-              <a:buNone/>
-            </a:pPr>
-            <a:r>
-              <a:rPr lang="en-US" sz="1300" b="1" dirty="0">
-                <a:solidFill>
-                  <a:srgbClr val="4338CA"/>
-                </a:solidFill>
-                <a:latin typeface="Trebuchet MS" pitchFamily="34" charset="0"/>
-                <a:ea typeface="Trebuchet MS" pitchFamily="34" charset="-122"/>
-                <a:cs typeface="Trebuchet MS" pitchFamily="34" charset="-120"/>
-              </a:rPr>
-              <a:t>midwinter</a:t>
+              <a:t>midland</a:t>
             </a:r>
             <a:endParaRPr lang="en-US" sz="1300" dirty="0"/>
           </a:p>
@@ -38293,7 +37427,7 @@
                 <a:ea typeface="Calibri" pitchFamily="34" charset="-122"/>
                 <a:cs typeface="Calibri" pitchFamily="34" charset="-120"/>
               </a:rPr>
-              <a:t>Word Labs  •  wordlabs.app  •  Prefix: 'mid-' = middle, in the middle</a:t>
+              <a:t>Word Labs  •  wordlabs.app  •  Prefix: 'mid-' = middle</a:t>
             </a:r>
             <a:endParaRPr lang="en-US" sz="800" dirty="0"/>
           </a:p>
@@ -38811,7 +37945,7 @@
                 <a:ea typeface="Trebuchet MS" pitchFamily="34" charset="-122"/>
                 <a:cs typeface="Trebuchet MS" pitchFamily="34" charset="-120"/>
               </a:rPr>
-              <a:t>night</a:t>
+              <a:t>field</a:t>
             </a:r>
             <a:endParaRPr lang="en-US" sz="1300" dirty="0"/>
           </a:p>
@@ -38832,7 +37966,7 @@
             <a:avLst/>
           </a:prstGeom>
           <a:solidFill>
-            <a:srgbClr val="FCE7F3"/>
+            <a:srgbClr val="F1F5F9"/>
           </a:solidFill>
           <a:ln w="12700">
             <a:solidFill>
@@ -38844,18 +37978,68 @@
       </p:sp>
       <p:sp>
         <p:nvSpPr>
-          <p:cNvPr id="27" name="Text 25"/>
-          <p:cNvSpPr/>
-          <p:nvPr/>
-        </p:nvSpPr>
-        <p:spPr>
-          <a:xfrm>
-            <a:off x="5943600" y="2212848"/>
+          <p:cNvPr id="27" name="Shape 25"/>
+          <p:cNvSpPr/>
+          <p:nvPr/>
+        </p:nvSpPr>
+        <p:spPr>
+          <a:xfrm>
+            <a:off x="640080" y="2670048"/>
             <a:ext cx="1463040" cy="420624"/>
           </a:xfrm>
           <a:prstGeom prst="rect">
             <a:avLst/>
           </a:prstGeom>
+          <a:solidFill>
+            <a:srgbClr val="F8FAFC"/>
+          </a:solidFill>
+          <a:ln w="12700">
+            <a:solidFill>
+              <a:srgbClr val="E5E7EB"/>
+            </a:solidFill>
+            <a:prstDash val="solid"/>
+          </a:ln>
+        </p:spPr>
+      </p:sp>
+      <p:sp>
+        <p:nvSpPr>
+          <p:cNvPr id="28" name="Shape 26"/>
+          <p:cNvSpPr/>
+          <p:nvPr/>
+        </p:nvSpPr>
+        <p:spPr>
+          <a:xfrm>
+            <a:off x="3291840" y="2670048"/>
+            <a:ext cx="1645920" cy="420624"/>
+          </a:xfrm>
+          <a:prstGeom prst="rect">
+            <a:avLst/>
+          </a:prstGeom>
+          <a:solidFill>
+            <a:srgbClr val="CCFBF1"/>
+          </a:solidFill>
+          <a:ln w="12700">
+            <a:solidFill>
+              <a:srgbClr val="E5E7EB"/>
+            </a:solidFill>
+            <a:prstDash val="solid"/>
+          </a:ln>
+        </p:spPr>
+      </p:sp>
+      <p:sp>
+        <p:nvSpPr>
+          <p:cNvPr id="29" name="Text 27"/>
+          <p:cNvSpPr/>
+          <p:nvPr/>
+        </p:nvSpPr>
+        <p:spPr>
+          <a:xfrm>
+            <a:off x="3291840" y="2670048"/>
+            <a:ext cx="1645920" cy="420624"/>
+          </a:xfrm>
+          <a:prstGeom prst="rect">
+            <a:avLst/>
+          </a:prstGeom>
           <a:noFill/>
           <a:ln/>
         </p:spPr>
@@ -38869,13 +38053,13 @@
             <a:r>
               <a:rPr lang="en-US" sz="1300" b="1" dirty="0">
                 <a:solidFill>
-                  <a:srgbClr val="9D174D"/>
+                  <a:srgbClr val="0F766E"/>
                 </a:solidFill>
                 <a:latin typeface="Trebuchet MS" pitchFamily="34" charset="0"/>
                 <a:ea typeface="Trebuchet MS" pitchFamily="34" charset="-122"/>
                 <a:cs typeface="Trebuchet MS" pitchFamily="34" charset="-120"/>
               </a:rPr>
-              <a:t>-er</a:t>
+              <a:t>land</a:t>
             </a:r>
             <a:endParaRPr lang="en-US" sz="1300" dirty="0"/>
           </a:p>
@@ -38883,13 +38067,13 @@
       </p:sp>
       <p:sp>
         <p:nvSpPr>
-          <p:cNvPr id="28" name="Shape 26"/>
-          <p:cNvSpPr/>
-          <p:nvPr/>
-        </p:nvSpPr>
-        <p:spPr>
-          <a:xfrm>
-            <a:off x="640080" y="2670048"/>
+          <p:cNvPr id="30" name="Shape 28"/>
+          <p:cNvSpPr/>
+          <p:nvPr/>
+        </p:nvSpPr>
+        <p:spPr>
+          <a:xfrm>
+            <a:off x="5943600" y="2670048"/>
             <a:ext cx="1463040" cy="420624"/>
           </a:xfrm>
           <a:prstGeom prst="rect">
@@ -38908,13 +38092,38 @@
       </p:sp>
       <p:sp>
         <p:nvSpPr>
-          <p:cNvPr id="29" name="Shape 27"/>
-          <p:cNvSpPr/>
-          <p:nvPr/>
-        </p:nvSpPr>
-        <p:spPr>
-          <a:xfrm>
-            <a:off x="3291840" y="2670048"/>
+          <p:cNvPr id="31" name="Shape 29"/>
+          <p:cNvSpPr/>
+          <p:nvPr/>
+        </p:nvSpPr>
+        <p:spPr>
+          <a:xfrm>
+            <a:off x="640080" y="3127248"/>
+            <a:ext cx="1463040" cy="420624"/>
+          </a:xfrm>
+          <a:prstGeom prst="rect">
+            <a:avLst/>
+          </a:prstGeom>
+          <a:solidFill>
+            <a:srgbClr val="F1F5F9"/>
+          </a:solidFill>
+          <a:ln w="12700">
+            <a:solidFill>
+              <a:srgbClr val="E5E7EB"/>
+            </a:solidFill>
+            <a:prstDash val="solid"/>
+          </a:ln>
+        </p:spPr>
+      </p:sp>
+      <p:sp>
+        <p:nvSpPr>
+          <p:cNvPr id="32" name="Shape 30"/>
+          <p:cNvSpPr/>
+          <p:nvPr/>
+        </p:nvSpPr>
+        <p:spPr>
+          <a:xfrm>
+            <a:off x="3291840" y="3127248"/>
             <a:ext cx="1645920" cy="420624"/>
           </a:xfrm>
           <a:prstGeom prst="rect">
@@ -38933,13 +38142,13 @@
       </p:sp>
       <p:sp>
         <p:nvSpPr>
-          <p:cNvPr id="30" name="Text 28"/>
-          <p:cNvSpPr/>
-          <p:nvPr/>
-        </p:nvSpPr>
-        <p:spPr>
-          <a:xfrm>
-            <a:off x="3291840" y="2670048"/>
+          <p:cNvPr id="33" name="Text 31"/>
+          <p:cNvSpPr/>
+          <p:nvPr/>
+        </p:nvSpPr>
+        <p:spPr>
+          <a:xfrm>
+            <a:off x="3291840" y="3127248"/>
             <a:ext cx="1645920" cy="420624"/>
           </a:xfrm>
           <a:prstGeom prst="rect">
@@ -38964,7 +38173,7 @@
                 <a:ea typeface="Trebuchet MS" pitchFamily="34" charset="-122"/>
                 <a:cs typeface="Trebuchet MS" pitchFamily="34" charset="-120"/>
               </a:rPr>
-              <a:t>summer</a:t>
+              <a:t>night</a:t>
             </a:r>
             <a:endParaRPr lang="en-US" sz="1300" dirty="0"/>
           </a:p>
@@ -38972,20 +38181,20 @@
       </p:sp>
       <p:sp>
         <p:nvSpPr>
-          <p:cNvPr id="31" name="Shape 29"/>
-          <p:cNvSpPr/>
-          <p:nvPr/>
-        </p:nvSpPr>
-        <p:spPr>
-          <a:xfrm>
-            <a:off x="5943600" y="2670048"/>
+          <p:cNvPr id="34" name="Shape 32"/>
+          <p:cNvSpPr/>
+          <p:nvPr/>
+        </p:nvSpPr>
+        <p:spPr>
+          <a:xfrm>
+            <a:off x="5943600" y="3127248"/>
             <a:ext cx="1463040" cy="420624"/>
           </a:xfrm>
           <a:prstGeom prst="rect">
             <a:avLst/>
           </a:prstGeom>
           <a:solidFill>
-            <a:srgbClr val="FCE7F3"/>
+            <a:srgbClr val="F1F5F9"/>
           </a:solidFill>
           <a:ln w="12700">
             <a:solidFill>
@@ -38997,18 +38206,68 @@
       </p:sp>
       <p:sp>
         <p:nvSpPr>
-          <p:cNvPr id="32" name="Text 30"/>
-          <p:cNvSpPr/>
-          <p:nvPr/>
-        </p:nvSpPr>
-        <p:spPr>
-          <a:xfrm>
-            <a:off x="5943600" y="2670048"/>
+          <p:cNvPr id="35" name="Shape 33"/>
+          <p:cNvSpPr/>
+          <p:nvPr/>
+        </p:nvSpPr>
+        <p:spPr>
+          <a:xfrm>
+            <a:off x="640080" y="3584448"/>
             <a:ext cx="1463040" cy="420624"/>
           </a:xfrm>
           <a:prstGeom prst="rect">
             <a:avLst/>
           </a:prstGeom>
+          <a:solidFill>
+            <a:srgbClr val="F8FAFC"/>
+          </a:solidFill>
+          <a:ln w="12700">
+            <a:solidFill>
+              <a:srgbClr val="E5E7EB"/>
+            </a:solidFill>
+            <a:prstDash val="solid"/>
+          </a:ln>
+        </p:spPr>
+      </p:sp>
+      <p:sp>
+        <p:nvSpPr>
+          <p:cNvPr id="36" name="Shape 34"/>
+          <p:cNvSpPr/>
+          <p:nvPr/>
+        </p:nvSpPr>
+        <p:spPr>
+          <a:xfrm>
+            <a:off x="3291840" y="3584448"/>
+            <a:ext cx="1645920" cy="420624"/>
+          </a:xfrm>
+          <a:prstGeom prst="rect">
+            <a:avLst/>
+          </a:prstGeom>
+          <a:solidFill>
+            <a:srgbClr val="CCFBF1"/>
+          </a:solidFill>
+          <a:ln w="12700">
+            <a:solidFill>
+              <a:srgbClr val="E5E7EB"/>
+            </a:solidFill>
+            <a:prstDash val="solid"/>
+          </a:ln>
+        </p:spPr>
+      </p:sp>
+      <p:sp>
+        <p:nvSpPr>
+          <p:cNvPr id="37" name="Text 35"/>
+          <p:cNvSpPr/>
+          <p:nvPr/>
+        </p:nvSpPr>
+        <p:spPr>
+          <a:xfrm>
+            <a:off x="3291840" y="3584448"/>
+            <a:ext cx="1645920" cy="420624"/>
+          </a:xfrm>
+          <a:prstGeom prst="rect">
+            <a:avLst/>
+          </a:prstGeom>
           <a:noFill/>
           <a:ln/>
         </p:spPr>
@@ -39022,13 +38281,13 @@
             <a:r>
               <a:rPr lang="en-US" sz="1300" b="1" dirty="0">
                 <a:solidFill>
-                  <a:srgbClr val="9D174D"/>
+                  <a:srgbClr val="0F766E"/>
                 </a:solidFill>
                 <a:latin typeface="Trebuchet MS" pitchFamily="34" charset="0"/>
                 <a:ea typeface="Trebuchet MS" pitchFamily="34" charset="-122"/>
                 <a:cs typeface="Trebuchet MS" pitchFamily="34" charset="-120"/>
               </a:rPr>
-              <a:t>-ed</a:t>
+              <a:t>point</a:t>
             </a:r>
             <a:endParaRPr lang="en-US" sz="1300" dirty="0"/>
           </a:p>
@@ -39036,19 +38295,44 @@
       </p:sp>
       <p:sp>
         <p:nvSpPr>
-          <p:cNvPr id="33" name="Shape 31"/>
-          <p:cNvSpPr/>
-          <p:nvPr/>
-        </p:nvSpPr>
-        <p:spPr>
-          <a:xfrm>
-            <a:off x="640080" y="3127248"/>
+          <p:cNvPr id="38" name="Shape 36"/>
+          <p:cNvSpPr/>
+          <p:nvPr/>
+        </p:nvSpPr>
+        <p:spPr>
+          <a:xfrm>
+            <a:off x="5943600" y="3584448"/>
             <a:ext cx="1463040" cy="420624"/>
           </a:xfrm>
           <a:prstGeom prst="rect">
             <a:avLst/>
           </a:prstGeom>
           <a:solidFill>
+            <a:srgbClr val="F8FAFC"/>
+          </a:solidFill>
+          <a:ln w="12700">
+            <a:solidFill>
+              <a:srgbClr val="E5E7EB"/>
+            </a:solidFill>
+            <a:prstDash val="solid"/>
+          </a:ln>
+        </p:spPr>
+      </p:sp>
+      <p:sp>
+        <p:nvSpPr>
+          <p:cNvPr id="39" name="Shape 37"/>
+          <p:cNvSpPr/>
+          <p:nvPr/>
+        </p:nvSpPr>
+        <p:spPr>
+          <a:xfrm>
+            <a:off x="640080" y="4041648"/>
+            <a:ext cx="1463040" cy="420624"/>
+          </a:xfrm>
+          <a:prstGeom prst="rect">
+            <a:avLst/>
+          </a:prstGeom>
+          <a:solidFill>
             <a:srgbClr val="F1F5F9"/>
           </a:solidFill>
           <a:ln w="12700">
@@ -39061,13 +38345,13 @@
       </p:sp>
       <p:sp>
         <p:nvSpPr>
-          <p:cNvPr id="34" name="Shape 32"/>
-          <p:cNvSpPr/>
-          <p:nvPr/>
-        </p:nvSpPr>
-        <p:spPr>
-          <a:xfrm>
-            <a:off x="3291840" y="3127248"/>
+          <p:cNvPr id="40" name="Shape 38"/>
+          <p:cNvSpPr/>
+          <p:nvPr/>
+        </p:nvSpPr>
+        <p:spPr>
+          <a:xfrm>
+            <a:off x="3291840" y="4041648"/>
             <a:ext cx="1645920" cy="420624"/>
           </a:xfrm>
           <a:prstGeom prst="rect">
@@ -39086,13 +38370,13 @@
       </p:sp>
       <p:sp>
         <p:nvSpPr>
-          <p:cNvPr id="35" name="Text 33"/>
-          <p:cNvSpPr/>
-          <p:nvPr/>
-        </p:nvSpPr>
-        <p:spPr>
-          <a:xfrm>
-            <a:off x="3291840" y="3127248"/>
+          <p:cNvPr id="41" name="Text 39"/>
+          <p:cNvSpPr/>
+          <p:nvPr/>
+        </p:nvSpPr>
+        <p:spPr>
+          <a:xfrm>
+            <a:off x="3291840" y="4041648"/>
             <a:ext cx="1645920" cy="420624"/>
           </a:xfrm>
           <a:prstGeom prst="rect">
@@ -39117,7 +38401,7 @@
                 <a:ea typeface="Trebuchet MS" pitchFamily="34" charset="-122"/>
                 <a:cs typeface="Trebuchet MS" pitchFamily="34" charset="-120"/>
               </a:rPr>
-              <a:t>field</a:t>
+              <a:t>way</a:t>
             </a:r>
             <a:endParaRPr lang="en-US" sz="1300" dirty="0"/>
           </a:p>
@@ -39125,20 +38409,20 @@
       </p:sp>
       <p:sp>
         <p:nvSpPr>
-          <p:cNvPr id="36" name="Shape 34"/>
-          <p:cNvSpPr/>
-          <p:nvPr/>
-        </p:nvSpPr>
-        <p:spPr>
-          <a:xfrm>
-            <a:off x="5943600" y="3127248"/>
+          <p:cNvPr id="42" name="Shape 40"/>
+          <p:cNvSpPr/>
+          <p:nvPr/>
+        </p:nvSpPr>
+        <p:spPr>
+          <a:xfrm>
+            <a:off x="5943600" y="4041648"/>
             <a:ext cx="1463040" cy="420624"/>
           </a:xfrm>
           <a:prstGeom prst="rect">
             <a:avLst/>
           </a:prstGeom>
           <a:solidFill>
-            <a:srgbClr val="FCE7F3"/>
+            <a:srgbClr val="F1F5F9"/>
           </a:solidFill>
           <a:ln w="12700">
             <a:solidFill>
@@ -39150,205 +38434,13 @@
       </p:sp>
       <p:sp>
         <p:nvSpPr>
-          <p:cNvPr id="37" name="Text 35"/>
-          <p:cNvSpPr/>
-          <p:nvPr/>
-        </p:nvSpPr>
-        <p:spPr>
-          <a:xfrm>
-            <a:off x="5943600" y="3127248"/>
-            <a:ext cx="1463040" cy="420624"/>
-          </a:xfrm>
-          <a:prstGeom prst="rect">
-            <a:avLst/>
-          </a:prstGeom>
-          <a:noFill/>
-          <a:ln/>
-        </p:spPr>
-        <p:txBody>
-          <a:bodyPr wrap="square" lIns="0" tIns="0" rIns="0" bIns="0" rtlCol="0" anchor="ctr"/>
-          <a:lstStyle/>
-          <a:p>
-            <a:pPr algn="ctr" indent="0" marL="0">
-              <a:buNone/>
-            </a:pPr>
-            <a:r>
-              <a:rPr lang="en-US" sz="1300" b="1" dirty="0">
-                <a:solidFill>
-                  <a:srgbClr val="9D174D"/>
-                </a:solidFill>
-                <a:latin typeface="Trebuchet MS" pitchFamily="34" charset="0"/>
-                <a:ea typeface="Trebuchet MS" pitchFamily="34" charset="-122"/>
-                <a:cs typeface="Trebuchet MS" pitchFamily="34" charset="-120"/>
-              </a:rPr>
-              <a:t>-night</a:t>
-            </a:r>
-            <a:endParaRPr lang="en-US" sz="1300" dirty="0"/>
-          </a:p>
-        </p:txBody>
-      </p:sp>
-      <p:sp>
-        <p:nvSpPr>
-          <p:cNvPr id="38" name="Shape 36"/>
-          <p:cNvSpPr/>
-          <p:nvPr/>
-        </p:nvSpPr>
-        <p:spPr>
-          <a:xfrm>
-            <a:off x="640080" y="3584448"/>
-            <a:ext cx="1463040" cy="420624"/>
-          </a:xfrm>
-          <a:prstGeom prst="rect">
-            <a:avLst/>
-          </a:prstGeom>
-          <a:solidFill>
-            <a:srgbClr val="F8FAFC"/>
-          </a:solidFill>
-          <a:ln w="12700">
-            <a:solidFill>
-              <a:srgbClr val="E5E7EB"/>
-            </a:solidFill>
-            <a:prstDash val="solid"/>
-          </a:ln>
-        </p:spPr>
-      </p:sp>
-      <p:sp>
-        <p:nvSpPr>
-          <p:cNvPr id="39" name="Shape 37"/>
-          <p:cNvSpPr/>
-          <p:nvPr/>
-        </p:nvSpPr>
-        <p:spPr>
-          <a:xfrm>
-            <a:off x="3291840" y="3584448"/>
-            <a:ext cx="1645920" cy="420624"/>
-          </a:xfrm>
-          <a:prstGeom prst="rect">
-            <a:avLst/>
-          </a:prstGeom>
-          <a:solidFill>
-            <a:srgbClr val="CCFBF1"/>
-          </a:solidFill>
-          <a:ln w="12700">
-            <a:solidFill>
-              <a:srgbClr val="E5E7EB"/>
-            </a:solidFill>
-            <a:prstDash val="solid"/>
-          </a:ln>
-        </p:spPr>
-      </p:sp>
-      <p:sp>
-        <p:nvSpPr>
-          <p:cNvPr id="40" name="Text 38"/>
-          <p:cNvSpPr/>
-          <p:nvPr/>
-        </p:nvSpPr>
-        <p:spPr>
-          <a:xfrm>
-            <a:off x="3291840" y="3584448"/>
-            <a:ext cx="1645920" cy="420624"/>
-          </a:xfrm>
-          <a:prstGeom prst="rect">
-            <a:avLst/>
-          </a:prstGeom>
-          <a:noFill/>
-          <a:ln/>
-        </p:spPr>
-        <p:txBody>
-          <a:bodyPr wrap="square" lIns="0" tIns="0" rIns="0" bIns="0" rtlCol="0" anchor="ctr"/>
-          <a:lstStyle/>
-          <a:p>
-            <a:pPr algn="ctr" indent="0" marL="0">
-              <a:buNone/>
-            </a:pPr>
-            <a:r>
-              <a:rPr lang="en-US" sz="1300" b="1" dirty="0">
-                <a:solidFill>
-                  <a:srgbClr val="0F766E"/>
-                </a:solidFill>
-                <a:latin typeface="Trebuchet MS" pitchFamily="34" charset="0"/>
-                <a:ea typeface="Trebuchet MS" pitchFamily="34" charset="-122"/>
-                <a:cs typeface="Trebuchet MS" pitchFamily="34" charset="-120"/>
-              </a:rPr>
-              <a:t>term</a:t>
-            </a:r>
-            <a:endParaRPr lang="en-US" sz="1300" dirty="0"/>
-          </a:p>
-        </p:txBody>
-      </p:sp>
-      <p:sp>
-        <p:nvSpPr>
-          <p:cNvPr id="41" name="Shape 39"/>
-          <p:cNvSpPr/>
-          <p:nvPr/>
-        </p:nvSpPr>
-        <p:spPr>
-          <a:xfrm>
-            <a:off x="5943600" y="3584448"/>
-            <a:ext cx="1463040" cy="420624"/>
-          </a:xfrm>
-          <a:prstGeom prst="rect">
-            <a:avLst/>
-          </a:prstGeom>
-          <a:solidFill>
-            <a:srgbClr val="FCE7F3"/>
-          </a:solidFill>
-          <a:ln w="12700">
-            <a:solidFill>
-              <a:srgbClr val="E5E7EB"/>
-            </a:solidFill>
-            <a:prstDash val="solid"/>
-          </a:ln>
-        </p:spPr>
-      </p:sp>
-      <p:sp>
-        <p:nvSpPr>
-          <p:cNvPr id="42" name="Text 40"/>
-          <p:cNvSpPr/>
-          <p:nvPr/>
-        </p:nvSpPr>
-        <p:spPr>
-          <a:xfrm>
-            <a:off x="5943600" y="3584448"/>
-            <a:ext cx="1463040" cy="420624"/>
-          </a:xfrm>
-          <a:prstGeom prst="rect">
-            <a:avLst/>
-          </a:prstGeom>
-          <a:noFill/>
-          <a:ln/>
-        </p:spPr>
-        <p:txBody>
-          <a:bodyPr wrap="square" lIns="0" tIns="0" rIns="0" bIns="0" rtlCol="0" anchor="ctr"/>
-          <a:lstStyle/>
-          <a:p>
-            <a:pPr algn="ctr" indent="0" marL="0">
-              <a:buNone/>
-            </a:pPr>
-            <a:r>
-              <a:rPr lang="en-US" sz="1300" b="1" dirty="0">
-                <a:solidFill>
-                  <a:srgbClr val="9D174D"/>
-                </a:solidFill>
-                <a:latin typeface="Trebuchet MS" pitchFamily="34" charset="0"/>
-                <a:ea typeface="Trebuchet MS" pitchFamily="34" charset="-122"/>
-                <a:cs typeface="Trebuchet MS" pitchFamily="34" charset="-120"/>
-              </a:rPr>
-              <a:t>-day</a:t>
-            </a:r>
-            <a:endParaRPr lang="en-US" sz="1300" dirty="0"/>
-          </a:p>
-        </p:txBody>
-      </p:sp>
-      <p:sp>
-        <p:nvSpPr>
           <p:cNvPr id="43" name="Text 41"/>
           <p:cNvSpPr/>
           <p:nvPr/>
         </p:nvSpPr>
         <p:spPr>
           <a:xfrm>
-            <a:off x="365760" y="4178808"/>
+            <a:off x="365760" y="4636008"/>
             <a:ext cx="1097280" cy="420624"/>
           </a:xfrm>
           <a:prstGeom prst="rect">
@@ -39387,7 +38479,7 @@
         </p:nvSpPr>
         <p:spPr>
           <a:xfrm>
-            <a:off x="1508760" y="4178808"/>
+            <a:off x="1508760" y="4636008"/>
             <a:ext cx="950976" cy="420624"/>
           </a:xfrm>
           <a:prstGeom prst="rect">
@@ -39421,7 +38513,7 @@
         </p:nvSpPr>
         <p:spPr>
           <a:xfrm>
-            <a:off x="1508760" y="4178808"/>
+            <a:off x="1508760" y="4636008"/>
             <a:ext cx="950976" cy="420624"/>
           </a:xfrm>
           <a:prstGeom prst="rect">
@@ -39460,7 +38552,7 @@
         </p:nvSpPr>
         <p:spPr>
           <a:xfrm>
-            <a:off x="2487168" y="4178808"/>
+            <a:off x="2487168" y="4636008"/>
             <a:ext cx="320040" cy="420624"/>
           </a:xfrm>
           <a:prstGeom prst="rect">
@@ -39499,7 +38591,7 @@
         </p:nvSpPr>
         <p:spPr>
           <a:xfrm>
-            <a:off x="2834640" y="4178808"/>
+            <a:off x="2834640" y="4636008"/>
             <a:ext cx="822960" cy="420624"/>
           </a:xfrm>
           <a:prstGeom prst="rect">
@@ -39533,7 +38625,7 @@
         </p:nvSpPr>
         <p:spPr>
           <a:xfrm>
-            <a:off x="2834640" y="4178808"/>
+            <a:off x="2834640" y="4636008"/>
             <a:ext cx="822960" cy="420624"/>
           </a:xfrm>
           <a:prstGeom prst="rect">
@@ -39572,7 +38664,7 @@
         </p:nvSpPr>
         <p:spPr>
           <a:xfrm>
-            <a:off x="3685032" y="4178808"/>
+            <a:off x="3685032" y="4636008"/>
             <a:ext cx="320040" cy="420624"/>
           </a:xfrm>
           <a:prstGeom prst="rect">
@@ -39611,7 +38703,7 @@
         </p:nvSpPr>
         <p:spPr>
           <a:xfrm>
-            <a:off x="4032504" y="4178808"/>
+            <a:off x="4032504" y="4636008"/>
             <a:ext cx="822960" cy="420624"/>
           </a:xfrm>
           <a:prstGeom prst="rect">
@@ -39645,7 +38737,7 @@
         </p:nvSpPr>
         <p:spPr>
           <a:xfrm>
-            <a:off x="4032504" y="4178808"/>
+            <a:off x="4032504" y="4636008"/>
             <a:ext cx="822960" cy="420624"/>
           </a:xfrm>
           <a:prstGeom prst="rect">
@@ -39684,7 +38776,7 @@
         </p:nvSpPr>
         <p:spPr>
           <a:xfrm>
-            <a:off x="4928616" y="4178808"/>
+            <a:off x="4928616" y="4636008"/>
             <a:ext cx="365760" cy="420624"/>
           </a:xfrm>
           <a:prstGeom prst="rect">
@@ -39723,7 +38815,7 @@
         </p:nvSpPr>
         <p:spPr>
           <a:xfrm>
-            <a:off x="5340096" y="4178808"/>
+            <a:off x="5340096" y="4636008"/>
             <a:ext cx="2194560" cy="420624"/>
           </a:xfrm>
           <a:prstGeom prst="rect">
@@ -39750,7 +38842,7 @@
         </p:nvSpPr>
         <p:spPr>
           <a:xfrm>
-            <a:off x="5340096" y="4178808"/>
+            <a:off x="5340096" y="4636008"/>
             <a:ext cx="2194560" cy="420624"/>
           </a:xfrm>
           <a:prstGeom prst="rect">
@@ -40067,7 +39159,7 @@
                 <a:ea typeface="Calibri" pitchFamily="34" charset="-122"/>
                 <a:cs typeface="Calibri" pitchFamily="34" charset="-120"/>
               </a:rPr>
-              <a:t>Word Labs  •  wordlabs.app  •  Prefix: 'mid-' = middle, in the middle</a:t>
+              <a:t>Word Labs  •  wordlabs.app  •  Prefix: 'mid-' = middle</a:t>
             </a:r>
             <a:endParaRPr lang="en-US" sz="800" dirty="0"/>
           </a:p>
@@ -40245,7 +39337,7 @@
                 <a:ea typeface="Calibri" pitchFamily="34" charset="-122"/>
                 <a:cs typeface="Calibri" pitchFamily="34" charset="-120"/>
               </a:rPr>
-              <a:t>The middle of winter, when the days are shortest and coldest.</a:t>
+              <a:t>in the middle of a distance or period of time; halfway</a:t>
             </a:r>
             <a:endParaRPr lang="en-US" sz="1200" dirty="0"/>
           </a:p>
@@ -40318,7 +39410,7 @@
                 <a:ea typeface="Trebuchet MS" pitchFamily="34" charset="-122"/>
                 <a:cs typeface="Trebuchet MS" pitchFamily="34" charset="-120"/>
               </a:rPr>
-              <a:t>midnight</a:t>
+              <a:t>midway</a:t>
             </a:r>
             <a:endParaRPr lang="en-US" sz="1200" dirty="0"/>
           </a:p>
@@ -40384,7 +39476,7 @@
                 <a:ea typeface="Calibri" pitchFamily="34" charset="-122"/>
                 <a:cs typeface="Calibri" pitchFamily="34" charset="-120"/>
               </a:rPr>
-              <a:t>The middle area of a sports field, like in football or soccer.</a:t>
+              <a:t>relating to or located in the central part of a country, away from the coast</a:t>
             </a:r>
             <a:endParaRPr lang="en-US" sz="1200" dirty="0"/>
           </a:p>
@@ -40457,7 +39549,7 @@
                 <a:ea typeface="Trebuchet MS" pitchFamily="34" charset="-122"/>
                 <a:cs typeface="Trebuchet MS" pitchFamily="34" charset="-120"/>
               </a:rPr>
-              <a:t>midterm</a:t>
+              <a:t>midland</a:t>
             </a:r>
             <a:endParaRPr lang="en-US" sz="1200" dirty="0"/>
           </a:p>
@@ -40523,563 +39615,7 @@
                 <a:ea typeface="Calibri" pitchFamily="34" charset="-122"/>
                 <a:cs typeface="Calibri" pitchFamily="34" charset="-120"/>
               </a:rPr>
-              <a:t>The middle of summer, when the days are longest.</a:t>
-            </a:r>
-            <a:endParaRPr lang="en-US" sz="1200" dirty="0"/>
-          </a:p>
-        </p:txBody>
-      </p:sp>
-      <p:sp>
-        <p:nvSpPr>
-          <p:cNvPr id="23" name="Shape 21"/>
-          <p:cNvSpPr/>
-          <p:nvPr/>
-        </p:nvSpPr>
-        <p:spPr>
-          <a:xfrm>
-            <a:off x="365760" y="2779776"/>
-            <a:ext cx="2011680" cy="457200"/>
-          </a:xfrm>
-          <a:prstGeom prst="rect">
-            <a:avLst>
-              <a:gd name="adj" fmla="val 12000"/>
-            </a:avLst>
-          </a:prstGeom>
-          <a:solidFill>
-            <a:srgbClr val="EEF2FF"/>
-          </a:solidFill>
-          <a:ln w="12700">
-            <a:solidFill>
-              <a:srgbClr val="6366F1"/>
-            </a:solidFill>
-            <a:prstDash val="solid"/>
-          </a:ln>
-          <a:effectLst>
-            <a:outerShdw sx="100000" sy="100000" kx="0" ky="0" algn="bl" rotWithShape="0" blurRad="101600" dist="38100" dir="8100000">
-              <a:srgbClr val="000000">
-                <a:alpha val="12000"/>
-              </a:srgbClr>
-            </a:outerShdw>
-          </a:effectLst>
-        </p:spPr>
-      </p:sp>
-      <p:sp>
-        <p:nvSpPr>
-          <p:cNvPr id="24" name="Text 22"/>
-          <p:cNvSpPr/>
-          <p:nvPr/>
-        </p:nvSpPr>
-        <p:spPr>
-          <a:xfrm>
-            <a:off x="365760" y="2779776"/>
-            <a:ext cx="2011680" cy="457200"/>
-          </a:xfrm>
-          <a:prstGeom prst="rect">
-            <a:avLst/>
-          </a:prstGeom>
-          <a:noFill/>
-          <a:ln/>
-        </p:spPr>
-        <p:txBody>
-          <a:bodyPr wrap="square" lIns="0" tIns="0" rIns="0" bIns="0" rtlCol="0" anchor="ctr"/>
-          <a:lstStyle/>
-          <a:p>
-            <a:pPr algn="ctr" indent="0" marL="0">
-              <a:buNone/>
-            </a:pPr>
-            <a:r>
-              <a:rPr lang="en-US" sz="1200" b="1" dirty="0">
-                <a:solidFill>
-                  <a:srgbClr val="4338CA"/>
-                </a:solidFill>
-                <a:latin typeface="Trebuchet MS" pitchFamily="34" charset="0"/>
-                <a:ea typeface="Trebuchet MS" pitchFamily="34" charset="-122"/>
-                <a:cs typeface="Trebuchet MS" pitchFamily="34" charset="-120"/>
-              </a:rPr>
-              <a:t>midfield</a:t>
-            </a:r>
-            <a:endParaRPr lang="en-US" sz="1200" dirty="0"/>
-          </a:p>
-        </p:txBody>
-      </p:sp>
-      <p:sp>
-        <p:nvSpPr>
-          <p:cNvPr id="25" name="Shape 23"/>
-          <p:cNvSpPr/>
-          <p:nvPr/>
-        </p:nvSpPr>
-        <p:spPr>
-          <a:xfrm>
-            <a:off x="2514600" y="2779776"/>
-            <a:ext cx="6263640" cy="457200"/>
-          </a:xfrm>
-          <a:prstGeom prst="rect">
-            <a:avLst>
-              <a:gd name="adj" fmla="val 12000"/>
-            </a:avLst>
-          </a:prstGeom>
-          <a:solidFill>
-            <a:srgbClr val="F8FAFC"/>
-          </a:solidFill>
-          <a:ln w="12700">
-            <a:solidFill>
-              <a:srgbClr val="E2E8F0"/>
-            </a:solidFill>
-            <a:prstDash val="solid"/>
-          </a:ln>
-        </p:spPr>
-      </p:sp>
-      <p:sp>
-        <p:nvSpPr>
-          <p:cNvPr id="26" name="Text 24"/>
-          <p:cNvSpPr/>
-          <p:nvPr/>
-        </p:nvSpPr>
-        <p:spPr>
-          <a:xfrm>
-            <a:off x="2651760" y="2779776"/>
-            <a:ext cx="6035040" cy="457200"/>
-          </a:xfrm>
-          <a:prstGeom prst="rect">
-            <a:avLst/>
-          </a:prstGeom>
-          <a:noFill/>
-          <a:ln/>
-        </p:spPr>
-        <p:txBody>
-          <a:bodyPr wrap="square" rtlCol="0" anchor="ctr"/>
-          <a:lstStyle/>
-          <a:p>
-            <a:pPr algn="l" indent="0" marL="0">
-              <a:buNone/>
-            </a:pPr>
-            <a:r>
-              <a:rPr lang="en-US" sz="1200" dirty="0">
-                <a:solidFill>
-                  <a:srgbClr val="0F172A"/>
-                </a:solidFill>
-                <a:latin typeface="Calibri" pitchFamily="34" charset="0"/>
-                <a:ea typeface="Calibri" pitchFamily="34" charset="-122"/>
-                <a:cs typeface="Calibri" pitchFamily="34" charset="-120"/>
-              </a:rPr>
-              <a:t>The middle part of a school or work term.</a:t>
-            </a:r>
-            <a:endParaRPr lang="en-US" sz="1200" dirty="0"/>
-          </a:p>
-        </p:txBody>
-      </p:sp>
-      <p:sp>
-        <p:nvSpPr>
-          <p:cNvPr id="27" name="Shape 25"/>
-          <p:cNvSpPr/>
-          <p:nvPr/>
-        </p:nvSpPr>
-        <p:spPr>
-          <a:xfrm>
-            <a:off x="365760" y="3310128"/>
-            <a:ext cx="2011680" cy="457200"/>
-          </a:xfrm>
-          <a:prstGeom prst="rect">
-            <a:avLst>
-              <a:gd name="adj" fmla="val 12000"/>
-            </a:avLst>
-          </a:prstGeom>
-          <a:solidFill>
-            <a:srgbClr val="EEF2FF"/>
-          </a:solidFill>
-          <a:ln w="12700">
-            <a:solidFill>
-              <a:srgbClr val="6366F1"/>
-            </a:solidFill>
-            <a:prstDash val="solid"/>
-          </a:ln>
-          <a:effectLst>
-            <a:outerShdw sx="100000" sy="100000" kx="0" ky="0" algn="bl" rotWithShape="0" blurRad="101600" dist="38100" dir="8100000">
-              <a:srgbClr val="000000">
-                <a:alpha val="12000"/>
-              </a:srgbClr>
-            </a:outerShdw>
-          </a:effectLst>
-        </p:spPr>
-      </p:sp>
-      <p:sp>
-        <p:nvSpPr>
-          <p:cNvPr id="28" name="Text 26"/>
-          <p:cNvSpPr/>
-          <p:nvPr/>
-        </p:nvSpPr>
-        <p:spPr>
-          <a:xfrm>
-            <a:off x="365760" y="3310128"/>
-            <a:ext cx="2011680" cy="457200"/>
-          </a:xfrm>
-          <a:prstGeom prst="rect">
-            <a:avLst/>
-          </a:prstGeom>
-          <a:noFill/>
-          <a:ln/>
-        </p:spPr>
-        <p:txBody>
-          <a:bodyPr wrap="square" lIns="0" tIns="0" rIns="0" bIns="0" rtlCol="0" anchor="ctr"/>
-          <a:lstStyle/>
-          <a:p>
-            <a:pPr algn="ctr" indent="0" marL="0">
-              <a:buNone/>
-            </a:pPr>
-            <a:r>
-              <a:rPr lang="en-US" sz="1200" b="1" dirty="0">
-                <a:solidFill>
-                  <a:srgbClr val="4338CA"/>
-                </a:solidFill>
-                <a:latin typeface="Trebuchet MS" pitchFamily="34" charset="0"/>
-                <a:ea typeface="Trebuchet MS" pitchFamily="34" charset="-122"/>
-                <a:cs typeface="Trebuchet MS" pitchFamily="34" charset="-120"/>
-              </a:rPr>
-              <a:t>midsummer</a:t>
-            </a:r>
-            <a:endParaRPr lang="en-US" sz="1200" dirty="0"/>
-          </a:p>
-        </p:txBody>
-      </p:sp>
-      <p:sp>
-        <p:nvSpPr>
-          <p:cNvPr id="29" name="Shape 27"/>
-          <p:cNvSpPr/>
-          <p:nvPr/>
-        </p:nvSpPr>
-        <p:spPr>
-          <a:xfrm>
-            <a:off x="2514600" y="3310128"/>
-            <a:ext cx="6263640" cy="457200"/>
-          </a:xfrm>
-          <a:prstGeom prst="rect">
-            <a:avLst>
-              <a:gd name="adj" fmla="val 12000"/>
-            </a:avLst>
-          </a:prstGeom>
-          <a:solidFill>
-            <a:srgbClr val="F8FAFC"/>
-          </a:solidFill>
-          <a:ln w="12700">
-            <a:solidFill>
-              <a:srgbClr val="E2E8F0"/>
-            </a:solidFill>
-            <a:prstDash val="solid"/>
-          </a:ln>
-        </p:spPr>
-      </p:sp>
-      <p:sp>
-        <p:nvSpPr>
-          <p:cNvPr id="30" name="Text 28"/>
-          <p:cNvSpPr/>
-          <p:nvPr/>
-        </p:nvSpPr>
-        <p:spPr>
-          <a:xfrm>
-            <a:off x="2651760" y="3310128"/>
-            <a:ext cx="6035040" cy="457200"/>
-          </a:xfrm>
-          <a:prstGeom prst="rect">
-            <a:avLst/>
-          </a:prstGeom>
-          <a:noFill/>
-          <a:ln/>
-        </p:spPr>
-        <p:txBody>
-          <a:bodyPr wrap="square" rtlCol="0" anchor="ctr"/>
-          <a:lstStyle/>
-          <a:p>
-            <a:pPr algn="l" indent="0" marL="0">
-              <a:buNone/>
-            </a:pPr>
-            <a:r>
-              <a:rPr lang="en-US" sz="1200" dirty="0">
-                <a:solidFill>
-                  <a:srgbClr val="0F172A"/>
-                </a:solidFill>
-                <a:latin typeface="Calibri" pitchFamily="34" charset="0"/>
-                <a:ea typeface="Calibri" pitchFamily="34" charset="-122"/>
-                <a:cs typeface="Calibri" pitchFamily="34" charset="-120"/>
-              </a:rPr>
-              <a:t>Halfway between two places or points.</a:t>
-            </a:r>
-            <a:endParaRPr lang="en-US" sz="1200" dirty="0"/>
-          </a:p>
-        </p:txBody>
-      </p:sp>
-      <p:sp>
-        <p:nvSpPr>
-          <p:cNvPr id="31" name="Shape 29"/>
-          <p:cNvSpPr/>
-          <p:nvPr/>
-        </p:nvSpPr>
-        <p:spPr>
-          <a:xfrm>
-            <a:off x="365760" y="3840480"/>
-            <a:ext cx="2011680" cy="457200"/>
-          </a:xfrm>
-          <a:prstGeom prst="rect">
-            <a:avLst>
-              <a:gd name="adj" fmla="val 12000"/>
-            </a:avLst>
-          </a:prstGeom>
-          <a:solidFill>
-            <a:srgbClr val="EEF2FF"/>
-          </a:solidFill>
-          <a:ln w="12700">
-            <a:solidFill>
-              <a:srgbClr val="6366F1"/>
-            </a:solidFill>
-            <a:prstDash val="solid"/>
-          </a:ln>
-          <a:effectLst>
-            <a:outerShdw sx="100000" sy="100000" kx="0" ky="0" algn="bl" rotWithShape="0" blurRad="101600" dist="38100" dir="8100000">
-              <a:srgbClr val="000000">
-                <a:alpha val="12000"/>
-              </a:srgbClr>
-            </a:outerShdw>
-          </a:effectLst>
-        </p:spPr>
-      </p:sp>
-      <p:sp>
-        <p:nvSpPr>
-          <p:cNvPr id="32" name="Text 30"/>
-          <p:cNvSpPr/>
-          <p:nvPr/>
-        </p:nvSpPr>
-        <p:spPr>
-          <a:xfrm>
-            <a:off x="365760" y="3840480"/>
-            <a:ext cx="2011680" cy="457200"/>
-          </a:xfrm>
-          <a:prstGeom prst="rect">
-            <a:avLst/>
-          </a:prstGeom>
-          <a:noFill/>
-          <a:ln/>
-        </p:spPr>
-        <p:txBody>
-          <a:bodyPr wrap="square" lIns="0" tIns="0" rIns="0" bIns="0" rtlCol="0" anchor="ctr"/>
-          <a:lstStyle/>
-          <a:p>
-            <a:pPr algn="ctr" indent="0" marL="0">
-              <a:buNone/>
-            </a:pPr>
-            <a:r>
-              <a:rPr lang="en-US" sz="1200" b="1" dirty="0">
-                <a:solidFill>
-                  <a:srgbClr val="4338CA"/>
-                </a:solidFill>
-                <a:latin typeface="Trebuchet MS" pitchFamily="34" charset="0"/>
-                <a:ea typeface="Trebuchet MS" pitchFamily="34" charset="-122"/>
-                <a:cs typeface="Trebuchet MS" pitchFamily="34" charset="-120"/>
-              </a:rPr>
-              <a:t>midway</a:t>
-            </a:r>
-            <a:endParaRPr lang="en-US" sz="1200" dirty="0"/>
-          </a:p>
-        </p:txBody>
-      </p:sp>
-      <p:sp>
-        <p:nvSpPr>
-          <p:cNvPr id="33" name="Shape 31"/>
-          <p:cNvSpPr/>
-          <p:nvPr/>
-        </p:nvSpPr>
-        <p:spPr>
-          <a:xfrm>
-            <a:off x="2514600" y="3840480"/>
-            <a:ext cx="6263640" cy="457200"/>
-          </a:xfrm>
-          <a:prstGeom prst="rect">
-            <a:avLst>
-              <a:gd name="adj" fmla="val 12000"/>
-            </a:avLst>
-          </a:prstGeom>
-          <a:solidFill>
-            <a:srgbClr val="F8FAFC"/>
-          </a:solidFill>
-          <a:ln w="12700">
-            <a:solidFill>
-              <a:srgbClr val="E2E8F0"/>
-            </a:solidFill>
-            <a:prstDash val="solid"/>
-          </a:ln>
-        </p:spPr>
-      </p:sp>
-      <p:sp>
-        <p:nvSpPr>
-          <p:cNvPr id="34" name="Text 32"/>
-          <p:cNvSpPr/>
-          <p:nvPr/>
-        </p:nvSpPr>
-        <p:spPr>
-          <a:xfrm>
-            <a:off x="2651760" y="3840480"/>
-            <a:ext cx="6035040" cy="457200"/>
-          </a:xfrm>
-          <a:prstGeom prst="rect">
-            <a:avLst/>
-          </a:prstGeom>
-          <a:noFill/>
-          <a:ln/>
-        </p:spPr>
-        <p:txBody>
-          <a:bodyPr wrap="square" rtlCol="0" anchor="ctr"/>
-          <a:lstStyle/>
-          <a:p>
-            <a:pPr algn="l" indent="0" marL="0">
-              <a:buNone/>
-            </a:pPr>
-            <a:r>
-              <a:rPr lang="en-US" sz="1200" dirty="0">
-                <a:solidFill>
-                  <a:srgbClr val="0F172A"/>
-                </a:solidFill>
-                <a:latin typeface="Calibri" pitchFamily="34" charset="0"/>
-                <a:ea typeface="Calibri" pitchFamily="34" charset="-122"/>
-                <a:cs typeface="Calibri" pitchFamily="34" charset="-120"/>
-              </a:rPr>
-              <a:t>The middle of the day, around 12 o'clock noon.</a:t>
-            </a:r>
-            <a:endParaRPr lang="en-US" sz="1200" dirty="0"/>
-          </a:p>
-        </p:txBody>
-      </p:sp>
-      <p:sp>
-        <p:nvSpPr>
-          <p:cNvPr id="35" name="Shape 33"/>
-          <p:cNvSpPr/>
-          <p:nvPr/>
-        </p:nvSpPr>
-        <p:spPr>
-          <a:xfrm>
-            <a:off x="365760" y="4370832"/>
-            <a:ext cx="2011680" cy="457200"/>
-          </a:xfrm>
-          <a:prstGeom prst="rect">
-            <a:avLst>
-              <a:gd name="adj" fmla="val 12000"/>
-            </a:avLst>
-          </a:prstGeom>
-          <a:solidFill>
-            <a:srgbClr val="EEF2FF"/>
-          </a:solidFill>
-          <a:ln w="12700">
-            <a:solidFill>
-              <a:srgbClr val="6366F1"/>
-            </a:solidFill>
-            <a:prstDash val="solid"/>
-          </a:ln>
-          <a:effectLst>
-            <a:outerShdw sx="100000" sy="100000" kx="0" ky="0" algn="bl" rotWithShape="0" blurRad="101600" dist="38100" dir="8100000">
-              <a:srgbClr val="000000">
-                <a:alpha val="12000"/>
-              </a:srgbClr>
-            </a:outerShdw>
-          </a:effectLst>
-        </p:spPr>
-      </p:sp>
-      <p:sp>
-        <p:nvSpPr>
-          <p:cNvPr id="36" name="Text 34"/>
-          <p:cNvSpPr/>
-          <p:nvPr/>
-        </p:nvSpPr>
-        <p:spPr>
-          <a:xfrm>
-            <a:off x="365760" y="4370832"/>
-            <a:ext cx="2011680" cy="457200"/>
-          </a:xfrm>
-          <a:prstGeom prst="rect">
-            <a:avLst/>
-          </a:prstGeom>
-          <a:noFill/>
-          <a:ln/>
-        </p:spPr>
-        <p:txBody>
-          <a:bodyPr wrap="square" lIns="0" tIns="0" rIns="0" bIns="0" rtlCol="0" anchor="ctr"/>
-          <a:lstStyle/>
-          <a:p>
-            <a:pPr algn="ctr" indent="0" marL="0">
-              <a:buNone/>
-            </a:pPr>
-            <a:r>
-              <a:rPr lang="en-US" sz="1200" b="1" dirty="0">
-                <a:solidFill>
-                  <a:srgbClr val="4338CA"/>
-                </a:solidFill>
-                <a:latin typeface="Trebuchet MS" pitchFamily="34" charset="0"/>
-                <a:ea typeface="Trebuchet MS" pitchFamily="34" charset="-122"/>
-                <a:cs typeface="Trebuchet MS" pitchFamily="34" charset="-120"/>
-              </a:rPr>
-              <a:t>midwinter</a:t>
-            </a:r>
-            <a:endParaRPr lang="en-US" sz="1200" dirty="0"/>
-          </a:p>
-        </p:txBody>
-      </p:sp>
-      <p:sp>
-        <p:nvSpPr>
-          <p:cNvPr id="37" name="Shape 35"/>
-          <p:cNvSpPr/>
-          <p:nvPr/>
-        </p:nvSpPr>
-        <p:spPr>
-          <a:xfrm>
-            <a:off x="2514600" y="4370832"/>
-            <a:ext cx="6263640" cy="457200"/>
-          </a:xfrm>
-          <a:prstGeom prst="rect">
-            <a:avLst>
-              <a:gd name="adj" fmla="val 12000"/>
-            </a:avLst>
-          </a:prstGeom>
-          <a:solidFill>
-            <a:srgbClr val="F8FAFC"/>
-          </a:solidFill>
-          <a:ln w="12700">
-            <a:solidFill>
-              <a:srgbClr val="E2E8F0"/>
-            </a:solidFill>
-            <a:prstDash val="solid"/>
-          </a:ln>
-        </p:spPr>
-      </p:sp>
-      <p:sp>
-        <p:nvSpPr>
-          <p:cNvPr id="38" name="Text 36"/>
-          <p:cNvSpPr/>
-          <p:nvPr/>
-        </p:nvSpPr>
-        <p:spPr>
-          <a:xfrm>
-            <a:off x="2651760" y="4370832"/>
-            <a:ext cx="6035040" cy="457200"/>
-          </a:xfrm>
-          <a:prstGeom prst="rect">
-            <a:avLst/>
-          </a:prstGeom>
-          <a:noFill/>
-          <a:ln/>
-        </p:spPr>
-        <p:txBody>
-          <a:bodyPr wrap="square" rtlCol="0" anchor="ctr"/>
-          <a:lstStyle/>
-          <a:p>
-            <a:pPr algn="l" indent="0" marL="0">
-              <a:buNone/>
-            </a:pPr>
-            <a:r>
-              <a:rPr lang="en-US" sz="1200" dirty="0">
-                <a:solidFill>
-                  <a:srgbClr val="0F172A"/>
-                </a:solidFill>
-                <a:latin typeface="Calibri" pitchFamily="34" charset="0"/>
-                <a:ea typeface="Calibri" pitchFamily="34" charset="-122"/>
-                <a:cs typeface="Calibri" pitchFamily="34" charset="-120"/>
-              </a:rPr>
-              <a:t>The middle of the night, exactly 12 o'clock at night.</a:t>
+              <a:t>twelve o'clock in the middle of the day; noon</a:t>
             </a:r>
             <a:endParaRPr lang="en-US" sz="1200" dirty="0"/>
           </a:p>
@@ -41371,7 +39907,7 @@
                 <a:ea typeface="Calibri" pitchFamily="34" charset="-122"/>
                 <a:cs typeface="Calibri" pitchFamily="34" charset="-120"/>
               </a:rPr>
-              <a:t>Word Labs  •  wordlabs.app  •  Prefix: 'mid-' = middle, in the middle</a:t>
+              <a:t>Word Labs  •  wordlabs.app  •  Prefix: 'mid-' = middle</a:t>
             </a:r>
             <a:endParaRPr lang="en-US" sz="800" dirty="0"/>
           </a:p>
@@ -41574,7 +40110,7 @@
                 <a:ea typeface="Calibri" pitchFamily="34" charset="-122"/>
                 <a:cs typeface="Calibri" pitchFamily="34" charset="-120"/>
               </a:rPr>
-              <a:t>We stopped for a snack at midday when the sun was high in the sky.</a:t>
+              <a:t>We stopped for lunch at midday when the sun was highest.</a:t>
             </a:r>
             <a:endParaRPr lang="en-US" sz="1500" dirty="0"/>
           </a:p>
@@ -41738,7 +40274,7 @@
                 <a:ea typeface="Calibri" pitchFamily="34" charset="-122"/>
                 <a:cs typeface="Calibri" pitchFamily="34" charset="-120"/>
               </a:rPr>
-              <a:t>The footballer ran into the midfield to receive the pass from her teammate.</a:t>
+              <a:t>We stopped for a rest midway through the hike.</a:t>
             </a:r>
             <a:endParaRPr lang="en-US" sz="1500" dirty="0"/>
           </a:p>
@@ -41902,7 +40438,7 @@
                 <a:ea typeface="Calibri" pitchFamily="34" charset="-122"/>
                 <a:cs typeface="Calibri" pitchFamily="34" charset="-120"/>
               </a:rPr>
-              <a:t>At midnight, the whole house was silent and everyone was fast asleep.</a:t>
+              <a:t>The midland town was far from the coast, surrounded by fields and hills.</a:t>
             </a:r>
             <a:endParaRPr lang="en-US" sz="1500" dirty="0"/>
           </a:p>
